--- a/multihop_location.pptx
+++ b/multihop_location.pptx
@@ -9,7 +9,7 @@
     <p:notesMasterId r:id="rId5"/>
   </p:notesMasterIdLst>
   <p:handoutMasterIdLst>
-    <p:handoutMasterId r:id="rId14"/>
+    <p:handoutMasterId r:id="rId15"/>
   </p:handoutMasterIdLst>
   <p:sldIdLst>
     <p:sldId id="259" r:id="rId4"/>
@@ -20,12 +20,13 @@
     <p:sldId id="439" r:id="rId10"/>
     <p:sldId id="440" r:id="rId11"/>
     <p:sldId id="441" r:id="rId12"/>
-    <p:sldId id="436" r:id="rId13"/>
+    <p:sldId id="442" r:id="rId13"/>
+    <p:sldId id="436" r:id="rId14"/>
   </p:sldIdLst>
   <p:sldSz cx="12192000" cy="6858000"/>
   <p:notesSz cx="6858000" cy="9144000"/>
   <p:custDataLst>
-    <p:tags r:id="rId21"/>
+    <p:tags r:id="rId22"/>
   </p:custDataLst>
   <p:defaultTextStyle>
     <a:defPPr>
@@ -135,6 +136,7 @@
             <p14:sldId id="439"/>
             <p14:sldId id="440"/>
             <p14:sldId id="441"/>
+            <p14:sldId id="442"/>
             <p14:sldId id="436"/>
           </p14:sldIdLst>
         </p14:section>
@@ -741,6 +743,58 @@
 </p:notes>
 </file>
 
+<file path=ppt/notesSlides/notesSlide10.xml><?xml version="1.0" encoding="utf-8"?>
+<p:notes xmlns:a="http://schemas.openxmlformats.org/drawingml/2006/main" xmlns:r="http://schemas.openxmlformats.org/officeDocument/2006/relationships" xmlns:p="http://schemas.openxmlformats.org/presentationml/2006/main">
+  <p:cSld>
+    <p:spTree>
+      <p:nvGrpSpPr>
+        <p:cNvPr id="1" name=""/>
+        <p:cNvGrpSpPr/>
+        <p:nvPr/>
+      </p:nvGrpSpPr>
+      <p:grpSpPr/>
+      <p:sp>
+        <p:nvSpPr>
+          <p:cNvPr id="2" name="幻灯片图像占位符 1"/>
+          <p:cNvSpPr>
+            <a:spLocks noGrp="1"/>
+          </p:cNvSpPr>
+          <p:nvPr>
+            <p:ph type="sldImg" idx="2"/>
+          </p:nvPr>
+        </p:nvSpPr>
+        <p:spPr/>
+      </p:sp>
+      <p:sp>
+        <p:nvSpPr>
+          <p:cNvPr id="3" name="文本占位符 2"/>
+          <p:cNvSpPr>
+            <a:spLocks noGrp="1"/>
+          </p:cNvSpPr>
+          <p:nvPr>
+            <p:ph type="body" idx="3"/>
+          </p:nvPr>
+        </p:nvSpPr>
+        <p:spPr/>
+        <p:txBody>
+          <a:bodyPr/>
+          <a:p>
+            <a:r>
+              <a:rPr lang="en-US" altLang="zh-CN"/>
+              <a:t>Thank you for your listening.</a:t>
+            </a:r>
+            <a:endParaRPr lang="en-US" altLang="zh-CN"/>
+          </a:p>
+        </p:txBody>
+      </p:sp>
+    </p:spTree>
+  </p:cSld>
+  <p:clrMapOvr>
+    <a:masterClrMapping/>
+  </p:clrMapOvr>
+</p:notes>
+</file>
+
 <file path=ppt/notesSlides/notesSlide2.xml><?xml version="1.0" encoding="utf-8"?>
 <p:notes xmlns:a="http://schemas.openxmlformats.org/drawingml/2006/main" xmlns:r="http://schemas.openxmlformats.org/officeDocument/2006/relationships" xmlns:p="http://schemas.openxmlformats.org/presentationml/2006/main">
   <p:cSld>
@@ -1666,12 +1720,19 @@
         <p:cNvGrpSpPr/>
         <p:nvPr/>
       </p:nvGrpSpPr>
-      <p:grpSpPr/>
-      <p:sp>
-        <p:nvSpPr>
-          <p:cNvPr id="2" name="幻灯片图像占位符 1"/>
+      <p:grpSpPr>
+        <a:xfrm>
+          <a:off x="0" y="0"/>
+          <a:ext cx="0" cy="0"/>
+          <a:chOff x="0" y="0"/>
+          <a:chExt cx="0" cy="0"/>
+        </a:xfrm>
+      </p:grpSpPr>
+      <p:sp>
+        <p:nvSpPr>
+          <p:cNvPr id="2" name="Slide Image Placeholder 1"/>
           <p:cNvSpPr>
-            <a:spLocks noGrp="1"/>
+            <a:spLocks noGrp="1" noRot="1" noChangeAspect="1"/>
           </p:cNvSpPr>
           <p:nvPr>
             <p:ph type="sldImg" idx="2"/>
@@ -1681,7 +1742,7 @@
       </p:sp>
       <p:sp>
         <p:nvSpPr>
-          <p:cNvPr id="3" name="文本占位符 2"/>
+          <p:cNvPr id="3" name="Text Placeholder 2"/>
           <p:cNvSpPr>
             <a:spLocks noGrp="1"/>
           </p:cNvSpPr>
@@ -1692,10 +1753,48 @@
         <p:spPr/>
         <p:txBody>
           <a:bodyPr/>
+          <a:lstStyle/>
+          <a:p>
+            <a:r>
+              <a:rPr lang="en-US" altLang="en-US"/>
+              <a:t>Vehicle-to-Everying(V2X) communication has very high standards for safety. To guarantee road safety, messages must be verified within 100ms. But there threee “security-efficieny dilemma”for current authentication methods:</a:t>
+            </a:r>
+            <a:endParaRPr lang="en-US" altLang="en-US"/>
+          </a:p>
+          <a:p>
+            <a:endParaRPr lang="zh-CN" altLang="en-US"/>
+          </a:p>
           <a:p>
             <a:r>
               <a:rPr lang="en-US" altLang="zh-CN"/>
-              <a:t>Thank you for your listening.</a:t>
+              <a:t>ECDSA method can provide strong security and non-repudiation but require 2ms to compute verification, this can be bottlenecks in dense traffic</a:t>
+            </a:r>
+            <a:endParaRPr lang="en-US" altLang="zh-CN"/>
+          </a:p>
+          <a:p>
+            <a:r>
+              <a:rPr lang="en-US" altLang="zh-CN"/>
+              <a:t>In comparsion with ECDSA method, TESLA method is more computationally effiecient, but it has “key disclosure delay”,which is from 20ms to 100ms</a:t>
+            </a:r>
+            <a:endParaRPr lang="en-US" altLang="zh-CN"/>
+          </a:p>
+          <a:p>
+            <a:endParaRPr lang="en-US" altLang="zh-CN"/>
+          </a:p>
+          <a:p>
+            <a:r>
+              <a:rPr lang="en-US" altLang="zh-CN"/>
+              <a:t>So the fact shows a gap, that is,  V2X communication requires </a:t>
+            </a:r>
+            <a:r>
+              <a:rPr lang="en-US" altLang="zh-CN">
+                <a:sym typeface="+mn-ea"/>
+              </a:rPr>
+              <a:t>immediate verification, but</a:t>
+            </a:r>
+            <a:r>
+              <a:rPr lang="en-US" altLang="zh-CN"/>
+              <a:t> the existing hybrid schemes are not able to provide high rates of immediate verification, it only provide about 1% immediate verification for non-signed messages.</a:t>
             </a:r>
             <a:endParaRPr lang="en-US" altLang="zh-CN"/>
           </a:p>
@@ -7996,6 +8095,95 @@
 </p:sld>
 </file>
 
+<file path=ppt/slides/slide10.xml><?xml version="1.0" encoding="utf-8"?>
+<p:sld xmlns:a="http://schemas.openxmlformats.org/drawingml/2006/main" xmlns:r="http://schemas.openxmlformats.org/officeDocument/2006/relationships" xmlns:p="http://schemas.openxmlformats.org/presentationml/2006/main">
+  <p:cSld>
+    <p:spTree>
+      <p:nvGrpSpPr>
+        <p:cNvPr id="1" name=""/>
+        <p:cNvGrpSpPr/>
+        <p:nvPr/>
+      </p:nvGrpSpPr>
+      <p:grpSpPr>
+        <a:xfrm>
+          <a:off x="0" y="0"/>
+          <a:ext cx="0" cy="0"/>
+          <a:chOff x="0" y="0"/>
+          <a:chExt cx="0" cy="0"/>
+        </a:xfrm>
+      </p:grpSpPr>
+      <p:sp>
+        <p:nvSpPr>
+          <p:cNvPr id="5" name="Title 1"/>
+          <p:cNvSpPr txBox="1"/>
+          <p:nvPr/>
+        </p:nvSpPr>
+        <p:spPr>
+          <a:xfrm>
+            <a:off x="2334260" y="2143760"/>
+            <a:ext cx="7523480" cy="917575"/>
+          </a:xfrm>
+          <a:prstGeom prst="rect">
+            <a:avLst/>
+          </a:prstGeom>
+        </p:spPr>
+        <p:txBody>
+          <a:bodyPr>
+            <a:noAutofit/>
+          </a:bodyPr>
+          <a:lstStyle>
+            <a:lvl1pPr algn="l" defTabSz="914400" rtl="0" eaLnBrk="1" latinLnBrk="0" hangingPunct="1">
+              <a:lnSpc>
+                <a:spcPct val="90000"/>
+              </a:lnSpc>
+              <a:spcBef>
+                <a:spcPct val="0"/>
+              </a:spcBef>
+              <a:buNone/>
+              <a:defRPr sz="6000" kern="1200">
+                <a:solidFill>
+                  <a:srgbClr val="DD613B"/>
+                </a:solidFill>
+                <a:latin typeface="+mj-lt"/>
+                <a:ea typeface="+mj-ea"/>
+                <a:cs typeface="+mj-cs"/>
+              </a:defRPr>
+            </a:lvl1pPr>
+          </a:lstStyle>
+          <a:p>
+            <a:pPr algn="ctr"/>
+            <a:r>
+              <a:rPr lang="en-US" altLang="zh-CN" sz="5400" b="1" dirty="0">
+                <a:latin typeface="Times New Roman" panose="02020603050405020304" charset="0"/>
+                <a:ea typeface="Kaiti TC" panose="02010600040101010101" pitchFamily="2" charset="-120"/>
+                <a:cs typeface="Times New Roman" panose="02020603050405020304" charset="0"/>
+              </a:rPr>
+              <a:t>Thank you for listening</a:t>
+            </a:r>
+            <a:r>
+              <a:rPr lang="zh-CN" altLang="en-US" sz="5400" b="1" dirty="0">
+                <a:latin typeface="Times New Roman" panose="02020603050405020304" charset="0"/>
+                <a:ea typeface="Kaiti TC" panose="02010600040101010101" pitchFamily="2" charset="-120"/>
+                <a:cs typeface="Times New Roman" panose="02020603050405020304" charset="0"/>
+              </a:rPr>
+              <a:t>！</a:t>
+            </a:r>
+            <a:endParaRPr lang="en-US" altLang="zh-CN" sz="5400" b="1" dirty="0">
+              <a:latin typeface="Times New Roman" panose="02020603050405020304" charset="0"/>
+              <a:ea typeface="Kaiti TC" panose="02010600040101010101" pitchFamily="2" charset="-120"/>
+              <a:cs typeface="Times New Roman" panose="02020603050405020304" charset="0"/>
+            </a:endParaRPr>
+          </a:p>
+        </p:txBody>
+      </p:sp>
+    </p:spTree>
+  </p:cSld>
+  <p:clrMapOvr>
+    <a:masterClrMapping/>
+  </p:clrMapOvr>
+</p:sld>
+</file>
+
 <file path=ppt/slides/slide2.xml><?xml version="1.0" encoding="utf-8"?>
 <p:sld xmlns:a="http://schemas.openxmlformats.org/drawingml/2006/main" xmlns:r="http://schemas.openxmlformats.org/officeDocument/2006/relationships" xmlns:p="http://schemas.openxmlformats.org/presentationml/2006/main">
   <p:cSld>
@@ -16887,7 +17075,7 @@
                           <a:latin typeface="Times New Roman" panose="02020603050405020304" charset="0"/>
                           <a:cs typeface="Times New Roman" panose="02020603050405020304" charset="0"/>
                         </a:rPr>
-                        <a:t>(2.7, 3.0)</a:t>
+                        <a:t>(2.75, 2.96)</a:t>
                       </a:r>
                       <a:endParaRPr lang="en-US" altLang="zh-CN" sz="1400">
                         <a:latin typeface="Times New Roman" panose="02020603050405020304" charset="0"/>
@@ -16977,7 +17165,7 @@
                           <a:latin typeface="Times New Roman" panose="02020603050405020304" charset="0"/>
                           <a:cs typeface="Times New Roman" panose="02020603050405020304" charset="0"/>
                         </a:rPr>
-                        <a:t>(1.9, 0.3)</a:t>
+                        <a:t>(1.91, 0.33)</a:t>
                       </a:r>
                       <a:endParaRPr lang="en-US" altLang="zh-CN" sz="1400">
                         <a:latin typeface="Times New Roman" panose="02020603050405020304" charset="0"/>
@@ -17067,7 +17255,7 @@
                           <a:latin typeface="Times New Roman" panose="02020603050405020304" charset="0"/>
                           <a:cs typeface="Times New Roman" panose="02020603050405020304" charset="0"/>
                         </a:rPr>
-                        <a:t>(7.3, 3.8)</a:t>
+                        <a:t>(7.30, 3.79)</a:t>
                       </a:r>
                       <a:endParaRPr lang="en-US" altLang="zh-CN" sz="1400">
                         <a:latin typeface="Times New Roman" panose="02020603050405020304" charset="0"/>
@@ -17157,7 +17345,7 @@
                           <a:latin typeface="Times New Roman" panose="02020603050405020304" charset="0"/>
                           <a:cs typeface="Times New Roman" panose="02020603050405020304" charset="0"/>
                         </a:rPr>
-                        <a:t>(2.5, 6.8)</a:t>
+                        <a:t>(2.54, 6.75)</a:t>
                       </a:r>
                       <a:endParaRPr lang="en-US" altLang="zh-CN" sz="1400">
                         <a:latin typeface="Times New Roman" panose="02020603050405020304" charset="0"/>
@@ -17244,12 +17432,18 @@
                       </a:pPr>
                       <a:r>
                         <a:rPr lang="en-US" altLang="zh-CN" sz="1400">
+                          <a:solidFill>
+                            <a:schemeClr val="tx1"/>
+                          </a:solidFill>
                           <a:latin typeface="Times New Roman" panose="02020603050405020304" charset="0"/>
                           <a:cs typeface="Times New Roman" panose="02020603050405020304" charset="0"/>
                         </a:rPr>
-                        <a:t>(5.3, 7.7)</a:t>
+                        <a:t>(5.33, 7.66)</a:t>
                       </a:r>
                       <a:endParaRPr lang="en-US" altLang="zh-CN" sz="1400">
+                        <a:solidFill>
+                          <a:schemeClr val="tx1"/>
+                        </a:solidFill>
                         <a:latin typeface="Times New Roman" panose="02020603050405020304" charset="0"/>
                         <a:cs typeface="Times New Roman" panose="02020603050405020304" charset="0"/>
                       </a:endParaRPr>
@@ -17337,7 +17531,7 @@
                           <a:latin typeface="Times New Roman" panose="02020603050405020304" charset="0"/>
                           <a:cs typeface="Times New Roman" panose="02020603050405020304" charset="0"/>
                         </a:rPr>
-                        <a:t>(8.3, 7.3)</a:t>
+                        <a:t>(8.28, 7.27)</a:t>
                       </a:r>
                       <a:endParaRPr lang="en-US" altLang="zh-CN" sz="1400">
                         <a:latin typeface="Times New Roman" panose="02020603050405020304" charset="0"/>
@@ -17567,7 +17761,7 @@
                           <a:latin typeface="Times New Roman" panose="02020603050405020304" charset="0"/>
                           <a:cs typeface="Times New Roman" panose="02020603050405020304" charset="0"/>
                         </a:rPr>
-                        <a:t>(2.8, 3.0)</a:t>
+                        <a:t>(2.75, 2.96)</a:t>
                       </a:r>
                       <a:endParaRPr lang="en-US" altLang="zh-CN" sz="1400">
                         <a:latin typeface="Times New Roman" panose="02020603050405020304" charset="0"/>
@@ -17589,7 +17783,7 @@
                           <a:latin typeface="Times New Roman" panose="02020603050405020304" charset="0"/>
                           <a:cs typeface="Times New Roman" panose="02020603050405020304" charset="0"/>
                         </a:rPr>
-                        <a:t>(3.0, 3.0)</a:t>
+                        <a:t>(3.00, 3.00)</a:t>
                       </a:r>
                       <a:endParaRPr lang="en-US" altLang="zh-CN" sz="1400">
                         <a:latin typeface="Times New Roman" panose="02020603050405020304" charset="0"/>
@@ -17657,7 +17851,7 @@
                           <a:latin typeface="Times New Roman" panose="02020603050405020304" charset="0"/>
                           <a:cs typeface="Times New Roman" panose="02020603050405020304" charset="0"/>
                         </a:rPr>
-                        <a:t>(1.9, 0.3)</a:t>
+                        <a:t>(1.91, 0.33)</a:t>
                       </a:r>
                       <a:endParaRPr lang="en-US" altLang="zh-CN" sz="1400">
                         <a:latin typeface="Times New Roman" panose="02020603050405020304" charset="0"/>
@@ -17679,7 +17873,7 @@
                           <a:latin typeface="Times New Roman" panose="02020603050405020304" charset="0"/>
                           <a:cs typeface="Times New Roman" panose="02020603050405020304" charset="0"/>
                         </a:rPr>
-                        <a:t>(2.0, 0.0)</a:t>
+                        <a:t>(2.00, 0.00)</a:t>
                       </a:r>
                       <a:endParaRPr lang="en-US" altLang="zh-CN" sz="1400">
                         <a:latin typeface="Times New Roman" panose="02020603050405020304" charset="0"/>
@@ -17747,7 +17941,7 @@
                           <a:latin typeface="Times New Roman" panose="02020603050405020304" charset="0"/>
                           <a:cs typeface="Times New Roman" panose="02020603050405020304" charset="0"/>
                         </a:rPr>
-                        <a:t>(7.3, 3.8)</a:t>
+                        <a:t>(7.30, 3.79)</a:t>
                       </a:r>
                       <a:endParaRPr lang="en-US" altLang="zh-CN" sz="1400">
                         <a:latin typeface="Times New Roman" panose="02020603050405020304" charset="0"/>
@@ -17769,7 +17963,7 @@
                           <a:latin typeface="Times New Roman" panose="02020603050405020304" charset="0"/>
                           <a:cs typeface="Times New Roman" panose="02020603050405020304" charset="0"/>
                         </a:rPr>
-                        <a:t>(7.0, 4.0)</a:t>
+                        <a:t>(7.00, 4.00)</a:t>
                       </a:r>
                       <a:endParaRPr lang="en-US" altLang="zh-CN" sz="1400">
                         <a:latin typeface="Times New Roman" panose="02020603050405020304" charset="0"/>
@@ -17837,7 +18031,7 @@
                           <a:latin typeface="Times New Roman" panose="02020603050405020304" charset="0"/>
                           <a:cs typeface="Times New Roman" panose="02020603050405020304" charset="0"/>
                         </a:rPr>
-                        <a:t>(-1.0, 0.9)</a:t>
+                        <a:t>(-1.00, 0.85)</a:t>
                       </a:r>
                       <a:endParaRPr lang="en-US" altLang="zh-CN" sz="1400">
                         <a:latin typeface="Times New Roman" panose="02020603050405020304" charset="0"/>
@@ -17859,7 +18053,7 @@
                           <a:latin typeface="Times New Roman" panose="02020603050405020304" charset="0"/>
                           <a:cs typeface="Times New Roman" panose="02020603050405020304" charset="0"/>
                         </a:rPr>
-                        <a:t>(2.5, 7.0)</a:t>
+                        <a:t>(2.50, 7.00)</a:t>
                       </a:r>
                       <a:endParaRPr lang="en-US" altLang="zh-CN" sz="1400">
                         <a:latin typeface="Times New Roman" panose="02020603050405020304" charset="0"/>
@@ -17927,7 +18121,7 @@
                           <a:latin typeface="Times New Roman" panose="02020603050405020304" charset="0"/>
                           <a:cs typeface="Times New Roman" panose="02020603050405020304" charset="0"/>
                         </a:rPr>
-                        <a:t>(2.2, 6.0)</a:t>
+                        <a:t>(2.17, 6.02)</a:t>
                       </a:r>
                       <a:endParaRPr lang="en-US" altLang="zh-CN" sz="1400">
                         <a:latin typeface="Times New Roman" panose="02020603050405020304" charset="0"/>
@@ -17949,7 +18143,7 @@
                           <a:latin typeface="Times New Roman" panose="02020603050405020304" charset="0"/>
                           <a:cs typeface="Times New Roman" panose="02020603050405020304" charset="0"/>
                         </a:rPr>
-                        <a:t>(6.0, 8.0)</a:t>
+                        <a:t>(6.00, 8.00)</a:t>
                       </a:r>
                       <a:endParaRPr lang="en-US" altLang="zh-CN" sz="1400">
                         <a:latin typeface="Times New Roman" panose="02020603050405020304" charset="0"/>
@@ -18017,7 +18211,1713 @@
                           <a:latin typeface="Times New Roman" panose="02020603050405020304" charset="0"/>
                           <a:cs typeface="Times New Roman" panose="02020603050405020304" charset="0"/>
                         </a:rPr>
-                        <a:t>(3..6, 6.4)</a:t>
+                        <a:t>(3.62, 6.35)</a:t>
+                      </a:r>
+                      <a:endParaRPr lang="en-US" altLang="zh-CN" sz="1400">
+                        <a:latin typeface="Times New Roman" panose="02020603050405020304" charset="0"/>
+                        <a:cs typeface="Times New Roman" panose="02020603050405020304" charset="0"/>
+                      </a:endParaRPr>
+                    </a:p>
+                  </a:txBody>
+                  <a:tcPr/>
+                </a:tc>
+                <a:tc>
+                  <a:txBody>
+                    <a:bodyPr/>
+                    <a:p>
+                      <a:pPr algn="ctr">
+                        <a:buNone/>
+                      </a:pPr>
+                      <a:r>
+                        <a:rPr lang="en-US" altLang="zh-CN" sz="1400">
+                          <a:latin typeface="Times New Roman" panose="02020603050405020304" charset="0"/>
+                          <a:cs typeface="Times New Roman" panose="02020603050405020304" charset="0"/>
+                        </a:rPr>
+                        <a:t>(8.00, 7.50)</a:t>
+                      </a:r>
+                      <a:endParaRPr lang="en-US" altLang="zh-CN" sz="1400">
+                        <a:latin typeface="Times New Roman" panose="02020603050405020304" charset="0"/>
+                        <a:cs typeface="Times New Roman" panose="02020603050405020304" charset="0"/>
+                      </a:endParaRPr>
+                    </a:p>
+                  </a:txBody>
+                  <a:tcPr/>
+                </a:tc>
+                <a:tc>
+                  <a:txBody>
+                    <a:bodyPr/>
+                    <a:p>
+                      <a:pPr algn="ctr">
+                        <a:buNone/>
+                      </a:pPr>
+                      <a:r>
+                        <a:rPr lang="en-US" altLang="zh-CN" sz="1400">
+                          <a:latin typeface="Times New Roman" panose="02020603050405020304" charset="0"/>
+                          <a:cs typeface="Times New Roman" panose="02020603050405020304" charset="0"/>
+                        </a:rPr>
+                        <a:t>4.5</a:t>
+                      </a:r>
+                      <a:endParaRPr lang="en-US" altLang="zh-CN" sz="1400">
+                        <a:latin typeface="Times New Roman" panose="02020603050405020304" charset="0"/>
+                        <a:cs typeface="Times New Roman" panose="02020603050405020304" charset="0"/>
+                      </a:endParaRPr>
+                    </a:p>
+                  </a:txBody>
+                  <a:tcPr/>
+                </a:tc>
+              </a:tr>
+            </a:tbl>
+          </a:graphicData>
+        </a:graphic>
+      </p:graphicFrame>
+      <p:sp>
+        <p:nvSpPr>
+          <p:cNvPr id="36" name="文本框 35"/>
+          <p:cNvSpPr txBox="1"/>
+          <p:nvPr/>
+        </p:nvSpPr>
+        <p:spPr>
+          <a:xfrm>
+            <a:off x="9359265" y="5645785"/>
+            <a:ext cx="2622550" cy="521970"/>
+          </a:xfrm>
+          <a:prstGeom prst="rect">
+            <a:avLst/>
+          </a:prstGeom>
+        </p:spPr>
+        <p:txBody>
+          <a:bodyPr wrap="square">
+            <a:spAutoFit/>
+            <a:extLst>
+              <a:ext uri="{4A0BC546-FE56-4ADE-93B0-CB8AF2F6F144}">
+                <wpsdc:textFrameExt xmlns:wpsdc="http://www.wps.cn/officeDocument/2022/drawingmlCustomData" type="text"/>
+              </a:ext>
+            </a:extLst>
+          </a:bodyPr>
+          <a:p>
+            <a:pPr algn="l"/>
+            <a:r>
+              <a:rPr lang="en-US" altLang="zh-CN" sz="1400" b="1">
+                <a:latin typeface="Times New Roman" panose="02020603050405020304" charset="0"/>
+                <a:ea typeface="微软雅黑" panose="020B0503020204020204" charset="-122"/>
+                <a:cs typeface="Times New Roman" panose="02020603050405020304" charset="0"/>
+              </a:rPr>
+              <a:t>Without multi-hop mechnisim:</a:t>
+            </a:r>
+            <a:endParaRPr lang="en-US" altLang="zh-CN" sz="1400">
+              <a:latin typeface="Times New Roman" panose="02020603050405020304" charset="0"/>
+              <a:ea typeface="微软雅黑" panose="020B0503020204020204" charset="-122"/>
+              <a:cs typeface="Times New Roman" panose="02020603050405020304" charset="0"/>
+            </a:endParaRPr>
+          </a:p>
+          <a:p>
+            <a:pPr marL="285750" indent="-285750" algn="l">
+              <a:buFont typeface="Wingdings" panose="05000000000000000000" charset="0"/>
+              <a:buChar char="Ø"/>
+            </a:pPr>
+            <a:r>
+              <a:rPr lang="en-US" altLang="zh-CN" sz="1400">
+                <a:latin typeface="Times New Roman" panose="02020603050405020304" charset="0"/>
+                <a:ea typeface="微软雅黑" panose="020B0503020204020204" charset="-122"/>
+                <a:cs typeface="Times New Roman" panose="02020603050405020304" charset="0"/>
+              </a:rPr>
+              <a:t>Average error: 2.81</a:t>
+            </a:r>
+            <a:endParaRPr lang="en-US" altLang="zh-CN" sz="1400">
+              <a:latin typeface="Times New Roman" panose="02020603050405020304" charset="0"/>
+              <a:ea typeface="微软雅黑" panose="020B0503020204020204" charset="-122"/>
+              <a:cs typeface="Times New Roman" panose="02020603050405020304" charset="0"/>
+            </a:endParaRPr>
+          </a:p>
+        </p:txBody>
+      </p:sp>
+    </p:spTree>
+  </p:cSld>
+  <p:clrMapOvr>
+    <a:masterClrMapping/>
+  </p:clrMapOvr>
+</p:sld>
+</file>
+
+<file path=ppt/slides/slide9.xml><?xml version="1.0" encoding="utf-8"?>
+<p:sld xmlns:a="http://schemas.openxmlformats.org/drawingml/2006/main" xmlns:r="http://schemas.openxmlformats.org/officeDocument/2006/relationships" xmlns:p="http://schemas.openxmlformats.org/presentationml/2006/main">
+  <p:cSld>
+    <p:spTree>
+      <p:nvGrpSpPr>
+        <p:cNvPr id="1" name=""/>
+        <p:cNvGrpSpPr/>
+        <p:nvPr/>
+      </p:nvGrpSpPr>
+      <p:grpSpPr>
+        <a:xfrm>
+          <a:off x="0" y="0"/>
+          <a:ext cx="0" cy="0"/>
+          <a:chOff x="0" y="0"/>
+          <a:chExt cx="0" cy="0"/>
+        </a:xfrm>
+      </p:grpSpPr>
+      <p:sp>
+        <p:nvSpPr>
+          <p:cNvPr id="2" name="Rectangle 1"/>
+          <p:cNvSpPr/>
+          <p:nvPr/>
+        </p:nvSpPr>
+        <p:spPr>
+          <a:xfrm>
+            <a:off x="838200" y="1794649"/>
+            <a:ext cx="10766715" cy="583565"/>
+          </a:xfrm>
+          <a:prstGeom prst="rect">
+            <a:avLst/>
+          </a:prstGeom>
+        </p:spPr>
+        <p:txBody>
+          <a:bodyPr wrap="square">
+            <a:spAutoFit/>
+          </a:bodyPr>
+          <a:lstStyle/>
+          <a:p>
+            <a:pPr marL="457200" indent="-457200">
+              <a:buFont typeface="Arial" panose="020B0604020202020204" pitchFamily="34" charset="0"/>
+              <a:buChar char="•"/>
+              <a:defRPr/>
+            </a:pPr>
+            <a:endParaRPr lang="en-US" altLang="zh-CN" sz="3200" dirty="0">
+              <a:latin typeface="Kaiti TC" panose="02010600040101010101" pitchFamily="2" charset="-120"/>
+              <a:ea typeface="Kaiti TC" panose="02010600040101010101" pitchFamily="2" charset="-120"/>
+            </a:endParaRPr>
+          </a:p>
+        </p:txBody>
+      </p:sp>
+      <p:sp>
+        <p:nvSpPr>
+          <p:cNvPr id="7" name="Title 2"/>
+          <p:cNvSpPr txBox="1"/>
+          <p:nvPr/>
+        </p:nvSpPr>
+        <p:spPr>
+          <a:xfrm>
+            <a:off x="265430" y="0"/>
+            <a:ext cx="10261600" cy="1082040"/>
+          </a:xfrm>
+          <a:prstGeom prst="rect">
+            <a:avLst/>
+          </a:prstGeom>
+        </p:spPr>
+        <p:txBody>
+          <a:bodyPr vert="horz" lIns="91440" tIns="45720" rIns="91440" bIns="45720" rtlCol="0" anchor="ctr">
+            <a:normAutofit/>
+          </a:bodyPr>
+          <a:lstStyle>
+            <a:lvl1pPr algn="l" defTabSz="914400" rtl="0" eaLnBrk="1" latinLnBrk="0" hangingPunct="1">
+              <a:lnSpc>
+                <a:spcPct val="90000"/>
+              </a:lnSpc>
+              <a:spcBef>
+                <a:spcPct val="0"/>
+              </a:spcBef>
+              <a:buNone/>
+              <a:defRPr sz="6000" kern="1200">
+                <a:solidFill>
+                  <a:srgbClr val="DD613B"/>
+                </a:solidFill>
+                <a:latin typeface="+mj-lt"/>
+                <a:ea typeface="+mj-ea"/>
+                <a:cs typeface="+mj-cs"/>
+              </a:defRPr>
+            </a:lvl1pPr>
+          </a:lstStyle>
+          <a:p>
+            <a:r>
+              <a:rPr lang="en-US" altLang="zh-CN" sz="4000" dirty="0" err="1">
+                <a:latin typeface="Times New Roman" panose="02020603050405020304" charset="0"/>
+                <a:ea typeface="微软雅黑" panose="020B0503020204020204" charset="-122"/>
+                <a:cs typeface="Times New Roman" panose="02020603050405020304" charset="0"/>
+                <a:sym typeface="+mn-ea"/>
+              </a:rPr>
+              <a:t>Simulation</a:t>
+            </a:r>
+            <a:endParaRPr lang="en-US" altLang="zh-CN" sz="4000" dirty="0" err="1">
+              <a:latin typeface="Times New Roman" panose="02020603050405020304" charset="0"/>
+              <a:ea typeface="微软雅黑" panose="020B0503020204020204" charset="-122"/>
+              <a:cs typeface="Times New Roman" panose="02020603050405020304" charset="0"/>
+              <a:sym typeface="+mn-ea"/>
+            </a:endParaRPr>
+          </a:p>
+        </p:txBody>
+      </p:sp>
+      <p:pic>
+        <p:nvPicPr>
+          <p:cNvPr id="30" name="图片 29" descr="localization_20MHz"/>
+          <p:cNvPicPr>
+            <a:picLocks noChangeAspect="1"/>
+          </p:cNvPicPr>
+          <p:nvPr/>
+        </p:nvPicPr>
+        <p:blipFill>
+          <a:blip r:embed="rId1"/>
+          <a:stretch>
+            <a:fillRect/>
+          </a:stretch>
+        </p:blipFill>
+        <p:spPr>
+          <a:xfrm>
+            <a:off x="412750" y="-3810"/>
+            <a:ext cx="4182745" cy="3348355"/>
+          </a:xfrm>
+          <a:prstGeom prst="rect">
+            <a:avLst/>
+          </a:prstGeom>
+        </p:spPr>
+      </p:pic>
+      <p:sp>
+        <p:nvSpPr>
+          <p:cNvPr id="31" name="文本框 30"/>
+          <p:cNvSpPr txBox="1"/>
+          <p:nvPr/>
+        </p:nvSpPr>
+        <p:spPr>
+          <a:xfrm>
+            <a:off x="9448800" y="2378075"/>
+            <a:ext cx="2622550" cy="737235"/>
+          </a:xfrm>
+          <a:prstGeom prst="rect">
+            <a:avLst/>
+          </a:prstGeom>
+        </p:spPr>
+        <p:txBody>
+          <a:bodyPr wrap="square">
+            <a:spAutoFit/>
+            <a:extLst>
+              <a:ext uri="{4A0BC546-FE56-4ADE-93B0-CB8AF2F6F144}">
+                <wpsdc:textFrameExt xmlns:wpsdc="http://www.wps.cn/officeDocument/2022/drawingmlCustomData" type="text"/>
+              </a:ext>
+            </a:extLst>
+          </a:bodyPr>
+          <a:p>
+            <a:pPr algn="l"/>
+            <a:r>
+              <a:rPr lang="en-US" altLang="zh-CN" sz="1400" b="1">
+                <a:latin typeface="Times New Roman" panose="02020603050405020304" charset="0"/>
+                <a:ea typeface="微软雅黑" panose="020B0503020204020204" charset="-122"/>
+                <a:cs typeface="Times New Roman" panose="02020603050405020304" charset="0"/>
+              </a:rPr>
+              <a:t>With multi-hop mechnisim(before optimization):</a:t>
+            </a:r>
+            <a:endParaRPr lang="en-US" altLang="zh-CN" sz="1400">
+              <a:latin typeface="Times New Roman" panose="02020603050405020304" charset="0"/>
+              <a:ea typeface="微软雅黑" panose="020B0503020204020204" charset="-122"/>
+              <a:cs typeface="Times New Roman" panose="02020603050405020304" charset="0"/>
+            </a:endParaRPr>
+          </a:p>
+          <a:p>
+            <a:pPr marL="285750" indent="-285750" algn="l">
+              <a:buFont typeface="Wingdings" panose="05000000000000000000" charset="0"/>
+              <a:buChar char="Ø"/>
+            </a:pPr>
+            <a:r>
+              <a:rPr lang="en-US" altLang="zh-CN" sz="1400">
+                <a:latin typeface="Times New Roman" panose="02020603050405020304" charset="0"/>
+                <a:ea typeface="微软雅黑" panose="020B0503020204020204" charset="-122"/>
+                <a:cs typeface="Times New Roman" panose="02020603050405020304" charset="0"/>
+              </a:rPr>
+              <a:t>Average error: 0.39</a:t>
+            </a:r>
+            <a:endParaRPr lang="en-US" altLang="zh-CN" sz="1400">
+              <a:latin typeface="Times New Roman" panose="02020603050405020304" charset="0"/>
+              <a:ea typeface="微软雅黑" panose="020B0503020204020204" charset="-122"/>
+              <a:cs typeface="Times New Roman" panose="02020603050405020304" charset="0"/>
+            </a:endParaRPr>
+          </a:p>
+        </p:txBody>
+      </p:sp>
+      <p:graphicFrame>
+        <p:nvGraphicFramePr>
+          <p:cNvPr id="32" name="表格 31"/>
+          <p:cNvGraphicFramePr/>
+          <p:nvPr/>
+        </p:nvGraphicFramePr>
+        <p:xfrm>
+          <a:off x="4728845" y="504825"/>
+          <a:ext cx="4480560" cy="2517775"/>
+        </p:xfrm>
+        <a:graphic>
+          <a:graphicData uri="http://schemas.openxmlformats.org/drawingml/2006/table">
+            <a:tbl>
+              <a:tblPr firstRow="1" bandRow="1">
+                <a:tableStyleId>{5C22544A-7EE6-4342-B048-85BDC9FD1C3A}</a:tableStyleId>
+              </a:tblPr>
+              <a:tblGrid>
+                <a:gridCol w="954405"/>
+                <a:gridCol w="1128395"/>
+                <a:gridCol w="1226185"/>
+                <a:gridCol w="1171575"/>
+              </a:tblGrid>
+              <a:tr h="323215">
+                <a:tc>
+                  <a:txBody>
+                    <a:bodyPr/>
+                    <a:p>
+                      <a:pPr algn="ctr">
+                        <a:buNone/>
+                      </a:pPr>
+                      <a:r>
+                        <a:rPr lang="en-US" altLang="zh-CN" sz="1200">
+                          <a:latin typeface="Times New Roman" panose="02020603050405020304" charset="0"/>
+                          <a:cs typeface="Times New Roman" panose="02020603050405020304" charset="0"/>
+                        </a:rPr>
+                        <a:t> Node</a:t>
+                      </a:r>
+                      <a:endParaRPr lang="en-US" altLang="zh-CN" sz="1200">
+                        <a:latin typeface="Times New Roman" panose="02020603050405020304" charset="0"/>
+                        <a:cs typeface="Times New Roman" panose="02020603050405020304" charset="0"/>
+                      </a:endParaRPr>
+                    </a:p>
+                  </a:txBody>
+                  <a:tcPr/>
+                </a:tc>
+                <a:tc>
+                  <a:txBody>
+                    <a:bodyPr/>
+                    <a:p>
+                      <a:pPr algn="ctr">
+                        <a:buNone/>
+                      </a:pPr>
+                      <a:r>
+                        <a:rPr lang="en-US" altLang="zh-CN" sz="1400">
+                          <a:latin typeface="Times New Roman" panose="02020603050405020304" charset="0"/>
+                          <a:cs typeface="Times New Roman" panose="02020603050405020304" charset="0"/>
+                        </a:rPr>
+                        <a:t>est_location</a:t>
+                      </a:r>
+                      <a:endParaRPr lang="en-US" altLang="zh-CN" sz="1400">
+                        <a:latin typeface="Times New Roman" panose="02020603050405020304" charset="0"/>
+                        <a:cs typeface="Times New Roman" panose="02020603050405020304" charset="0"/>
+                      </a:endParaRPr>
+                    </a:p>
+                  </a:txBody>
+                  <a:tcPr/>
+                </a:tc>
+                <a:tc>
+                  <a:txBody>
+                    <a:bodyPr/>
+                    <a:p>
+                      <a:pPr algn="ctr">
+                        <a:buNone/>
+                      </a:pPr>
+                      <a:r>
+                        <a:rPr lang="en-US" altLang="zh-CN" sz="1400">
+                          <a:latin typeface="Times New Roman" panose="02020603050405020304" charset="0"/>
+                          <a:cs typeface="Times New Roman" panose="02020603050405020304" charset="0"/>
+                        </a:rPr>
+                        <a:t>true_location</a:t>
+                      </a:r>
+                      <a:endParaRPr lang="en-US" altLang="zh-CN" sz="1400">
+                        <a:latin typeface="Times New Roman" panose="02020603050405020304" charset="0"/>
+                        <a:cs typeface="Times New Roman" panose="02020603050405020304" charset="0"/>
+                      </a:endParaRPr>
+                    </a:p>
+                  </a:txBody>
+                  <a:tcPr/>
+                </a:tc>
+                <a:tc>
+                  <a:txBody>
+                    <a:bodyPr/>
+                    <a:p>
+                      <a:pPr algn="ctr">
+                        <a:buNone/>
+                      </a:pPr>
+                      <a:r>
+                        <a:rPr lang="en-US" altLang="zh-CN" sz="1400">
+                          <a:latin typeface="Times New Roman" panose="02020603050405020304" charset="0"/>
+                          <a:cs typeface="Times New Roman" panose="02020603050405020304" charset="0"/>
+                        </a:rPr>
+                        <a:t>error</a:t>
+                      </a:r>
+                      <a:endParaRPr lang="en-US" altLang="zh-CN" sz="1400">
+                        <a:latin typeface="Times New Roman" panose="02020603050405020304" charset="0"/>
+                        <a:cs typeface="Times New Roman" panose="02020603050405020304" charset="0"/>
+                      </a:endParaRPr>
+                    </a:p>
+                  </a:txBody>
+                  <a:tcPr/>
+                </a:tc>
+              </a:tr>
+              <a:tr h="365760">
+                <a:tc>
+                  <a:txBody>
+                    <a:bodyPr/>
+                    <a:p>
+                      <a:pPr algn="ctr">
+                        <a:buNone/>
+                      </a:pPr>
+                      <a:r>
+                        <a:rPr lang="en-US" altLang="zh-CN" sz="1400">
+                          <a:latin typeface="Times New Roman" panose="02020603050405020304" charset="0"/>
+                          <a:cs typeface="Times New Roman" panose="02020603050405020304" charset="0"/>
+                        </a:rPr>
+                        <a:t>1</a:t>
+                      </a:r>
+                      <a:endParaRPr lang="en-US" altLang="zh-CN" sz="1400">
+                        <a:latin typeface="Times New Roman" panose="02020603050405020304" charset="0"/>
+                        <a:cs typeface="Times New Roman" panose="02020603050405020304" charset="0"/>
+                      </a:endParaRPr>
+                    </a:p>
+                  </a:txBody>
+                  <a:tcPr/>
+                </a:tc>
+                <a:tc>
+                  <a:txBody>
+                    <a:bodyPr/>
+                    <a:p>
+                      <a:pPr algn="ctr">
+                        <a:buNone/>
+                      </a:pPr>
+                      <a:r>
+                        <a:rPr lang="en-US" altLang="zh-CN" sz="1400">
+                          <a:latin typeface="Times New Roman" panose="02020603050405020304" charset="0"/>
+                          <a:cs typeface="Times New Roman" panose="02020603050405020304" charset="0"/>
+                        </a:rPr>
+                        <a:t>(2.75, 2.96)</a:t>
+                      </a:r>
+                      <a:endParaRPr lang="en-US" altLang="zh-CN" sz="1400">
+                        <a:latin typeface="Times New Roman" panose="02020603050405020304" charset="0"/>
+                        <a:cs typeface="Times New Roman" panose="02020603050405020304" charset="0"/>
+                      </a:endParaRPr>
+                    </a:p>
+                  </a:txBody>
+                  <a:tcPr/>
+                </a:tc>
+                <a:tc>
+                  <a:txBody>
+                    <a:bodyPr/>
+                    <a:p>
+                      <a:pPr algn="ctr">
+                        <a:buNone/>
+                      </a:pPr>
+                      <a:r>
+                        <a:rPr lang="en-US" altLang="zh-CN" sz="1400">
+                          <a:latin typeface="Times New Roman" panose="02020603050405020304" charset="0"/>
+                          <a:cs typeface="Times New Roman" panose="02020603050405020304" charset="0"/>
+                        </a:rPr>
+                        <a:t>(3.00, 3.00)</a:t>
+                      </a:r>
+                      <a:endParaRPr lang="en-US" altLang="zh-CN" sz="1400">
+                        <a:latin typeface="Times New Roman" panose="02020603050405020304" charset="0"/>
+                        <a:cs typeface="Times New Roman" panose="02020603050405020304" charset="0"/>
+                      </a:endParaRPr>
+                    </a:p>
+                  </a:txBody>
+                  <a:tcPr/>
+                </a:tc>
+                <a:tc>
+                  <a:txBody>
+                    <a:bodyPr/>
+                    <a:p>
+                      <a:pPr algn="ctr">
+                        <a:buNone/>
+                      </a:pPr>
+                      <a:r>
+                        <a:rPr lang="en-US" altLang="zh-CN" sz="1400">
+                          <a:latin typeface="Times New Roman" panose="02020603050405020304" charset="0"/>
+                          <a:cs typeface="Times New Roman" panose="02020603050405020304" charset="0"/>
+                        </a:rPr>
+                        <a:t>0.26</a:t>
+                      </a:r>
+                      <a:endParaRPr lang="en-US" altLang="zh-CN" sz="1400">
+                        <a:latin typeface="Times New Roman" panose="02020603050405020304" charset="0"/>
+                        <a:cs typeface="Times New Roman" panose="02020603050405020304" charset="0"/>
+                      </a:endParaRPr>
+                    </a:p>
+                  </a:txBody>
+                  <a:tcPr/>
+                </a:tc>
+              </a:tr>
+              <a:tr h="365760">
+                <a:tc>
+                  <a:txBody>
+                    <a:bodyPr/>
+                    <a:p>
+                      <a:pPr algn="ctr">
+                        <a:buNone/>
+                      </a:pPr>
+                      <a:r>
+                        <a:rPr lang="en-US" altLang="zh-CN" sz="1400">
+                          <a:latin typeface="Times New Roman" panose="02020603050405020304" charset="0"/>
+                          <a:cs typeface="Times New Roman" panose="02020603050405020304" charset="0"/>
+                        </a:rPr>
+                        <a:t>2</a:t>
+                      </a:r>
+                      <a:endParaRPr lang="en-US" altLang="zh-CN" sz="1400">
+                        <a:latin typeface="Times New Roman" panose="02020603050405020304" charset="0"/>
+                        <a:cs typeface="Times New Roman" panose="02020603050405020304" charset="0"/>
+                      </a:endParaRPr>
+                    </a:p>
+                  </a:txBody>
+                  <a:tcPr/>
+                </a:tc>
+                <a:tc>
+                  <a:txBody>
+                    <a:bodyPr/>
+                    <a:p>
+                      <a:pPr algn="ctr">
+                        <a:buNone/>
+                      </a:pPr>
+                      <a:r>
+                        <a:rPr lang="en-US" altLang="zh-CN" sz="1400">
+                          <a:latin typeface="Times New Roman" panose="02020603050405020304" charset="0"/>
+                          <a:cs typeface="Times New Roman" panose="02020603050405020304" charset="0"/>
+                        </a:rPr>
+                        <a:t>(1.91, 0.33)</a:t>
+                      </a:r>
+                      <a:endParaRPr lang="en-US" altLang="zh-CN" sz="1400">
+                        <a:latin typeface="Times New Roman" panose="02020603050405020304" charset="0"/>
+                        <a:cs typeface="Times New Roman" panose="02020603050405020304" charset="0"/>
+                      </a:endParaRPr>
+                    </a:p>
+                  </a:txBody>
+                  <a:tcPr/>
+                </a:tc>
+                <a:tc>
+                  <a:txBody>
+                    <a:bodyPr/>
+                    <a:p>
+                      <a:pPr algn="ctr">
+                        <a:buNone/>
+                      </a:pPr>
+                      <a:r>
+                        <a:rPr lang="en-US" altLang="zh-CN" sz="1400">
+                          <a:latin typeface="Times New Roman" panose="02020603050405020304" charset="0"/>
+                          <a:cs typeface="Times New Roman" panose="02020603050405020304" charset="0"/>
+                        </a:rPr>
+                        <a:t>(2.00, 0.00)</a:t>
+                      </a:r>
+                      <a:endParaRPr lang="en-US" altLang="zh-CN" sz="1400">
+                        <a:latin typeface="Times New Roman" panose="02020603050405020304" charset="0"/>
+                        <a:cs typeface="Times New Roman" panose="02020603050405020304" charset="0"/>
+                      </a:endParaRPr>
+                    </a:p>
+                  </a:txBody>
+                  <a:tcPr/>
+                </a:tc>
+                <a:tc>
+                  <a:txBody>
+                    <a:bodyPr/>
+                    <a:p>
+                      <a:pPr algn="ctr">
+                        <a:buNone/>
+                      </a:pPr>
+                      <a:r>
+                        <a:rPr lang="en-US" altLang="zh-CN" sz="1400">
+                          <a:latin typeface="Times New Roman" panose="02020603050405020304" charset="0"/>
+                          <a:cs typeface="Times New Roman" panose="02020603050405020304" charset="0"/>
+                        </a:rPr>
+                        <a:t>0.34</a:t>
+                      </a:r>
+                      <a:endParaRPr lang="en-US" altLang="zh-CN" sz="1400">
+                        <a:latin typeface="Times New Roman" panose="02020603050405020304" charset="0"/>
+                        <a:cs typeface="Times New Roman" panose="02020603050405020304" charset="0"/>
+                      </a:endParaRPr>
+                    </a:p>
+                  </a:txBody>
+                  <a:tcPr/>
+                </a:tc>
+              </a:tr>
+              <a:tr h="365760">
+                <a:tc>
+                  <a:txBody>
+                    <a:bodyPr/>
+                    <a:p>
+                      <a:pPr algn="ctr">
+                        <a:buNone/>
+                      </a:pPr>
+                      <a:r>
+                        <a:rPr lang="en-US" altLang="zh-CN" sz="1400">
+                          <a:latin typeface="Times New Roman" panose="02020603050405020304" charset="0"/>
+                          <a:cs typeface="Times New Roman" panose="02020603050405020304" charset="0"/>
+                        </a:rPr>
+                        <a:t>3</a:t>
+                      </a:r>
+                      <a:endParaRPr lang="en-US" altLang="zh-CN" sz="1400">
+                        <a:latin typeface="Times New Roman" panose="02020603050405020304" charset="0"/>
+                        <a:cs typeface="Times New Roman" panose="02020603050405020304" charset="0"/>
+                      </a:endParaRPr>
+                    </a:p>
+                  </a:txBody>
+                  <a:tcPr/>
+                </a:tc>
+                <a:tc>
+                  <a:txBody>
+                    <a:bodyPr/>
+                    <a:p>
+                      <a:pPr algn="ctr">
+                        <a:buNone/>
+                      </a:pPr>
+                      <a:r>
+                        <a:rPr lang="en-US" altLang="zh-CN" sz="1400">
+                          <a:latin typeface="Times New Roman" panose="02020603050405020304" charset="0"/>
+                          <a:cs typeface="Times New Roman" panose="02020603050405020304" charset="0"/>
+                        </a:rPr>
+                        <a:t>(7.30, 3.79)</a:t>
+                      </a:r>
+                      <a:endParaRPr lang="en-US" altLang="zh-CN" sz="1400">
+                        <a:latin typeface="Times New Roman" panose="02020603050405020304" charset="0"/>
+                        <a:cs typeface="Times New Roman" panose="02020603050405020304" charset="0"/>
+                      </a:endParaRPr>
+                    </a:p>
+                  </a:txBody>
+                  <a:tcPr/>
+                </a:tc>
+                <a:tc>
+                  <a:txBody>
+                    <a:bodyPr/>
+                    <a:p>
+                      <a:pPr algn="ctr">
+                        <a:buNone/>
+                      </a:pPr>
+                      <a:r>
+                        <a:rPr lang="en-US" altLang="zh-CN" sz="1400">
+                          <a:latin typeface="Times New Roman" panose="02020603050405020304" charset="0"/>
+                          <a:cs typeface="Times New Roman" panose="02020603050405020304" charset="0"/>
+                        </a:rPr>
+                        <a:t>(7.00, 4.00)</a:t>
+                      </a:r>
+                      <a:endParaRPr lang="en-US" altLang="zh-CN" sz="1400">
+                        <a:latin typeface="Times New Roman" panose="02020603050405020304" charset="0"/>
+                        <a:cs typeface="Times New Roman" panose="02020603050405020304" charset="0"/>
+                      </a:endParaRPr>
+                    </a:p>
+                  </a:txBody>
+                  <a:tcPr/>
+                </a:tc>
+                <a:tc>
+                  <a:txBody>
+                    <a:bodyPr/>
+                    <a:p>
+                      <a:pPr algn="ctr">
+                        <a:buNone/>
+                      </a:pPr>
+                      <a:r>
+                        <a:rPr lang="en-US" altLang="zh-CN" sz="1400">
+                          <a:latin typeface="Times New Roman" panose="02020603050405020304" charset="0"/>
+                          <a:cs typeface="Times New Roman" panose="02020603050405020304" charset="0"/>
+                        </a:rPr>
+                        <a:t>0.36</a:t>
+                      </a:r>
+                      <a:endParaRPr lang="en-US" altLang="zh-CN" sz="1400">
+                        <a:latin typeface="Times New Roman" panose="02020603050405020304" charset="0"/>
+                        <a:cs typeface="Times New Roman" panose="02020603050405020304" charset="0"/>
+                      </a:endParaRPr>
+                    </a:p>
+                  </a:txBody>
+                  <a:tcPr/>
+                </a:tc>
+              </a:tr>
+              <a:tr h="365760">
+                <a:tc>
+                  <a:txBody>
+                    <a:bodyPr/>
+                    <a:p>
+                      <a:pPr algn="ctr">
+                        <a:buNone/>
+                      </a:pPr>
+                      <a:r>
+                        <a:rPr lang="en-US" altLang="zh-CN" sz="1400">
+                          <a:latin typeface="Times New Roman" panose="02020603050405020304" charset="0"/>
+                          <a:cs typeface="Times New Roman" panose="02020603050405020304" charset="0"/>
+                        </a:rPr>
+                        <a:t>4</a:t>
+                      </a:r>
+                      <a:endParaRPr lang="en-US" altLang="zh-CN" sz="1400">
+                        <a:latin typeface="Times New Roman" panose="02020603050405020304" charset="0"/>
+                        <a:cs typeface="Times New Roman" panose="02020603050405020304" charset="0"/>
+                      </a:endParaRPr>
+                    </a:p>
+                  </a:txBody>
+                  <a:tcPr/>
+                </a:tc>
+                <a:tc>
+                  <a:txBody>
+                    <a:bodyPr/>
+                    <a:p>
+                      <a:pPr algn="ctr">
+                        <a:buNone/>
+                      </a:pPr>
+                      <a:r>
+                        <a:rPr lang="en-US" altLang="zh-CN" sz="1400">
+                          <a:latin typeface="Times New Roman" panose="02020603050405020304" charset="0"/>
+                          <a:cs typeface="Times New Roman" panose="02020603050405020304" charset="0"/>
+                        </a:rPr>
+                        <a:t>(2.54, 6.75)</a:t>
+                      </a:r>
+                      <a:endParaRPr lang="en-US" altLang="zh-CN" sz="1400">
+                        <a:latin typeface="Times New Roman" panose="02020603050405020304" charset="0"/>
+                        <a:cs typeface="Times New Roman" panose="02020603050405020304" charset="0"/>
+                      </a:endParaRPr>
+                    </a:p>
+                  </a:txBody>
+                  <a:tcPr/>
+                </a:tc>
+                <a:tc>
+                  <a:txBody>
+                    <a:bodyPr/>
+                    <a:p>
+                      <a:pPr algn="ctr">
+                        <a:buNone/>
+                      </a:pPr>
+                      <a:r>
+                        <a:rPr lang="en-US" altLang="zh-CN" sz="1400">
+                          <a:latin typeface="Times New Roman" panose="02020603050405020304" charset="0"/>
+                          <a:cs typeface="Times New Roman" panose="02020603050405020304" charset="0"/>
+                        </a:rPr>
+                        <a:t>(2.50, 7.00)</a:t>
+                      </a:r>
+                      <a:endParaRPr lang="en-US" altLang="zh-CN" sz="1400">
+                        <a:latin typeface="Times New Roman" panose="02020603050405020304" charset="0"/>
+                        <a:cs typeface="Times New Roman" panose="02020603050405020304" charset="0"/>
+                      </a:endParaRPr>
+                    </a:p>
+                  </a:txBody>
+                  <a:tcPr/>
+                </a:tc>
+                <a:tc>
+                  <a:txBody>
+                    <a:bodyPr/>
+                    <a:p>
+                      <a:pPr algn="ctr">
+                        <a:buNone/>
+                      </a:pPr>
+                      <a:r>
+                        <a:rPr lang="en-US" altLang="zh-CN" sz="1400">
+                          <a:latin typeface="Times New Roman" panose="02020603050405020304" charset="0"/>
+                          <a:cs typeface="Times New Roman" panose="02020603050405020304" charset="0"/>
+                        </a:rPr>
+                        <a:t>0.25</a:t>
+                      </a:r>
+                      <a:endParaRPr lang="en-US" altLang="zh-CN" sz="1400">
+                        <a:latin typeface="Times New Roman" panose="02020603050405020304" charset="0"/>
+                        <a:cs typeface="Times New Roman" panose="02020603050405020304" charset="0"/>
+                      </a:endParaRPr>
+                    </a:p>
+                  </a:txBody>
+                  <a:tcPr/>
+                </a:tc>
+              </a:tr>
+              <a:tr h="365760">
+                <a:tc>
+                  <a:txBody>
+                    <a:bodyPr/>
+                    <a:p>
+                      <a:pPr algn="ctr">
+                        <a:buNone/>
+                      </a:pPr>
+                      <a:r>
+                        <a:rPr lang="en-US" altLang="zh-CN" sz="1400">
+                          <a:solidFill>
+                            <a:srgbClr val="C00000"/>
+                          </a:solidFill>
+                          <a:latin typeface="Times New Roman" panose="02020603050405020304" charset="0"/>
+                          <a:cs typeface="Times New Roman" panose="02020603050405020304" charset="0"/>
+                        </a:rPr>
+                        <a:t>5</a:t>
+                      </a:r>
+                      <a:endParaRPr lang="en-US" altLang="zh-CN" sz="1400">
+                        <a:solidFill>
+                          <a:srgbClr val="C00000"/>
+                        </a:solidFill>
+                        <a:latin typeface="Times New Roman" panose="02020603050405020304" charset="0"/>
+                        <a:cs typeface="Times New Roman" panose="02020603050405020304" charset="0"/>
+                      </a:endParaRPr>
+                    </a:p>
+                  </a:txBody>
+                  <a:tcPr/>
+                </a:tc>
+                <a:tc>
+                  <a:txBody>
+                    <a:bodyPr/>
+                    <a:p>
+                      <a:pPr algn="ctr">
+                        <a:buNone/>
+                      </a:pPr>
+                      <a:r>
+                        <a:rPr lang="en-US" altLang="zh-CN" sz="1400">
+                          <a:solidFill>
+                            <a:srgbClr val="C00000"/>
+                          </a:solidFill>
+                          <a:latin typeface="Times New Roman" panose="02020603050405020304" charset="0"/>
+                          <a:cs typeface="Times New Roman" panose="02020603050405020304" charset="0"/>
+                        </a:rPr>
+                        <a:t>(5.33, 7.66)</a:t>
+                      </a:r>
+                      <a:endParaRPr lang="en-US" altLang="zh-CN" sz="1400">
+                        <a:solidFill>
+                          <a:srgbClr val="C00000"/>
+                        </a:solidFill>
+                        <a:latin typeface="Times New Roman" panose="02020603050405020304" charset="0"/>
+                        <a:cs typeface="Times New Roman" panose="02020603050405020304" charset="0"/>
+                      </a:endParaRPr>
+                    </a:p>
+                  </a:txBody>
+                  <a:tcPr/>
+                </a:tc>
+                <a:tc>
+                  <a:txBody>
+                    <a:bodyPr/>
+                    <a:p>
+                      <a:pPr algn="ctr">
+                        <a:buNone/>
+                      </a:pPr>
+                      <a:r>
+                        <a:rPr lang="en-US" altLang="zh-CN" sz="1400">
+                          <a:solidFill>
+                            <a:srgbClr val="C00000"/>
+                          </a:solidFill>
+                          <a:latin typeface="Times New Roman" panose="02020603050405020304" charset="0"/>
+                          <a:cs typeface="Times New Roman" panose="02020603050405020304" charset="0"/>
+                        </a:rPr>
+                        <a:t>(6.00, 8.00)</a:t>
+                      </a:r>
+                      <a:endParaRPr lang="en-US" altLang="zh-CN" sz="1400">
+                        <a:solidFill>
+                          <a:srgbClr val="C00000"/>
+                        </a:solidFill>
+                        <a:latin typeface="Times New Roman" panose="02020603050405020304" charset="0"/>
+                        <a:cs typeface="Times New Roman" panose="02020603050405020304" charset="0"/>
+                      </a:endParaRPr>
+                    </a:p>
+                  </a:txBody>
+                  <a:tcPr/>
+                </a:tc>
+                <a:tc>
+                  <a:txBody>
+                    <a:bodyPr/>
+                    <a:p>
+                      <a:pPr algn="ctr">
+                        <a:buNone/>
+                      </a:pPr>
+                      <a:r>
+                        <a:rPr lang="en-US" altLang="zh-CN" sz="1400">
+                          <a:solidFill>
+                            <a:srgbClr val="C00000"/>
+                          </a:solidFill>
+                          <a:latin typeface="Times New Roman" panose="02020603050405020304" charset="0"/>
+                          <a:cs typeface="Times New Roman" panose="02020603050405020304" charset="0"/>
+                        </a:rPr>
+                        <a:t>0.75</a:t>
+                      </a:r>
+                      <a:endParaRPr lang="en-US" altLang="zh-CN" sz="1400">
+                        <a:solidFill>
+                          <a:srgbClr val="C00000"/>
+                        </a:solidFill>
+                        <a:latin typeface="Times New Roman" panose="02020603050405020304" charset="0"/>
+                        <a:cs typeface="Times New Roman" panose="02020603050405020304" charset="0"/>
+                      </a:endParaRPr>
+                    </a:p>
+                  </a:txBody>
+                  <a:tcPr/>
+                </a:tc>
+              </a:tr>
+              <a:tr h="365760">
+                <a:tc>
+                  <a:txBody>
+                    <a:bodyPr/>
+                    <a:p>
+                      <a:pPr algn="ctr">
+                        <a:buNone/>
+                      </a:pPr>
+                      <a:r>
+                        <a:rPr lang="en-US" altLang="zh-CN" sz="1400">
+                          <a:latin typeface="Times New Roman" panose="02020603050405020304" charset="0"/>
+                          <a:cs typeface="Times New Roman" panose="02020603050405020304" charset="0"/>
+                        </a:rPr>
+                        <a:t>6</a:t>
+                      </a:r>
+                      <a:endParaRPr lang="en-US" altLang="zh-CN" sz="1400">
+                        <a:latin typeface="Times New Roman" panose="02020603050405020304" charset="0"/>
+                        <a:cs typeface="Times New Roman" panose="02020603050405020304" charset="0"/>
+                      </a:endParaRPr>
+                    </a:p>
+                  </a:txBody>
+                  <a:tcPr/>
+                </a:tc>
+                <a:tc>
+                  <a:txBody>
+                    <a:bodyPr/>
+                    <a:p>
+                      <a:pPr algn="ctr">
+                        <a:buNone/>
+                      </a:pPr>
+                      <a:r>
+                        <a:rPr lang="en-US" altLang="zh-CN" sz="1400">
+                          <a:latin typeface="Times New Roman" panose="02020603050405020304" charset="0"/>
+                          <a:cs typeface="Times New Roman" panose="02020603050405020304" charset="0"/>
+                        </a:rPr>
+                        <a:t>(8.28, 7.27)</a:t>
+                      </a:r>
+                      <a:endParaRPr lang="en-US" altLang="zh-CN" sz="1400">
+                        <a:latin typeface="Times New Roman" panose="02020603050405020304" charset="0"/>
+                        <a:cs typeface="Times New Roman" panose="02020603050405020304" charset="0"/>
+                      </a:endParaRPr>
+                    </a:p>
+                  </a:txBody>
+                  <a:tcPr/>
+                </a:tc>
+                <a:tc>
+                  <a:txBody>
+                    <a:bodyPr/>
+                    <a:p>
+                      <a:pPr algn="ctr">
+                        <a:buNone/>
+                      </a:pPr>
+                      <a:r>
+                        <a:rPr lang="en-US" altLang="zh-CN" sz="1400">
+                          <a:latin typeface="Times New Roman" panose="02020603050405020304" charset="0"/>
+                          <a:cs typeface="Times New Roman" panose="02020603050405020304" charset="0"/>
+                        </a:rPr>
+                        <a:t>(8.00, 7.50)</a:t>
+                      </a:r>
+                      <a:endParaRPr lang="en-US" altLang="zh-CN" sz="1400">
+                        <a:latin typeface="Times New Roman" panose="02020603050405020304" charset="0"/>
+                        <a:cs typeface="Times New Roman" panose="02020603050405020304" charset="0"/>
+                      </a:endParaRPr>
+                    </a:p>
+                  </a:txBody>
+                  <a:tcPr/>
+                </a:tc>
+                <a:tc>
+                  <a:txBody>
+                    <a:bodyPr/>
+                    <a:p>
+                      <a:pPr algn="ctr">
+                        <a:buNone/>
+                      </a:pPr>
+                      <a:r>
+                        <a:rPr lang="en-US" altLang="zh-CN" sz="1400">
+                          <a:latin typeface="Times New Roman" panose="02020603050405020304" charset="0"/>
+                          <a:cs typeface="Times New Roman" panose="02020603050405020304" charset="0"/>
+                        </a:rPr>
+                        <a:t>0.36</a:t>
+                      </a:r>
+                      <a:endParaRPr lang="en-US" altLang="zh-CN" sz="1400">
+                        <a:latin typeface="Times New Roman" panose="02020603050405020304" charset="0"/>
+                        <a:cs typeface="Times New Roman" panose="02020603050405020304" charset="0"/>
+                      </a:endParaRPr>
+                    </a:p>
+                  </a:txBody>
+                  <a:tcPr/>
+                </a:tc>
+              </a:tr>
+            </a:tbl>
+          </a:graphicData>
+        </a:graphic>
+      </p:graphicFrame>
+      <p:sp>
+        <p:nvSpPr>
+          <p:cNvPr id="36" name="文本框 35"/>
+          <p:cNvSpPr txBox="1"/>
+          <p:nvPr/>
+        </p:nvSpPr>
+        <p:spPr>
+          <a:xfrm>
+            <a:off x="9359265" y="5570855"/>
+            <a:ext cx="2622550" cy="737235"/>
+          </a:xfrm>
+          <a:prstGeom prst="rect">
+            <a:avLst/>
+          </a:prstGeom>
+        </p:spPr>
+        <p:txBody>
+          <a:bodyPr wrap="square">
+            <a:spAutoFit/>
+            <a:extLst>
+              <a:ext uri="{4A0BC546-FE56-4ADE-93B0-CB8AF2F6F144}">
+                <wpsdc:textFrameExt xmlns:wpsdc="http://www.wps.cn/officeDocument/2022/drawingmlCustomData" type="text"/>
+              </a:ext>
+            </a:extLst>
+          </a:bodyPr>
+          <a:p>
+            <a:pPr algn="l"/>
+            <a:r>
+              <a:rPr lang="en-US" altLang="zh-CN" sz="1400" b="1">
+                <a:latin typeface="Times New Roman" panose="02020603050405020304" charset="0"/>
+                <a:ea typeface="微软雅黑" panose="020B0503020204020204" charset="-122"/>
+                <a:cs typeface="Times New Roman" panose="02020603050405020304" charset="0"/>
+              </a:rPr>
+              <a:t>With multi-hop mechnisim(after optimization):</a:t>
+            </a:r>
+            <a:endParaRPr lang="en-US" altLang="zh-CN" sz="1400">
+              <a:latin typeface="Times New Roman" panose="02020603050405020304" charset="0"/>
+              <a:ea typeface="微软雅黑" panose="020B0503020204020204" charset="-122"/>
+              <a:cs typeface="Times New Roman" panose="02020603050405020304" charset="0"/>
+            </a:endParaRPr>
+          </a:p>
+          <a:p>
+            <a:pPr marL="285750" indent="-285750" algn="l">
+              <a:buFont typeface="Wingdings" panose="05000000000000000000" charset="0"/>
+              <a:buChar char="Ø"/>
+            </a:pPr>
+            <a:r>
+              <a:rPr lang="en-US" altLang="zh-CN" sz="1400">
+                <a:latin typeface="Times New Roman" panose="02020603050405020304" charset="0"/>
+                <a:ea typeface="微软雅黑" panose="020B0503020204020204" charset="-122"/>
+                <a:cs typeface="Times New Roman" panose="02020603050405020304" charset="0"/>
+              </a:rPr>
+              <a:t>Average error: 0.27</a:t>
+            </a:r>
+            <a:endParaRPr lang="en-US" altLang="zh-CN" sz="1400">
+              <a:latin typeface="Times New Roman" panose="02020603050405020304" charset="0"/>
+              <a:ea typeface="微软雅黑" panose="020B0503020204020204" charset="-122"/>
+              <a:cs typeface="Times New Roman" panose="02020603050405020304" charset="0"/>
+            </a:endParaRPr>
+          </a:p>
+        </p:txBody>
+      </p:sp>
+      <p:pic>
+        <p:nvPicPr>
+          <p:cNvPr id="3" name="图片 2" descr="localization_20MHz_optimized"/>
+          <p:cNvPicPr>
+            <a:picLocks noChangeAspect="1"/>
+          </p:cNvPicPr>
+          <p:nvPr/>
+        </p:nvPicPr>
+        <p:blipFill>
+          <a:blip r:embed="rId2"/>
+          <a:stretch>
+            <a:fillRect/>
+          </a:stretch>
+        </p:blipFill>
+        <p:spPr>
+          <a:xfrm>
+            <a:off x="365760" y="3344545"/>
+            <a:ext cx="4251960" cy="3402330"/>
+          </a:xfrm>
+          <a:prstGeom prst="rect">
+            <a:avLst/>
+          </a:prstGeom>
+        </p:spPr>
+      </p:pic>
+      <p:graphicFrame>
+        <p:nvGraphicFramePr>
+          <p:cNvPr id="4" name="表格 3"/>
+          <p:cNvGraphicFramePr/>
+          <p:nvPr/>
+        </p:nvGraphicFramePr>
+        <p:xfrm>
+          <a:off x="4728845" y="3735705"/>
+          <a:ext cx="4480560" cy="2517775"/>
+        </p:xfrm>
+        <a:graphic>
+          <a:graphicData uri="http://schemas.openxmlformats.org/drawingml/2006/table">
+            <a:tbl>
+              <a:tblPr firstRow="1" bandRow="1">
+                <a:tableStyleId>{5C22544A-7EE6-4342-B048-85BDC9FD1C3A}</a:tableStyleId>
+              </a:tblPr>
+              <a:tblGrid>
+                <a:gridCol w="954405"/>
+                <a:gridCol w="1128395"/>
+                <a:gridCol w="1226185"/>
+                <a:gridCol w="1171575"/>
+              </a:tblGrid>
+              <a:tr h="323215">
+                <a:tc>
+                  <a:txBody>
+                    <a:bodyPr/>
+                    <a:p>
+                      <a:pPr algn="ctr">
+                        <a:buNone/>
+                      </a:pPr>
+                      <a:r>
+                        <a:rPr lang="en-US" altLang="zh-CN" sz="1200">
+                          <a:latin typeface="Times New Roman" panose="02020603050405020304" charset="0"/>
+                          <a:cs typeface="Times New Roman" panose="02020603050405020304" charset="0"/>
+                        </a:rPr>
+                        <a:t> Node</a:t>
+                      </a:r>
+                      <a:endParaRPr lang="en-US" altLang="zh-CN" sz="1200">
+                        <a:latin typeface="Times New Roman" panose="02020603050405020304" charset="0"/>
+                        <a:cs typeface="Times New Roman" panose="02020603050405020304" charset="0"/>
+                      </a:endParaRPr>
+                    </a:p>
+                  </a:txBody>
+                  <a:tcPr/>
+                </a:tc>
+                <a:tc>
+                  <a:txBody>
+                    <a:bodyPr/>
+                    <a:p>
+                      <a:pPr algn="ctr">
+                        <a:buNone/>
+                      </a:pPr>
+                      <a:r>
+                        <a:rPr lang="en-US" altLang="zh-CN" sz="1400">
+                          <a:latin typeface="Times New Roman" panose="02020603050405020304" charset="0"/>
+                          <a:cs typeface="Times New Roman" panose="02020603050405020304" charset="0"/>
+                        </a:rPr>
+                        <a:t>est_location</a:t>
+                      </a:r>
+                      <a:endParaRPr lang="en-US" altLang="zh-CN" sz="1400">
+                        <a:latin typeface="Times New Roman" panose="02020603050405020304" charset="0"/>
+                        <a:cs typeface="Times New Roman" panose="02020603050405020304" charset="0"/>
+                      </a:endParaRPr>
+                    </a:p>
+                  </a:txBody>
+                  <a:tcPr/>
+                </a:tc>
+                <a:tc>
+                  <a:txBody>
+                    <a:bodyPr/>
+                    <a:p>
+                      <a:pPr algn="ctr">
+                        <a:buNone/>
+                      </a:pPr>
+                      <a:r>
+                        <a:rPr lang="en-US" altLang="zh-CN" sz="1400">
+                          <a:latin typeface="Times New Roman" panose="02020603050405020304" charset="0"/>
+                          <a:cs typeface="Times New Roman" panose="02020603050405020304" charset="0"/>
+                        </a:rPr>
+                        <a:t>true_location</a:t>
+                      </a:r>
+                      <a:endParaRPr lang="en-US" altLang="zh-CN" sz="1400">
+                        <a:latin typeface="Times New Roman" panose="02020603050405020304" charset="0"/>
+                        <a:cs typeface="Times New Roman" panose="02020603050405020304" charset="0"/>
+                      </a:endParaRPr>
+                    </a:p>
+                  </a:txBody>
+                  <a:tcPr/>
+                </a:tc>
+                <a:tc>
+                  <a:txBody>
+                    <a:bodyPr/>
+                    <a:p>
+                      <a:pPr algn="ctr">
+                        <a:buNone/>
+                      </a:pPr>
+                      <a:r>
+                        <a:rPr lang="en-US" altLang="zh-CN" sz="1400">
+                          <a:latin typeface="Times New Roman" panose="02020603050405020304" charset="0"/>
+                          <a:cs typeface="Times New Roman" panose="02020603050405020304" charset="0"/>
+                        </a:rPr>
+                        <a:t>error</a:t>
+                      </a:r>
+                      <a:endParaRPr lang="en-US" altLang="zh-CN" sz="1400">
+                        <a:latin typeface="Times New Roman" panose="02020603050405020304" charset="0"/>
+                        <a:cs typeface="Times New Roman" panose="02020603050405020304" charset="0"/>
+                      </a:endParaRPr>
+                    </a:p>
+                  </a:txBody>
+                  <a:tcPr/>
+                </a:tc>
+              </a:tr>
+              <a:tr h="365760">
+                <a:tc>
+                  <a:txBody>
+                    <a:bodyPr/>
+                    <a:p>
+                      <a:pPr algn="ctr">
+                        <a:buNone/>
+                      </a:pPr>
+                      <a:r>
+                        <a:rPr lang="en-US" altLang="zh-CN" sz="1400">
+                          <a:latin typeface="Times New Roman" panose="02020603050405020304" charset="0"/>
+                          <a:cs typeface="Times New Roman" panose="02020603050405020304" charset="0"/>
+                        </a:rPr>
+                        <a:t>1</a:t>
+                      </a:r>
+                      <a:endParaRPr lang="en-US" altLang="zh-CN" sz="1400">
+                        <a:latin typeface="Times New Roman" panose="02020603050405020304" charset="0"/>
+                        <a:cs typeface="Times New Roman" panose="02020603050405020304" charset="0"/>
+                      </a:endParaRPr>
+                    </a:p>
+                  </a:txBody>
+                  <a:tcPr/>
+                </a:tc>
+                <a:tc>
+                  <a:txBody>
+                    <a:bodyPr/>
+                    <a:p>
+                      <a:pPr algn="ctr">
+                        <a:buNone/>
+                      </a:pPr>
+                      <a:r>
+                        <a:rPr lang="en-US" altLang="zh-CN" sz="1400">
+                          <a:latin typeface="Times New Roman" panose="02020603050405020304" charset="0"/>
+                          <a:cs typeface="Times New Roman" panose="02020603050405020304" charset="0"/>
+                        </a:rPr>
+                        <a:t>(2.87, 2.72)</a:t>
+                      </a:r>
+                      <a:endParaRPr lang="en-US" altLang="zh-CN" sz="1400">
+                        <a:latin typeface="Times New Roman" panose="02020603050405020304" charset="0"/>
+                        <a:cs typeface="Times New Roman" panose="02020603050405020304" charset="0"/>
+                      </a:endParaRPr>
+                    </a:p>
+                  </a:txBody>
+                  <a:tcPr/>
+                </a:tc>
+                <a:tc>
+                  <a:txBody>
+                    <a:bodyPr/>
+                    <a:p>
+                      <a:pPr algn="ctr">
+                        <a:buNone/>
+                      </a:pPr>
+                      <a:r>
+                        <a:rPr lang="en-US" altLang="zh-CN" sz="1400">
+                          <a:latin typeface="Times New Roman" panose="02020603050405020304" charset="0"/>
+                          <a:cs typeface="Times New Roman" panose="02020603050405020304" charset="0"/>
+                        </a:rPr>
+                        <a:t>(3.0, 3.0)</a:t>
+                      </a:r>
+                      <a:endParaRPr lang="en-US" altLang="zh-CN" sz="1400">
+                        <a:latin typeface="Times New Roman" panose="02020603050405020304" charset="0"/>
+                        <a:cs typeface="Times New Roman" panose="02020603050405020304" charset="0"/>
+                      </a:endParaRPr>
+                    </a:p>
+                  </a:txBody>
+                  <a:tcPr/>
+                </a:tc>
+                <a:tc>
+                  <a:txBody>
+                    <a:bodyPr/>
+                    <a:p>
+                      <a:pPr algn="ctr">
+                        <a:buNone/>
+                      </a:pPr>
+                      <a:r>
+                        <a:rPr lang="en-US" altLang="zh-CN" sz="1400">
+                          <a:latin typeface="Times New Roman" panose="02020603050405020304" charset="0"/>
+                          <a:cs typeface="Times New Roman" panose="02020603050405020304" charset="0"/>
+                        </a:rPr>
+                        <a:t>0.31</a:t>
+                      </a:r>
+                      <a:endParaRPr lang="en-US" altLang="zh-CN" sz="1400">
+                        <a:latin typeface="Times New Roman" panose="02020603050405020304" charset="0"/>
+                        <a:cs typeface="Times New Roman" panose="02020603050405020304" charset="0"/>
+                      </a:endParaRPr>
+                    </a:p>
+                  </a:txBody>
+                  <a:tcPr/>
+                </a:tc>
+              </a:tr>
+              <a:tr h="365760">
+                <a:tc>
+                  <a:txBody>
+                    <a:bodyPr/>
+                    <a:p>
+                      <a:pPr algn="ctr">
+                        <a:buNone/>
+                      </a:pPr>
+                      <a:r>
+                        <a:rPr lang="en-US" altLang="zh-CN" sz="1400">
+                          <a:latin typeface="Times New Roman" panose="02020603050405020304" charset="0"/>
+                          <a:cs typeface="Times New Roman" panose="02020603050405020304" charset="0"/>
+                        </a:rPr>
+                        <a:t>2</a:t>
+                      </a:r>
+                      <a:endParaRPr lang="en-US" altLang="zh-CN" sz="1400">
+                        <a:latin typeface="Times New Roman" panose="02020603050405020304" charset="0"/>
+                        <a:cs typeface="Times New Roman" panose="02020603050405020304" charset="0"/>
+                      </a:endParaRPr>
+                    </a:p>
+                  </a:txBody>
+                  <a:tcPr/>
+                </a:tc>
+                <a:tc>
+                  <a:txBody>
+                    <a:bodyPr/>
+                    <a:p>
+                      <a:pPr algn="ctr">
+                        <a:buNone/>
+                      </a:pPr>
+                      <a:r>
+                        <a:rPr lang="en-US" altLang="zh-CN" sz="1400">
+                          <a:latin typeface="Times New Roman" panose="02020603050405020304" charset="0"/>
+                          <a:cs typeface="Times New Roman" panose="02020603050405020304" charset="0"/>
+                        </a:rPr>
+                        <a:t>(1.96, 0.26)</a:t>
+                      </a:r>
+                      <a:endParaRPr lang="en-US" altLang="zh-CN" sz="1400">
+                        <a:latin typeface="Times New Roman" panose="02020603050405020304" charset="0"/>
+                        <a:cs typeface="Times New Roman" panose="02020603050405020304" charset="0"/>
+                      </a:endParaRPr>
+                    </a:p>
+                  </a:txBody>
+                  <a:tcPr/>
+                </a:tc>
+                <a:tc>
+                  <a:txBody>
+                    <a:bodyPr/>
+                    <a:p>
+                      <a:pPr algn="ctr">
+                        <a:buNone/>
+                      </a:pPr>
+                      <a:r>
+                        <a:rPr lang="en-US" altLang="zh-CN" sz="1400">
+                          <a:latin typeface="Times New Roman" panose="02020603050405020304" charset="0"/>
+                          <a:cs typeface="Times New Roman" panose="02020603050405020304" charset="0"/>
+                        </a:rPr>
+                        <a:t>(2.0, 0.0)</a:t>
+                      </a:r>
+                      <a:endParaRPr lang="en-US" altLang="zh-CN" sz="1400">
+                        <a:latin typeface="Times New Roman" panose="02020603050405020304" charset="0"/>
+                        <a:cs typeface="Times New Roman" panose="02020603050405020304" charset="0"/>
+                      </a:endParaRPr>
+                    </a:p>
+                  </a:txBody>
+                  <a:tcPr/>
+                </a:tc>
+                <a:tc>
+                  <a:txBody>
+                    <a:bodyPr/>
+                    <a:p>
+                      <a:pPr algn="ctr">
+                        <a:buNone/>
+                      </a:pPr>
+                      <a:r>
+                        <a:rPr lang="en-US" altLang="zh-CN" sz="1400">
+                          <a:latin typeface="Times New Roman" panose="02020603050405020304" charset="0"/>
+                          <a:cs typeface="Times New Roman" panose="02020603050405020304" charset="0"/>
+                        </a:rPr>
+                        <a:t>0.26</a:t>
+                      </a:r>
+                      <a:endParaRPr lang="en-US" altLang="zh-CN" sz="1400">
+                        <a:latin typeface="Times New Roman" panose="02020603050405020304" charset="0"/>
+                        <a:cs typeface="Times New Roman" panose="02020603050405020304" charset="0"/>
+                      </a:endParaRPr>
+                    </a:p>
+                  </a:txBody>
+                  <a:tcPr/>
+                </a:tc>
+              </a:tr>
+              <a:tr h="365760">
+                <a:tc>
+                  <a:txBody>
+                    <a:bodyPr/>
+                    <a:p>
+                      <a:pPr algn="ctr">
+                        <a:buNone/>
+                      </a:pPr>
+                      <a:r>
+                        <a:rPr lang="en-US" altLang="zh-CN" sz="1400">
+                          <a:latin typeface="Times New Roman" panose="02020603050405020304" charset="0"/>
+                          <a:cs typeface="Times New Roman" panose="02020603050405020304" charset="0"/>
+                        </a:rPr>
+                        <a:t>3</a:t>
+                      </a:r>
+                      <a:endParaRPr lang="en-US" altLang="zh-CN" sz="1400">
+                        <a:latin typeface="Times New Roman" panose="02020603050405020304" charset="0"/>
+                        <a:cs typeface="Times New Roman" panose="02020603050405020304" charset="0"/>
+                      </a:endParaRPr>
+                    </a:p>
+                  </a:txBody>
+                  <a:tcPr/>
+                </a:tc>
+                <a:tc>
+                  <a:txBody>
+                    <a:bodyPr/>
+                    <a:p>
+                      <a:pPr algn="ctr">
+                        <a:buNone/>
+                      </a:pPr>
+                      <a:r>
+                        <a:rPr lang="en-US" altLang="zh-CN" sz="1400">
+                          <a:latin typeface="Times New Roman" panose="02020603050405020304" charset="0"/>
+                          <a:cs typeface="Times New Roman" panose="02020603050405020304" charset="0"/>
+                        </a:rPr>
+                        <a:t>(7.14, 4.09)</a:t>
+                      </a:r>
+                      <a:endParaRPr lang="en-US" altLang="zh-CN" sz="1400">
+                        <a:latin typeface="Times New Roman" panose="02020603050405020304" charset="0"/>
+                        <a:cs typeface="Times New Roman" panose="02020603050405020304" charset="0"/>
+                      </a:endParaRPr>
+                    </a:p>
+                  </a:txBody>
+                  <a:tcPr/>
+                </a:tc>
+                <a:tc>
+                  <a:txBody>
+                    <a:bodyPr/>
+                    <a:p>
+                      <a:pPr algn="ctr">
+                        <a:buNone/>
+                      </a:pPr>
+                      <a:r>
+                        <a:rPr lang="en-US" altLang="zh-CN" sz="1400">
+                          <a:latin typeface="Times New Roman" panose="02020603050405020304" charset="0"/>
+                          <a:cs typeface="Times New Roman" panose="02020603050405020304" charset="0"/>
+                        </a:rPr>
+                        <a:t>(7.0, 4.0)</a:t>
+                      </a:r>
+                      <a:endParaRPr lang="en-US" altLang="zh-CN" sz="1400">
+                        <a:latin typeface="Times New Roman" panose="02020603050405020304" charset="0"/>
+                        <a:cs typeface="Times New Roman" panose="02020603050405020304" charset="0"/>
+                      </a:endParaRPr>
+                    </a:p>
+                  </a:txBody>
+                  <a:tcPr/>
+                </a:tc>
+                <a:tc>
+                  <a:txBody>
+                    <a:bodyPr/>
+                    <a:p>
+                      <a:pPr algn="ctr">
+                        <a:buNone/>
+                      </a:pPr>
+                      <a:r>
+                        <a:rPr lang="en-US" altLang="zh-CN" sz="1400">
+                          <a:latin typeface="Times New Roman" panose="02020603050405020304" charset="0"/>
+                          <a:cs typeface="Times New Roman" panose="02020603050405020304" charset="0"/>
+                        </a:rPr>
+                        <a:t>0.16</a:t>
+                      </a:r>
+                      <a:endParaRPr lang="en-US" altLang="zh-CN" sz="1400">
+                        <a:latin typeface="Times New Roman" panose="02020603050405020304" charset="0"/>
+                        <a:cs typeface="Times New Roman" panose="02020603050405020304" charset="0"/>
+                      </a:endParaRPr>
+                    </a:p>
+                  </a:txBody>
+                  <a:tcPr/>
+                </a:tc>
+              </a:tr>
+              <a:tr h="365760">
+                <a:tc>
+                  <a:txBody>
+                    <a:bodyPr/>
+                    <a:p>
+                      <a:pPr algn="ctr">
+                        <a:buNone/>
+                      </a:pPr>
+                      <a:r>
+                        <a:rPr lang="en-US" altLang="zh-CN" sz="1400">
+                          <a:latin typeface="Times New Roman" panose="02020603050405020304" charset="0"/>
+                          <a:cs typeface="Times New Roman" panose="02020603050405020304" charset="0"/>
+                        </a:rPr>
+                        <a:t>4</a:t>
+                      </a:r>
+                      <a:endParaRPr lang="en-US" altLang="zh-CN" sz="1400">
+                        <a:latin typeface="Times New Roman" panose="02020603050405020304" charset="0"/>
+                        <a:cs typeface="Times New Roman" panose="02020603050405020304" charset="0"/>
+                      </a:endParaRPr>
+                    </a:p>
+                  </a:txBody>
+                  <a:tcPr/>
+                </a:tc>
+                <a:tc>
+                  <a:txBody>
+                    <a:bodyPr/>
+                    <a:p>
+                      <a:pPr algn="ctr">
+                        <a:buNone/>
+                      </a:pPr>
+                      <a:r>
+                        <a:rPr lang="en-US" altLang="zh-CN" sz="1400">
+                          <a:latin typeface="Times New Roman" panose="02020603050405020304" charset="0"/>
+                          <a:cs typeface="Times New Roman" panose="02020603050405020304" charset="0"/>
+                        </a:rPr>
+                        <a:t>(2.37, 7.05)</a:t>
+                      </a:r>
+                      <a:endParaRPr lang="en-US" altLang="zh-CN" sz="1400">
+                        <a:latin typeface="Times New Roman" panose="02020603050405020304" charset="0"/>
+                        <a:cs typeface="Times New Roman" panose="02020603050405020304" charset="0"/>
+                      </a:endParaRPr>
+                    </a:p>
+                  </a:txBody>
+                  <a:tcPr/>
+                </a:tc>
+                <a:tc>
+                  <a:txBody>
+                    <a:bodyPr/>
+                    <a:p>
+                      <a:pPr algn="ctr">
+                        <a:buNone/>
+                      </a:pPr>
+                      <a:r>
+                        <a:rPr lang="en-US" altLang="zh-CN" sz="1400">
+                          <a:latin typeface="Times New Roman" panose="02020603050405020304" charset="0"/>
+                          <a:cs typeface="Times New Roman" panose="02020603050405020304" charset="0"/>
+                        </a:rPr>
+                        <a:t>(2.5, 7.0)</a:t>
+                      </a:r>
+                      <a:endParaRPr lang="en-US" altLang="zh-CN" sz="1400">
+                        <a:latin typeface="Times New Roman" panose="02020603050405020304" charset="0"/>
+                        <a:cs typeface="Times New Roman" panose="02020603050405020304" charset="0"/>
+                      </a:endParaRPr>
+                    </a:p>
+                  </a:txBody>
+                  <a:tcPr/>
+                </a:tc>
+                <a:tc>
+                  <a:txBody>
+                    <a:bodyPr/>
+                    <a:p>
+                      <a:pPr algn="ctr">
+                        <a:buNone/>
+                      </a:pPr>
+                      <a:r>
+                        <a:rPr lang="en-US" altLang="zh-CN" sz="1400">
+                          <a:latin typeface="Times New Roman" panose="02020603050405020304" charset="0"/>
+                          <a:cs typeface="Times New Roman" panose="02020603050405020304" charset="0"/>
+                        </a:rPr>
+                        <a:t>0.14</a:t>
+                      </a:r>
+                      <a:endParaRPr lang="en-US" altLang="zh-CN" sz="1400">
+                        <a:latin typeface="Times New Roman" panose="02020603050405020304" charset="0"/>
+                        <a:cs typeface="Times New Roman" panose="02020603050405020304" charset="0"/>
+                      </a:endParaRPr>
+                    </a:p>
+                  </a:txBody>
+                  <a:tcPr/>
+                </a:tc>
+              </a:tr>
+              <a:tr h="365760">
+                <a:tc>
+                  <a:txBody>
+                    <a:bodyPr/>
+                    <a:p>
+                      <a:pPr algn="ctr">
+                        <a:buNone/>
+                      </a:pPr>
+                      <a:r>
+                        <a:rPr lang="en-US" altLang="zh-CN" sz="1400">
+                          <a:solidFill>
+                            <a:srgbClr val="C00000"/>
+                          </a:solidFill>
+                          <a:latin typeface="Times New Roman" panose="02020603050405020304" charset="0"/>
+                          <a:cs typeface="Times New Roman" panose="02020603050405020304" charset="0"/>
+                        </a:rPr>
+                        <a:t>5</a:t>
+                      </a:r>
+                      <a:endParaRPr lang="en-US" altLang="zh-CN" sz="1400">
+                        <a:solidFill>
+                          <a:srgbClr val="C00000"/>
+                        </a:solidFill>
+                        <a:latin typeface="Times New Roman" panose="02020603050405020304" charset="0"/>
+                        <a:cs typeface="Times New Roman" panose="02020603050405020304" charset="0"/>
+                      </a:endParaRPr>
+                    </a:p>
+                  </a:txBody>
+                  <a:tcPr/>
+                </a:tc>
+                <a:tc>
+                  <a:txBody>
+                    <a:bodyPr/>
+                    <a:p>
+                      <a:pPr algn="ctr">
+                        <a:buNone/>
+                      </a:pPr>
+                      <a:r>
+                        <a:rPr lang="en-US" altLang="zh-CN" sz="1400">
+                          <a:solidFill>
+                            <a:srgbClr val="C00000"/>
+                          </a:solidFill>
+                          <a:latin typeface="Times New Roman" panose="02020603050405020304" charset="0"/>
+                          <a:cs typeface="Times New Roman" panose="02020603050405020304" charset="0"/>
+                        </a:rPr>
+                        <a:t>(5.50, 8.06)</a:t>
+                      </a:r>
+                      <a:endParaRPr lang="en-US" altLang="zh-CN" sz="1400">
+                        <a:solidFill>
+                          <a:srgbClr val="C00000"/>
+                        </a:solidFill>
+                        <a:latin typeface="Times New Roman" panose="02020603050405020304" charset="0"/>
+                        <a:cs typeface="Times New Roman" panose="02020603050405020304" charset="0"/>
+                      </a:endParaRPr>
+                    </a:p>
+                  </a:txBody>
+                  <a:tcPr/>
+                </a:tc>
+                <a:tc>
+                  <a:txBody>
+                    <a:bodyPr/>
+                    <a:p>
+                      <a:pPr algn="ctr">
+                        <a:buNone/>
+                      </a:pPr>
+                      <a:r>
+                        <a:rPr lang="en-US" altLang="zh-CN" sz="1400">
+                          <a:solidFill>
+                            <a:srgbClr val="C00000"/>
+                          </a:solidFill>
+                          <a:latin typeface="Times New Roman" panose="02020603050405020304" charset="0"/>
+                          <a:cs typeface="Times New Roman" panose="02020603050405020304" charset="0"/>
+                        </a:rPr>
+                        <a:t>(6.0, 8.0)</a:t>
+                      </a:r>
+                      <a:endParaRPr lang="en-US" altLang="zh-CN" sz="1400">
+                        <a:solidFill>
+                          <a:srgbClr val="C00000"/>
+                        </a:solidFill>
+                        <a:latin typeface="Times New Roman" panose="02020603050405020304" charset="0"/>
+                        <a:cs typeface="Times New Roman" panose="02020603050405020304" charset="0"/>
+                      </a:endParaRPr>
+                    </a:p>
+                  </a:txBody>
+                  <a:tcPr/>
+                </a:tc>
+                <a:tc>
+                  <a:txBody>
+                    <a:bodyPr/>
+                    <a:p>
+                      <a:pPr algn="ctr">
+                        <a:buNone/>
+                      </a:pPr>
+                      <a:r>
+                        <a:rPr lang="en-US" altLang="zh-CN" sz="1400">
+                          <a:solidFill>
+                            <a:srgbClr val="C00000"/>
+                          </a:solidFill>
+                          <a:latin typeface="Times New Roman" panose="02020603050405020304" charset="0"/>
+                          <a:cs typeface="Times New Roman" panose="02020603050405020304" charset="0"/>
+                        </a:rPr>
+                        <a:t>0.50</a:t>
+                      </a:r>
+                      <a:endParaRPr lang="en-US" altLang="zh-CN" sz="1400">
+                        <a:solidFill>
+                          <a:srgbClr val="C00000"/>
+                        </a:solidFill>
+                        <a:latin typeface="Times New Roman" panose="02020603050405020304" charset="0"/>
+                        <a:cs typeface="Times New Roman" panose="02020603050405020304" charset="0"/>
+                      </a:endParaRPr>
+                    </a:p>
+                  </a:txBody>
+                  <a:tcPr/>
+                </a:tc>
+              </a:tr>
+              <a:tr h="365760">
+                <a:tc>
+                  <a:txBody>
+                    <a:bodyPr/>
+                    <a:p>
+                      <a:pPr algn="ctr">
+                        <a:buNone/>
+                      </a:pPr>
+                      <a:r>
+                        <a:rPr lang="en-US" altLang="zh-CN" sz="1400">
+                          <a:latin typeface="Times New Roman" panose="02020603050405020304" charset="0"/>
+                          <a:cs typeface="Times New Roman" panose="02020603050405020304" charset="0"/>
+                        </a:rPr>
+                        <a:t>6</a:t>
+                      </a:r>
+                      <a:endParaRPr lang="en-US" altLang="zh-CN" sz="1400">
+                        <a:latin typeface="Times New Roman" panose="02020603050405020304" charset="0"/>
+                        <a:cs typeface="Times New Roman" panose="02020603050405020304" charset="0"/>
+                      </a:endParaRPr>
+                    </a:p>
+                  </a:txBody>
+                  <a:tcPr/>
+                </a:tc>
+                <a:tc>
+                  <a:txBody>
+                    <a:bodyPr/>
+                    <a:p>
+                      <a:pPr algn="ctr">
+                        <a:buNone/>
+                      </a:pPr>
+                      <a:r>
+                        <a:rPr lang="en-US" altLang="zh-CN" sz="1400">
+                          <a:latin typeface="Times New Roman" panose="02020603050405020304" charset="0"/>
+                          <a:cs typeface="Times New Roman" panose="02020603050405020304" charset="0"/>
+                        </a:rPr>
+                        <a:t>(7.78, 7.48)</a:t>
                       </a:r>
                       <a:endParaRPr lang="en-US" altLang="zh-CN" sz="1400">
                         <a:latin typeface="Times New Roman" panose="02020603050405020304" charset="0"/>
@@ -18061,7 +19961,7 @@
                           <a:latin typeface="Times New Roman" panose="02020603050405020304" charset="0"/>
                           <a:cs typeface="Times New Roman" panose="02020603050405020304" charset="0"/>
                         </a:rPr>
-                        <a:t>4.5</a:t>
+                        <a:t>0.22</a:t>
                       </a:r>
                       <a:endParaRPr lang="en-US" altLang="zh-CN" sz="1400">
                         <a:latin typeface="Times New Roman" panose="02020603050405020304" charset="0"/>
@@ -18076,156 +19976,6 @@
           </a:graphicData>
         </a:graphic>
       </p:graphicFrame>
-      <p:sp>
-        <p:nvSpPr>
-          <p:cNvPr id="36" name="文本框 35"/>
-          <p:cNvSpPr txBox="1"/>
-          <p:nvPr/>
-        </p:nvSpPr>
-        <p:spPr>
-          <a:xfrm>
-            <a:off x="9359265" y="5645785"/>
-            <a:ext cx="2622550" cy="521970"/>
-          </a:xfrm>
-          <a:prstGeom prst="rect">
-            <a:avLst/>
-          </a:prstGeom>
-        </p:spPr>
-        <p:txBody>
-          <a:bodyPr wrap="square">
-            <a:spAutoFit/>
-            <a:extLst>
-              <a:ext uri="{4A0BC546-FE56-4ADE-93B0-CB8AF2F6F144}">
-                <wpsdc:textFrameExt xmlns:wpsdc="http://www.wps.cn/officeDocument/2022/drawingmlCustomData" type="text"/>
-              </a:ext>
-            </a:extLst>
-          </a:bodyPr>
-          <a:p>
-            <a:pPr algn="l"/>
-            <a:r>
-              <a:rPr lang="en-US" altLang="zh-CN" sz="1400" b="1">
-                <a:latin typeface="Times New Roman" panose="02020603050405020304" charset="0"/>
-                <a:ea typeface="微软雅黑" panose="020B0503020204020204" charset="-122"/>
-                <a:cs typeface="Times New Roman" panose="02020603050405020304" charset="0"/>
-              </a:rPr>
-              <a:t>Without multi-hop mechnisim:</a:t>
-            </a:r>
-            <a:endParaRPr lang="en-US" altLang="zh-CN" sz="1400">
-              <a:latin typeface="Times New Roman" panose="02020603050405020304" charset="0"/>
-              <a:ea typeface="微软雅黑" panose="020B0503020204020204" charset="-122"/>
-              <a:cs typeface="Times New Roman" panose="02020603050405020304" charset="0"/>
-            </a:endParaRPr>
-          </a:p>
-          <a:p>
-            <a:pPr marL="285750" indent="-285750" algn="l">
-              <a:buFont typeface="Wingdings" panose="05000000000000000000" charset="0"/>
-              <a:buChar char="Ø"/>
-            </a:pPr>
-            <a:r>
-              <a:rPr lang="en-US" altLang="zh-CN" sz="1400">
-                <a:latin typeface="Times New Roman" panose="02020603050405020304" charset="0"/>
-                <a:ea typeface="微软雅黑" panose="020B0503020204020204" charset="-122"/>
-                <a:cs typeface="Times New Roman" panose="02020603050405020304" charset="0"/>
-              </a:rPr>
-              <a:t>Average error: 2.81</a:t>
-            </a:r>
-            <a:endParaRPr lang="en-US" altLang="zh-CN" sz="1400">
-              <a:latin typeface="Times New Roman" panose="02020603050405020304" charset="0"/>
-              <a:ea typeface="微软雅黑" panose="020B0503020204020204" charset="-122"/>
-              <a:cs typeface="Times New Roman" panose="02020603050405020304" charset="0"/>
-            </a:endParaRPr>
-          </a:p>
-        </p:txBody>
-      </p:sp>
-    </p:spTree>
-  </p:cSld>
-  <p:clrMapOvr>
-    <a:masterClrMapping/>
-  </p:clrMapOvr>
-</p:sld>
-</file>
-
-<file path=ppt/slides/slide9.xml><?xml version="1.0" encoding="utf-8"?>
-<p:sld xmlns:a="http://schemas.openxmlformats.org/drawingml/2006/main" xmlns:r="http://schemas.openxmlformats.org/officeDocument/2006/relationships" xmlns:p="http://schemas.openxmlformats.org/presentationml/2006/main">
-  <p:cSld>
-    <p:spTree>
-      <p:nvGrpSpPr>
-        <p:cNvPr id="1" name=""/>
-        <p:cNvGrpSpPr/>
-        <p:nvPr/>
-      </p:nvGrpSpPr>
-      <p:grpSpPr>
-        <a:xfrm>
-          <a:off x="0" y="0"/>
-          <a:ext cx="0" cy="0"/>
-          <a:chOff x="0" y="0"/>
-          <a:chExt cx="0" cy="0"/>
-        </a:xfrm>
-      </p:grpSpPr>
-      <p:sp>
-        <p:nvSpPr>
-          <p:cNvPr id="5" name="Title 1"/>
-          <p:cNvSpPr txBox="1"/>
-          <p:nvPr/>
-        </p:nvSpPr>
-        <p:spPr>
-          <a:xfrm>
-            <a:off x="2334260" y="2143760"/>
-            <a:ext cx="7523480" cy="917575"/>
-          </a:xfrm>
-          <a:prstGeom prst="rect">
-            <a:avLst/>
-          </a:prstGeom>
-        </p:spPr>
-        <p:txBody>
-          <a:bodyPr>
-            <a:noAutofit/>
-          </a:bodyPr>
-          <a:lstStyle>
-            <a:lvl1pPr algn="l" defTabSz="914400" rtl="0" eaLnBrk="1" latinLnBrk="0" hangingPunct="1">
-              <a:lnSpc>
-                <a:spcPct val="90000"/>
-              </a:lnSpc>
-              <a:spcBef>
-                <a:spcPct val="0"/>
-              </a:spcBef>
-              <a:buNone/>
-              <a:defRPr sz="6000" kern="1200">
-                <a:solidFill>
-                  <a:srgbClr val="DD613B"/>
-                </a:solidFill>
-                <a:latin typeface="+mj-lt"/>
-                <a:ea typeface="+mj-ea"/>
-                <a:cs typeface="+mj-cs"/>
-              </a:defRPr>
-            </a:lvl1pPr>
-          </a:lstStyle>
-          <a:p>
-            <a:pPr algn="ctr"/>
-            <a:r>
-              <a:rPr lang="en-US" altLang="zh-CN" sz="5400" b="1" dirty="0">
-                <a:latin typeface="Times New Roman" panose="02020603050405020304" charset="0"/>
-                <a:ea typeface="Kaiti TC" panose="02010600040101010101" pitchFamily="2" charset="-120"/>
-                <a:cs typeface="Times New Roman" panose="02020603050405020304" charset="0"/>
-              </a:rPr>
-              <a:t>Thank you for listening</a:t>
-            </a:r>
-            <a:r>
-              <a:rPr lang="zh-CN" altLang="en-US" sz="5400" b="1" dirty="0">
-                <a:latin typeface="Times New Roman" panose="02020603050405020304" charset="0"/>
-                <a:ea typeface="Kaiti TC" panose="02010600040101010101" pitchFamily="2" charset="-120"/>
-                <a:cs typeface="Times New Roman" panose="02020603050405020304" charset="0"/>
-              </a:rPr>
-              <a:t>！</a:t>
-            </a:r>
-            <a:endParaRPr lang="en-US" altLang="zh-CN" sz="5400" b="1" dirty="0">
-              <a:latin typeface="Times New Roman" panose="02020603050405020304" charset="0"/>
-              <a:ea typeface="Kaiti TC" panose="02010600040101010101" pitchFamily="2" charset="-120"/>
-              <a:cs typeface="Times New Roman" panose="02020603050405020304" charset="0"/>
-            </a:endParaRPr>
-          </a:p>
-        </p:txBody>
-      </p:sp>
     </p:spTree>
   </p:cSld>
   <p:clrMapOvr>

--- a/multihop_location.pptx
+++ b/multihop_location.pptx
@@ -9,7 +9,7 @@
     <p:notesMasterId r:id="rId5"/>
   </p:notesMasterIdLst>
   <p:handoutMasterIdLst>
-    <p:handoutMasterId r:id="rId15"/>
+    <p:handoutMasterId r:id="rId18"/>
   </p:handoutMasterIdLst>
   <p:sldIdLst>
     <p:sldId id="259" r:id="rId4"/>
@@ -19,14 +19,17 @@
     <p:sldId id="417" r:id="rId9"/>
     <p:sldId id="439" r:id="rId10"/>
     <p:sldId id="440" r:id="rId11"/>
-    <p:sldId id="441" r:id="rId12"/>
-    <p:sldId id="442" r:id="rId13"/>
-    <p:sldId id="436" r:id="rId14"/>
+    <p:sldId id="445" r:id="rId12"/>
+    <p:sldId id="441" r:id="rId13"/>
+    <p:sldId id="442" r:id="rId14"/>
+    <p:sldId id="444" r:id="rId15"/>
+    <p:sldId id="443" r:id="rId16"/>
+    <p:sldId id="436" r:id="rId17"/>
   </p:sldIdLst>
   <p:sldSz cx="12192000" cy="6858000"/>
   <p:notesSz cx="6858000" cy="9144000"/>
   <p:custDataLst>
-    <p:tags r:id="rId22"/>
+    <p:tags r:id="rId25"/>
   </p:custDataLst>
   <p:defaultTextStyle>
     <a:defPPr>
@@ -135,8 +138,11 @@
             <p14:sldId id="417"/>
             <p14:sldId id="439"/>
             <p14:sldId id="440"/>
+            <p14:sldId id="445"/>
             <p14:sldId id="441"/>
             <p14:sldId id="442"/>
+            <p14:sldId id="444"/>
+            <p14:sldId id="443"/>
             <p14:sldId id="436"/>
           </p14:sldIdLst>
         </p14:section>
@@ -144,12 +150,12 @@
     </p:ext>
     <p:ext uri="{EFAFB233-063F-42B5-8137-9DF3F51BA10A}">
       <p15:sldGuideLst xmlns:p15="http://schemas.microsoft.com/office/powerpoint/2012/main">
-        <p15:guide id="1" orient="horz" pos="2300" userDrawn="1">
+        <p15:guide id="1" orient="horz" pos="2276" userDrawn="1">
           <p15:clr>
             <a:srgbClr val="A4A3A4"/>
           </p15:clr>
         </p15:guide>
-        <p15:guide id="2" pos="3839" userDrawn="1">
+        <p15:guide id="2" pos="3838" userDrawn="1">
           <p15:clr>
             <a:srgbClr val="A4A3A4"/>
           </p15:clr>
@@ -744,6 +750,297 @@
 </file>
 
 <file path=ppt/notesSlides/notesSlide10.xml><?xml version="1.0" encoding="utf-8"?>
+<p:notes xmlns:a="http://schemas.openxmlformats.org/drawingml/2006/main" xmlns:r="http://schemas.openxmlformats.org/officeDocument/2006/relationships" xmlns:p="http://schemas.openxmlformats.org/presentationml/2006/main">
+  <p:cSld>
+    <p:spTree>
+      <p:nvGrpSpPr>
+        <p:cNvPr id="1" name=""/>
+        <p:cNvGrpSpPr/>
+        <p:nvPr/>
+      </p:nvGrpSpPr>
+      <p:grpSpPr>
+        <a:xfrm>
+          <a:off x="0" y="0"/>
+          <a:ext cx="0" cy="0"/>
+          <a:chOff x="0" y="0"/>
+          <a:chExt cx="0" cy="0"/>
+        </a:xfrm>
+      </p:grpSpPr>
+      <p:sp>
+        <p:nvSpPr>
+          <p:cNvPr id="2" name="Slide Image Placeholder 1"/>
+          <p:cNvSpPr>
+            <a:spLocks noGrp="1" noRot="1" noChangeAspect="1"/>
+          </p:cNvSpPr>
+          <p:nvPr>
+            <p:ph type="sldImg" idx="2"/>
+          </p:nvPr>
+        </p:nvSpPr>
+        <p:spPr/>
+      </p:sp>
+      <p:sp>
+        <p:nvSpPr>
+          <p:cNvPr id="3" name="Text Placeholder 2"/>
+          <p:cNvSpPr>
+            <a:spLocks noGrp="1"/>
+          </p:cNvSpPr>
+          <p:nvPr>
+            <p:ph type="body" idx="3"/>
+          </p:nvPr>
+        </p:nvSpPr>
+        <p:spPr/>
+        <p:txBody>
+          <a:bodyPr/>
+          <a:lstStyle/>
+          <a:p>
+            <a:r>
+              <a:rPr lang="en-US" altLang="en-US"/>
+              <a:t>Vehicle-to-Everying(V2X) communication has very high standards for safety. To guarantee road safety, messages must be verified within 100ms. But there threee “security-efficieny dilemma”for current authentication methods:</a:t>
+            </a:r>
+            <a:endParaRPr lang="en-US" altLang="en-US"/>
+          </a:p>
+          <a:p>
+            <a:endParaRPr lang="zh-CN" altLang="en-US"/>
+          </a:p>
+          <a:p>
+            <a:r>
+              <a:rPr lang="en-US" altLang="zh-CN"/>
+              <a:t>ECDSA method can provide strong security and non-repudiation but require 2ms to compute verification, this can be bottlenecks in dense traffic</a:t>
+            </a:r>
+            <a:endParaRPr lang="en-US" altLang="zh-CN"/>
+          </a:p>
+          <a:p>
+            <a:r>
+              <a:rPr lang="en-US" altLang="zh-CN"/>
+              <a:t>In comparsion with ECDSA method, TESLA method is more computationally effiecient, but it has “key disclosure delay”,which is from 20ms to 100ms</a:t>
+            </a:r>
+            <a:endParaRPr lang="en-US" altLang="zh-CN"/>
+          </a:p>
+          <a:p>
+            <a:endParaRPr lang="en-US" altLang="zh-CN"/>
+          </a:p>
+          <a:p>
+            <a:r>
+              <a:rPr lang="en-US" altLang="zh-CN"/>
+              <a:t>So the fact shows a gap, that is,  V2X communication requires </a:t>
+            </a:r>
+            <a:r>
+              <a:rPr lang="en-US" altLang="zh-CN">
+                <a:sym typeface="+mn-ea"/>
+              </a:rPr>
+              <a:t>immediate verification, but</a:t>
+            </a:r>
+            <a:r>
+              <a:rPr lang="en-US" altLang="zh-CN"/>
+              <a:t> the existing hybrid schemes are not able to provide high rates of immediate verification, it only provide about 1% immediate verification for non-signed messages.</a:t>
+            </a:r>
+            <a:endParaRPr lang="en-US" altLang="zh-CN"/>
+          </a:p>
+        </p:txBody>
+      </p:sp>
+    </p:spTree>
+  </p:cSld>
+  <p:clrMapOvr>
+    <a:masterClrMapping/>
+  </p:clrMapOvr>
+</p:notes>
+</file>
+
+<file path=ppt/notesSlides/notesSlide11.xml><?xml version="1.0" encoding="utf-8"?>
+<p:notes xmlns:a="http://schemas.openxmlformats.org/drawingml/2006/main" xmlns:r="http://schemas.openxmlformats.org/officeDocument/2006/relationships" xmlns:p="http://schemas.openxmlformats.org/presentationml/2006/main">
+  <p:cSld>
+    <p:spTree>
+      <p:nvGrpSpPr>
+        <p:cNvPr id="1" name=""/>
+        <p:cNvGrpSpPr/>
+        <p:nvPr/>
+      </p:nvGrpSpPr>
+      <p:grpSpPr>
+        <a:xfrm>
+          <a:off x="0" y="0"/>
+          <a:ext cx="0" cy="0"/>
+          <a:chOff x="0" y="0"/>
+          <a:chExt cx="0" cy="0"/>
+        </a:xfrm>
+      </p:grpSpPr>
+      <p:sp>
+        <p:nvSpPr>
+          <p:cNvPr id="2" name="Slide Image Placeholder 1"/>
+          <p:cNvSpPr>
+            <a:spLocks noGrp="1" noRot="1" noChangeAspect="1"/>
+          </p:cNvSpPr>
+          <p:nvPr>
+            <p:ph type="sldImg" idx="2"/>
+          </p:nvPr>
+        </p:nvSpPr>
+        <p:spPr/>
+      </p:sp>
+      <p:sp>
+        <p:nvSpPr>
+          <p:cNvPr id="3" name="Text Placeholder 2"/>
+          <p:cNvSpPr>
+            <a:spLocks noGrp="1"/>
+          </p:cNvSpPr>
+          <p:nvPr>
+            <p:ph type="body" idx="3"/>
+          </p:nvPr>
+        </p:nvSpPr>
+        <p:spPr/>
+        <p:txBody>
+          <a:bodyPr/>
+          <a:lstStyle/>
+          <a:p>
+            <a:r>
+              <a:rPr lang="en-US" altLang="en-US"/>
+              <a:t>Vehicle-to-Everying(V2X) communication has very high standards for safety. To guarantee road safety, messages must be verified within 100ms. But there threee “security-efficieny dilemma”for current authentication methods:</a:t>
+            </a:r>
+            <a:endParaRPr lang="en-US" altLang="en-US"/>
+          </a:p>
+          <a:p>
+            <a:endParaRPr lang="zh-CN" altLang="en-US"/>
+          </a:p>
+          <a:p>
+            <a:r>
+              <a:rPr lang="en-US" altLang="zh-CN"/>
+              <a:t>ECDSA method can provide strong security and non-repudiation but require 2ms to compute verification, this can be bottlenecks in dense traffic</a:t>
+            </a:r>
+            <a:endParaRPr lang="en-US" altLang="zh-CN"/>
+          </a:p>
+          <a:p>
+            <a:r>
+              <a:rPr lang="en-US" altLang="zh-CN"/>
+              <a:t>In comparsion with ECDSA method, TESLA method is more computationally effiecient, but it has “key disclosure delay”,which is from 20ms to 100ms</a:t>
+            </a:r>
+            <a:endParaRPr lang="en-US" altLang="zh-CN"/>
+          </a:p>
+          <a:p>
+            <a:endParaRPr lang="en-US" altLang="zh-CN"/>
+          </a:p>
+          <a:p>
+            <a:r>
+              <a:rPr lang="en-US" altLang="zh-CN"/>
+              <a:t>So the fact shows a gap, that is,  V2X communication requires </a:t>
+            </a:r>
+            <a:r>
+              <a:rPr lang="en-US" altLang="zh-CN">
+                <a:sym typeface="+mn-ea"/>
+              </a:rPr>
+              <a:t>immediate verification, but</a:t>
+            </a:r>
+            <a:r>
+              <a:rPr lang="en-US" altLang="zh-CN"/>
+              <a:t> the existing hybrid schemes are not able to provide high rates of immediate verification, it only provide about 1% immediate verification for non-signed messages.</a:t>
+            </a:r>
+            <a:endParaRPr lang="en-US" altLang="zh-CN"/>
+          </a:p>
+        </p:txBody>
+      </p:sp>
+    </p:spTree>
+  </p:cSld>
+  <p:clrMapOvr>
+    <a:masterClrMapping/>
+  </p:clrMapOvr>
+</p:notes>
+</file>
+
+<file path=ppt/notesSlides/notesSlide12.xml><?xml version="1.0" encoding="utf-8"?>
+<p:notes xmlns:a="http://schemas.openxmlformats.org/drawingml/2006/main" xmlns:r="http://schemas.openxmlformats.org/officeDocument/2006/relationships" xmlns:p="http://schemas.openxmlformats.org/presentationml/2006/main">
+  <p:cSld>
+    <p:spTree>
+      <p:nvGrpSpPr>
+        <p:cNvPr id="1" name=""/>
+        <p:cNvGrpSpPr/>
+        <p:nvPr/>
+      </p:nvGrpSpPr>
+      <p:grpSpPr>
+        <a:xfrm>
+          <a:off x="0" y="0"/>
+          <a:ext cx="0" cy="0"/>
+          <a:chOff x="0" y="0"/>
+          <a:chExt cx="0" cy="0"/>
+        </a:xfrm>
+      </p:grpSpPr>
+      <p:sp>
+        <p:nvSpPr>
+          <p:cNvPr id="2" name="Slide Image Placeholder 1"/>
+          <p:cNvSpPr>
+            <a:spLocks noGrp="1" noRot="1" noChangeAspect="1"/>
+          </p:cNvSpPr>
+          <p:nvPr>
+            <p:ph type="sldImg" idx="2"/>
+          </p:nvPr>
+        </p:nvSpPr>
+        <p:spPr/>
+      </p:sp>
+      <p:sp>
+        <p:nvSpPr>
+          <p:cNvPr id="3" name="Text Placeholder 2"/>
+          <p:cNvSpPr>
+            <a:spLocks noGrp="1"/>
+          </p:cNvSpPr>
+          <p:nvPr>
+            <p:ph type="body" idx="3"/>
+          </p:nvPr>
+        </p:nvSpPr>
+        <p:spPr/>
+        <p:txBody>
+          <a:bodyPr/>
+          <a:lstStyle/>
+          <a:p>
+            <a:r>
+              <a:rPr lang="en-US" altLang="en-US"/>
+              <a:t>Vehicle-to-Everying(V2X) communication has very high standards for safety. To guarantee road safety, messages must be verified within 100ms. But there threee “security-efficieny dilemma”for current authentication methods:</a:t>
+            </a:r>
+            <a:endParaRPr lang="en-US" altLang="en-US"/>
+          </a:p>
+          <a:p>
+            <a:endParaRPr lang="zh-CN" altLang="en-US"/>
+          </a:p>
+          <a:p>
+            <a:r>
+              <a:rPr lang="en-US" altLang="zh-CN"/>
+              <a:t>ECDSA method can provide strong security and non-repudiation but require 2ms to compute verification, this can be bottlenecks in dense traffic</a:t>
+            </a:r>
+            <a:endParaRPr lang="en-US" altLang="zh-CN"/>
+          </a:p>
+          <a:p>
+            <a:r>
+              <a:rPr lang="en-US" altLang="zh-CN"/>
+              <a:t>In comparsion with ECDSA method, TESLA method is more computationally effiecient, but it has “key disclosure delay”,which is from 20ms to 100ms</a:t>
+            </a:r>
+            <a:endParaRPr lang="en-US" altLang="zh-CN"/>
+          </a:p>
+          <a:p>
+            <a:endParaRPr lang="en-US" altLang="zh-CN"/>
+          </a:p>
+          <a:p>
+            <a:r>
+              <a:rPr lang="en-US" altLang="zh-CN"/>
+              <a:t>So the fact shows a gap, that is,  V2X communication requires </a:t>
+            </a:r>
+            <a:r>
+              <a:rPr lang="en-US" altLang="zh-CN">
+                <a:sym typeface="+mn-ea"/>
+              </a:rPr>
+              <a:t>immediate verification, but</a:t>
+            </a:r>
+            <a:r>
+              <a:rPr lang="en-US" altLang="zh-CN"/>
+              <a:t> the existing hybrid schemes are not able to provide high rates of immediate verification, it only provide about 1% immediate verification for non-signed messages.</a:t>
+            </a:r>
+            <a:endParaRPr lang="en-US" altLang="zh-CN"/>
+          </a:p>
+        </p:txBody>
+      </p:sp>
+    </p:spTree>
+  </p:cSld>
+  <p:clrMapOvr>
+    <a:masterClrMapping/>
+  </p:clrMapOvr>
+</p:notes>
+</file>
+
+<file path=ppt/notesSlides/notesSlide13.xml><?xml version="1.0" encoding="utf-8"?>
 <p:notes xmlns:a="http://schemas.openxmlformats.org/drawingml/2006/main" xmlns:r="http://schemas.openxmlformats.org/officeDocument/2006/relationships" xmlns:p="http://schemas.openxmlformats.org/presentationml/2006/main">
   <p:cSld>
     <p:spTree>
@@ -8114,6 +8411,5568 @@
       </p:grpSpPr>
       <p:sp>
         <p:nvSpPr>
+          <p:cNvPr id="2" name="Rectangle 1"/>
+          <p:cNvSpPr/>
+          <p:nvPr/>
+        </p:nvSpPr>
+        <p:spPr>
+          <a:xfrm>
+            <a:off x="838200" y="1794649"/>
+            <a:ext cx="10766715" cy="583565"/>
+          </a:xfrm>
+          <a:prstGeom prst="rect">
+            <a:avLst/>
+          </a:prstGeom>
+        </p:spPr>
+        <p:txBody>
+          <a:bodyPr wrap="square">
+            <a:spAutoFit/>
+          </a:bodyPr>
+          <a:lstStyle/>
+          <a:p>
+            <a:pPr marL="457200" indent="-457200">
+              <a:buFont typeface="Arial" panose="020B0604020202020204" pitchFamily="34" charset="0"/>
+              <a:buChar char="•"/>
+              <a:defRPr/>
+            </a:pPr>
+            <a:endParaRPr lang="en-US" altLang="zh-CN" sz="3200" dirty="0">
+              <a:latin typeface="Kaiti TC" panose="02010600040101010101" pitchFamily="2" charset="-120"/>
+              <a:ea typeface="Kaiti TC" panose="02010600040101010101" pitchFamily="2" charset="-120"/>
+            </a:endParaRPr>
+          </a:p>
+        </p:txBody>
+      </p:sp>
+      <p:sp>
+        <p:nvSpPr>
+          <p:cNvPr id="7" name="Title 2"/>
+          <p:cNvSpPr txBox="1"/>
+          <p:nvPr/>
+        </p:nvSpPr>
+        <p:spPr>
+          <a:xfrm>
+            <a:off x="265430" y="-233680"/>
+            <a:ext cx="10261600" cy="1082040"/>
+          </a:xfrm>
+          <a:prstGeom prst="rect">
+            <a:avLst/>
+          </a:prstGeom>
+        </p:spPr>
+        <p:txBody>
+          <a:bodyPr vert="horz" lIns="91440" tIns="45720" rIns="91440" bIns="45720" rtlCol="0" anchor="ctr">
+            <a:normAutofit/>
+          </a:bodyPr>
+          <a:lstStyle>
+            <a:lvl1pPr algn="l" defTabSz="914400" rtl="0" eaLnBrk="1" latinLnBrk="0" hangingPunct="1">
+              <a:lnSpc>
+                <a:spcPct val="90000"/>
+              </a:lnSpc>
+              <a:spcBef>
+                <a:spcPct val="0"/>
+              </a:spcBef>
+              <a:buNone/>
+              <a:defRPr sz="6000" kern="1200">
+                <a:solidFill>
+                  <a:srgbClr val="DD613B"/>
+                </a:solidFill>
+                <a:latin typeface="+mj-lt"/>
+                <a:ea typeface="+mj-ea"/>
+                <a:cs typeface="+mj-cs"/>
+              </a:defRPr>
+            </a:lvl1pPr>
+          </a:lstStyle>
+          <a:p>
+            <a:r>
+              <a:rPr lang="en-US" altLang="zh-CN" sz="4000" dirty="0" err="1">
+                <a:latin typeface="Times New Roman" panose="02020603050405020304" charset="0"/>
+                <a:ea typeface="微软雅黑" panose="020B0503020204020204" charset="-122"/>
+                <a:cs typeface="Times New Roman" panose="02020603050405020304" charset="0"/>
+                <a:sym typeface="+mn-ea"/>
+              </a:rPr>
+              <a:t>Simulation(DNN)</a:t>
+            </a:r>
+            <a:endParaRPr lang="en-US" altLang="zh-CN" sz="4000" dirty="0" err="1">
+              <a:latin typeface="Times New Roman" panose="02020603050405020304" charset="0"/>
+              <a:ea typeface="微软雅黑" panose="020B0503020204020204" charset="-122"/>
+              <a:cs typeface="Times New Roman" panose="02020603050405020304" charset="0"/>
+              <a:sym typeface="+mn-ea"/>
+            </a:endParaRPr>
+          </a:p>
+        </p:txBody>
+      </p:sp>
+      <p:sp>
+        <p:nvSpPr>
+          <p:cNvPr id="31" name="文本框 30"/>
+          <p:cNvSpPr txBox="1"/>
+          <p:nvPr/>
+        </p:nvSpPr>
+        <p:spPr>
+          <a:xfrm>
+            <a:off x="9697720" y="2378075"/>
+            <a:ext cx="2622550" cy="737235"/>
+          </a:xfrm>
+          <a:prstGeom prst="rect">
+            <a:avLst/>
+          </a:prstGeom>
+        </p:spPr>
+        <p:txBody>
+          <a:bodyPr wrap="square">
+            <a:spAutoFit/>
+            <a:extLst>
+              <a:ext uri="{4A0BC546-FE56-4ADE-93B0-CB8AF2F6F144}">
+                <wpsdc:textFrameExt xmlns:wpsdc="http://www.wps.cn/officeDocument/2022/drawingmlCustomData" type="text"/>
+              </a:ext>
+            </a:extLst>
+          </a:bodyPr>
+          <a:p>
+            <a:pPr algn="l"/>
+            <a:r>
+              <a:rPr lang="en-US" altLang="zh-CN" sz="1400" b="1">
+                <a:latin typeface="Times New Roman" panose="02020603050405020304" charset="0"/>
+                <a:ea typeface="微软雅黑" panose="020B0503020204020204" charset="-122"/>
+                <a:cs typeface="Times New Roman" panose="02020603050405020304" charset="0"/>
+              </a:rPr>
+              <a:t>With multi-hop mechnisim(before optimization):</a:t>
+            </a:r>
+            <a:endParaRPr lang="en-US" altLang="zh-CN" sz="1400">
+              <a:latin typeface="Times New Roman" panose="02020603050405020304" charset="0"/>
+              <a:ea typeface="微软雅黑" panose="020B0503020204020204" charset="-122"/>
+              <a:cs typeface="Times New Roman" panose="02020603050405020304" charset="0"/>
+            </a:endParaRPr>
+          </a:p>
+          <a:p>
+            <a:pPr marL="285750" indent="-285750" algn="l">
+              <a:buFont typeface="Wingdings" panose="05000000000000000000" charset="0"/>
+              <a:buChar char="Ø"/>
+            </a:pPr>
+            <a:r>
+              <a:rPr lang="en-US" altLang="zh-CN" sz="1400">
+                <a:latin typeface="Times New Roman" panose="02020603050405020304" charset="0"/>
+                <a:ea typeface="微软雅黑" panose="020B0503020204020204" charset="-122"/>
+                <a:cs typeface="Times New Roman" panose="02020603050405020304" charset="0"/>
+              </a:rPr>
+              <a:t>Average error: 0.40</a:t>
+            </a:r>
+            <a:endParaRPr lang="en-US" altLang="zh-CN" sz="1400">
+              <a:latin typeface="Times New Roman" panose="02020603050405020304" charset="0"/>
+              <a:ea typeface="微软雅黑" panose="020B0503020204020204" charset="-122"/>
+              <a:cs typeface="Times New Roman" panose="02020603050405020304" charset="0"/>
+            </a:endParaRPr>
+          </a:p>
+        </p:txBody>
+      </p:sp>
+      <p:graphicFrame>
+        <p:nvGraphicFramePr>
+          <p:cNvPr id="32" name="表格 31"/>
+          <p:cNvGraphicFramePr/>
+          <p:nvPr/>
+        </p:nvGraphicFramePr>
+        <p:xfrm>
+          <a:off x="4318635" y="719455"/>
+          <a:ext cx="4480560" cy="2517775"/>
+        </p:xfrm>
+        <a:graphic>
+          <a:graphicData uri="http://schemas.openxmlformats.org/drawingml/2006/table">
+            <a:tbl>
+              <a:tblPr firstRow="1" bandRow="1">
+                <a:tableStyleId>{5C22544A-7EE6-4342-B048-85BDC9FD1C3A}</a:tableStyleId>
+              </a:tblPr>
+              <a:tblGrid>
+                <a:gridCol w="954405"/>
+                <a:gridCol w="1128395"/>
+                <a:gridCol w="1226185"/>
+                <a:gridCol w="1171575"/>
+              </a:tblGrid>
+              <a:tr h="323215">
+                <a:tc>
+                  <a:txBody>
+                    <a:bodyPr/>
+                    <a:p>
+                      <a:pPr algn="ctr">
+                        <a:buNone/>
+                      </a:pPr>
+                      <a:r>
+                        <a:rPr lang="en-US" altLang="zh-CN" sz="1200">
+                          <a:latin typeface="Times New Roman" panose="02020603050405020304" charset="0"/>
+                          <a:cs typeface="Times New Roman" panose="02020603050405020304" charset="0"/>
+                        </a:rPr>
+                        <a:t> Node</a:t>
+                      </a:r>
+                      <a:endParaRPr lang="en-US" altLang="zh-CN" sz="1200">
+                        <a:latin typeface="Times New Roman" panose="02020603050405020304" charset="0"/>
+                        <a:cs typeface="Times New Roman" panose="02020603050405020304" charset="0"/>
+                      </a:endParaRPr>
+                    </a:p>
+                  </a:txBody>
+                  <a:tcPr/>
+                </a:tc>
+                <a:tc>
+                  <a:txBody>
+                    <a:bodyPr/>
+                    <a:p>
+                      <a:pPr algn="ctr">
+                        <a:buNone/>
+                      </a:pPr>
+                      <a:r>
+                        <a:rPr lang="en-US" altLang="zh-CN" sz="1400">
+                          <a:latin typeface="Times New Roman" panose="02020603050405020304" charset="0"/>
+                          <a:cs typeface="Times New Roman" panose="02020603050405020304" charset="0"/>
+                        </a:rPr>
+                        <a:t>est_location</a:t>
+                      </a:r>
+                      <a:endParaRPr lang="en-US" altLang="zh-CN" sz="1400">
+                        <a:latin typeface="Times New Roman" panose="02020603050405020304" charset="0"/>
+                        <a:cs typeface="Times New Roman" panose="02020603050405020304" charset="0"/>
+                      </a:endParaRPr>
+                    </a:p>
+                  </a:txBody>
+                  <a:tcPr/>
+                </a:tc>
+                <a:tc>
+                  <a:txBody>
+                    <a:bodyPr/>
+                    <a:p>
+                      <a:pPr algn="ctr">
+                        <a:buNone/>
+                      </a:pPr>
+                      <a:r>
+                        <a:rPr lang="en-US" altLang="zh-CN" sz="1400">
+                          <a:latin typeface="Times New Roman" panose="02020603050405020304" charset="0"/>
+                          <a:cs typeface="Times New Roman" panose="02020603050405020304" charset="0"/>
+                        </a:rPr>
+                        <a:t>true_location</a:t>
+                      </a:r>
+                      <a:endParaRPr lang="en-US" altLang="zh-CN" sz="1400">
+                        <a:latin typeface="Times New Roman" panose="02020603050405020304" charset="0"/>
+                        <a:cs typeface="Times New Roman" panose="02020603050405020304" charset="0"/>
+                      </a:endParaRPr>
+                    </a:p>
+                  </a:txBody>
+                  <a:tcPr/>
+                </a:tc>
+                <a:tc>
+                  <a:txBody>
+                    <a:bodyPr/>
+                    <a:p>
+                      <a:pPr algn="ctr">
+                        <a:buNone/>
+                      </a:pPr>
+                      <a:r>
+                        <a:rPr lang="en-US" altLang="zh-CN" sz="1400">
+                          <a:latin typeface="Times New Roman" panose="02020603050405020304" charset="0"/>
+                          <a:cs typeface="Times New Roman" panose="02020603050405020304" charset="0"/>
+                        </a:rPr>
+                        <a:t>error</a:t>
+                      </a:r>
+                      <a:endParaRPr lang="en-US" altLang="zh-CN" sz="1400">
+                        <a:latin typeface="Times New Roman" panose="02020603050405020304" charset="0"/>
+                        <a:cs typeface="Times New Roman" panose="02020603050405020304" charset="0"/>
+                      </a:endParaRPr>
+                    </a:p>
+                  </a:txBody>
+                  <a:tcPr/>
+                </a:tc>
+              </a:tr>
+              <a:tr h="365760">
+                <a:tc>
+                  <a:txBody>
+                    <a:bodyPr/>
+                    <a:p>
+                      <a:pPr algn="ctr">
+                        <a:buNone/>
+                      </a:pPr>
+                      <a:r>
+                        <a:rPr lang="en-US" altLang="zh-CN" sz="1400">
+                          <a:latin typeface="Times New Roman" panose="02020603050405020304" charset="0"/>
+                          <a:cs typeface="Times New Roman" panose="02020603050405020304" charset="0"/>
+                        </a:rPr>
+                        <a:t>1</a:t>
+                      </a:r>
+                      <a:endParaRPr lang="en-US" altLang="zh-CN" sz="1400">
+                        <a:latin typeface="Times New Roman" panose="02020603050405020304" charset="0"/>
+                        <a:cs typeface="Times New Roman" panose="02020603050405020304" charset="0"/>
+                      </a:endParaRPr>
+                    </a:p>
+                  </a:txBody>
+                  <a:tcPr/>
+                </a:tc>
+                <a:tc>
+                  <a:txBody>
+                    <a:bodyPr/>
+                    <a:p>
+                      <a:pPr algn="ctr">
+                        <a:buNone/>
+                      </a:pPr>
+                      <a:r>
+                        <a:rPr lang="en-US" altLang="zh-CN" sz="1400">
+                          <a:latin typeface="Times New Roman" panose="02020603050405020304" charset="0"/>
+                          <a:cs typeface="Times New Roman" panose="02020603050405020304" charset="0"/>
+                        </a:rPr>
+                        <a:t>(2.70, 2.91)</a:t>
+                      </a:r>
+                      <a:endParaRPr lang="en-US" altLang="zh-CN" sz="1400">
+                        <a:latin typeface="Times New Roman" panose="02020603050405020304" charset="0"/>
+                        <a:cs typeface="Times New Roman" panose="02020603050405020304" charset="0"/>
+                      </a:endParaRPr>
+                    </a:p>
+                  </a:txBody>
+                  <a:tcPr/>
+                </a:tc>
+                <a:tc>
+                  <a:txBody>
+                    <a:bodyPr/>
+                    <a:p>
+                      <a:pPr algn="ctr">
+                        <a:buNone/>
+                      </a:pPr>
+                      <a:r>
+                        <a:rPr lang="en-US" altLang="zh-CN" sz="1400">
+                          <a:latin typeface="Times New Roman" panose="02020603050405020304" charset="0"/>
+                          <a:cs typeface="Times New Roman" panose="02020603050405020304" charset="0"/>
+                        </a:rPr>
+                        <a:t>(3.00, 3.00)</a:t>
+                      </a:r>
+                      <a:endParaRPr lang="en-US" altLang="zh-CN" sz="1400">
+                        <a:latin typeface="Times New Roman" panose="02020603050405020304" charset="0"/>
+                        <a:cs typeface="Times New Roman" panose="02020603050405020304" charset="0"/>
+                      </a:endParaRPr>
+                    </a:p>
+                  </a:txBody>
+                  <a:tcPr/>
+                </a:tc>
+                <a:tc>
+                  <a:txBody>
+                    <a:bodyPr/>
+                    <a:p>
+                      <a:pPr algn="ctr">
+                        <a:buNone/>
+                      </a:pPr>
+                      <a:r>
+                        <a:rPr lang="en-US" altLang="zh-CN" sz="1400">
+                          <a:latin typeface="Times New Roman" panose="02020603050405020304" charset="0"/>
+                          <a:cs typeface="Times New Roman" panose="02020603050405020304" charset="0"/>
+                        </a:rPr>
+                        <a:t>0.31</a:t>
+                      </a:r>
+                      <a:endParaRPr lang="en-US" altLang="zh-CN" sz="1400">
+                        <a:latin typeface="Times New Roman" panose="02020603050405020304" charset="0"/>
+                        <a:cs typeface="Times New Roman" panose="02020603050405020304" charset="0"/>
+                      </a:endParaRPr>
+                    </a:p>
+                  </a:txBody>
+                  <a:tcPr/>
+                </a:tc>
+              </a:tr>
+              <a:tr h="365760">
+                <a:tc>
+                  <a:txBody>
+                    <a:bodyPr/>
+                    <a:p>
+                      <a:pPr algn="ctr">
+                        <a:buNone/>
+                      </a:pPr>
+                      <a:r>
+                        <a:rPr lang="en-US" altLang="zh-CN" sz="1400">
+                          <a:latin typeface="Times New Roman" panose="02020603050405020304" charset="0"/>
+                          <a:cs typeface="Times New Roman" panose="02020603050405020304" charset="0"/>
+                        </a:rPr>
+                        <a:t>2</a:t>
+                      </a:r>
+                      <a:endParaRPr lang="en-US" altLang="zh-CN" sz="1400">
+                        <a:latin typeface="Times New Roman" panose="02020603050405020304" charset="0"/>
+                        <a:cs typeface="Times New Roman" panose="02020603050405020304" charset="0"/>
+                      </a:endParaRPr>
+                    </a:p>
+                  </a:txBody>
+                  <a:tcPr/>
+                </a:tc>
+                <a:tc>
+                  <a:txBody>
+                    <a:bodyPr/>
+                    <a:p>
+                      <a:pPr algn="ctr">
+                        <a:buNone/>
+                      </a:pPr>
+                      <a:r>
+                        <a:rPr lang="en-US" altLang="zh-CN" sz="1400">
+                          <a:latin typeface="Times New Roman" panose="02020603050405020304" charset="0"/>
+                          <a:cs typeface="Times New Roman" panose="02020603050405020304" charset="0"/>
+                        </a:rPr>
+                        <a:t>(1.91, 0.33)</a:t>
+                      </a:r>
+                      <a:endParaRPr lang="en-US" altLang="zh-CN" sz="1400">
+                        <a:latin typeface="Times New Roman" panose="02020603050405020304" charset="0"/>
+                        <a:cs typeface="Times New Roman" panose="02020603050405020304" charset="0"/>
+                      </a:endParaRPr>
+                    </a:p>
+                  </a:txBody>
+                  <a:tcPr/>
+                </a:tc>
+                <a:tc>
+                  <a:txBody>
+                    <a:bodyPr/>
+                    <a:p>
+                      <a:pPr algn="ctr">
+                        <a:buNone/>
+                      </a:pPr>
+                      <a:r>
+                        <a:rPr lang="en-US" altLang="zh-CN" sz="1400">
+                          <a:latin typeface="Times New Roman" panose="02020603050405020304" charset="0"/>
+                          <a:cs typeface="Times New Roman" panose="02020603050405020304" charset="0"/>
+                        </a:rPr>
+                        <a:t>(2.00, 0.00)</a:t>
+                      </a:r>
+                      <a:endParaRPr lang="en-US" altLang="zh-CN" sz="1400">
+                        <a:latin typeface="Times New Roman" panose="02020603050405020304" charset="0"/>
+                        <a:cs typeface="Times New Roman" panose="02020603050405020304" charset="0"/>
+                      </a:endParaRPr>
+                    </a:p>
+                  </a:txBody>
+                  <a:tcPr/>
+                </a:tc>
+                <a:tc>
+                  <a:txBody>
+                    <a:bodyPr/>
+                    <a:p>
+                      <a:pPr algn="ctr">
+                        <a:buNone/>
+                      </a:pPr>
+                      <a:r>
+                        <a:rPr lang="en-US" altLang="zh-CN" sz="1400">
+                          <a:latin typeface="Times New Roman" panose="02020603050405020304" charset="0"/>
+                          <a:cs typeface="Times New Roman" panose="02020603050405020304" charset="0"/>
+                        </a:rPr>
+                        <a:t>0.34</a:t>
+                      </a:r>
+                      <a:endParaRPr lang="en-US" altLang="zh-CN" sz="1400">
+                        <a:latin typeface="Times New Roman" panose="02020603050405020304" charset="0"/>
+                        <a:cs typeface="Times New Roman" panose="02020603050405020304" charset="0"/>
+                      </a:endParaRPr>
+                    </a:p>
+                  </a:txBody>
+                  <a:tcPr/>
+                </a:tc>
+              </a:tr>
+              <a:tr h="365760">
+                <a:tc>
+                  <a:txBody>
+                    <a:bodyPr/>
+                    <a:p>
+                      <a:pPr algn="ctr">
+                        <a:buNone/>
+                      </a:pPr>
+                      <a:r>
+                        <a:rPr lang="en-US" altLang="zh-CN" sz="1400">
+                          <a:latin typeface="Times New Roman" panose="02020603050405020304" charset="0"/>
+                          <a:cs typeface="Times New Roman" panose="02020603050405020304" charset="0"/>
+                        </a:rPr>
+                        <a:t>3</a:t>
+                      </a:r>
+                      <a:endParaRPr lang="en-US" altLang="zh-CN" sz="1400">
+                        <a:latin typeface="Times New Roman" panose="02020603050405020304" charset="0"/>
+                        <a:cs typeface="Times New Roman" panose="02020603050405020304" charset="0"/>
+                      </a:endParaRPr>
+                    </a:p>
+                  </a:txBody>
+                  <a:tcPr/>
+                </a:tc>
+                <a:tc>
+                  <a:txBody>
+                    <a:bodyPr/>
+                    <a:p>
+                      <a:pPr algn="ctr">
+                        <a:buNone/>
+                      </a:pPr>
+                      <a:r>
+                        <a:rPr lang="en-US" altLang="zh-CN" sz="1400">
+                          <a:latin typeface="Times New Roman" panose="02020603050405020304" charset="0"/>
+                          <a:cs typeface="Times New Roman" panose="02020603050405020304" charset="0"/>
+                        </a:rPr>
+                        <a:t>(7.30, 3.79)</a:t>
+                      </a:r>
+                      <a:endParaRPr lang="en-US" altLang="zh-CN" sz="1400">
+                        <a:latin typeface="Times New Roman" panose="02020603050405020304" charset="0"/>
+                        <a:cs typeface="Times New Roman" panose="02020603050405020304" charset="0"/>
+                      </a:endParaRPr>
+                    </a:p>
+                  </a:txBody>
+                  <a:tcPr/>
+                </a:tc>
+                <a:tc>
+                  <a:txBody>
+                    <a:bodyPr/>
+                    <a:p>
+                      <a:pPr algn="ctr">
+                        <a:buNone/>
+                      </a:pPr>
+                      <a:r>
+                        <a:rPr lang="en-US" altLang="zh-CN" sz="1400">
+                          <a:latin typeface="Times New Roman" panose="02020603050405020304" charset="0"/>
+                          <a:cs typeface="Times New Roman" panose="02020603050405020304" charset="0"/>
+                        </a:rPr>
+                        <a:t>(7.00, 4.00)</a:t>
+                      </a:r>
+                      <a:endParaRPr lang="en-US" altLang="zh-CN" sz="1400">
+                        <a:latin typeface="Times New Roman" panose="02020603050405020304" charset="0"/>
+                        <a:cs typeface="Times New Roman" panose="02020603050405020304" charset="0"/>
+                      </a:endParaRPr>
+                    </a:p>
+                  </a:txBody>
+                  <a:tcPr/>
+                </a:tc>
+                <a:tc>
+                  <a:txBody>
+                    <a:bodyPr/>
+                    <a:p>
+                      <a:pPr algn="ctr">
+                        <a:buNone/>
+                      </a:pPr>
+                      <a:r>
+                        <a:rPr lang="en-US" altLang="zh-CN" sz="1400">
+                          <a:latin typeface="Times New Roman" panose="02020603050405020304" charset="0"/>
+                          <a:cs typeface="Times New Roman" panose="02020603050405020304" charset="0"/>
+                        </a:rPr>
+                        <a:t>0.36</a:t>
+                      </a:r>
+                      <a:endParaRPr lang="en-US" altLang="zh-CN" sz="1400">
+                        <a:latin typeface="Times New Roman" panose="02020603050405020304" charset="0"/>
+                        <a:cs typeface="Times New Roman" panose="02020603050405020304" charset="0"/>
+                      </a:endParaRPr>
+                    </a:p>
+                  </a:txBody>
+                  <a:tcPr/>
+                </a:tc>
+              </a:tr>
+              <a:tr h="365760">
+                <a:tc>
+                  <a:txBody>
+                    <a:bodyPr/>
+                    <a:p>
+                      <a:pPr algn="ctr">
+                        <a:buNone/>
+                      </a:pPr>
+                      <a:r>
+                        <a:rPr lang="en-US" altLang="zh-CN" sz="1400">
+                          <a:latin typeface="Times New Roman" panose="02020603050405020304" charset="0"/>
+                          <a:cs typeface="Times New Roman" panose="02020603050405020304" charset="0"/>
+                        </a:rPr>
+                        <a:t>4</a:t>
+                      </a:r>
+                      <a:endParaRPr lang="en-US" altLang="zh-CN" sz="1400">
+                        <a:latin typeface="Times New Roman" panose="02020603050405020304" charset="0"/>
+                        <a:cs typeface="Times New Roman" panose="02020603050405020304" charset="0"/>
+                      </a:endParaRPr>
+                    </a:p>
+                  </a:txBody>
+                  <a:tcPr/>
+                </a:tc>
+                <a:tc>
+                  <a:txBody>
+                    <a:bodyPr/>
+                    <a:p>
+                      <a:pPr algn="ctr">
+                        <a:buNone/>
+                      </a:pPr>
+                      <a:r>
+                        <a:rPr lang="en-US" altLang="zh-CN" sz="1400">
+                          <a:latin typeface="Times New Roman" panose="02020603050405020304" charset="0"/>
+                          <a:cs typeface="Times New Roman" panose="02020603050405020304" charset="0"/>
+                        </a:rPr>
+                        <a:t>(2.54, 6.75)</a:t>
+                      </a:r>
+                      <a:endParaRPr lang="en-US" altLang="zh-CN" sz="1400">
+                        <a:latin typeface="Times New Roman" panose="02020603050405020304" charset="0"/>
+                        <a:cs typeface="Times New Roman" panose="02020603050405020304" charset="0"/>
+                      </a:endParaRPr>
+                    </a:p>
+                  </a:txBody>
+                  <a:tcPr/>
+                </a:tc>
+                <a:tc>
+                  <a:txBody>
+                    <a:bodyPr/>
+                    <a:p>
+                      <a:pPr algn="ctr">
+                        <a:buNone/>
+                      </a:pPr>
+                      <a:r>
+                        <a:rPr lang="en-US" altLang="zh-CN" sz="1400">
+                          <a:latin typeface="Times New Roman" panose="02020603050405020304" charset="0"/>
+                          <a:cs typeface="Times New Roman" panose="02020603050405020304" charset="0"/>
+                        </a:rPr>
+                        <a:t>(2.50, 7.00)</a:t>
+                      </a:r>
+                      <a:endParaRPr lang="en-US" altLang="zh-CN" sz="1400">
+                        <a:latin typeface="Times New Roman" panose="02020603050405020304" charset="0"/>
+                        <a:cs typeface="Times New Roman" panose="02020603050405020304" charset="0"/>
+                      </a:endParaRPr>
+                    </a:p>
+                  </a:txBody>
+                  <a:tcPr/>
+                </a:tc>
+                <a:tc>
+                  <a:txBody>
+                    <a:bodyPr/>
+                    <a:p>
+                      <a:pPr algn="ctr">
+                        <a:buNone/>
+                      </a:pPr>
+                      <a:r>
+                        <a:rPr lang="en-US" altLang="zh-CN" sz="1400">
+                          <a:latin typeface="Times New Roman" panose="02020603050405020304" charset="0"/>
+                          <a:cs typeface="Times New Roman" panose="02020603050405020304" charset="0"/>
+                        </a:rPr>
+                        <a:t>0.25</a:t>
+                      </a:r>
+                      <a:endParaRPr lang="en-US" altLang="zh-CN" sz="1400">
+                        <a:latin typeface="Times New Roman" panose="02020603050405020304" charset="0"/>
+                        <a:cs typeface="Times New Roman" panose="02020603050405020304" charset="0"/>
+                      </a:endParaRPr>
+                    </a:p>
+                  </a:txBody>
+                  <a:tcPr/>
+                </a:tc>
+              </a:tr>
+              <a:tr h="365760">
+                <a:tc>
+                  <a:txBody>
+                    <a:bodyPr/>
+                    <a:p>
+                      <a:pPr algn="ctr">
+                        <a:buNone/>
+                      </a:pPr>
+                      <a:r>
+                        <a:rPr lang="en-US" altLang="zh-CN" sz="1400">
+                          <a:solidFill>
+                            <a:schemeClr val="tx1"/>
+                          </a:solidFill>
+                          <a:latin typeface="Times New Roman" panose="02020603050405020304" charset="0"/>
+                          <a:cs typeface="Times New Roman" panose="02020603050405020304" charset="0"/>
+                        </a:rPr>
+                        <a:t>5</a:t>
+                      </a:r>
+                      <a:endParaRPr lang="en-US" altLang="zh-CN" sz="1400">
+                        <a:solidFill>
+                          <a:schemeClr val="tx1"/>
+                        </a:solidFill>
+                        <a:latin typeface="Times New Roman" panose="02020603050405020304" charset="0"/>
+                        <a:cs typeface="Times New Roman" panose="02020603050405020304" charset="0"/>
+                      </a:endParaRPr>
+                    </a:p>
+                  </a:txBody>
+                  <a:tcPr/>
+                </a:tc>
+                <a:tc>
+                  <a:txBody>
+                    <a:bodyPr/>
+                    <a:p>
+                      <a:pPr algn="ctr">
+                        <a:buNone/>
+                      </a:pPr>
+                      <a:r>
+                        <a:rPr lang="en-US" altLang="zh-CN" sz="1400">
+                          <a:solidFill>
+                            <a:schemeClr val="tx1"/>
+                          </a:solidFill>
+                          <a:latin typeface="Times New Roman" panose="02020603050405020304" charset="0"/>
+                          <a:cs typeface="Times New Roman" panose="02020603050405020304" charset="0"/>
+                        </a:rPr>
+                        <a:t>(5.33, 7.66)</a:t>
+                      </a:r>
+                      <a:endParaRPr lang="en-US" altLang="zh-CN" sz="1400">
+                        <a:solidFill>
+                          <a:schemeClr val="tx1"/>
+                        </a:solidFill>
+                        <a:latin typeface="Times New Roman" panose="02020603050405020304" charset="0"/>
+                        <a:cs typeface="Times New Roman" panose="02020603050405020304" charset="0"/>
+                      </a:endParaRPr>
+                    </a:p>
+                  </a:txBody>
+                  <a:tcPr/>
+                </a:tc>
+                <a:tc>
+                  <a:txBody>
+                    <a:bodyPr/>
+                    <a:p>
+                      <a:pPr algn="ctr">
+                        <a:buNone/>
+                      </a:pPr>
+                      <a:r>
+                        <a:rPr lang="en-US" altLang="zh-CN" sz="1400">
+                          <a:solidFill>
+                            <a:schemeClr val="tx1"/>
+                          </a:solidFill>
+                          <a:latin typeface="Times New Roman" panose="02020603050405020304" charset="0"/>
+                          <a:cs typeface="Times New Roman" panose="02020603050405020304" charset="0"/>
+                        </a:rPr>
+                        <a:t>(6.00, 8.00)</a:t>
+                      </a:r>
+                      <a:endParaRPr lang="en-US" altLang="zh-CN" sz="1400">
+                        <a:solidFill>
+                          <a:schemeClr val="tx1"/>
+                        </a:solidFill>
+                        <a:latin typeface="Times New Roman" panose="02020603050405020304" charset="0"/>
+                        <a:cs typeface="Times New Roman" panose="02020603050405020304" charset="0"/>
+                      </a:endParaRPr>
+                    </a:p>
+                  </a:txBody>
+                  <a:tcPr/>
+                </a:tc>
+                <a:tc>
+                  <a:txBody>
+                    <a:bodyPr/>
+                    <a:p>
+                      <a:pPr algn="ctr">
+                        <a:buNone/>
+                      </a:pPr>
+                      <a:r>
+                        <a:rPr lang="en-US" altLang="zh-CN" sz="1400">
+                          <a:solidFill>
+                            <a:schemeClr val="tx1"/>
+                          </a:solidFill>
+                          <a:latin typeface="Times New Roman" panose="02020603050405020304" charset="0"/>
+                          <a:cs typeface="Times New Roman" panose="02020603050405020304" charset="0"/>
+                        </a:rPr>
+                        <a:t>0.75</a:t>
+                      </a:r>
+                      <a:endParaRPr lang="en-US" altLang="zh-CN" sz="1400">
+                        <a:solidFill>
+                          <a:schemeClr val="tx1"/>
+                        </a:solidFill>
+                        <a:latin typeface="Times New Roman" panose="02020603050405020304" charset="0"/>
+                        <a:cs typeface="Times New Roman" panose="02020603050405020304" charset="0"/>
+                      </a:endParaRPr>
+                    </a:p>
+                  </a:txBody>
+                  <a:tcPr/>
+                </a:tc>
+              </a:tr>
+              <a:tr h="365760">
+                <a:tc>
+                  <a:txBody>
+                    <a:bodyPr/>
+                    <a:p>
+                      <a:pPr algn="ctr">
+                        <a:buNone/>
+                      </a:pPr>
+                      <a:r>
+                        <a:rPr lang="en-US" altLang="zh-CN" sz="1400">
+                          <a:latin typeface="Times New Roman" panose="02020603050405020304" charset="0"/>
+                          <a:cs typeface="Times New Roman" panose="02020603050405020304" charset="0"/>
+                        </a:rPr>
+                        <a:t>6</a:t>
+                      </a:r>
+                      <a:endParaRPr lang="en-US" altLang="zh-CN" sz="1400">
+                        <a:latin typeface="Times New Roman" panose="02020603050405020304" charset="0"/>
+                        <a:cs typeface="Times New Roman" panose="02020603050405020304" charset="0"/>
+                      </a:endParaRPr>
+                    </a:p>
+                  </a:txBody>
+                  <a:tcPr/>
+                </a:tc>
+                <a:tc>
+                  <a:txBody>
+                    <a:bodyPr/>
+                    <a:p>
+                      <a:pPr algn="ctr">
+                        <a:buNone/>
+                      </a:pPr>
+                      <a:r>
+                        <a:rPr lang="en-US" altLang="zh-CN" sz="1400">
+                          <a:latin typeface="Times New Roman" panose="02020603050405020304" charset="0"/>
+                          <a:cs typeface="Times New Roman" panose="02020603050405020304" charset="0"/>
+                        </a:rPr>
+                        <a:t>(8.28, 7.27)</a:t>
+                      </a:r>
+                      <a:endParaRPr lang="en-US" altLang="zh-CN" sz="1400">
+                        <a:latin typeface="Times New Roman" panose="02020603050405020304" charset="0"/>
+                        <a:cs typeface="Times New Roman" panose="02020603050405020304" charset="0"/>
+                      </a:endParaRPr>
+                    </a:p>
+                  </a:txBody>
+                  <a:tcPr/>
+                </a:tc>
+                <a:tc>
+                  <a:txBody>
+                    <a:bodyPr/>
+                    <a:p>
+                      <a:pPr algn="ctr">
+                        <a:buNone/>
+                      </a:pPr>
+                      <a:r>
+                        <a:rPr lang="en-US" altLang="zh-CN" sz="1400">
+                          <a:latin typeface="Times New Roman" panose="02020603050405020304" charset="0"/>
+                          <a:cs typeface="Times New Roman" panose="02020603050405020304" charset="0"/>
+                        </a:rPr>
+                        <a:t>(8.00, 7.50)</a:t>
+                      </a:r>
+                      <a:endParaRPr lang="en-US" altLang="zh-CN" sz="1400">
+                        <a:latin typeface="Times New Roman" panose="02020603050405020304" charset="0"/>
+                        <a:cs typeface="Times New Roman" panose="02020603050405020304" charset="0"/>
+                      </a:endParaRPr>
+                    </a:p>
+                  </a:txBody>
+                  <a:tcPr/>
+                </a:tc>
+                <a:tc>
+                  <a:txBody>
+                    <a:bodyPr/>
+                    <a:p>
+                      <a:pPr algn="ctr">
+                        <a:buNone/>
+                      </a:pPr>
+                      <a:r>
+                        <a:rPr lang="en-US" altLang="zh-CN" sz="1400">
+                          <a:latin typeface="Times New Roman" panose="02020603050405020304" charset="0"/>
+                          <a:cs typeface="Times New Roman" panose="02020603050405020304" charset="0"/>
+                        </a:rPr>
+                        <a:t>0.36</a:t>
+                      </a:r>
+                      <a:endParaRPr lang="en-US" altLang="zh-CN" sz="1400">
+                        <a:latin typeface="Times New Roman" panose="02020603050405020304" charset="0"/>
+                        <a:cs typeface="Times New Roman" panose="02020603050405020304" charset="0"/>
+                      </a:endParaRPr>
+                    </a:p>
+                  </a:txBody>
+                  <a:tcPr/>
+                </a:tc>
+              </a:tr>
+            </a:tbl>
+          </a:graphicData>
+        </a:graphic>
+      </p:graphicFrame>
+      <p:sp>
+        <p:nvSpPr>
+          <p:cNvPr id="36" name="文本框 35"/>
+          <p:cNvSpPr txBox="1"/>
+          <p:nvPr/>
+        </p:nvSpPr>
+        <p:spPr>
+          <a:xfrm>
+            <a:off x="9697720" y="5516245"/>
+            <a:ext cx="2622550" cy="737235"/>
+          </a:xfrm>
+          <a:prstGeom prst="rect">
+            <a:avLst/>
+          </a:prstGeom>
+        </p:spPr>
+        <p:txBody>
+          <a:bodyPr wrap="square">
+            <a:spAutoFit/>
+            <a:extLst>
+              <a:ext uri="{4A0BC546-FE56-4ADE-93B0-CB8AF2F6F144}">
+                <wpsdc:textFrameExt xmlns:wpsdc="http://www.wps.cn/officeDocument/2022/drawingmlCustomData" type="text"/>
+              </a:ext>
+            </a:extLst>
+          </a:bodyPr>
+          <a:p>
+            <a:pPr algn="l"/>
+            <a:r>
+              <a:rPr lang="en-US" altLang="zh-CN" sz="1400" b="1">
+                <a:latin typeface="Times New Roman" panose="02020603050405020304" charset="0"/>
+                <a:ea typeface="微软雅黑" panose="020B0503020204020204" charset="-122"/>
+                <a:cs typeface="Times New Roman" panose="02020603050405020304" charset="0"/>
+              </a:rPr>
+              <a:t>With multi-hop mechnisim(after optimization):</a:t>
+            </a:r>
+            <a:endParaRPr lang="en-US" altLang="zh-CN" sz="1400">
+              <a:latin typeface="Times New Roman" panose="02020603050405020304" charset="0"/>
+              <a:ea typeface="微软雅黑" panose="020B0503020204020204" charset="-122"/>
+              <a:cs typeface="Times New Roman" panose="02020603050405020304" charset="0"/>
+            </a:endParaRPr>
+          </a:p>
+          <a:p>
+            <a:pPr marL="285750" indent="-285750" algn="l">
+              <a:buFont typeface="Wingdings" panose="05000000000000000000" charset="0"/>
+              <a:buChar char="Ø"/>
+            </a:pPr>
+            <a:r>
+              <a:rPr lang="en-US" altLang="zh-CN" sz="1400">
+                <a:latin typeface="Times New Roman" panose="02020603050405020304" charset="0"/>
+                <a:ea typeface="微软雅黑" panose="020B0503020204020204" charset="-122"/>
+                <a:cs typeface="Times New Roman" panose="02020603050405020304" charset="0"/>
+              </a:rPr>
+              <a:t>Average error: 0.27</a:t>
+            </a:r>
+            <a:endParaRPr lang="en-US" altLang="zh-CN" sz="1400">
+              <a:latin typeface="Times New Roman" panose="02020603050405020304" charset="0"/>
+              <a:ea typeface="微软雅黑" panose="020B0503020204020204" charset="-122"/>
+              <a:cs typeface="Times New Roman" panose="02020603050405020304" charset="0"/>
+            </a:endParaRPr>
+          </a:p>
+        </p:txBody>
+      </p:sp>
+      <p:graphicFrame>
+        <p:nvGraphicFramePr>
+          <p:cNvPr id="4" name="表格 3"/>
+          <p:cNvGraphicFramePr/>
+          <p:nvPr/>
+        </p:nvGraphicFramePr>
+        <p:xfrm>
+          <a:off x="4318635" y="3735705"/>
+          <a:ext cx="5454015" cy="2517775"/>
+        </p:xfrm>
+        <a:graphic>
+          <a:graphicData uri="http://schemas.openxmlformats.org/drawingml/2006/table">
+            <a:tbl>
+              <a:tblPr firstRow="1" bandRow="1">
+                <a:tableStyleId>{5C22544A-7EE6-4342-B048-85BDC9FD1C3A}</a:tableStyleId>
+              </a:tblPr>
+              <a:tblGrid>
+                <a:gridCol w="971550"/>
+                <a:gridCol w="1110615"/>
+                <a:gridCol w="1258570"/>
+                <a:gridCol w="1136650"/>
+                <a:gridCol w="976630"/>
+              </a:tblGrid>
+              <a:tr h="323215">
+                <a:tc>
+                  <a:txBody>
+                    <a:bodyPr/>
+                    <a:p>
+                      <a:pPr algn="ctr">
+                        <a:buNone/>
+                      </a:pPr>
+                      <a:r>
+                        <a:rPr lang="en-US" altLang="zh-CN" sz="1200">
+                          <a:latin typeface="Times New Roman" panose="02020603050405020304" charset="0"/>
+                          <a:cs typeface="Times New Roman" panose="02020603050405020304" charset="0"/>
+                        </a:rPr>
+                        <a:t> Node</a:t>
+                      </a:r>
+                      <a:endParaRPr lang="en-US" altLang="zh-CN" sz="1200">
+                        <a:latin typeface="Times New Roman" panose="02020603050405020304" charset="0"/>
+                        <a:cs typeface="Times New Roman" panose="02020603050405020304" charset="0"/>
+                      </a:endParaRPr>
+                    </a:p>
+                  </a:txBody>
+                  <a:tcPr/>
+                </a:tc>
+                <a:tc>
+                  <a:txBody>
+                    <a:bodyPr/>
+                    <a:p>
+                      <a:pPr algn="ctr">
+                        <a:buNone/>
+                      </a:pPr>
+                      <a:r>
+                        <a:rPr lang="en-US" altLang="zh-CN" sz="1400">
+                          <a:latin typeface="Times New Roman" panose="02020603050405020304" charset="0"/>
+                          <a:cs typeface="Times New Roman" panose="02020603050405020304" charset="0"/>
+                        </a:rPr>
+                        <a:t>est_location</a:t>
+                      </a:r>
+                      <a:endParaRPr lang="en-US" altLang="zh-CN" sz="1400">
+                        <a:latin typeface="Times New Roman" panose="02020603050405020304" charset="0"/>
+                        <a:cs typeface="Times New Roman" panose="02020603050405020304" charset="0"/>
+                      </a:endParaRPr>
+                    </a:p>
+                  </a:txBody>
+                  <a:tcPr/>
+                </a:tc>
+                <a:tc>
+                  <a:txBody>
+                    <a:bodyPr/>
+                    <a:p>
+                      <a:pPr algn="ctr">
+                        <a:buNone/>
+                      </a:pPr>
+                      <a:r>
+                        <a:rPr lang="en-US" altLang="zh-CN" sz="1400">
+                          <a:latin typeface="Times New Roman" panose="02020603050405020304" charset="0"/>
+                          <a:cs typeface="Times New Roman" panose="02020603050405020304" charset="0"/>
+                        </a:rPr>
+                        <a:t>true_location</a:t>
+                      </a:r>
+                      <a:endParaRPr lang="en-US" altLang="zh-CN" sz="1400">
+                        <a:latin typeface="Times New Roman" panose="02020603050405020304" charset="0"/>
+                        <a:cs typeface="Times New Roman" panose="02020603050405020304" charset="0"/>
+                      </a:endParaRPr>
+                    </a:p>
+                  </a:txBody>
+                  <a:tcPr/>
+                </a:tc>
+                <a:tc>
+                  <a:txBody>
+                    <a:bodyPr/>
+                    <a:p>
+                      <a:pPr algn="ctr">
+                        <a:buNone/>
+                      </a:pPr>
+                      <a:r>
+                        <a:rPr lang="en-US" altLang="zh-CN" sz="1400">
+                          <a:latin typeface="Times New Roman" panose="02020603050405020304" charset="0"/>
+                          <a:cs typeface="Times New Roman" panose="02020603050405020304" charset="0"/>
+                        </a:rPr>
+                        <a:t>error</a:t>
+                      </a:r>
+                      <a:endParaRPr lang="en-US" altLang="zh-CN" sz="1400">
+                        <a:latin typeface="Times New Roman" panose="02020603050405020304" charset="0"/>
+                        <a:cs typeface="Times New Roman" panose="02020603050405020304" charset="0"/>
+                      </a:endParaRPr>
+                    </a:p>
+                  </a:txBody>
+                  <a:tcPr/>
+                </a:tc>
+                <a:tc>
+                  <a:txBody>
+                    <a:bodyPr/>
+                    <a:p>
+                      <a:pPr algn="ctr">
+                        <a:buNone/>
+                      </a:pPr>
+                      <a:r>
+                        <a:rPr lang="en-US" altLang="zh-CN" sz="1400">
+                          <a:latin typeface="Times New Roman" panose="02020603050405020304" charset="0"/>
+                          <a:cs typeface="Times New Roman" panose="02020603050405020304" charset="0"/>
+                        </a:rPr>
+                        <a:t>diff</a:t>
+                      </a:r>
+                      <a:endParaRPr lang="en-US" altLang="zh-CN" sz="1400">
+                        <a:latin typeface="Times New Roman" panose="02020603050405020304" charset="0"/>
+                        <a:cs typeface="Times New Roman" panose="02020603050405020304" charset="0"/>
+                      </a:endParaRPr>
+                    </a:p>
+                  </a:txBody>
+                  <a:tcPr/>
+                </a:tc>
+              </a:tr>
+              <a:tr h="365760">
+                <a:tc>
+                  <a:txBody>
+                    <a:bodyPr/>
+                    <a:p>
+                      <a:pPr algn="ctr">
+                        <a:buNone/>
+                      </a:pPr>
+                      <a:r>
+                        <a:rPr lang="en-US" altLang="zh-CN" sz="1400">
+                          <a:latin typeface="Times New Roman" panose="02020603050405020304" charset="0"/>
+                          <a:cs typeface="Times New Roman" panose="02020603050405020304" charset="0"/>
+                        </a:rPr>
+                        <a:t>1</a:t>
+                      </a:r>
+                      <a:endParaRPr lang="en-US" altLang="zh-CN" sz="1400">
+                        <a:latin typeface="Times New Roman" panose="02020603050405020304" charset="0"/>
+                        <a:cs typeface="Times New Roman" panose="02020603050405020304" charset="0"/>
+                      </a:endParaRPr>
+                    </a:p>
+                  </a:txBody>
+                  <a:tcPr/>
+                </a:tc>
+                <a:tc>
+                  <a:txBody>
+                    <a:bodyPr/>
+                    <a:p>
+                      <a:pPr algn="ctr">
+                        <a:buNone/>
+                      </a:pPr>
+                      <a:r>
+                        <a:rPr lang="en-US" altLang="zh-CN" sz="1400">
+                          <a:latin typeface="Times New Roman" panose="02020603050405020304" charset="0"/>
+                          <a:cs typeface="Times New Roman" panose="02020603050405020304" charset="0"/>
+                        </a:rPr>
+                        <a:t>(2.86, 2.68)</a:t>
+                      </a:r>
+                      <a:endParaRPr lang="en-US" altLang="zh-CN" sz="1400">
+                        <a:latin typeface="Times New Roman" panose="02020603050405020304" charset="0"/>
+                        <a:cs typeface="Times New Roman" panose="02020603050405020304" charset="0"/>
+                      </a:endParaRPr>
+                    </a:p>
+                  </a:txBody>
+                  <a:tcPr/>
+                </a:tc>
+                <a:tc>
+                  <a:txBody>
+                    <a:bodyPr/>
+                    <a:p>
+                      <a:pPr algn="ctr">
+                        <a:buNone/>
+                      </a:pPr>
+                      <a:r>
+                        <a:rPr lang="en-US" altLang="zh-CN" sz="1400">
+                          <a:latin typeface="Times New Roman" panose="02020603050405020304" charset="0"/>
+                          <a:cs typeface="Times New Roman" panose="02020603050405020304" charset="0"/>
+                        </a:rPr>
+                        <a:t>(3.00, 3.00)</a:t>
+                      </a:r>
+                      <a:endParaRPr lang="en-US" altLang="zh-CN" sz="1400">
+                        <a:latin typeface="Times New Roman" panose="02020603050405020304" charset="0"/>
+                        <a:cs typeface="Times New Roman" panose="02020603050405020304" charset="0"/>
+                      </a:endParaRPr>
+                    </a:p>
+                  </a:txBody>
+                  <a:tcPr/>
+                </a:tc>
+                <a:tc>
+                  <a:txBody>
+                    <a:bodyPr/>
+                    <a:p>
+                      <a:pPr algn="ctr">
+                        <a:buNone/>
+                      </a:pPr>
+                      <a:r>
+                        <a:rPr lang="en-US" altLang="zh-CN" sz="1400">
+                          <a:latin typeface="Times New Roman" panose="02020603050405020304" charset="0"/>
+                          <a:cs typeface="Times New Roman" panose="02020603050405020304" charset="0"/>
+                        </a:rPr>
+                        <a:t>0.35</a:t>
+                      </a:r>
+                      <a:endParaRPr lang="en-US" altLang="zh-CN" sz="1400">
+                        <a:latin typeface="Times New Roman" panose="02020603050405020304" charset="0"/>
+                        <a:cs typeface="Times New Roman" panose="02020603050405020304" charset="0"/>
+                      </a:endParaRPr>
+                    </a:p>
+                  </a:txBody>
+                  <a:tcPr/>
+                </a:tc>
+                <a:tc>
+                  <a:txBody>
+                    <a:bodyPr/>
+                    <a:p>
+                      <a:pPr algn="ctr">
+                        <a:buNone/>
+                      </a:pPr>
+                      <a:r>
+                        <a:rPr lang="en-US" altLang="zh-CN" sz="1400">
+                          <a:latin typeface="Times New Roman" panose="02020603050405020304" charset="0"/>
+                          <a:cs typeface="Times New Roman" panose="02020603050405020304" charset="0"/>
+                        </a:rPr>
+                        <a:t>-0.04</a:t>
+                      </a:r>
+                      <a:endParaRPr lang="en-US" altLang="zh-CN" sz="1400">
+                        <a:latin typeface="Times New Roman" panose="02020603050405020304" charset="0"/>
+                        <a:cs typeface="Times New Roman" panose="02020603050405020304" charset="0"/>
+                      </a:endParaRPr>
+                    </a:p>
+                  </a:txBody>
+                  <a:tcPr/>
+                </a:tc>
+              </a:tr>
+              <a:tr h="365760">
+                <a:tc>
+                  <a:txBody>
+                    <a:bodyPr/>
+                    <a:p>
+                      <a:pPr algn="ctr">
+                        <a:buNone/>
+                      </a:pPr>
+                      <a:r>
+                        <a:rPr lang="en-US" altLang="zh-CN" sz="1400">
+                          <a:latin typeface="Times New Roman" panose="02020603050405020304" charset="0"/>
+                          <a:cs typeface="Times New Roman" panose="02020603050405020304" charset="0"/>
+                        </a:rPr>
+                        <a:t>2</a:t>
+                      </a:r>
+                      <a:endParaRPr lang="en-US" altLang="zh-CN" sz="1400">
+                        <a:latin typeface="Times New Roman" panose="02020603050405020304" charset="0"/>
+                        <a:cs typeface="Times New Roman" panose="02020603050405020304" charset="0"/>
+                      </a:endParaRPr>
+                    </a:p>
+                  </a:txBody>
+                  <a:tcPr/>
+                </a:tc>
+                <a:tc>
+                  <a:txBody>
+                    <a:bodyPr/>
+                    <a:p>
+                      <a:pPr algn="ctr">
+                        <a:buNone/>
+                      </a:pPr>
+                      <a:r>
+                        <a:rPr lang="en-US" altLang="zh-CN" sz="1400">
+                          <a:latin typeface="Times New Roman" panose="02020603050405020304" charset="0"/>
+                          <a:cs typeface="Times New Roman" panose="02020603050405020304" charset="0"/>
+                        </a:rPr>
+                        <a:t>(1.96, 0.24)</a:t>
+                      </a:r>
+                      <a:endParaRPr lang="en-US" altLang="zh-CN" sz="1400">
+                        <a:latin typeface="Times New Roman" panose="02020603050405020304" charset="0"/>
+                        <a:cs typeface="Times New Roman" panose="02020603050405020304" charset="0"/>
+                      </a:endParaRPr>
+                    </a:p>
+                  </a:txBody>
+                  <a:tcPr/>
+                </a:tc>
+                <a:tc>
+                  <a:txBody>
+                    <a:bodyPr/>
+                    <a:p>
+                      <a:pPr algn="ctr">
+                        <a:buNone/>
+                      </a:pPr>
+                      <a:r>
+                        <a:rPr lang="en-US" altLang="zh-CN" sz="1400">
+                          <a:latin typeface="Times New Roman" panose="02020603050405020304" charset="0"/>
+                          <a:cs typeface="Times New Roman" panose="02020603050405020304" charset="0"/>
+                        </a:rPr>
+                        <a:t>(2.00, 0.00)</a:t>
+                      </a:r>
+                      <a:endParaRPr lang="en-US" altLang="zh-CN" sz="1400">
+                        <a:latin typeface="Times New Roman" panose="02020603050405020304" charset="0"/>
+                        <a:cs typeface="Times New Roman" panose="02020603050405020304" charset="0"/>
+                      </a:endParaRPr>
+                    </a:p>
+                  </a:txBody>
+                  <a:tcPr/>
+                </a:tc>
+                <a:tc>
+                  <a:txBody>
+                    <a:bodyPr/>
+                    <a:p>
+                      <a:pPr algn="ctr">
+                        <a:buNone/>
+                      </a:pPr>
+                      <a:r>
+                        <a:rPr lang="en-US" altLang="zh-CN" sz="1400">
+                          <a:latin typeface="Times New Roman" panose="02020603050405020304" charset="0"/>
+                          <a:cs typeface="Times New Roman" panose="02020603050405020304" charset="0"/>
+                        </a:rPr>
+                        <a:t>0.24</a:t>
+                      </a:r>
+                      <a:endParaRPr lang="en-US" altLang="zh-CN" sz="1400">
+                        <a:latin typeface="Times New Roman" panose="02020603050405020304" charset="0"/>
+                        <a:cs typeface="Times New Roman" panose="02020603050405020304" charset="0"/>
+                      </a:endParaRPr>
+                    </a:p>
+                  </a:txBody>
+                  <a:tcPr/>
+                </a:tc>
+                <a:tc>
+                  <a:txBody>
+                    <a:bodyPr/>
+                    <a:p>
+                      <a:pPr algn="ctr">
+                        <a:buNone/>
+                      </a:pPr>
+                      <a:r>
+                        <a:rPr lang="en-US" altLang="zh-CN" sz="1400">
+                          <a:solidFill>
+                            <a:srgbClr val="C00000"/>
+                          </a:solidFill>
+                          <a:latin typeface="Times New Roman" panose="02020603050405020304" charset="0"/>
+                          <a:cs typeface="Times New Roman" panose="02020603050405020304" charset="0"/>
+                        </a:rPr>
+                        <a:t>+0.10</a:t>
+                      </a:r>
+                      <a:endParaRPr lang="en-US" altLang="zh-CN" sz="1400">
+                        <a:solidFill>
+                          <a:srgbClr val="C00000"/>
+                        </a:solidFill>
+                        <a:latin typeface="Times New Roman" panose="02020603050405020304" charset="0"/>
+                        <a:cs typeface="Times New Roman" panose="02020603050405020304" charset="0"/>
+                      </a:endParaRPr>
+                    </a:p>
+                  </a:txBody>
+                  <a:tcPr/>
+                </a:tc>
+              </a:tr>
+              <a:tr h="365760">
+                <a:tc>
+                  <a:txBody>
+                    <a:bodyPr/>
+                    <a:p>
+                      <a:pPr algn="ctr">
+                        <a:buNone/>
+                      </a:pPr>
+                      <a:r>
+                        <a:rPr lang="en-US" altLang="zh-CN" sz="1400">
+                          <a:latin typeface="Times New Roman" panose="02020603050405020304" charset="0"/>
+                          <a:cs typeface="Times New Roman" panose="02020603050405020304" charset="0"/>
+                        </a:rPr>
+                        <a:t>3</a:t>
+                      </a:r>
+                      <a:endParaRPr lang="en-US" altLang="zh-CN" sz="1400">
+                        <a:latin typeface="Times New Roman" panose="02020603050405020304" charset="0"/>
+                        <a:cs typeface="Times New Roman" panose="02020603050405020304" charset="0"/>
+                      </a:endParaRPr>
+                    </a:p>
+                  </a:txBody>
+                  <a:tcPr/>
+                </a:tc>
+                <a:tc>
+                  <a:txBody>
+                    <a:bodyPr/>
+                    <a:p>
+                      <a:pPr algn="ctr">
+                        <a:buNone/>
+                      </a:pPr>
+                      <a:r>
+                        <a:rPr lang="en-US" altLang="zh-CN" sz="1400">
+                          <a:latin typeface="Times New Roman" panose="02020603050405020304" charset="0"/>
+                          <a:cs typeface="Times New Roman" panose="02020603050405020304" charset="0"/>
+                        </a:rPr>
+                        <a:t>(7.13, 4.07)</a:t>
+                      </a:r>
+                      <a:endParaRPr lang="en-US" altLang="zh-CN" sz="1400">
+                        <a:latin typeface="Times New Roman" panose="02020603050405020304" charset="0"/>
+                        <a:cs typeface="Times New Roman" panose="02020603050405020304" charset="0"/>
+                      </a:endParaRPr>
+                    </a:p>
+                  </a:txBody>
+                  <a:tcPr/>
+                </a:tc>
+                <a:tc>
+                  <a:txBody>
+                    <a:bodyPr/>
+                    <a:p>
+                      <a:pPr algn="ctr">
+                        <a:buNone/>
+                      </a:pPr>
+                      <a:r>
+                        <a:rPr lang="en-US" altLang="zh-CN" sz="1400">
+                          <a:latin typeface="Times New Roman" panose="02020603050405020304" charset="0"/>
+                          <a:cs typeface="Times New Roman" panose="02020603050405020304" charset="0"/>
+                        </a:rPr>
+                        <a:t>(7.00, 4.00)</a:t>
+                      </a:r>
+                      <a:endParaRPr lang="en-US" altLang="zh-CN" sz="1400">
+                        <a:latin typeface="Times New Roman" panose="02020603050405020304" charset="0"/>
+                        <a:cs typeface="Times New Roman" panose="02020603050405020304" charset="0"/>
+                      </a:endParaRPr>
+                    </a:p>
+                  </a:txBody>
+                  <a:tcPr/>
+                </a:tc>
+                <a:tc>
+                  <a:txBody>
+                    <a:bodyPr/>
+                    <a:p>
+                      <a:pPr algn="ctr">
+                        <a:buNone/>
+                      </a:pPr>
+                      <a:r>
+                        <a:rPr lang="en-US" altLang="zh-CN" sz="1400">
+                          <a:latin typeface="Times New Roman" panose="02020603050405020304" charset="0"/>
+                          <a:cs typeface="Times New Roman" panose="02020603050405020304" charset="0"/>
+                        </a:rPr>
+                        <a:t>0.15</a:t>
+                      </a:r>
+                      <a:endParaRPr lang="en-US" altLang="zh-CN" sz="1400">
+                        <a:latin typeface="Times New Roman" panose="02020603050405020304" charset="0"/>
+                        <a:cs typeface="Times New Roman" panose="02020603050405020304" charset="0"/>
+                      </a:endParaRPr>
+                    </a:p>
+                  </a:txBody>
+                  <a:tcPr/>
+                </a:tc>
+                <a:tc>
+                  <a:txBody>
+                    <a:bodyPr/>
+                    <a:p>
+                      <a:pPr algn="ctr">
+                        <a:buNone/>
+                      </a:pPr>
+                      <a:r>
+                        <a:rPr lang="en-US" altLang="zh-CN" sz="1400">
+                          <a:solidFill>
+                            <a:srgbClr val="C00000"/>
+                          </a:solidFill>
+                          <a:latin typeface="Times New Roman" panose="02020603050405020304" charset="0"/>
+                          <a:cs typeface="Times New Roman" panose="02020603050405020304" charset="0"/>
+                        </a:rPr>
+                        <a:t>+0.22</a:t>
+                      </a:r>
+                      <a:endParaRPr lang="en-US" altLang="zh-CN" sz="1400">
+                        <a:solidFill>
+                          <a:srgbClr val="C00000"/>
+                        </a:solidFill>
+                        <a:latin typeface="Times New Roman" panose="02020603050405020304" charset="0"/>
+                        <a:cs typeface="Times New Roman" panose="02020603050405020304" charset="0"/>
+                      </a:endParaRPr>
+                    </a:p>
+                  </a:txBody>
+                  <a:tcPr/>
+                </a:tc>
+              </a:tr>
+              <a:tr h="365760">
+                <a:tc>
+                  <a:txBody>
+                    <a:bodyPr/>
+                    <a:p>
+                      <a:pPr algn="ctr">
+                        <a:buNone/>
+                      </a:pPr>
+                      <a:r>
+                        <a:rPr lang="en-US" altLang="zh-CN" sz="1400">
+                          <a:latin typeface="Times New Roman" panose="02020603050405020304" charset="0"/>
+                          <a:cs typeface="Times New Roman" panose="02020603050405020304" charset="0"/>
+                        </a:rPr>
+                        <a:t>4</a:t>
+                      </a:r>
+                      <a:endParaRPr lang="en-US" altLang="zh-CN" sz="1400">
+                        <a:latin typeface="Times New Roman" panose="02020603050405020304" charset="0"/>
+                        <a:cs typeface="Times New Roman" panose="02020603050405020304" charset="0"/>
+                      </a:endParaRPr>
+                    </a:p>
+                  </a:txBody>
+                  <a:tcPr/>
+                </a:tc>
+                <a:tc>
+                  <a:txBody>
+                    <a:bodyPr/>
+                    <a:p>
+                      <a:pPr algn="ctr">
+                        <a:buNone/>
+                      </a:pPr>
+                      <a:r>
+                        <a:rPr lang="en-US" altLang="zh-CN" sz="1400">
+                          <a:latin typeface="Times New Roman" panose="02020603050405020304" charset="0"/>
+                          <a:cs typeface="Times New Roman" panose="02020603050405020304" charset="0"/>
+                        </a:rPr>
+                        <a:t>(2.37, 7.03)</a:t>
+                      </a:r>
+                      <a:endParaRPr lang="en-US" altLang="zh-CN" sz="1400">
+                        <a:latin typeface="Times New Roman" panose="02020603050405020304" charset="0"/>
+                        <a:cs typeface="Times New Roman" panose="02020603050405020304" charset="0"/>
+                      </a:endParaRPr>
+                    </a:p>
+                  </a:txBody>
+                  <a:tcPr/>
+                </a:tc>
+                <a:tc>
+                  <a:txBody>
+                    <a:bodyPr/>
+                    <a:p>
+                      <a:pPr algn="ctr">
+                        <a:buNone/>
+                      </a:pPr>
+                      <a:r>
+                        <a:rPr lang="en-US" altLang="zh-CN" sz="1400">
+                          <a:latin typeface="Times New Roman" panose="02020603050405020304" charset="0"/>
+                          <a:cs typeface="Times New Roman" panose="02020603050405020304" charset="0"/>
+                        </a:rPr>
+                        <a:t>(2.50, 7.00)</a:t>
+                      </a:r>
+                      <a:endParaRPr lang="en-US" altLang="zh-CN" sz="1400">
+                        <a:latin typeface="Times New Roman" panose="02020603050405020304" charset="0"/>
+                        <a:cs typeface="Times New Roman" panose="02020603050405020304" charset="0"/>
+                      </a:endParaRPr>
+                    </a:p>
+                  </a:txBody>
+                  <a:tcPr/>
+                </a:tc>
+                <a:tc>
+                  <a:txBody>
+                    <a:bodyPr/>
+                    <a:p>
+                      <a:pPr algn="ctr">
+                        <a:buNone/>
+                      </a:pPr>
+                      <a:r>
+                        <a:rPr lang="en-US" altLang="zh-CN" sz="1400">
+                          <a:latin typeface="Times New Roman" panose="02020603050405020304" charset="0"/>
+                          <a:cs typeface="Times New Roman" panose="02020603050405020304" charset="0"/>
+                        </a:rPr>
+                        <a:t>0.14</a:t>
+                      </a:r>
+                      <a:endParaRPr lang="en-US" altLang="zh-CN" sz="1400">
+                        <a:latin typeface="Times New Roman" panose="02020603050405020304" charset="0"/>
+                        <a:cs typeface="Times New Roman" panose="02020603050405020304" charset="0"/>
+                      </a:endParaRPr>
+                    </a:p>
+                  </a:txBody>
+                  <a:tcPr/>
+                </a:tc>
+                <a:tc>
+                  <a:txBody>
+                    <a:bodyPr/>
+                    <a:p>
+                      <a:pPr algn="ctr">
+                        <a:buNone/>
+                      </a:pPr>
+                      <a:r>
+                        <a:rPr lang="en-US" altLang="zh-CN" sz="1400">
+                          <a:solidFill>
+                            <a:srgbClr val="C00000"/>
+                          </a:solidFill>
+                          <a:latin typeface="Times New Roman" panose="02020603050405020304" charset="0"/>
+                          <a:cs typeface="Times New Roman" panose="02020603050405020304" charset="0"/>
+                        </a:rPr>
+                        <a:t>+0.12</a:t>
+                      </a:r>
+                      <a:endParaRPr lang="en-US" altLang="zh-CN" sz="1400">
+                        <a:solidFill>
+                          <a:srgbClr val="C00000"/>
+                        </a:solidFill>
+                        <a:latin typeface="Times New Roman" panose="02020603050405020304" charset="0"/>
+                        <a:cs typeface="Times New Roman" panose="02020603050405020304" charset="0"/>
+                      </a:endParaRPr>
+                    </a:p>
+                  </a:txBody>
+                  <a:tcPr/>
+                </a:tc>
+              </a:tr>
+              <a:tr h="365760">
+                <a:tc>
+                  <a:txBody>
+                    <a:bodyPr/>
+                    <a:p>
+                      <a:pPr algn="ctr">
+                        <a:buNone/>
+                      </a:pPr>
+                      <a:r>
+                        <a:rPr lang="en-US" altLang="zh-CN" sz="1400">
+                          <a:solidFill>
+                            <a:schemeClr val="tx1"/>
+                          </a:solidFill>
+                          <a:latin typeface="Times New Roman" panose="02020603050405020304" charset="0"/>
+                          <a:cs typeface="Times New Roman" panose="02020603050405020304" charset="0"/>
+                        </a:rPr>
+                        <a:t>5</a:t>
+                      </a:r>
+                      <a:endParaRPr lang="en-US" altLang="zh-CN" sz="1400">
+                        <a:solidFill>
+                          <a:schemeClr val="tx1"/>
+                        </a:solidFill>
+                        <a:latin typeface="Times New Roman" panose="02020603050405020304" charset="0"/>
+                        <a:cs typeface="Times New Roman" panose="02020603050405020304" charset="0"/>
+                      </a:endParaRPr>
+                    </a:p>
+                  </a:txBody>
+                  <a:tcPr/>
+                </a:tc>
+                <a:tc>
+                  <a:txBody>
+                    <a:bodyPr/>
+                    <a:p>
+                      <a:pPr algn="ctr">
+                        <a:buNone/>
+                      </a:pPr>
+                      <a:r>
+                        <a:rPr lang="en-US" altLang="zh-CN" sz="1400">
+                          <a:solidFill>
+                            <a:schemeClr val="tx1"/>
+                          </a:solidFill>
+                          <a:latin typeface="Times New Roman" panose="02020603050405020304" charset="0"/>
+                          <a:cs typeface="Times New Roman" panose="02020603050405020304" charset="0"/>
+                        </a:rPr>
+                        <a:t>(5.50, 8.04)</a:t>
+                      </a:r>
+                      <a:endParaRPr lang="en-US" altLang="zh-CN" sz="1400">
+                        <a:solidFill>
+                          <a:schemeClr val="tx1"/>
+                        </a:solidFill>
+                        <a:latin typeface="Times New Roman" panose="02020603050405020304" charset="0"/>
+                        <a:cs typeface="Times New Roman" panose="02020603050405020304" charset="0"/>
+                      </a:endParaRPr>
+                    </a:p>
+                  </a:txBody>
+                  <a:tcPr/>
+                </a:tc>
+                <a:tc>
+                  <a:txBody>
+                    <a:bodyPr/>
+                    <a:p>
+                      <a:pPr algn="ctr">
+                        <a:buNone/>
+                      </a:pPr>
+                      <a:r>
+                        <a:rPr lang="en-US" altLang="zh-CN" sz="1400">
+                          <a:solidFill>
+                            <a:schemeClr val="tx1"/>
+                          </a:solidFill>
+                          <a:latin typeface="Times New Roman" panose="02020603050405020304" charset="0"/>
+                          <a:cs typeface="Times New Roman" panose="02020603050405020304" charset="0"/>
+                        </a:rPr>
+                        <a:t>(6.00, 8.00)</a:t>
+                      </a:r>
+                      <a:endParaRPr lang="en-US" altLang="zh-CN" sz="1400">
+                        <a:solidFill>
+                          <a:schemeClr val="tx1"/>
+                        </a:solidFill>
+                        <a:latin typeface="Times New Roman" panose="02020603050405020304" charset="0"/>
+                        <a:cs typeface="Times New Roman" panose="02020603050405020304" charset="0"/>
+                      </a:endParaRPr>
+                    </a:p>
+                  </a:txBody>
+                  <a:tcPr/>
+                </a:tc>
+                <a:tc>
+                  <a:txBody>
+                    <a:bodyPr/>
+                    <a:p>
+                      <a:pPr algn="ctr">
+                        <a:buNone/>
+                      </a:pPr>
+                      <a:r>
+                        <a:rPr lang="en-US" altLang="zh-CN" sz="1400">
+                          <a:solidFill>
+                            <a:schemeClr val="tx1"/>
+                          </a:solidFill>
+                          <a:latin typeface="Times New Roman" panose="02020603050405020304" charset="0"/>
+                          <a:cs typeface="Times New Roman" panose="02020603050405020304" charset="0"/>
+                        </a:rPr>
+                        <a:t>0.50</a:t>
+                      </a:r>
+                      <a:endParaRPr lang="en-US" altLang="zh-CN" sz="1400">
+                        <a:solidFill>
+                          <a:schemeClr val="tx1"/>
+                        </a:solidFill>
+                        <a:latin typeface="Times New Roman" panose="02020603050405020304" charset="0"/>
+                        <a:cs typeface="Times New Roman" panose="02020603050405020304" charset="0"/>
+                      </a:endParaRPr>
+                    </a:p>
+                  </a:txBody>
+                  <a:tcPr/>
+                </a:tc>
+                <a:tc>
+                  <a:txBody>
+                    <a:bodyPr/>
+                    <a:p>
+                      <a:pPr algn="ctr">
+                        <a:buNone/>
+                      </a:pPr>
+                      <a:r>
+                        <a:rPr lang="en-US" altLang="zh-CN" sz="1400">
+                          <a:solidFill>
+                            <a:srgbClr val="C00000"/>
+                          </a:solidFill>
+                          <a:latin typeface="Times New Roman" panose="02020603050405020304" charset="0"/>
+                          <a:cs typeface="Times New Roman" panose="02020603050405020304" charset="0"/>
+                        </a:rPr>
+                        <a:t>+0.25</a:t>
+                      </a:r>
+                      <a:endParaRPr lang="en-US" altLang="zh-CN" sz="1400">
+                        <a:solidFill>
+                          <a:srgbClr val="C00000"/>
+                        </a:solidFill>
+                        <a:latin typeface="Times New Roman" panose="02020603050405020304" charset="0"/>
+                        <a:cs typeface="Times New Roman" panose="02020603050405020304" charset="0"/>
+                      </a:endParaRPr>
+                    </a:p>
+                  </a:txBody>
+                  <a:tcPr/>
+                </a:tc>
+              </a:tr>
+              <a:tr h="365760">
+                <a:tc>
+                  <a:txBody>
+                    <a:bodyPr/>
+                    <a:p>
+                      <a:pPr algn="ctr">
+                        <a:buNone/>
+                      </a:pPr>
+                      <a:r>
+                        <a:rPr lang="en-US" altLang="zh-CN" sz="1400">
+                          <a:latin typeface="Times New Roman" panose="02020603050405020304" charset="0"/>
+                          <a:cs typeface="Times New Roman" panose="02020603050405020304" charset="0"/>
+                        </a:rPr>
+                        <a:t>6</a:t>
+                      </a:r>
+                      <a:endParaRPr lang="en-US" altLang="zh-CN" sz="1400">
+                        <a:latin typeface="Times New Roman" panose="02020603050405020304" charset="0"/>
+                        <a:cs typeface="Times New Roman" panose="02020603050405020304" charset="0"/>
+                      </a:endParaRPr>
+                    </a:p>
+                  </a:txBody>
+                  <a:tcPr/>
+                </a:tc>
+                <a:tc>
+                  <a:txBody>
+                    <a:bodyPr/>
+                    <a:p>
+                      <a:pPr algn="ctr">
+                        <a:buNone/>
+                      </a:pPr>
+                      <a:r>
+                        <a:rPr lang="en-US" altLang="zh-CN" sz="1400">
+                          <a:latin typeface="Times New Roman" panose="02020603050405020304" charset="0"/>
+                          <a:cs typeface="Times New Roman" panose="02020603050405020304" charset="0"/>
+                        </a:rPr>
+                        <a:t>(7.78, 7.46)</a:t>
+                      </a:r>
+                      <a:endParaRPr lang="en-US" altLang="zh-CN" sz="1400">
+                        <a:latin typeface="Times New Roman" panose="02020603050405020304" charset="0"/>
+                        <a:cs typeface="Times New Roman" panose="02020603050405020304" charset="0"/>
+                      </a:endParaRPr>
+                    </a:p>
+                  </a:txBody>
+                  <a:tcPr/>
+                </a:tc>
+                <a:tc>
+                  <a:txBody>
+                    <a:bodyPr/>
+                    <a:p>
+                      <a:pPr algn="ctr">
+                        <a:buNone/>
+                      </a:pPr>
+                      <a:r>
+                        <a:rPr lang="en-US" altLang="zh-CN" sz="1400">
+                          <a:latin typeface="Times New Roman" panose="02020603050405020304" charset="0"/>
+                          <a:cs typeface="Times New Roman" panose="02020603050405020304" charset="0"/>
+                        </a:rPr>
+                        <a:t>(8.00, 7.50)</a:t>
+                      </a:r>
+                      <a:endParaRPr lang="en-US" altLang="zh-CN" sz="1400">
+                        <a:latin typeface="Times New Roman" panose="02020603050405020304" charset="0"/>
+                        <a:cs typeface="Times New Roman" panose="02020603050405020304" charset="0"/>
+                      </a:endParaRPr>
+                    </a:p>
+                  </a:txBody>
+                  <a:tcPr/>
+                </a:tc>
+                <a:tc>
+                  <a:txBody>
+                    <a:bodyPr/>
+                    <a:p>
+                      <a:pPr algn="ctr">
+                        <a:buNone/>
+                      </a:pPr>
+                      <a:r>
+                        <a:rPr lang="en-US" altLang="zh-CN" sz="1400">
+                          <a:latin typeface="Times New Roman" panose="02020603050405020304" charset="0"/>
+                          <a:cs typeface="Times New Roman" panose="02020603050405020304" charset="0"/>
+                        </a:rPr>
+                        <a:t>0.23</a:t>
+                      </a:r>
+                      <a:endParaRPr lang="en-US" altLang="zh-CN" sz="1400">
+                        <a:latin typeface="Times New Roman" panose="02020603050405020304" charset="0"/>
+                        <a:cs typeface="Times New Roman" panose="02020603050405020304" charset="0"/>
+                      </a:endParaRPr>
+                    </a:p>
+                  </a:txBody>
+                  <a:tcPr/>
+                </a:tc>
+                <a:tc>
+                  <a:txBody>
+                    <a:bodyPr/>
+                    <a:p>
+                      <a:pPr algn="ctr">
+                        <a:buNone/>
+                      </a:pPr>
+                      <a:r>
+                        <a:rPr lang="en-US" altLang="zh-CN" sz="1400">
+                          <a:solidFill>
+                            <a:srgbClr val="C00000"/>
+                          </a:solidFill>
+                          <a:latin typeface="Times New Roman" panose="02020603050405020304" charset="0"/>
+                          <a:cs typeface="Times New Roman" panose="02020603050405020304" charset="0"/>
+                        </a:rPr>
+                        <a:t>+0.13</a:t>
+                      </a:r>
+                      <a:endParaRPr lang="en-US" altLang="zh-CN" sz="1400">
+                        <a:solidFill>
+                          <a:srgbClr val="C00000"/>
+                        </a:solidFill>
+                        <a:latin typeface="Times New Roman" panose="02020603050405020304" charset="0"/>
+                        <a:cs typeface="Times New Roman" panose="02020603050405020304" charset="0"/>
+                      </a:endParaRPr>
+                    </a:p>
+                  </a:txBody>
+                  <a:tcPr/>
+                </a:tc>
+              </a:tr>
+            </a:tbl>
+          </a:graphicData>
+        </a:graphic>
+      </p:graphicFrame>
+      <p:pic>
+        <p:nvPicPr>
+          <p:cNvPr id="6" name="图片 5" descr="localization_20MHz_sequential"/>
+          <p:cNvPicPr>
+            <a:picLocks noChangeAspect="1"/>
+          </p:cNvPicPr>
+          <p:nvPr/>
+        </p:nvPicPr>
+        <p:blipFill>
+          <a:blip r:embed="rId1"/>
+          <a:stretch>
+            <a:fillRect/>
+          </a:stretch>
+        </p:blipFill>
+        <p:spPr>
+          <a:xfrm>
+            <a:off x="477520" y="504825"/>
+            <a:ext cx="3683000" cy="2946400"/>
+          </a:xfrm>
+          <a:prstGeom prst="rect">
+            <a:avLst/>
+          </a:prstGeom>
+        </p:spPr>
+      </p:pic>
+      <p:pic>
+        <p:nvPicPr>
+          <p:cNvPr id="9" name="图片 8" descr="localization_dnn_20MHz_sequential"/>
+          <p:cNvPicPr>
+            <a:picLocks noChangeAspect="1"/>
+          </p:cNvPicPr>
+          <p:nvPr/>
+        </p:nvPicPr>
+        <p:blipFill>
+          <a:blip r:embed="rId2"/>
+          <a:stretch>
+            <a:fillRect/>
+          </a:stretch>
+        </p:blipFill>
+        <p:spPr>
+          <a:xfrm>
+            <a:off x="500380" y="490855"/>
+            <a:ext cx="3783965" cy="3027680"/>
+          </a:xfrm>
+          <a:prstGeom prst="rect">
+            <a:avLst/>
+          </a:prstGeom>
+        </p:spPr>
+      </p:pic>
+      <p:pic>
+        <p:nvPicPr>
+          <p:cNvPr id="10" name="图片 9" descr="localization_dnn_20MHz_optimized"/>
+          <p:cNvPicPr>
+            <a:picLocks noChangeAspect="1"/>
+          </p:cNvPicPr>
+          <p:nvPr/>
+        </p:nvPicPr>
+        <p:blipFill>
+          <a:blip r:embed="rId3"/>
+          <a:stretch>
+            <a:fillRect/>
+          </a:stretch>
+        </p:blipFill>
+        <p:spPr>
+          <a:xfrm>
+            <a:off x="445135" y="3524885"/>
+            <a:ext cx="3874770" cy="3100705"/>
+          </a:xfrm>
+          <a:prstGeom prst="rect">
+            <a:avLst/>
+          </a:prstGeom>
+        </p:spPr>
+      </p:pic>
+    </p:spTree>
+  </p:cSld>
+  <p:clrMapOvr>
+    <a:masterClrMapping/>
+  </p:clrMapOvr>
+</p:sld>
+</file>
+
+<file path=ppt/slides/slide11.xml><?xml version="1.0" encoding="utf-8"?>
+<p:sld xmlns:a="http://schemas.openxmlformats.org/drawingml/2006/main" xmlns:r="http://schemas.openxmlformats.org/officeDocument/2006/relationships" xmlns:p="http://schemas.openxmlformats.org/presentationml/2006/main">
+  <p:cSld>
+    <p:spTree>
+      <p:nvGrpSpPr>
+        <p:cNvPr id="1" name=""/>
+        <p:cNvGrpSpPr/>
+        <p:nvPr/>
+      </p:nvGrpSpPr>
+      <p:grpSpPr>
+        <a:xfrm>
+          <a:off x="0" y="0"/>
+          <a:ext cx="0" cy="0"/>
+          <a:chOff x="0" y="0"/>
+          <a:chExt cx="0" cy="0"/>
+        </a:xfrm>
+      </p:grpSpPr>
+      <p:sp>
+        <p:nvSpPr>
+          <p:cNvPr id="2" name="Rectangle 1"/>
+          <p:cNvSpPr/>
+          <p:nvPr/>
+        </p:nvSpPr>
+        <p:spPr>
+          <a:xfrm>
+            <a:off x="838200" y="1794649"/>
+            <a:ext cx="10766715" cy="583565"/>
+          </a:xfrm>
+          <a:prstGeom prst="rect">
+            <a:avLst/>
+          </a:prstGeom>
+        </p:spPr>
+        <p:txBody>
+          <a:bodyPr wrap="square">
+            <a:spAutoFit/>
+          </a:bodyPr>
+          <a:lstStyle/>
+          <a:p>
+            <a:pPr marL="457200" indent="-457200">
+              <a:buFont typeface="Arial" panose="020B0604020202020204" pitchFamily="34" charset="0"/>
+              <a:buChar char="•"/>
+              <a:defRPr/>
+            </a:pPr>
+            <a:endParaRPr lang="en-US" altLang="zh-CN" sz="3200" dirty="0">
+              <a:latin typeface="Kaiti TC" panose="02010600040101010101" pitchFamily="2" charset="-120"/>
+              <a:ea typeface="Kaiti TC" panose="02010600040101010101" pitchFamily="2" charset="-120"/>
+            </a:endParaRPr>
+          </a:p>
+        </p:txBody>
+      </p:sp>
+      <p:sp>
+        <p:nvSpPr>
+          <p:cNvPr id="7" name="Title 2"/>
+          <p:cNvSpPr txBox="1"/>
+          <p:nvPr/>
+        </p:nvSpPr>
+        <p:spPr>
+          <a:xfrm>
+            <a:off x="265430" y="-167640"/>
+            <a:ext cx="10261600" cy="1082040"/>
+          </a:xfrm>
+          <a:prstGeom prst="rect">
+            <a:avLst/>
+          </a:prstGeom>
+        </p:spPr>
+        <p:txBody>
+          <a:bodyPr vert="horz" lIns="91440" tIns="45720" rIns="91440" bIns="45720" rtlCol="0" anchor="ctr">
+            <a:normAutofit/>
+          </a:bodyPr>
+          <a:lstStyle>
+            <a:lvl1pPr algn="l" defTabSz="914400" rtl="0" eaLnBrk="1" latinLnBrk="0" hangingPunct="1">
+              <a:lnSpc>
+                <a:spcPct val="90000"/>
+              </a:lnSpc>
+              <a:spcBef>
+                <a:spcPct val="0"/>
+              </a:spcBef>
+              <a:buNone/>
+              <a:defRPr sz="6000" kern="1200">
+                <a:solidFill>
+                  <a:srgbClr val="DD613B"/>
+                </a:solidFill>
+                <a:latin typeface="+mj-lt"/>
+                <a:ea typeface="+mj-ea"/>
+                <a:cs typeface="+mj-cs"/>
+              </a:defRPr>
+            </a:lvl1pPr>
+          </a:lstStyle>
+          <a:p>
+            <a:r>
+              <a:rPr lang="en-US" altLang="zh-CN" sz="4000" dirty="0" err="1">
+                <a:latin typeface="Times New Roman" panose="02020603050405020304" charset="0"/>
+                <a:ea typeface="微软雅黑" panose="020B0503020204020204" charset="-122"/>
+                <a:cs typeface="Times New Roman" panose="02020603050405020304" charset="0"/>
+                <a:sym typeface="+mn-ea"/>
+              </a:rPr>
+              <a:t>Simulation(Transformer)</a:t>
+            </a:r>
+            <a:endParaRPr lang="en-US" altLang="zh-CN" sz="4000" dirty="0" err="1">
+              <a:latin typeface="Times New Roman" panose="02020603050405020304" charset="0"/>
+              <a:ea typeface="微软雅黑" panose="020B0503020204020204" charset="-122"/>
+              <a:cs typeface="Times New Roman" panose="02020603050405020304" charset="0"/>
+              <a:sym typeface="+mn-ea"/>
+            </a:endParaRPr>
+          </a:p>
+        </p:txBody>
+      </p:sp>
+      <p:sp>
+        <p:nvSpPr>
+          <p:cNvPr id="31" name="文本框 30"/>
+          <p:cNvSpPr txBox="1"/>
+          <p:nvPr/>
+        </p:nvSpPr>
+        <p:spPr>
+          <a:xfrm>
+            <a:off x="10124440" y="2334895"/>
+            <a:ext cx="2009140" cy="953135"/>
+          </a:xfrm>
+          <a:prstGeom prst="rect">
+            <a:avLst/>
+          </a:prstGeom>
+        </p:spPr>
+        <p:txBody>
+          <a:bodyPr wrap="square">
+            <a:spAutoFit/>
+            <a:extLst>
+              <a:ext uri="{4A0BC546-FE56-4ADE-93B0-CB8AF2F6F144}">
+                <wpsdc:textFrameExt xmlns:wpsdc="http://www.wps.cn/officeDocument/2022/drawingmlCustomData" type="text"/>
+              </a:ext>
+            </a:extLst>
+          </a:bodyPr>
+          <a:p>
+            <a:pPr algn="l"/>
+            <a:r>
+              <a:rPr lang="en-US" altLang="zh-CN" sz="1400" b="1">
+                <a:latin typeface="Times New Roman" panose="02020603050405020304" charset="0"/>
+                <a:ea typeface="微软雅黑" panose="020B0503020204020204" charset="-122"/>
+                <a:cs typeface="Times New Roman" panose="02020603050405020304" charset="0"/>
+              </a:rPr>
+              <a:t>With multi-hop mechnisim(before </a:t>
+            </a:r>
+            <a:endParaRPr lang="en-US" altLang="zh-CN" sz="1400" b="1">
+              <a:latin typeface="Times New Roman" panose="02020603050405020304" charset="0"/>
+              <a:ea typeface="微软雅黑" panose="020B0503020204020204" charset="-122"/>
+              <a:cs typeface="Times New Roman" panose="02020603050405020304" charset="0"/>
+            </a:endParaRPr>
+          </a:p>
+          <a:p>
+            <a:pPr algn="l"/>
+            <a:r>
+              <a:rPr lang="en-US" altLang="zh-CN" sz="1400" b="1">
+                <a:latin typeface="Times New Roman" panose="02020603050405020304" charset="0"/>
+                <a:ea typeface="微软雅黑" panose="020B0503020204020204" charset="-122"/>
+                <a:cs typeface="Times New Roman" panose="02020603050405020304" charset="0"/>
+              </a:rPr>
+              <a:t>optimization):</a:t>
+            </a:r>
+            <a:endParaRPr lang="en-US" altLang="zh-CN" sz="1400">
+              <a:latin typeface="Times New Roman" panose="02020603050405020304" charset="0"/>
+              <a:ea typeface="微软雅黑" panose="020B0503020204020204" charset="-122"/>
+              <a:cs typeface="Times New Roman" panose="02020603050405020304" charset="0"/>
+            </a:endParaRPr>
+          </a:p>
+          <a:p>
+            <a:pPr marL="285750" indent="-285750" algn="l">
+              <a:buFont typeface="Wingdings" panose="05000000000000000000" charset="0"/>
+              <a:buChar char="Ø"/>
+            </a:pPr>
+            <a:r>
+              <a:rPr lang="en-US" altLang="zh-CN" sz="1400">
+                <a:latin typeface="Times New Roman" panose="02020603050405020304" charset="0"/>
+                <a:ea typeface="微软雅黑" panose="020B0503020204020204" charset="-122"/>
+                <a:cs typeface="Times New Roman" panose="02020603050405020304" charset="0"/>
+              </a:rPr>
+              <a:t>Average error: 0.22</a:t>
+            </a:r>
+            <a:endParaRPr lang="en-US" altLang="zh-CN" sz="1400">
+              <a:latin typeface="Times New Roman" panose="02020603050405020304" charset="0"/>
+              <a:ea typeface="微软雅黑" panose="020B0503020204020204" charset="-122"/>
+              <a:cs typeface="Times New Roman" panose="02020603050405020304" charset="0"/>
+            </a:endParaRPr>
+          </a:p>
+        </p:txBody>
+      </p:sp>
+      <p:sp>
+        <p:nvSpPr>
+          <p:cNvPr id="36" name="文本框 35"/>
+          <p:cNvSpPr txBox="1"/>
+          <p:nvPr/>
+        </p:nvSpPr>
+        <p:spPr>
+          <a:xfrm>
+            <a:off x="10184765" y="5025390"/>
+            <a:ext cx="2007235" cy="953135"/>
+          </a:xfrm>
+          <a:prstGeom prst="rect">
+            <a:avLst/>
+          </a:prstGeom>
+        </p:spPr>
+        <p:txBody>
+          <a:bodyPr wrap="square">
+            <a:spAutoFit/>
+            <a:extLst>
+              <a:ext uri="{4A0BC546-FE56-4ADE-93B0-CB8AF2F6F144}">
+                <wpsdc:textFrameExt xmlns:wpsdc="http://www.wps.cn/officeDocument/2022/drawingmlCustomData" type="text"/>
+              </a:ext>
+            </a:extLst>
+          </a:bodyPr>
+          <a:p>
+            <a:pPr algn="l"/>
+            <a:r>
+              <a:rPr lang="en-US" altLang="zh-CN" sz="1400" b="1">
+                <a:latin typeface="Times New Roman" panose="02020603050405020304" charset="0"/>
+                <a:ea typeface="微软雅黑" panose="020B0503020204020204" charset="-122"/>
+                <a:cs typeface="Times New Roman" panose="02020603050405020304" charset="0"/>
+              </a:rPr>
+              <a:t>Without multi-hop mechnisim(before </a:t>
+            </a:r>
+            <a:endParaRPr lang="en-US" altLang="zh-CN" sz="1400" b="1">
+              <a:latin typeface="Times New Roman" panose="02020603050405020304" charset="0"/>
+              <a:ea typeface="微软雅黑" panose="020B0503020204020204" charset="-122"/>
+              <a:cs typeface="Times New Roman" panose="02020603050405020304" charset="0"/>
+            </a:endParaRPr>
+          </a:p>
+          <a:p>
+            <a:pPr algn="l"/>
+            <a:r>
+              <a:rPr lang="en-US" altLang="zh-CN" sz="1400" b="1">
+                <a:latin typeface="Times New Roman" panose="02020603050405020304" charset="0"/>
+                <a:ea typeface="微软雅黑" panose="020B0503020204020204" charset="-122"/>
+                <a:cs typeface="Times New Roman" panose="02020603050405020304" charset="0"/>
+              </a:rPr>
+              <a:t>optimization):</a:t>
+            </a:r>
+            <a:endParaRPr lang="en-US" altLang="zh-CN" sz="1400">
+              <a:latin typeface="Times New Roman" panose="02020603050405020304" charset="0"/>
+              <a:ea typeface="微软雅黑" panose="020B0503020204020204" charset="-122"/>
+              <a:cs typeface="Times New Roman" panose="02020603050405020304" charset="0"/>
+            </a:endParaRPr>
+          </a:p>
+          <a:p>
+            <a:pPr marL="285750" indent="-285750" algn="l">
+              <a:buFont typeface="Wingdings" panose="05000000000000000000" charset="0"/>
+              <a:buChar char="Ø"/>
+            </a:pPr>
+            <a:r>
+              <a:rPr lang="en-US" altLang="zh-CN" sz="1400">
+                <a:latin typeface="Times New Roman" panose="02020603050405020304" charset="0"/>
+                <a:ea typeface="微软雅黑" panose="020B0503020204020204" charset="-122"/>
+                <a:cs typeface="Times New Roman" panose="02020603050405020304" charset="0"/>
+              </a:rPr>
+              <a:t>Average error: 1.49</a:t>
+            </a:r>
+            <a:endParaRPr lang="en-US" altLang="zh-CN" sz="1400">
+              <a:latin typeface="Times New Roman" panose="02020603050405020304" charset="0"/>
+              <a:ea typeface="微软雅黑" panose="020B0503020204020204" charset="-122"/>
+              <a:cs typeface="Times New Roman" panose="02020603050405020304" charset="0"/>
+            </a:endParaRPr>
+          </a:p>
+        </p:txBody>
+      </p:sp>
+      <p:pic>
+        <p:nvPicPr>
+          <p:cNvPr id="6" name="图片 5" descr="transformer_location"/>
+          <p:cNvPicPr>
+            <a:picLocks noChangeAspect="1"/>
+          </p:cNvPicPr>
+          <p:nvPr/>
+        </p:nvPicPr>
+        <p:blipFill>
+          <a:blip r:embed="rId1"/>
+          <a:stretch>
+            <a:fillRect/>
+          </a:stretch>
+        </p:blipFill>
+        <p:spPr>
+          <a:xfrm>
+            <a:off x="431800" y="560705"/>
+            <a:ext cx="3813810" cy="3051810"/>
+          </a:xfrm>
+          <a:prstGeom prst="rect">
+            <a:avLst/>
+          </a:prstGeom>
+        </p:spPr>
+      </p:pic>
+      <p:graphicFrame>
+        <p:nvGraphicFramePr>
+          <p:cNvPr id="9" name="表格 8"/>
+          <p:cNvGraphicFramePr/>
+          <p:nvPr/>
+        </p:nvGraphicFramePr>
+        <p:xfrm>
+          <a:off x="4498340" y="827405"/>
+          <a:ext cx="4480560" cy="2517775"/>
+        </p:xfrm>
+        <a:graphic>
+          <a:graphicData uri="http://schemas.openxmlformats.org/drawingml/2006/table">
+            <a:tbl>
+              <a:tblPr firstRow="1" bandRow="1">
+                <a:tableStyleId>{5C22544A-7EE6-4342-B048-85BDC9FD1C3A}</a:tableStyleId>
+              </a:tblPr>
+              <a:tblGrid>
+                <a:gridCol w="954405"/>
+                <a:gridCol w="1128395"/>
+                <a:gridCol w="1226185"/>
+                <a:gridCol w="1171575"/>
+              </a:tblGrid>
+              <a:tr h="323215">
+                <a:tc>
+                  <a:txBody>
+                    <a:bodyPr/>
+                    <a:p>
+                      <a:pPr algn="ctr">
+                        <a:buNone/>
+                      </a:pPr>
+                      <a:r>
+                        <a:rPr lang="en-US" altLang="zh-CN" sz="1200">
+                          <a:latin typeface="Times New Roman" panose="02020603050405020304" charset="0"/>
+                          <a:cs typeface="Times New Roman" panose="02020603050405020304" charset="0"/>
+                        </a:rPr>
+                        <a:t> Node</a:t>
+                      </a:r>
+                      <a:endParaRPr lang="en-US" altLang="zh-CN" sz="1200">
+                        <a:latin typeface="Times New Roman" panose="02020603050405020304" charset="0"/>
+                        <a:cs typeface="Times New Roman" panose="02020603050405020304" charset="0"/>
+                      </a:endParaRPr>
+                    </a:p>
+                  </a:txBody>
+                  <a:tcPr/>
+                </a:tc>
+                <a:tc>
+                  <a:txBody>
+                    <a:bodyPr/>
+                    <a:p>
+                      <a:pPr algn="ctr">
+                        <a:buNone/>
+                      </a:pPr>
+                      <a:r>
+                        <a:rPr lang="en-US" altLang="zh-CN" sz="1400">
+                          <a:latin typeface="Times New Roman" panose="02020603050405020304" charset="0"/>
+                          <a:cs typeface="Times New Roman" panose="02020603050405020304" charset="0"/>
+                        </a:rPr>
+                        <a:t>est_location</a:t>
+                      </a:r>
+                      <a:endParaRPr lang="en-US" altLang="zh-CN" sz="1400">
+                        <a:latin typeface="Times New Roman" panose="02020603050405020304" charset="0"/>
+                        <a:cs typeface="Times New Roman" panose="02020603050405020304" charset="0"/>
+                      </a:endParaRPr>
+                    </a:p>
+                  </a:txBody>
+                  <a:tcPr/>
+                </a:tc>
+                <a:tc>
+                  <a:txBody>
+                    <a:bodyPr/>
+                    <a:p>
+                      <a:pPr algn="ctr">
+                        <a:buNone/>
+                      </a:pPr>
+                      <a:r>
+                        <a:rPr lang="en-US" altLang="zh-CN" sz="1400">
+                          <a:latin typeface="Times New Roman" panose="02020603050405020304" charset="0"/>
+                          <a:cs typeface="Times New Roman" panose="02020603050405020304" charset="0"/>
+                        </a:rPr>
+                        <a:t>true_location</a:t>
+                      </a:r>
+                      <a:endParaRPr lang="en-US" altLang="zh-CN" sz="1400">
+                        <a:latin typeface="Times New Roman" panose="02020603050405020304" charset="0"/>
+                        <a:cs typeface="Times New Roman" panose="02020603050405020304" charset="0"/>
+                      </a:endParaRPr>
+                    </a:p>
+                  </a:txBody>
+                  <a:tcPr/>
+                </a:tc>
+                <a:tc>
+                  <a:txBody>
+                    <a:bodyPr/>
+                    <a:p>
+                      <a:pPr algn="ctr">
+                        <a:buNone/>
+                      </a:pPr>
+                      <a:r>
+                        <a:rPr lang="en-US" altLang="zh-CN" sz="1400">
+                          <a:latin typeface="Times New Roman" panose="02020603050405020304" charset="0"/>
+                          <a:cs typeface="Times New Roman" panose="02020603050405020304" charset="0"/>
+                        </a:rPr>
+                        <a:t>error</a:t>
+                      </a:r>
+                      <a:endParaRPr lang="en-US" altLang="zh-CN" sz="1400">
+                        <a:latin typeface="Times New Roman" panose="02020603050405020304" charset="0"/>
+                        <a:cs typeface="Times New Roman" panose="02020603050405020304" charset="0"/>
+                      </a:endParaRPr>
+                    </a:p>
+                  </a:txBody>
+                  <a:tcPr/>
+                </a:tc>
+              </a:tr>
+              <a:tr h="365760">
+                <a:tc>
+                  <a:txBody>
+                    <a:bodyPr/>
+                    <a:p>
+                      <a:pPr algn="ctr">
+                        <a:buNone/>
+                      </a:pPr>
+                      <a:r>
+                        <a:rPr lang="en-US" altLang="zh-CN" sz="1400">
+                          <a:latin typeface="Times New Roman" panose="02020603050405020304" charset="0"/>
+                          <a:cs typeface="Times New Roman" panose="02020603050405020304" charset="0"/>
+                        </a:rPr>
+                        <a:t>1</a:t>
+                      </a:r>
+                      <a:endParaRPr lang="en-US" altLang="zh-CN" sz="1400">
+                        <a:latin typeface="Times New Roman" panose="02020603050405020304" charset="0"/>
+                        <a:cs typeface="Times New Roman" panose="02020603050405020304" charset="0"/>
+                      </a:endParaRPr>
+                    </a:p>
+                  </a:txBody>
+                  <a:tcPr/>
+                </a:tc>
+                <a:tc>
+                  <a:txBody>
+                    <a:bodyPr/>
+                    <a:p>
+                      <a:pPr algn="ctr">
+                        <a:buNone/>
+                      </a:pPr>
+                      <a:r>
+                        <a:rPr lang="en-US" altLang="zh-CN" sz="1400">
+                          <a:latin typeface="Times New Roman" panose="02020603050405020304" charset="0"/>
+                          <a:cs typeface="Times New Roman" panose="02020603050405020304" charset="0"/>
+                        </a:rPr>
+                        <a:t>(2.95, 2.95)</a:t>
+                      </a:r>
+                      <a:endParaRPr lang="en-US" altLang="zh-CN" sz="1400">
+                        <a:latin typeface="Times New Roman" panose="02020603050405020304" charset="0"/>
+                        <a:cs typeface="Times New Roman" panose="02020603050405020304" charset="0"/>
+                      </a:endParaRPr>
+                    </a:p>
+                  </a:txBody>
+                  <a:tcPr/>
+                </a:tc>
+                <a:tc>
+                  <a:txBody>
+                    <a:bodyPr/>
+                    <a:p>
+                      <a:pPr algn="ctr">
+                        <a:buNone/>
+                      </a:pPr>
+                      <a:r>
+                        <a:rPr lang="en-US" altLang="zh-CN" sz="1400">
+                          <a:latin typeface="Times New Roman" panose="02020603050405020304" charset="0"/>
+                          <a:cs typeface="Times New Roman" panose="02020603050405020304" charset="0"/>
+                        </a:rPr>
+                        <a:t>(3.00, 3.00)</a:t>
+                      </a:r>
+                      <a:endParaRPr lang="en-US" altLang="zh-CN" sz="1400">
+                        <a:latin typeface="Times New Roman" panose="02020603050405020304" charset="0"/>
+                        <a:cs typeface="Times New Roman" panose="02020603050405020304" charset="0"/>
+                      </a:endParaRPr>
+                    </a:p>
+                  </a:txBody>
+                  <a:tcPr/>
+                </a:tc>
+                <a:tc>
+                  <a:txBody>
+                    <a:bodyPr/>
+                    <a:p>
+                      <a:pPr algn="ctr">
+                        <a:buNone/>
+                      </a:pPr>
+                      <a:r>
+                        <a:rPr lang="en-US" altLang="zh-CN" sz="1400">
+                          <a:latin typeface="Times New Roman" panose="02020603050405020304" charset="0"/>
+                          <a:cs typeface="Times New Roman" panose="02020603050405020304" charset="0"/>
+                        </a:rPr>
+                        <a:t>0.07</a:t>
+                      </a:r>
+                      <a:endParaRPr lang="en-US" altLang="zh-CN" sz="1400">
+                        <a:latin typeface="Times New Roman" panose="02020603050405020304" charset="0"/>
+                        <a:cs typeface="Times New Roman" panose="02020603050405020304" charset="0"/>
+                      </a:endParaRPr>
+                    </a:p>
+                  </a:txBody>
+                  <a:tcPr/>
+                </a:tc>
+              </a:tr>
+              <a:tr h="365760">
+                <a:tc>
+                  <a:txBody>
+                    <a:bodyPr/>
+                    <a:p>
+                      <a:pPr algn="ctr">
+                        <a:buNone/>
+                      </a:pPr>
+                      <a:r>
+                        <a:rPr lang="en-US" altLang="zh-CN" sz="1400">
+                          <a:latin typeface="Times New Roman" panose="02020603050405020304" charset="0"/>
+                          <a:cs typeface="Times New Roman" panose="02020603050405020304" charset="0"/>
+                        </a:rPr>
+                        <a:t>2</a:t>
+                      </a:r>
+                      <a:endParaRPr lang="en-US" altLang="zh-CN" sz="1400">
+                        <a:latin typeface="Times New Roman" panose="02020603050405020304" charset="0"/>
+                        <a:cs typeface="Times New Roman" panose="02020603050405020304" charset="0"/>
+                      </a:endParaRPr>
+                    </a:p>
+                  </a:txBody>
+                  <a:tcPr/>
+                </a:tc>
+                <a:tc>
+                  <a:txBody>
+                    <a:bodyPr/>
+                    <a:p>
+                      <a:pPr algn="ctr">
+                        <a:buNone/>
+                      </a:pPr>
+                      <a:r>
+                        <a:rPr lang="en-US" altLang="zh-CN" sz="1400">
+                          <a:latin typeface="Times New Roman" panose="02020603050405020304" charset="0"/>
+                          <a:cs typeface="Times New Roman" panose="02020603050405020304" charset="0"/>
+                        </a:rPr>
+                        <a:t>(1.72, -0.08)</a:t>
+                      </a:r>
+                      <a:endParaRPr lang="en-US" altLang="zh-CN" sz="1400">
+                        <a:latin typeface="Times New Roman" panose="02020603050405020304" charset="0"/>
+                        <a:cs typeface="Times New Roman" panose="02020603050405020304" charset="0"/>
+                      </a:endParaRPr>
+                    </a:p>
+                  </a:txBody>
+                  <a:tcPr/>
+                </a:tc>
+                <a:tc>
+                  <a:txBody>
+                    <a:bodyPr/>
+                    <a:p>
+                      <a:pPr algn="ctr">
+                        <a:buNone/>
+                      </a:pPr>
+                      <a:r>
+                        <a:rPr lang="en-US" altLang="zh-CN" sz="1400">
+                          <a:latin typeface="Times New Roman" panose="02020603050405020304" charset="0"/>
+                          <a:cs typeface="Times New Roman" panose="02020603050405020304" charset="0"/>
+                        </a:rPr>
+                        <a:t>(2.00, 0.00)</a:t>
+                      </a:r>
+                      <a:endParaRPr lang="en-US" altLang="zh-CN" sz="1400">
+                        <a:latin typeface="Times New Roman" panose="02020603050405020304" charset="0"/>
+                        <a:cs typeface="Times New Roman" panose="02020603050405020304" charset="0"/>
+                      </a:endParaRPr>
+                    </a:p>
+                  </a:txBody>
+                  <a:tcPr/>
+                </a:tc>
+                <a:tc>
+                  <a:txBody>
+                    <a:bodyPr/>
+                    <a:p>
+                      <a:pPr algn="ctr">
+                        <a:buNone/>
+                      </a:pPr>
+                      <a:r>
+                        <a:rPr lang="en-US" altLang="zh-CN" sz="1400">
+                          <a:latin typeface="Times New Roman" panose="02020603050405020304" charset="0"/>
+                          <a:cs typeface="Times New Roman" panose="02020603050405020304" charset="0"/>
+                        </a:rPr>
+                        <a:t>0.29</a:t>
+                      </a:r>
+                      <a:endParaRPr lang="en-US" altLang="zh-CN" sz="1400">
+                        <a:latin typeface="Times New Roman" panose="02020603050405020304" charset="0"/>
+                        <a:cs typeface="Times New Roman" panose="02020603050405020304" charset="0"/>
+                      </a:endParaRPr>
+                    </a:p>
+                  </a:txBody>
+                  <a:tcPr/>
+                </a:tc>
+              </a:tr>
+              <a:tr h="365760">
+                <a:tc>
+                  <a:txBody>
+                    <a:bodyPr/>
+                    <a:p>
+                      <a:pPr algn="ctr">
+                        <a:buNone/>
+                      </a:pPr>
+                      <a:r>
+                        <a:rPr lang="en-US" altLang="zh-CN" sz="1400">
+                          <a:latin typeface="Times New Roman" panose="02020603050405020304" charset="0"/>
+                          <a:cs typeface="Times New Roman" panose="02020603050405020304" charset="0"/>
+                        </a:rPr>
+                        <a:t>3</a:t>
+                      </a:r>
+                      <a:endParaRPr lang="en-US" altLang="zh-CN" sz="1400">
+                        <a:latin typeface="Times New Roman" panose="02020603050405020304" charset="0"/>
+                        <a:cs typeface="Times New Roman" panose="02020603050405020304" charset="0"/>
+                      </a:endParaRPr>
+                    </a:p>
+                  </a:txBody>
+                  <a:tcPr/>
+                </a:tc>
+                <a:tc>
+                  <a:txBody>
+                    <a:bodyPr/>
+                    <a:p>
+                      <a:pPr algn="ctr">
+                        <a:buNone/>
+                      </a:pPr>
+                      <a:r>
+                        <a:rPr lang="en-US" altLang="zh-CN" sz="1400">
+                          <a:latin typeface="Times New Roman" panose="02020603050405020304" charset="0"/>
+                          <a:cs typeface="Times New Roman" panose="02020603050405020304" charset="0"/>
+                        </a:rPr>
+                        <a:t>(7.03, 3.53)</a:t>
+                      </a:r>
+                      <a:endParaRPr lang="en-US" altLang="zh-CN" sz="1400">
+                        <a:latin typeface="Times New Roman" panose="02020603050405020304" charset="0"/>
+                        <a:cs typeface="Times New Roman" panose="02020603050405020304" charset="0"/>
+                      </a:endParaRPr>
+                    </a:p>
+                  </a:txBody>
+                  <a:tcPr/>
+                </a:tc>
+                <a:tc>
+                  <a:txBody>
+                    <a:bodyPr/>
+                    <a:p>
+                      <a:pPr algn="ctr">
+                        <a:buNone/>
+                      </a:pPr>
+                      <a:r>
+                        <a:rPr lang="en-US" altLang="zh-CN" sz="1400">
+                          <a:latin typeface="Times New Roman" panose="02020603050405020304" charset="0"/>
+                          <a:cs typeface="Times New Roman" panose="02020603050405020304" charset="0"/>
+                        </a:rPr>
+                        <a:t>(7.00, 4.00)</a:t>
+                      </a:r>
+                      <a:endParaRPr lang="en-US" altLang="zh-CN" sz="1400">
+                        <a:latin typeface="Times New Roman" panose="02020603050405020304" charset="0"/>
+                        <a:cs typeface="Times New Roman" panose="02020603050405020304" charset="0"/>
+                      </a:endParaRPr>
+                    </a:p>
+                  </a:txBody>
+                  <a:tcPr/>
+                </a:tc>
+                <a:tc>
+                  <a:txBody>
+                    <a:bodyPr/>
+                    <a:p>
+                      <a:pPr algn="ctr">
+                        <a:buNone/>
+                      </a:pPr>
+                      <a:r>
+                        <a:rPr lang="en-US" altLang="zh-CN" sz="1400">
+                          <a:latin typeface="Times New Roman" panose="02020603050405020304" charset="0"/>
+                          <a:cs typeface="Times New Roman" panose="02020603050405020304" charset="0"/>
+                        </a:rPr>
+                        <a:t>0.48</a:t>
+                      </a:r>
+                      <a:endParaRPr lang="en-US" altLang="zh-CN" sz="1400">
+                        <a:latin typeface="Times New Roman" panose="02020603050405020304" charset="0"/>
+                        <a:cs typeface="Times New Roman" panose="02020603050405020304" charset="0"/>
+                      </a:endParaRPr>
+                    </a:p>
+                  </a:txBody>
+                  <a:tcPr/>
+                </a:tc>
+              </a:tr>
+              <a:tr h="365760">
+                <a:tc>
+                  <a:txBody>
+                    <a:bodyPr/>
+                    <a:p>
+                      <a:pPr algn="ctr">
+                        <a:buNone/>
+                      </a:pPr>
+                      <a:r>
+                        <a:rPr lang="en-US" altLang="zh-CN" sz="1400">
+                          <a:latin typeface="Times New Roman" panose="02020603050405020304" charset="0"/>
+                          <a:cs typeface="Times New Roman" panose="02020603050405020304" charset="0"/>
+                        </a:rPr>
+                        <a:t>4</a:t>
+                      </a:r>
+                      <a:endParaRPr lang="en-US" altLang="zh-CN" sz="1400">
+                        <a:latin typeface="Times New Roman" panose="02020603050405020304" charset="0"/>
+                        <a:cs typeface="Times New Roman" panose="02020603050405020304" charset="0"/>
+                      </a:endParaRPr>
+                    </a:p>
+                  </a:txBody>
+                  <a:tcPr/>
+                </a:tc>
+                <a:tc>
+                  <a:txBody>
+                    <a:bodyPr/>
+                    <a:p>
+                      <a:pPr algn="ctr">
+                        <a:buNone/>
+                      </a:pPr>
+                      <a:r>
+                        <a:rPr lang="en-US" altLang="zh-CN" sz="1400">
+                          <a:latin typeface="Times New Roman" panose="02020603050405020304" charset="0"/>
+                          <a:cs typeface="Times New Roman" panose="02020603050405020304" charset="0"/>
+                        </a:rPr>
+                        <a:t>(2.45, 6.51)</a:t>
+                      </a:r>
+                      <a:endParaRPr lang="en-US" altLang="zh-CN" sz="1400">
+                        <a:latin typeface="Times New Roman" panose="02020603050405020304" charset="0"/>
+                        <a:cs typeface="Times New Roman" panose="02020603050405020304" charset="0"/>
+                      </a:endParaRPr>
+                    </a:p>
+                  </a:txBody>
+                  <a:tcPr/>
+                </a:tc>
+                <a:tc>
+                  <a:txBody>
+                    <a:bodyPr/>
+                    <a:p>
+                      <a:pPr algn="ctr">
+                        <a:buNone/>
+                      </a:pPr>
+                      <a:r>
+                        <a:rPr lang="en-US" altLang="zh-CN" sz="1400">
+                          <a:latin typeface="Times New Roman" panose="02020603050405020304" charset="0"/>
+                          <a:cs typeface="Times New Roman" panose="02020603050405020304" charset="0"/>
+                        </a:rPr>
+                        <a:t>(2.50, 7.00)</a:t>
+                      </a:r>
+                      <a:endParaRPr lang="en-US" altLang="zh-CN" sz="1400">
+                        <a:latin typeface="Times New Roman" panose="02020603050405020304" charset="0"/>
+                        <a:cs typeface="Times New Roman" panose="02020603050405020304" charset="0"/>
+                      </a:endParaRPr>
+                    </a:p>
+                  </a:txBody>
+                  <a:tcPr/>
+                </a:tc>
+                <a:tc>
+                  <a:txBody>
+                    <a:bodyPr/>
+                    <a:p>
+                      <a:pPr algn="ctr">
+                        <a:buNone/>
+                      </a:pPr>
+                      <a:r>
+                        <a:rPr lang="en-US" altLang="zh-CN" sz="1400">
+                          <a:latin typeface="Times New Roman" panose="02020603050405020304" charset="0"/>
+                          <a:cs typeface="Times New Roman" panose="02020603050405020304" charset="0"/>
+                        </a:rPr>
+                        <a:t>0.49</a:t>
+                      </a:r>
+                      <a:endParaRPr lang="en-US" altLang="zh-CN" sz="1400">
+                        <a:latin typeface="Times New Roman" panose="02020603050405020304" charset="0"/>
+                        <a:cs typeface="Times New Roman" panose="02020603050405020304" charset="0"/>
+                      </a:endParaRPr>
+                    </a:p>
+                  </a:txBody>
+                  <a:tcPr/>
+                </a:tc>
+              </a:tr>
+              <a:tr h="365760">
+                <a:tc>
+                  <a:txBody>
+                    <a:bodyPr/>
+                    <a:p>
+                      <a:pPr algn="ctr">
+                        <a:buNone/>
+                      </a:pPr>
+                      <a:r>
+                        <a:rPr lang="en-US" altLang="zh-CN" sz="1400">
+                          <a:solidFill>
+                            <a:srgbClr val="C00000"/>
+                          </a:solidFill>
+                          <a:latin typeface="Times New Roman" panose="02020603050405020304" charset="0"/>
+                          <a:cs typeface="Times New Roman" panose="02020603050405020304" charset="0"/>
+                        </a:rPr>
+                        <a:t>5</a:t>
+                      </a:r>
+                      <a:endParaRPr lang="en-US" altLang="zh-CN" sz="1400">
+                        <a:solidFill>
+                          <a:srgbClr val="C00000"/>
+                        </a:solidFill>
+                        <a:latin typeface="Times New Roman" panose="02020603050405020304" charset="0"/>
+                        <a:cs typeface="Times New Roman" panose="02020603050405020304" charset="0"/>
+                      </a:endParaRPr>
+                    </a:p>
+                  </a:txBody>
+                  <a:tcPr/>
+                </a:tc>
+                <a:tc>
+                  <a:txBody>
+                    <a:bodyPr/>
+                    <a:p>
+                      <a:pPr algn="ctr">
+                        <a:buNone/>
+                      </a:pPr>
+                      <a:r>
+                        <a:rPr lang="en-US" altLang="zh-CN" sz="1400">
+                          <a:solidFill>
+                            <a:schemeClr val="tx1"/>
+                          </a:solidFill>
+                          <a:latin typeface="Times New Roman" panose="02020603050405020304" charset="0"/>
+                          <a:cs typeface="Times New Roman" panose="02020603050405020304" charset="0"/>
+                        </a:rPr>
+                        <a:t>(5.30, 7.37)</a:t>
+                      </a:r>
+                      <a:endParaRPr lang="en-US" altLang="zh-CN" sz="1400">
+                        <a:solidFill>
+                          <a:schemeClr val="tx1"/>
+                        </a:solidFill>
+                        <a:latin typeface="Times New Roman" panose="02020603050405020304" charset="0"/>
+                        <a:cs typeface="Times New Roman" panose="02020603050405020304" charset="0"/>
+                      </a:endParaRPr>
+                    </a:p>
+                  </a:txBody>
+                  <a:tcPr/>
+                </a:tc>
+                <a:tc>
+                  <a:txBody>
+                    <a:bodyPr/>
+                    <a:p>
+                      <a:pPr algn="ctr">
+                        <a:buNone/>
+                      </a:pPr>
+                      <a:r>
+                        <a:rPr lang="en-US" altLang="zh-CN" sz="1400">
+                          <a:solidFill>
+                            <a:schemeClr val="tx1"/>
+                          </a:solidFill>
+                          <a:latin typeface="Times New Roman" panose="02020603050405020304" charset="0"/>
+                          <a:cs typeface="Times New Roman" panose="02020603050405020304" charset="0"/>
+                        </a:rPr>
+                        <a:t>(6.00, 8.00)</a:t>
+                      </a:r>
+                      <a:endParaRPr lang="en-US" altLang="zh-CN" sz="1400">
+                        <a:solidFill>
+                          <a:schemeClr val="tx1"/>
+                        </a:solidFill>
+                        <a:latin typeface="Times New Roman" panose="02020603050405020304" charset="0"/>
+                        <a:cs typeface="Times New Roman" panose="02020603050405020304" charset="0"/>
+                      </a:endParaRPr>
+                    </a:p>
+                  </a:txBody>
+                  <a:tcPr/>
+                </a:tc>
+                <a:tc>
+                  <a:txBody>
+                    <a:bodyPr/>
+                    <a:p>
+                      <a:pPr algn="ctr">
+                        <a:buNone/>
+                      </a:pPr>
+                      <a:r>
+                        <a:rPr lang="en-US" altLang="zh-CN" sz="1400">
+                          <a:solidFill>
+                            <a:schemeClr val="tx1"/>
+                          </a:solidFill>
+                          <a:latin typeface="Times New Roman" panose="02020603050405020304" charset="0"/>
+                          <a:cs typeface="Times New Roman" panose="02020603050405020304" charset="0"/>
+                        </a:rPr>
+                        <a:t>0.94</a:t>
+                      </a:r>
+                      <a:endParaRPr lang="en-US" altLang="zh-CN" sz="1400">
+                        <a:solidFill>
+                          <a:schemeClr val="tx1"/>
+                        </a:solidFill>
+                        <a:latin typeface="Times New Roman" panose="02020603050405020304" charset="0"/>
+                        <a:cs typeface="Times New Roman" panose="02020603050405020304" charset="0"/>
+                      </a:endParaRPr>
+                    </a:p>
+                  </a:txBody>
+                  <a:tcPr/>
+                </a:tc>
+              </a:tr>
+              <a:tr h="365760">
+                <a:tc>
+                  <a:txBody>
+                    <a:bodyPr/>
+                    <a:p>
+                      <a:pPr algn="ctr">
+                        <a:buNone/>
+                      </a:pPr>
+                      <a:r>
+                        <a:rPr lang="en-US" altLang="zh-CN" sz="1400">
+                          <a:latin typeface="Times New Roman" panose="02020603050405020304" charset="0"/>
+                          <a:cs typeface="Times New Roman" panose="02020603050405020304" charset="0"/>
+                        </a:rPr>
+                        <a:t>6</a:t>
+                      </a:r>
+                      <a:endParaRPr lang="en-US" altLang="zh-CN" sz="1400">
+                        <a:latin typeface="Times New Roman" panose="02020603050405020304" charset="0"/>
+                        <a:cs typeface="Times New Roman" panose="02020603050405020304" charset="0"/>
+                      </a:endParaRPr>
+                    </a:p>
+                  </a:txBody>
+                  <a:tcPr/>
+                </a:tc>
+                <a:tc>
+                  <a:txBody>
+                    <a:bodyPr/>
+                    <a:p>
+                      <a:pPr algn="ctr">
+                        <a:buNone/>
+                      </a:pPr>
+                      <a:r>
+                        <a:rPr lang="en-US" altLang="zh-CN" sz="1400">
+                          <a:latin typeface="Times New Roman" panose="02020603050405020304" charset="0"/>
+                          <a:cs typeface="Times New Roman" panose="02020603050405020304" charset="0"/>
+                        </a:rPr>
+                        <a:t>(7.71, 7.14)</a:t>
+                      </a:r>
+                      <a:endParaRPr lang="en-US" altLang="zh-CN" sz="1400">
+                        <a:latin typeface="Times New Roman" panose="02020603050405020304" charset="0"/>
+                        <a:cs typeface="Times New Roman" panose="02020603050405020304" charset="0"/>
+                      </a:endParaRPr>
+                    </a:p>
+                  </a:txBody>
+                  <a:tcPr/>
+                </a:tc>
+                <a:tc>
+                  <a:txBody>
+                    <a:bodyPr/>
+                    <a:p>
+                      <a:pPr algn="ctr">
+                        <a:buNone/>
+                      </a:pPr>
+                      <a:r>
+                        <a:rPr lang="en-US" altLang="zh-CN" sz="1400">
+                          <a:latin typeface="Times New Roman" panose="02020603050405020304" charset="0"/>
+                          <a:cs typeface="Times New Roman" panose="02020603050405020304" charset="0"/>
+                        </a:rPr>
+                        <a:t>(8.00, 7.50)</a:t>
+                      </a:r>
+                      <a:endParaRPr lang="en-US" altLang="zh-CN" sz="1400">
+                        <a:latin typeface="Times New Roman" panose="02020603050405020304" charset="0"/>
+                        <a:cs typeface="Times New Roman" panose="02020603050405020304" charset="0"/>
+                      </a:endParaRPr>
+                    </a:p>
+                  </a:txBody>
+                  <a:tcPr/>
+                </a:tc>
+                <a:tc>
+                  <a:txBody>
+                    <a:bodyPr/>
+                    <a:p>
+                      <a:pPr algn="ctr">
+                        <a:buNone/>
+                      </a:pPr>
+                      <a:r>
+                        <a:rPr lang="en-US" altLang="zh-CN" sz="1400">
+                          <a:latin typeface="Times New Roman" panose="02020603050405020304" charset="0"/>
+                          <a:cs typeface="Times New Roman" panose="02020603050405020304" charset="0"/>
+                        </a:rPr>
+                        <a:t>0.46</a:t>
+                      </a:r>
+                      <a:endParaRPr lang="en-US" altLang="zh-CN" sz="1400">
+                        <a:latin typeface="Times New Roman" panose="02020603050405020304" charset="0"/>
+                        <a:cs typeface="Times New Roman" panose="02020603050405020304" charset="0"/>
+                      </a:endParaRPr>
+                    </a:p>
+                  </a:txBody>
+                  <a:tcPr/>
+                </a:tc>
+              </a:tr>
+            </a:tbl>
+          </a:graphicData>
+        </a:graphic>
+      </p:graphicFrame>
+      <p:graphicFrame>
+        <p:nvGraphicFramePr>
+          <p:cNvPr id="10" name="表格 9"/>
+          <p:cNvGraphicFramePr/>
+          <p:nvPr>
+            <p:custDataLst>
+              <p:tags r:id="rId2"/>
+            </p:custDataLst>
+          </p:nvPr>
+        </p:nvGraphicFramePr>
+        <p:xfrm>
+          <a:off x="4479925" y="3797935"/>
+          <a:ext cx="5518150" cy="2517775"/>
+        </p:xfrm>
+        <a:graphic>
+          <a:graphicData uri="http://schemas.openxmlformats.org/drawingml/2006/table">
+            <a:tbl>
+              <a:tblPr firstRow="1" bandRow="1">
+                <a:tableStyleId>{5C22544A-7EE6-4342-B048-85BDC9FD1C3A}</a:tableStyleId>
+              </a:tblPr>
+              <a:tblGrid>
+                <a:gridCol w="980440"/>
+                <a:gridCol w="1139190"/>
+                <a:gridCol w="1223010"/>
+                <a:gridCol w="1137920"/>
+                <a:gridCol w="1037590"/>
+              </a:tblGrid>
+              <a:tr h="323215">
+                <a:tc>
+                  <a:txBody>
+                    <a:bodyPr/>
+                    <a:p>
+                      <a:pPr algn="ctr">
+                        <a:buNone/>
+                      </a:pPr>
+                      <a:r>
+                        <a:rPr lang="en-US" altLang="zh-CN" sz="1200">
+                          <a:latin typeface="Times New Roman" panose="02020603050405020304" charset="0"/>
+                          <a:cs typeface="Times New Roman" panose="02020603050405020304" charset="0"/>
+                        </a:rPr>
+                        <a:t> Node</a:t>
+                      </a:r>
+                      <a:endParaRPr lang="en-US" altLang="zh-CN" sz="1200">
+                        <a:latin typeface="Times New Roman" panose="02020603050405020304" charset="0"/>
+                        <a:cs typeface="Times New Roman" panose="02020603050405020304" charset="0"/>
+                      </a:endParaRPr>
+                    </a:p>
+                  </a:txBody>
+                  <a:tcPr/>
+                </a:tc>
+                <a:tc>
+                  <a:txBody>
+                    <a:bodyPr/>
+                    <a:p>
+                      <a:pPr algn="ctr">
+                        <a:buNone/>
+                      </a:pPr>
+                      <a:r>
+                        <a:rPr lang="en-US" altLang="zh-CN" sz="1400">
+                          <a:latin typeface="Times New Roman" panose="02020603050405020304" charset="0"/>
+                          <a:cs typeface="Times New Roman" panose="02020603050405020304" charset="0"/>
+                        </a:rPr>
+                        <a:t>est_location</a:t>
+                      </a:r>
+                      <a:endParaRPr lang="en-US" altLang="zh-CN" sz="1400">
+                        <a:latin typeface="Times New Roman" panose="02020603050405020304" charset="0"/>
+                        <a:cs typeface="Times New Roman" panose="02020603050405020304" charset="0"/>
+                      </a:endParaRPr>
+                    </a:p>
+                  </a:txBody>
+                  <a:tcPr/>
+                </a:tc>
+                <a:tc>
+                  <a:txBody>
+                    <a:bodyPr/>
+                    <a:p>
+                      <a:pPr algn="ctr">
+                        <a:buNone/>
+                      </a:pPr>
+                      <a:r>
+                        <a:rPr lang="en-US" altLang="zh-CN" sz="1400">
+                          <a:latin typeface="Times New Roman" panose="02020603050405020304" charset="0"/>
+                          <a:cs typeface="Times New Roman" panose="02020603050405020304" charset="0"/>
+                        </a:rPr>
+                        <a:t>true_location</a:t>
+                      </a:r>
+                      <a:endParaRPr lang="en-US" altLang="zh-CN" sz="1400">
+                        <a:latin typeface="Times New Roman" panose="02020603050405020304" charset="0"/>
+                        <a:cs typeface="Times New Roman" panose="02020603050405020304" charset="0"/>
+                      </a:endParaRPr>
+                    </a:p>
+                  </a:txBody>
+                  <a:tcPr/>
+                </a:tc>
+                <a:tc>
+                  <a:txBody>
+                    <a:bodyPr/>
+                    <a:p>
+                      <a:pPr algn="ctr">
+                        <a:buNone/>
+                      </a:pPr>
+                      <a:r>
+                        <a:rPr lang="en-US" altLang="zh-CN" sz="1400">
+                          <a:latin typeface="Times New Roman" panose="02020603050405020304" charset="0"/>
+                          <a:cs typeface="Times New Roman" panose="02020603050405020304" charset="0"/>
+                        </a:rPr>
+                        <a:t>error</a:t>
+                      </a:r>
+                      <a:endParaRPr lang="en-US" altLang="zh-CN" sz="1400">
+                        <a:latin typeface="Times New Roman" panose="02020603050405020304" charset="0"/>
+                        <a:cs typeface="Times New Roman" panose="02020603050405020304" charset="0"/>
+                      </a:endParaRPr>
+                    </a:p>
+                  </a:txBody>
+                  <a:tcPr/>
+                </a:tc>
+                <a:tc>
+                  <a:txBody>
+                    <a:bodyPr/>
+                    <a:p>
+                      <a:pPr algn="ctr">
+                        <a:buNone/>
+                      </a:pPr>
+                      <a:r>
+                        <a:rPr lang="en-US" altLang="zh-CN" sz="1400">
+                          <a:latin typeface="Times New Roman" panose="02020603050405020304" charset="0"/>
+                          <a:cs typeface="Times New Roman" panose="02020603050405020304" charset="0"/>
+                        </a:rPr>
+                        <a:t>diff</a:t>
+                      </a:r>
+                      <a:endParaRPr lang="en-US" altLang="zh-CN" sz="1400">
+                        <a:latin typeface="Times New Roman" panose="02020603050405020304" charset="0"/>
+                        <a:cs typeface="Times New Roman" panose="02020603050405020304" charset="0"/>
+                      </a:endParaRPr>
+                    </a:p>
+                  </a:txBody>
+                  <a:tcPr/>
+                </a:tc>
+              </a:tr>
+              <a:tr h="365760">
+                <a:tc>
+                  <a:txBody>
+                    <a:bodyPr/>
+                    <a:p>
+                      <a:pPr algn="ctr">
+                        <a:buNone/>
+                      </a:pPr>
+                      <a:r>
+                        <a:rPr lang="en-US" altLang="zh-CN" sz="1400">
+                          <a:latin typeface="Times New Roman" panose="02020603050405020304" charset="0"/>
+                          <a:cs typeface="Times New Roman" panose="02020603050405020304" charset="0"/>
+                        </a:rPr>
+                        <a:t>1</a:t>
+                      </a:r>
+                      <a:endParaRPr lang="en-US" altLang="zh-CN" sz="1400">
+                        <a:latin typeface="Times New Roman" panose="02020603050405020304" charset="0"/>
+                        <a:cs typeface="Times New Roman" panose="02020603050405020304" charset="0"/>
+                      </a:endParaRPr>
+                    </a:p>
+                  </a:txBody>
+                  <a:tcPr/>
+                </a:tc>
+                <a:tc>
+                  <a:txBody>
+                    <a:bodyPr/>
+                    <a:p>
+                      <a:pPr algn="ctr">
+                        <a:buNone/>
+                      </a:pPr>
+                      <a:r>
+                        <a:rPr lang="en-US" altLang="zh-CN" sz="1400">
+                          <a:latin typeface="Times New Roman" panose="02020603050405020304" charset="0"/>
+                          <a:cs typeface="Times New Roman" panose="02020603050405020304" charset="0"/>
+                        </a:rPr>
+                        <a:t>(2.91, 3.06)</a:t>
+                      </a:r>
+                      <a:endParaRPr lang="en-US" altLang="zh-CN" sz="1400">
+                        <a:latin typeface="Times New Roman" panose="02020603050405020304" charset="0"/>
+                        <a:cs typeface="Times New Roman" panose="02020603050405020304" charset="0"/>
+                      </a:endParaRPr>
+                    </a:p>
+                  </a:txBody>
+                  <a:tcPr/>
+                </a:tc>
+                <a:tc>
+                  <a:txBody>
+                    <a:bodyPr/>
+                    <a:p>
+                      <a:pPr algn="ctr">
+                        <a:buNone/>
+                      </a:pPr>
+                      <a:r>
+                        <a:rPr lang="en-US" altLang="zh-CN" sz="1400">
+                          <a:latin typeface="Times New Roman" panose="02020603050405020304" charset="0"/>
+                          <a:cs typeface="Times New Roman" panose="02020603050405020304" charset="0"/>
+                        </a:rPr>
+                        <a:t>(3.00, 3.00)</a:t>
+                      </a:r>
+                      <a:endParaRPr lang="en-US" altLang="zh-CN" sz="1400">
+                        <a:latin typeface="Times New Roman" panose="02020603050405020304" charset="0"/>
+                        <a:cs typeface="Times New Roman" panose="02020603050405020304" charset="0"/>
+                      </a:endParaRPr>
+                    </a:p>
+                  </a:txBody>
+                  <a:tcPr/>
+                </a:tc>
+                <a:tc>
+                  <a:txBody>
+                    <a:bodyPr/>
+                    <a:p>
+                      <a:pPr algn="ctr">
+                        <a:buNone/>
+                      </a:pPr>
+                      <a:r>
+                        <a:rPr lang="en-US" altLang="zh-CN" sz="1400">
+                          <a:latin typeface="Times New Roman" panose="02020603050405020304" charset="0"/>
+                          <a:cs typeface="Times New Roman" panose="02020603050405020304" charset="0"/>
+                        </a:rPr>
+                        <a:t>0.11</a:t>
+                      </a:r>
+                      <a:endParaRPr lang="en-US" altLang="zh-CN" sz="1400">
+                        <a:latin typeface="Times New Roman" panose="02020603050405020304" charset="0"/>
+                        <a:cs typeface="Times New Roman" panose="02020603050405020304" charset="0"/>
+                      </a:endParaRPr>
+                    </a:p>
+                  </a:txBody>
+                  <a:tcPr/>
+                </a:tc>
+                <a:tc>
+                  <a:txBody>
+                    <a:bodyPr/>
+                    <a:p>
+                      <a:pPr algn="ctr">
+                        <a:buNone/>
+                      </a:pPr>
+                      <a:r>
+                        <a:rPr lang="en-US" altLang="zh-CN" sz="1400">
+                          <a:latin typeface="Times New Roman" panose="02020603050405020304" charset="0"/>
+                          <a:cs typeface="Times New Roman" panose="02020603050405020304" charset="0"/>
+                        </a:rPr>
+                        <a:t>0.00</a:t>
+                      </a:r>
+                      <a:endParaRPr lang="en-US" altLang="zh-CN" sz="1400">
+                        <a:latin typeface="Times New Roman" panose="02020603050405020304" charset="0"/>
+                        <a:cs typeface="Times New Roman" panose="02020603050405020304" charset="0"/>
+                      </a:endParaRPr>
+                    </a:p>
+                  </a:txBody>
+                  <a:tcPr/>
+                </a:tc>
+              </a:tr>
+              <a:tr h="365760">
+                <a:tc>
+                  <a:txBody>
+                    <a:bodyPr/>
+                    <a:p>
+                      <a:pPr algn="ctr">
+                        <a:buNone/>
+                      </a:pPr>
+                      <a:r>
+                        <a:rPr lang="en-US" altLang="zh-CN" sz="1400">
+                          <a:latin typeface="Times New Roman" panose="02020603050405020304" charset="0"/>
+                          <a:cs typeface="Times New Roman" panose="02020603050405020304" charset="0"/>
+                        </a:rPr>
+                        <a:t>2</a:t>
+                      </a:r>
+                      <a:endParaRPr lang="en-US" altLang="zh-CN" sz="1400">
+                        <a:latin typeface="Times New Roman" panose="02020603050405020304" charset="0"/>
+                        <a:cs typeface="Times New Roman" panose="02020603050405020304" charset="0"/>
+                      </a:endParaRPr>
+                    </a:p>
+                  </a:txBody>
+                  <a:tcPr/>
+                </a:tc>
+                <a:tc>
+                  <a:txBody>
+                    <a:bodyPr/>
+                    <a:p>
+                      <a:pPr algn="ctr">
+                        <a:buNone/>
+                      </a:pPr>
+                      <a:r>
+                        <a:rPr lang="en-US" altLang="zh-CN" sz="1400">
+                          <a:latin typeface="Times New Roman" panose="02020603050405020304" charset="0"/>
+                          <a:cs typeface="Times New Roman" panose="02020603050405020304" charset="0"/>
+                        </a:rPr>
+                        <a:t>(1.68, 0.01)</a:t>
+                      </a:r>
+                      <a:endParaRPr lang="en-US" altLang="zh-CN" sz="1400">
+                        <a:latin typeface="Times New Roman" panose="02020603050405020304" charset="0"/>
+                        <a:cs typeface="Times New Roman" panose="02020603050405020304" charset="0"/>
+                      </a:endParaRPr>
+                    </a:p>
+                  </a:txBody>
+                  <a:tcPr/>
+                </a:tc>
+                <a:tc>
+                  <a:txBody>
+                    <a:bodyPr/>
+                    <a:p>
+                      <a:pPr algn="ctr">
+                        <a:buNone/>
+                      </a:pPr>
+                      <a:r>
+                        <a:rPr lang="en-US" altLang="zh-CN" sz="1400">
+                          <a:latin typeface="Times New Roman" panose="02020603050405020304" charset="0"/>
+                          <a:cs typeface="Times New Roman" panose="02020603050405020304" charset="0"/>
+                        </a:rPr>
+                        <a:t>(2.00, 0.00)</a:t>
+                      </a:r>
+                      <a:endParaRPr lang="en-US" altLang="zh-CN" sz="1400">
+                        <a:latin typeface="Times New Roman" panose="02020603050405020304" charset="0"/>
+                        <a:cs typeface="Times New Roman" panose="02020603050405020304" charset="0"/>
+                      </a:endParaRPr>
+                    </a:p>
+                  </a:txBody>
+                  <a:tcPr/>
+                </a:tc>
+                <a:tc>
+                  <a:txBody>
+                    <a:bodyPr/>
+                    <a:p>
+                      <a:pPr algn="ctr">
+                        <a:buNone/>
+                      </a:pPr>
+                      <a:r>
+                        <a:rPr lang="en-US" altLang="zh-CN" sz="1400">
+                          <a:latin typeface="Times New Roman" panose="02020603050405020304" charset="0"/>
+                          <a:cs typeface="Times New Roman" panose="02020603050405020304" charset="0"/>
+                        </a:rPr>
+                        <a:t>0.32</a:t>
+                      </a:r>
+                      <a:endParaRPr lang="en-US" altLang="zh-CN" sz="1400">
+                        <a:latin typeface="Times New Roman" panose="02020603050405020304" charset="0"/>
+                        <a:cs typeface="Times New Roman" panose="02020603050405020304" charset="0"/>
+                      </a:endParaRPr>
+                    </a:p>
+                  </a:txBody>
+                  <a:tcPr/>
+                </a:tc>
+                <a:tc>
+                  <a:txBody>
+                    <a:bodyPr/>
+                    <a:p>
+                      <a:pPr algn="ctr">
+                        <a:buNone/>
+                      </a:pPr>
+                      <a:r>
+                        <a:rPr lang="en-US" altLang="zh-CN" sz="1400">
+                          <a:latin typeface="Times New Roman" panose="02020603050405020304" charset="0"/>
+                          <a:cs typeface="Times New Roman" panose="02020603050405020304" charset="0"/>
+                        </a:rPr>
+                        <a:t>0.00</a:t>
+                      </a:r>
+                      <a:endParaRPr lang="en-US" altLang="zh-CN" sz="1400">
+                        <a:latin typeface="Times New Roman" panose="02020603050405020304" charset="0"/>
+                        <a:cs typeface="Times New Roman" panose="02020603050405020304" charset="0"/>
+                      </a:endParaRPr>
+                    </a:p>
+                  </a:txBody>
+                  <a:tcPr/>
+                </a:tc>
+              </a:tr>
+              <a:tr h="365760">
+                <a:tc>
+                  <a:txBody>
+                    <a:bodyPr/>
+                    <a:p>
+                      <a:pPr algn="ctr">
+                        <a:buNone/>
+                      </a:pPr>
+                      <a:r>
+                        <a:rPr lang="en-US" altLang="zh-CN" sz="1400">
+                          <a:latin typeface="Times New Roman" panose="02020603050405020304" charset="0"/>
+                          <a:cs typeface="Times New Roman" panose="02020603050405020304" charset="0"/>
+                        </a:rPr>
+                        <a:t>3</a:t>
+                      </a:r>
+                      <a:endParaRPr lang="en-US" altLang="zh-CN" sz="1400">
+                        <a:latin typeface="Times New Roman" panose="02020603050405020304" charset="0"/>
+                        <a:cs typeface="Times New Roman" panose="02020603050405020304" charset="0"/>
+                      </a:endParaRPr>
+                    </a:p>
+                  </a:txBody>
+                  <a:tcPr/>
+                </a:tc>
+                <a:tc>
+                  <a:txBody>
+                    <a:bodyPr/>
+                    <a:p>
+                      <a:pPr algn="ctr">
+                        <a:buNone/>
+                      </a:pPr>
+                      <a:r>
+                        <a:rPr lang="en-US" altLang="zh-CN" sz="1400">
+                          <a:latin typeface="Times New Roman" panose="02020603050405020304" charset="0"/>
+                          <a:cs typeface="Times New Roman" panose="02020603050405020304" charset="0"/>
+                        </a:rPr>
+                        <a:t>(7.11, 3.72)</a:t>
+                      </a:r>
+                      <a:endParaRPr lang="en-US" altLang="zh-CN" sz="1400">
+                        <a:latin typeface="Times New Roman" panose="02020603050405020304" charset="0"/>
+                        <a:cs typeface="Times New Roman" panose="02020603050405020304" charset="0"/>
+                      </a:endParaRPr>
+                    </a:p>
+                  </a:txBody>
+                  <a:tcPr/>
+                </a:tc>
+                <a:tc>
+                  <a:txBody>
+                    <a:bodyPr/>
+                    <a:p>
+                      <a:pPr algn="ctr">
+                        <a:buNone/>
+                      </a:pPr>
+                      <a:r>
+                        <a:rPr lang="en-US" altLang="zh-CN" sz="1400">
+                          <a:latin typeface="Times New Roman" panose="02020603050405020304" charset="0"/>
+                          <a:cs typeface="Times New Roman" panose="02020603050405020304" charset="0"/>
+                        </a:rPr>
+                        <a:t>(7.00, 4.00)</a:t>
+                      </a:r>
+                      <a:endParaRPr lang="en-US" altLang="zh-CN" sz="1400">
+                        <a:latin typeface="Times New Roman" panose="02020603050405020304" charset="0"/>
+                        <a:cs typeface="Times New Roman" panose="02020603050405020304" charset="0"/>
+                      </a:endParaRPr>
+                    </a:p>
+                  </a:txBody>
+                  <a:tcPr/>
+                </a:tc>
+                <a:tc>
+                  <a:txBody>
+                    <a:bodyPr/>
+                    <a:p>
+                      <a:pPr algn="ctr">
+                        <a:buNone/>
+                      </a:pPr>
+                      <a:r>
+                        <a:rPr lang="en-US" altLang="zh-CN" sz="1400">
+                          <a:latin typeface="Times New Roman" panose="02020603050405020304" charset="0"/>
+                          <a:cs typeface="Times New Roman" panose="02020603050405020304" charset="0"/>
+                        </a:rPr>
+                        <a:t>0.30</a:t>
+                      </a:r>
+                      <a:endParaRPr lang="en-US" altLang="zh-CN" sz="1400">
+                        <a:latin typeface="Times New Roman" panose="02020603050405020304" charset="0"/>
+                        <a:cs typeface="Times New Roman" panose="02020603050405020304" charset="0"/>
+                      </a:endParaRPr>
+                    </a:p>
+                  </a:txBody>
+                  <a:tcPr/>
+                </a:tc>
+                <a:tc>
+                  <a:txBody>
+                    <a:bodyPr/>
+                    <a:p>
+                      <a:pPr algn="ctr">
+                        <a:buNone/>
+                      </a:pPr>
+                      <a:r>
+                        <a:rPr lang="en-US" altLang="zh-CN" sz="1400">
+                          <a:latin typeface="Times New Roman" panose="02020603050405020304" charset="0"/>
+                          <a:cs typeface="Times New Roman" panose="02020603050405020304" charset="0"/>
+                        </a:rPr>
+                        <a:t>0.00</a:t>
+                      </a:r>
+                      <a:endParaRPr lang="en-US" altLang="zh-CN" sz="1400">
+                        <a:latin typeface="Times New Roman" panose="02020603050405020304" charset="0"/>
+                        <a:cs typeface="Times New Roman" panose="02020603050405020304" charset="0"/>
+                      </a:endParaRPr>
+                    </a:p>
+                  </a:txBody>
+                  <a:tcPr/>
+                </a:tc>
+              </a:tr>
+              <a:tr h="365760">
+                <a:tc>
+                  <a:txBody>
+                    <a:bodyPr/>
+                    <a:p>
+                      <a:pPr algn="ctr">
+                        <a:buNone/>
+                      </a:pPr>
+                      <a:r>
+                        <a:rPr lang="en-US" altLang="zh-CN" sz="1400">
+                          <a:latin typeface="Times New Roman" panose="02020603050405020304" charset="0"/>
+                          <a:cs typeface="Times New Roman" panose="02020603050405020304" charset="0"/>
+                        </a:rPr>
+                        <a:t>4</a:t>
+                      </a:r>
+                      <a:endParaRPr lang="en-US" altLang="zh-CN" sz="1400">
+                        <a:latin typeface="Times New Roman" panose="02020603050405020304" charset="0"/>
+                        <a:cs typeface="Times New Roman" panose="02020603050405020304" charset="0"/>
+                      </a:endParaRPr>
+                    </a:p>
+                  </a:txBody>
+                  <a:tcPr/>
+                </a:tc>
+                <a:tc>
+                  <a:txBody>
+                    <a:bodyPr/>
+                    <a:p>
+                      <a:pPr algn="ctr">
+                        <a:buNone/>
+                      </a:pPr>
+                      <a:r>
+                        <a:rPr lang="en-US" altLang="zh-CN" sz="1400">
+                          <a:latin typeface="Times New Roman" panose="02020603050405020304" charset="0"/>
+                          <a:cs typeface="Times New Roman" panose="02020603050405020304" charset="0"/>
+                        </a:rPr>
+                        <a:t>(-0.74, 0.81)</a:t>
+                      </a:r>
+                      <a:endParaRPr lang="en-US" altLang="zh-CN" sz="1400">
+                        <a:latin typeface="Times New Roman" panose="02020603050405020304" charset="0"/>
+                        <a:cs typeface="Times New Roman" panose="02020603050405020304" charset="0"/>
+                      </a:endParaRPr>
+                    </a:p>
+                  </a:txBody>
+                  <a:tcPr/>
+                </a:tc>
+                <a:tc>
+                  <a:txBody>
+                    <a:bodyPr/>
+                    <a:p>
+                      <a:pPr algn="ctr">
+                        <a:buNone/>
+                      </a:pPr>
+                      <a:r>
+                        <a:rPr lang="en-US" altLang="zh-CN" sz="1400">
+                          <a:latin typeface="Times New Roman" panose="02020603050405020304" charset="0"/>
+                          <a:cs typeface="Times New Roman" panose="02020603050405020304" charset="0"/>
+                        </a:rPr>
+                        <a:t>(2.50, 7.00)</a:t>
+                      </a:r>
+                      <a:endParaRPr lang="en-US" altLang="zh-CN" sz="1400">
+                        <a:latin typeface="Times New Roman" panose="02020603050405020304" charset="0"/>
+                        <a:cs typeface="Times New Roman" panose="02020603050405020304" charset="0"/>
+                      </a:endParaRPr>
+                    </a:p>
+                  </a:txBody>
+                  <a:tcPr/>
+                </a:tc>
+                <a:tc>
+                  <a:txBody>
+                    <a:bodyPr/>
+                    <a:p>
+                      <a:pPr algn="ctr">
+                        <a:buNone/>
+                      </a:pPr>
+                      <a:r>
+                        <a:rPr lang="en-US" altLang="zh-CN" sz="1400">
+                          <a:latin typeface="Times New Roman" panose="02020603050405020304" charset="0"/>
+                          <a:cs typeface="Times New Roman" panose="02020603050405020304" charset="0"/>
+                        </a:rPr>
+                        <a:t>6.99</a:t>
+                      </a:r>
+                      <a:endParaRPr lang="en-US" altLang="zh-CN" sz="1400">
+                        <a:latin typeface="Times New Roman" panose="02020603050405020304" charset="0"/>
+                        <a:cs typeface="Times New Roman" panose="02020603050405020304" charset="0"/>
+                      </a:endParaRPr>
+                    </a:p>
+                  </a:txBody>
+                  <a:tcPr/>
+                </a:tc>
+                <a:tc>
+                  <a:txBody>
+                    <a:bodyPr/>
+                    <a:p>
+                      <a:pPr algn="ctr">
+                        <a:buNone/>
+                      </a:pPr>
+                      <a:r>
+                        <a:rPr lang="en-US" altLang="zh-CN" sz="1400">
+                          <a:solidFill>
+                            <a:srgbClr val="C00000"/>
+                          </a:solidFill>
+                          <a:latin typeface="Times New Roman" panose="02020603050405020304" charset="0"/>
+                          <a:cs typeface="Times New Roman" panose="02020603050405020304" charset="0"/>
+                        </a:rPr>
+                        <a:t>-6.88</a:t>
+                      </a:r>
+                      <a:endParaRPr lang="en-US" altLang="zh-CN" sz="1400">
+                        <a:solidFill>
+                          <a:srgbClr val="C00000"/>
+                        </a:solidFill>
+                        <a:latin typeface="Times New Roman" panose="02020603050405020304" charset="0"/>
+                        <a:cs typeface="Times New Roman" panose="02020603050405020304" charset="0"/>
+                      </a:endParaRPr>
+                    </a:p>
+                  </a:txBody>
+                  <a:tcPr/>
+                </a:tc>
+              </a:tr>
+              <a:tr h="365760">
+                <a:tc>
+                  <a:txBody>
+                    <a:bodyPr/>
+                    <a:p>
+                      <a:pPr algn="ctr">
+                        <a:buNone/>
+                      </a:pPr>
+                      <a:r>
+                        <a:rPr lang="en-US" altLang="zh-CN" sz="1400">
+                          <a:solidFill>
+                            <a:schemeClr val="tx1"/>
+                          </a:solidFill>
+                          <a:latin typeface="Times New Roman" panose="02020603050405020304" charset="0"/>
+                          <a:cs typeface="Times New Roman" panose="02020603050405020304" charset="0"/>
+                        </a:rPr>
+                        <a:t>5</a:t>
+                      </a:r>
+                      <a:endParaRPr lang="en-US" altLang="zh-CN" sz="1400">
+                        <a:solidFill>
+                          <a:schemeClr val="tx1"/>
+                        </a:solidFill>
+                        <a:latin typeface="Times New Roman" panose="02020603050405020304" charset="0"/>
+                        <a:cs typeface="Times New Roman" panose="02020603050405020304" charset="0"/>
+                      </a:endParaRPr>
+                    </a:p>
+                  </a:txBody>
+                  <a:tcPr/>
+                </a:tc>
+                <a:tc>
+                  <a:txBody>
+                    <a:bodyPr/>
+                    <a:p>
+                      <a:pPr algn="ctr">
+                        <a:buNone/>
+                      </a:pPr>
+                      <a:r>
+                        <a:rPr lang="en-US" altLang="zh-CN" sz="1400">
+                          <a:solidFill>
+                            <a:schemeClr val="tx1"/>
+                          </a:solidFill>
+                          <a:latin typeface="Times New Roman" panose="02020603050405020304" charset="0"/>
+                          <a:cs typeface="Times New Roman" panose="02020603050405020304" charset="0"/>
+                        </a:rPr>
+                        <a:t>(5.51, 7.70)</a:t>
+                      </a:r>
+                      <a:endParaRPr lang="en-US" altLang="zh-CN" sz="1400">
+                        <a:solidFill>
+                          <a:schemeClr val="tx1"/>
+                        </a:solidFill>
+                        <a:latin typeface="Times New Roman" panose="02020603050405020304" charset="0"/>
+                        <a:cs typeface="Times New Roman" panose="02020603050405020304" charset="0"/>
+                      </a:endParaRPr>
+                    </a:p>
+                  </a:txBody>
+                  <a:tcPr/>
+                </a:tc>
+                <a:tc>
+                  <a:txBody>
+                    <a:bodyPr/>
+                    <a:p>
+                      <a:pPr algn="ctr">
+                        <a:buNone/>
+                      </a:pPr>
+                      <a:r>
+                        <a:rPr lang="en-US" altLang="zh-CN" sz="1400">
+                          <a:solidFill>
+                            <a:schemeClr val="tx1"/>
+                          </a:solidFill>
+                          <a:latin typeface="Times New Roman" panose="02020603050405020304" charset="0"/>
+                          <a:cs typeface="Times New Roman" panose="02020603050405020304" charset="0"/>
+                        </a:rPr>
+                        <a:t>(6.00, 8.00)</a:t>
+                      </a:r>
+                      <a:endParaRPr lang="en-US" altLang="zh-CN" sz="1400">
+                        <a:solidFill>
+                          <a:schemeClr val="tx1"/>
+                        </a:solidFill>
+                        <a:latin typeface="Times New Roman" panose="02020603050405020304" charset="0"/>
+                        <a:cs typeface="Times New Roman" panose="02020603050405020304" charset="0"/>
+                      </a:endParaRPr>
+                    </a:p>
+                  </a:txBody>
+                  <a:tcPr/>
+                </a:tc>
+                <a:tc>
+                  <a:txBody>
+                    <a:bodyPr/>
+                    <a:p>
+                      <a:pPr algn="ctr">
+                        <a:buNone/>
+                      </a:pPr>
+                      <a:r>
+                        <a:rPr lang="en-US" altLang="zh-CN" sz="1400">
+                          <a:solidFill>
+                            <a:schemeClr val="tx1"/>
+                          </a:solidFill>
+                          <a:latin typeface="Times New Roman" panose="02020603050405020304" charset="0"/>
+                          <a:cs typeface="Times New Roman" panose="02020603050405020304" charset="0"/>
+                        </a:rPr>
+                        <a:t>0.58</a:t>
+                      </a:r>
+                      <a:endParaRPr lang="en-US" altLang="zh-CN" sz="1400">
+                        <a:solidFill>
+                          <a:schemeClr val="tx1"/>
+                        </a:solidFill>
+                        <a:latin typeface="Times New Roman" panose="02020603050405020304" charset="0"/>
+                        <a:cs typeface="Times New Roman" panose="02020603050405020304" charset="0"/>
+                      </a:endParaRPr>
+                    </a:p>
+                  </a:txBody>
+                  <a:tcPr/>
+                </a:tc>
+                <a:tc>
+                  <a:txBody>
+                    <a:bodyPr/>
+                    <a:p>
+                      <a:pPr algn="ctr">
+                        <a:buNone/>
+                      </a:pPr>
+                      <a:r>
+                        <a:rPr lang="en-US" altLang="zh-CN" sz="1400">
+                          <a:solidFill>
+                            <a:srgbClr val="C00000"/>
+                          </a:solidFill>
+                          <a:latin typeface="Times New Roman" panose="02020603050405020304" charset="0"/>
+                          <a:cs typeface="Times New Roman" panose="02020603050405020304" charset="0"/>
+                        </a:rPr>
+                        <a:t>-0.13</a:t>
+                      </a:r>
+                      <a:endParaRPr lang="en-US" altLang="zh-CN" sz="1400">
+                        <a:solidFill>
+                          <a:srgbClr val="C00000"/>
+                        </a:solidFill>
+                        <a:latin typeface="Times New Roman" panose="02020603050405020304" charset="0"/>
+                        <a:cs typeface="Times New Roman" panose="02020603050405020304" charset="0"/>
+                      </a:endParaRPr>
+                    </a:p>
+                  </a:txBody>
+                  <a:tcPr/>
+                </a:tc>
+              </a:tr>
+              <a:tr h="365760">
+                <a:tc>
+                  <a:txBody>
+                    <a:bodyPr/>
+                    <a:p>
+                      <a:pPr algn="ctr">
+                        <a:buNone/>
+                      </a:pPr>
+                      <a:r>
+                        <a:rPr lang="en-US" altLang="zh-CN" sz="1400">
+                          <a:latin typeface="Times New Roman" panose="02020603050405020304" charset="0"/>
+                          <a:cs typeface="Times New Roman" panose="02020603050405020304" charset="0"/>
+                        </a:rPr>
+                        <a:t>6</a:t>
+                      </a:r>
+                      <a:endParaRPr lang="en-US" altLang="zh-CN" sz="1400">
+                        <a:latin typeface="Times New Roman" panose="02020603050405020304" charset="0"/>
+                        <a:cs typeface="Times New Roman" panose="02020603050405020304" charset="0"/>
+                      </a:endParaRPr>
+                    </a:p>
+                  </a:txBody>
+                  <a:tcPr/>
+                </a:tc>
+                <a:tc>
+                  <a:txBody>
+                    <a:bodyPr/>
+                    <a:p>
+                      <a:pPr algn="ctr">
+                        <a:buNone/>
+                      </a:pPr>
+                      <a:r>
+                        <a:rPr lang="en-US" altLang="zh-CN" sz="1400">
+                          <a:latin typeface="Times New Roman" panose="02020603050405020304" charset="0"/>
+                          <a:cs typeface="Times New Roman" panose="02020603050405020304" charset="0"/>
+                        </a:rPr>
+                        <a:t>(7.41, 7.28)</a:t>
+                      </a:r>
+                      <a:endParaRPr lang="en-US" altLang="zh-CN" sz="1400">
+                        <a:latin typeface="Times New Roman" panose="02020603050405020304" charset="0"/>
+                        <a:cs typeface="Times New Roman" panose="02020603050405020304" charset="0"/>
+                      </a:endParaRPr>
+                    </a:p>
+                  </a:txBody>
+                  <a:tcPr/>
+                </a:tc>
+                <a:tc>
+                  <a:txBody>
+                    <a:bodyPr/>
+                    <a:p>
+                      <a:pPr algn="ctr">
+                        <a:buNone/>
+                      </a:pPr>
+                      <a:r>
+                        <a:rPr lang="en-US" altLang="zh-CN" sz="1400">
+                          <a:latin typeface="Times New Roman" panose="02020603050405020304" charset="0"/>
+                          <a:cs typeface="Times New Roman" panose="02020603050405020304" charset="0"/>
+                        </a:rPr>
+                        <a:t>(8.00, 7.50)</a:t>
+                      </a:r>
+                      <a:endParaRPr lang="en-US" altLang="zh-CN" sz="1400">
+                        <a:latin typeface="Times New Roman" panose="02020603050405020304" charset="0"/>
+                        <a:cs typeface="Times New Roman" panose="02020603050405020304" charset="0"/>
+                      </a:endParaRPr>
+                    </a:p>
+                  </a:txBody>
+                  <a:tcPr/>
+                </a:tc>
+                <a:tc>
+                  <a:txBody>
+                    <a:bodyPr/>
+                    <a:p>
+                      <a:pPr algn="ctr">
+                        <a:buNone/>
+                      </a:pPr>
+                      <a:r>
+                        <a:rPr lang="en-US" altLang="zh-CN" sz="1400">
+                          <a:latin typeface="Times New Roman" panose="02020603050405020304" charset="0"/>
+                          <a:cs typeface="Times New Roman" panose="02020603050405020304" charset="0"/>
+                        </a:rPr>
+                        <a:t>0.63</a:t>
+                      </a:r>
+                      <a:endParaRPr lang="en-US" altLang="zh-CN" sz="1400">
+                        <a:latin typeface="Times New Roman" panose="02020603050405020304" charset="0"/>
+                        <a:cs typeface="Times New Roman" panose="02020603050405020304" charset="0"/>
+                      </a:endParaRPr>
+                    </a:p>
+                  </a:txBody>
+                  <a:tcPr/>
+                </a:tc>
+                <a:tc>
+                  <a:txBody>
+                    <a:bodyPr/>
+                    <a:p>
+                      <a:pPr algn="ctr">
+                        <a:buNone/>
+                      </a:pPr>
+                      <a:r>
+                        <a:rPr lang="en-US" altLang="zh-CN" sz="1400">
+                          <a:solidFill>
+                            <a:srgbClr val="C00000"/>
+                          </a:solidFill>
+                          <a:latin typeface="Times New Roman" panose="02020603050405020304" charset="0"/>
+                          <a:cs typeface="Times New Roman" panose="02020603050405020304" charset="0"/>
+                        </a:rPr>
+                        <a:t>-0.60</a:t>
+                      </a:r>
+                      <a:endParaRPr lang="en-US" altLang="zh-CN" sz="1400">
+                        <a:solidFill>
+                          <a:srgbClr val="C00000"/>
+                        </a:solidFill>
+                        <a:latin typeface="Times New Roman" panose="02020603050405020304" charset="0"/>
+                        <a:cs typeface="Times New Roman" panose="02020603050405020304" charset="0"/>
+                      </a:endParaRPr>
+                    </a:p>
+                  </a:txBody>
+                  <a:tcPr/>
+                </a:tc>
+              </a:tr>
+            </a:tbl>
+          </a:graphicData>
+        </a:graphic>
+      </p:graphicFrame>
+      <p:pic>
+        <p:nvPicPr>
+          <p:cNvPr id="3" name="图片 2" descr="transformer_location_dirc"/>
+          <p:cNvPicPr>
+            <a:picLocks noChangeAspect="1"/>
+          </p:cNvPicPr>
+          <p:nvPr/>
+        </p:nvPicPr>
+        <p:blipFill>
+          <a:blip r:embed="rId3"/>
+          <a:stretch>
+            <a:fillRect/>
+          </a:stretch>
+        </p:blipFill>
+        <p:spPr>
+          <a:xfrm>
+            <a:off x="674370" y="3612515"/>
+            <a:ext cx="3224530" cy="2867660"/>
+          </a:xfrm>
+          <a:prstGeom prst="rect">
+            <a:avLst/>
+          </a:prstGeom>
+        </p:spPr>
+      </p:pic>
+    </p:spTree>
+  </p:cSld>
+  <p:clrMapOvr>
+    <a:masterClrMapping/>
+  </p:clrMapOvr>
+</p:sld>
+</file>
+
+<file path=ppt/slides/slide12.xml><?xml version="1.0" encoding="utf-8"?>
+<p:sld xmlns:a="http://schemas.openxmlformats.org/drawingml/2006/main" xmlns:r="http://schemas.openxmlformats.org/officeDocument/2006/relationships" xmlns:p="http://schemas.openxmlformats.org/presentationml/2006/main">
+  <p:cSld>
+    <p:spTree>
+      <p:nvGrpSpPr>
+        <p:cNvPr id="1" name=""/>
+        <p:cNvGrpSpPr/>
+        <p:nvPr/>
+      </p:nvGrpSpPr>
+      <p:grpSpPr>
+        <a:xfrm>
+          <a:off x="0" y="0"/>
+          <a:ext cx="0" cy="0"/>
+          <a:chOff x="0" y="0"/>
+          <a:chExt cx="0" cy="0"/>
+        </a:xfrm>
+      </p:grpSpPr>
+      <p:sp>
+        <p:nvSpPr>
+          <p:cNvPr id="2" name="Rectangle 1"/>
+          <p:cNvSpPr/>
+          <p:nvPr/>
+        </p:nvSpPr>
+        <p:spPr>
+          <a:xfrm>
+            <a:off x="838200" y="1794649"/>
+            <a:ext cx="10766715" cy="583565"/>
+          </a:xfrm>
+          <a:prstGeom prst="rect">
+            <a:avLst/>
+          </a:prstGeom>
+        </p:spPr>
+        <p:txBody>
+          <a:bodyPr wrap="square">
+            <a:spAutoFit/>
+          </a:bodyPr>
+          <a:lstStyle/>
+          <a:p>
+            <a:pPr marL="457200" indent="-457200">
+              <a:buFont typeface="Arial" panose="020B0604020202020204" pitchFamily="34" charset="0"/>
+              <a:buChar char="•"/>
+              <a:defRPr/>
+            </a:pPr>
+            <a:endParaRPr lang="en-US" altLang="zh-CN" sz="3200" dirty="0">
+              <a:latin typeface="Kaiti TC" panose="02010600040101010101" pitchFamily="2" charset="-120"/>
+              <a:ea typeface="Kaiti TC" panose="02010600040101010101" pitchFamily="2" charset="-120"/>
+            </a:endParaRPr>
+          </a:p>
+        </p:txBody>
+      </p:sp>
+      <p:sp>
+        <p:nvSpPr>
+          <p:cNvPr id="7" name="Title 2"/>
+          <p:cNvSpPr txBox="1"/>
+          <p:nvPr/>
+        </p:nvSpPr>
+        <p:spPr>
+          <a:xfrm>
+            <a:off x="265430" y="-167640"/>
+            <a:ext cx="10261600" cy="1082040"/>
+          </a:xfrm>
+          <a:prstGeom prst="rect">
+            <a:avLst/>
+          </a:prstGeom>
+        </p:spPr>
+        <p:txBody>
+          <a:bodyPr vert="horz" lIns="91440" tIns="45720" rIns="91440" bIns="45720" rtlCol="0" anchor="ctr">
+            <a:normAutofit/>
+          </a:bodyPr>
+          <a:lstStyle>
+            <a:lvl1pPr algn="l" defTabSz="914400" rtl="0" eaLnBrk="1" latinLnBrk="0" hangingPunct="1">
+              <a:lnSpc>
+                <a:spcPct val="90000"/>
+              </a:lnSpc>
+              <a:spcBef>
+                <a:spcPct val="0"/>
+              </a:spcBef>
+              <a:buNone/>
+              <a:defRPr sz="6000" kern="1200">
+                <a:solidFill>
+                  <a:srgbClr val="DD613B"/>
+                </a:solidFill>
+                <a:latin typeface="+mj-lt"/>
+                <a:ea typeface="+mj-ea"/>
+                <a:cs typeface="+mj-cs"/>
+              </a:defRPr>
+            </a:lvl1pPr>
+          </a:lstStyle>
+          <a:p>
+            <a:r>
+              <a:rPr lang="en-US" altLang="zh-CN" sz="4000" dirty="0" err="1">
+                <a:latin typeface="Times New Roman" panose="02020603050405020304" charset="0"/>
+                <a:ea typeface="微软雅黑" panose="020B0503020204020204" charset="-122"/>
+                <a:cs typeface="Times New Roman" panose="02020603050405020304" charset="0"/>
+                <a:sym typeface="+mn-ea"/>
+              </a:rPr>
+              <a:t>Simulation(Transformer)</a:t>
+            </a:r>
+            <a:endParaRPr lang="en-US" altLang="zh-CN" sz="4000" dirty="0" err="1">
+              <a:latin typeface="Times New Roman" panose="02020603050405020304" charset="0"/>
+              <a:ea typeface="微软雅黑" panose="020B0503020204020204" charset="-122"/>
+              <a:cs typeface="Times New Roman" panose="02020603050405020304" charset="0"/>
+              <a:sym typeface="+mn-ea"/>
+            </a:endParaRPr>
+          </a:p>
+        </p:txBody>
+      </p:sp>
+      <p:sp>
+        <p:nvSpPr>
+          <p:cNvPr id="31" name="文本框 30"/>
+          <p:cNvSpPr txBox="1"/>
+          <p:nvPr/>
+        </p:nvSpPr>
+        <p:spPr>
+          <a:xfrm>
+            <a:off x="10124440" y="2334895"/>
+            <a:ext cx="2009140" cy="953135"/>
+          </a:xfrm>
+          <a:prstGeom prst="rect">
+            <a:avLst/>
+          </a:prstGeom>
+        </p:spPr>
+        <p:txBody>
+          <a:bodyPr wrap="square">
+            <a:spAutoFit/>
+            <a:extLst>
+              <a:ext uri="{4A0BC546-FE56-4ADE-93B0-CB8AF2F6F144}">
+                <wpsdc:textFrameExt xmlns:wpsdc="http://www.wps.cn/officeDocument/2022/drawingmlCustomData" type="text"/>
+              </a:ext>
+            </a:extLst>
+          </a:bodyPr>
+          <a:p>
+            <a:pPr algn="l"/>
+            <a:r>
+              <a:rPr lang="en-US" altLang="zh-CN" sz="1400" b="1">
+                <a:latin typeface="Times New Roman" panose="02020603050405020304" charset="0"/>
+                <a:ea typeface="微软雅黑" panose="020B0503020204020204" charset="-122"/>
+                <a:cs typeface="Times New Roman" panose="02020603050405020304" charset="0"/>
+              </a:rPr>
+              <a:t>With multi-hop mechnisim(before </a:t>
+            </a:r>
+            <a:endParaRPr lang="en-US" altLang="zh-CN" sz="1400" b="1">
+              <a:latin typeface="Times New Roman" panose="02020603050405020304" charset="0"/>
+              <a:ea typeface="微软雅黑" panose="020B0503020204020204" charset="-122"/>
+              <a:cs typeface="Times New Roman" panose="02020603050405020304" charset="0"/>
+            </a:endParaRPr>
+          </a:p>
+          <a:p>
+            <a:pPr algn="l"/>
+            <a:r>
+              <a:rPr lang="en-US" altLang="zh-CN" sz="1400" b="1">
+                <a:latin typeface="Times New Roman" panose="02020603050405020304" charset="0"/>
+                <a:ea typeface="微软雅黑" panose="020B0503020204020204" charset="-122"/>
+                <a:cs typeface="Times New Roman" panose="02020603050405020304" charset="0"/>
+              </a:rPr>
+              <a:t>optimization):</a:t>
+            </a:r>
+            <a:endParaRPr lang="en-US" altLang="zh-CN" sz="1400">
+              <a:latin typeface="Times New Roman" panose="02020603050405020304" charset="0"/>
+              <a:ea typeface="微软雅黑" panose="020B0503020204020204" charset="-122"/>
+              <a:cs typeface="Times New Roman" panose="02020603050405020304" charset="0"/>
+            </a:endParaRPr>
+          </a:p>
+          <a:p>
+            <a:pPr marL="285750" indent="-285750" algn="l">
+              <a:buFont typeface="Wingdings" panose="05000000000000000000" charset="0"/>
+              <a:buChar char="Ø"/>
+            </a:pPr>
+            <a:r>
+              <a:rPr lang="en-US" altLang="zh-CN" sz="1400">
+                <a:latin typeface="Times New Roman" panose="02020603050405020304" charset="0"/>
+                <a:ea typeface="微软雅黑" panose="020B0503020204020204" charset="-122"/>
+                <a:cs typeface="Times New Roman" panose="02020603050405020304" charset="0"/>
+              </a:rPr>
+              <a:t>Average error: 0.22</a:t>
+            </a:r>
+            <a:endParaRPr lang="en-US" altLang="zh-CN" sz="1400">
+              <a:latin typeface="Times New Roman" panose="02020603050405020304" charset="0"/>
+              <a:ea typeface="微软雅黑" panose="020B0503020204020204" charset="-122"/>
+              <a:cs typeface="Times New Roman" panose="02020603050405020304" charset="0"/>
+            </a:endParaRPr>
+          </a:p>
+        </p:txBody>
+      </p:sp>
+      <p:sp>
+        <p:nvSpPr>
+          <p:cNvPr id="36" name="文本框 35"/>
+          <p:cNvSpPr txBox="1"/>
+          <p:nvPr/>
+        </p:nvSpPr>
+        <p:spPr>
+          <a:xfrm>
+            <a:off x="10184765" y="5025390"/>
+            <a:ext cx="2007235" cy="953135"/>
+          </a:xfrm>
+          <a:prstGeom prst="rect">
+            <a:avLst/>
+          </a:prstGeom>
+        </p:spPr>
+        <p:txBody>
+          <a:bodyPr wrap="square">
+            <a:spAutoFit/>
+            <a:extLst>
+              <a:ext uri="{4A0BC546-FE56-4ADE-93B0-CB8AF2F6F144}">
+                <wpsdc:textFrameExt xmlns:wpsdc="http://www.wps.cn/officeDocument/2022/drawingmlCustomData" type="text"/>
+              </a:ext>
+            </a:extLst>
+          </a:bodyPr>
+          <a:p>
+            <a:pPr algn="l"/>
+            <a:r>
+              <a:rPr lang="en-US" altLang="zh-CN" sz="1400" b="1">
+                <a:latin typeface="Times New Roman" panose="02020603050405020304" charset="0"/>
+                <a:ea typeface="微软雅黑" panose="020B0503020204020204" charset="-122"/>
+                <a:cs typeface="Times New Roman" panose="02020603050405020304" charset="0"/>
+              </a:rPr>
+              <a:t>With multi-hop mechnisim(after </a:t>
+            </a:r>
+            <a:endParaRPr lang="en-US" altLang="zh-CN" sz="1400" b="1">
+              <a:latin typeface="Times New Roman" panose="02020603050405020304" charset="0"/>
+              <a:ea typeface="微软雅黑" panose="020B0503020204020204" charset="-122"/>
+              <a:cs typeface="Times New Roman" panose="02020603050405020304" charset="0"/>
+            </a:endParaRPr>
+          </a:p>
+          <a:p>
+            <a:pPr algn="l"/>
+            <a:r>
+              <a:rPr lang="en-US" altLang="zh-CN" sz="1400" b="1">
+                <a:latin typeface="Times New Roman" panose="02020603050405020304" charset="0"/>
+                <a:ea typeface="微软雅黑" panose="020B0503020204020204" charset="-122"/>
+                <a:cs typeface="Times New Roman" panose="02020603050405020304" charset="0"/>
+              </a:rPr>
+              <a:t>optimization):</a:t>
+            </a:r>
+            <a:endParaRPr lang="en-US" altLang="zh-CN" sz="1400">
+              <a:latin typeface="Times New Roman" panose="02020603050405020304" charset="0"/>
+              <a:ea typeface="微软雅黑" panose="020B0503020204020204" charset="-122"/>
+              <a:cs typeface="Times New Roman" panose="02020603050405020304" charset="0"/>
+            </a:endParaRPr>
+          </a:p>
+          <a:p>
+            <a:pPr marL="285750" indent="-285750" algn="l">
+              <a:buFont typeface="Wingdings" panose="05000000000000000000" charset="0"/>
+              <a:buChar char="Ø"/>
+            </a:pPr>
+            <a:r>
+              <a:rPr lang="en-US" altLang="zh-CN" sz="1400">
+                <a:latin typeface="Times New Roman" panose="02020603050405020304" charset="0"/>
+                <a:ea typeface="微软雅黑" panose="020B0503020204020204" charset="-122"/>
+                <a:cs typeface="Times New Roman" panose="02020603050405020304" charset="0"/>
+              </a:rPr>
+              <a:t>Average error: 0.26</a:t>
+            </a:r>
+            <a:endParaRPr lang="en-US" altLang="zh-CN" sz="1400">
+              <a:latin typeface="Times New Roman" panose="02020603050405020304" charset="0"/>
+              <a:ea typeface="微软雅黑" panose="020B0503020204020204" charset="-122"/>
+              <a:cs typeface="Times New Roman" panose="02020603050405020304" charset="0"/>
+            </a:endParaRPr>
+          </a:p>
+        </p:txBody>
+      </p:sp>
+      <p:pic>
+        <p:nvPicPr>
+          <p:cNvPr id="6" name="图片 5" descr="transformer_location"/>
+          <p:cNvPicPr>
+            <a:picLocks noChangeAspect="1"/>
+          </p:cNvPicPr>
+          <p:nvPr/>
+        </p:nvPicPr>
+        <p:blipFill>
+          <a:blip r:embed="rId1"/>
+          <a:stretch>
+            <a:fillRect/>
+          </a:stretch>
+        </p:blipFill>
+        <p:spPr>
+          <a:xfrm>
+            <a:off x="431800" y="560705"/>
+            <a:ext cx="3813810" cy="3051810"/>
+          </a:xfrm>
+          <a:prstGeom prst="rect">
+            <a:avLst/>
+          </a:prstGeom>
+        </p:spPr>
+      </p:pic>
+      <p:pic>
+        <p:nvPicPr>
+          <p:cNvPr id="8" name="图片 7" descr="transformer_location_opt"/>
+          <p:cNvPicPr>
+            <a:picLocks noChangeAspect="1"/>
+          </p:cNvPicPr>
+          <p:nvPr/>
+        </p:nvPicPr>
+        <p:blipFill>
+          <a:blip r:embed="rId2"/>
+          <a:stretch>
+            <a:fillRect/>
+          </a:stretch>
+        </p:blipFill>
+        <p:spPr>
+          <a:xfrm>
+            <a:off x="431800" y="3612515"/>
+            <a:ext cx="3813810" cy="3050540"/>
+          </a:xfrm>
+          <a:prstGeom prst="rect">
+            <a:avLst/>
+          </a:prstGeom>
+        </p:spPr>
+      </p:pic>
+      <p:graphicFrame>
+        <p:nvGraphicFramePr>
+          <p:cNvPr id="10" name="表格 9"/>
+          <p:cNvGraphicFramePr/>
+          <p:nvPr>
+            <p:custDataLst>
+              <p:tags r:id="rId3"/>
+            </p:custDataLst>
+          </p:nvPr>
+        </p:nvGraphicFramePr>
+        <p:xfrm>
+          <a:off x="4479925" y="3797935"/>
+          <a:ext cx="5566410" cy="2517775"/>
+        </p:xfrm>
+        <a:graphic>
+          <a:graphicData uri="http://schemas.openxmlformats.org/drawingml/2006/table">
+            <a:tbl>
+              <a:tblPr firstRow="1" bandRow="1">
+                <a:tableStyleId>{5C22544A-7EE6-4342-B048-85BDC9FD1C3A}</a:tableStyleId>
+              </a:tblPr>
+              <a:tblGrid>
+                <a:gridCol w="939165"/>
+                <a:gridCol w="1170305"/>
+                <a:gridCol w="1243330"/>
+                <a:gridCol w="1149350"/>
+                <a:gridCol w="1064260"/>
+              </a:tblGrid>
+              <a:tr h="323215">
+                <a:tc>
+                  <a:txBody>
+                    <a:bodyPr/>
+                    <a:p>
+                      <a:pPr algn="ctr">
+                        <a:buNone/>
+                      </a:pPr>
+                      <a:r>
+                        <a:rPr lang="en-US" altLang="zh-CN" sz="1200">
+                          <a:latin typeface="Times New Roman" panose="02020603050405020304" charset="0"/>
+                          <a:cs typeface="Times New Roman" panose="02020603050405020304" charset="0"/>
+                        </a:rPr>
+                        <a:t> Node</a:t>
+                      </a:r>
+                      <a:endParaRPr lang="en-US" altLang="zh-CN" sz="1200">
+                        <a:latin typeface="Times New Roman" panose="02020603050405020304" charset="0"/>
+                        <a:cs typeface="Times New Roman" panose="02020603050405020304" charset="0"/>
+                      </a:endParaRPr>
+                    </a:p>
+                  </a:txBody>
+                  <a:tcPr/>
+                </a:tc>
+                <a:tc>
+                  <a:txBody>
+                    <a:bodyPr/>
+                    <a:p>
+                      <a:pPr algn="ctr">
+                        <a:buNone/>
+                      </a:pPr>
+                      <a:r>
+                        <a:rPr lang="en-US" altLang="zh-CN" sz="1400">
+                          <a:latin typeface="Times New Roman" panose="02020603050405020304" charset="0"/>
+                          <a:cs typeface="Times New Roman" panose="02020603050405020304" charset="0"/>
+                        </a:rPr>
+                        <a:t>est_location</a:t>
+                      </a:r>
+                      <a:endParaRPr lang="en-US" altLang="zh-CN" sz="1400">
+                        <a:latin typeface="Times New Roman" panose="02020603050405020304" charset="0"/>
+                        <a:cs typeface="Times New Roman" panose="02020603050405020304" charset="0"/>
+                      </a:endParaRPr>
+                    </a:p>
+                  </a:txBody>
+                  <a:tcPr/>
+                </a:tc>
+                <a:tc>
+                  <a:txBody>
+                    <a:bodyPr/>
+                    <a:p>
+                      <a:pPr algn="ctr">
+                        <a:buNone/>
+                      </a:pPr>
+                      <a:r>
+                        <a:rPr lang="en-US" altLang="zh-CN" sz="1400">
+                          <a:latin typeface="Times New Roman" panose="02020603050405020304" charset="0"/>
+                          <a:cs typeface="Times New Roman" panose="02020603050405020304" charset="0"/>
+                        </a:rPr>
+                        <a:t>true_location</a:t>
+                      </a:r>
+                      <a:endParaRPr lang="en-US" altLang="zh-CN" sz="1400">
+                        <a:latin typeface="Times New Roman" panose="02020603050405020304" charset="0"/>
+                        <a:cs typeface="Times New Roman" panose="02020603050405020304" charset="0"/>
+                      </a:endParaRPr>
+                    </a:p>
+                  </a:txBody>
+                  <a:tcPr/>
+                </a:tc>
+                <a:tc>
+                  <a:txBody>
+                    <a:bodyPr/>
+                    <a:p>
+                      <a:pPr algn="ctr">
+                        <a:buNone/>
+                      </a:pPr>
+                      <a:r>
+                        <a:rPr lang="en-US" altLang="zh-CN" sz="1400">
+                          <a:latin typeface="Times New Roman" panose="02020603050405020304" charset="0"/>
+                          <a:cs typeface="Times New Roman" panose="02020603050405020304" charset="0"/>
+                        </a:rPr>
+                        <a:t>error</a:t>
+                      </a:r>
+                      <a:endParaRPr lang="en-US" altLang="zh-CN" sz="1400">
+                        <a:latin typeface="Times New Roman" panose="02020603050405020304" charset="0"/>
+                        <a:cs typeface="Times New Roman" panose="02020603050405020304" charset="0"/>
+                      </a:endParaRPr>
+                    </a:p>
+                  </a:txBody>
+                  <a:tcPr/>
+                </a:tc>
+                <a:tc>
+                  <a:txBody>
+                    <a:bodyPr/>
+                    <a:p>
+                      <a:pPr algn="ctr">
+                        <a:buNone/>
+                      </a:pPr>
+                      <a:r>
+                        <a:rPr lang="en-US" altLang="zh-CN" sz="1400">
+                          <a:latin typeface="Times New Roman" panose="02020603050405020304" charset="0"/>
+                          <a:cs typeface="Times New Roman" panose="02020603050405020304" charset="0"/>
+                        </a:rPr>
+                        <a:t>diff</a:t>
+                      </a:r>
+                      <a:endParaRPr lang="en-US" altLang="zh-CN" sz="1400">
+                        <a:latin typeface="Times New Roman" panose="02020603050405020304" charset="0"/>
+                        <a:cs typeface="Times New Roman" panose="02020603050405020304" charset="0"/>
+                      </a:endParaRPr>
+                    </a:p>
+                  </a:txBody>
+                  <a:tcPr/>
+                </a:tc>
+              </a:tr>
+              <a:tr h="365760">
+                <a:tc>
+                  <a:txBody>
+                    <a:bodyPr/>
+                    <a:p>
+                      <a:pPr algn="ctr">
+                        <a:buNone/>
+                      </a:pPr>
+                      <a:r>
+                        <a:rPr lang="en-US" altLang="zh-CN" sz="1400">
+                          <a:latin typeface="Times New Roman" panose="02020603050405020304" charset="0"/>
+                          <a:cs typeface="Times New Roman" panose="02020603050405020304" charset="0"/>
+                        </a:rPr>
+                        <a:t>1</a:t>
+                      </a:r>
+                      <a:endParaRPr lang="en-US" altLang="zh-CN" sz="1400">
+                        <a:latin typeface="Times New Roman" panose="02020603050405020304" charset="0"/>
+                        <a:cs typeface="Times New Roman" panose="02020603050405020304" charset="0"/>
+                      </a:endParaRPr>
+                    </a:p>
+                  </a:txBody>
+                  <a:tcPr/>
+                </a:tc>
+                <a:tc>
+                  <a:txBody>
+                    <a:bodyPr/>
+                    <a:p>
+                      <a:pPr algn="ctr">
+                        <a:buNone/>
+                      </a:pPr>
+                      <a:r>
+                        <a:rPr lang="en-US" altLang="zh-CN" sz="1400">
+                          <a:latin typeface="Times New Roman" panose="02020603050405020304" charset="0"/>
+                          <a:cs typeface="Times New Roman" panose="02020603050405020304" charset="0"/>
+                        </a:rPr>
+                        <a:t>(2.94, 2.70)</a:t>
+                      </a:r>
+                      <a:endParaRPr lang="en-US" altLang="zh-CN" sz="1400">
+                        <a:latin typeface="Times New Roman" panose="02020603050405020304" charset="0"/>
+                        <a:cs typeface="Times New Roman" panose="02020603050405020304" charset="0"/>
+                      </a:endParaRPr>
+                    </a:p>
+                  </a:txBody>
+                  <a:tcPr/>
+                </a:tc>
+                <a:tc>
+                  <a:txBody>
+                    <a:bodyPr/>
+                    <a:p>
+                      <a:pPr algn="ctr">
+                        <a:buNone/>
+                      </a:pPr>
+                      <a:r>
+                        <a:rPr lang="en-US" altLang="zh-CN" sz="1400">
+                          <a:latin typeface="Times New Roman" panose="02020603050405020304" charset="0"/>
+                          <a:cs typeface="Times New Roman" panose="02020603050405020304" charset="0"/>
+                        </a:rPr>
+                        <a:t>(3.00, 3.00)</a:t>
+                      </a:r>
+                      <a:endParaRPr lang="en-US" altLang="zh-CN" sz="1400">
+                        <a:latin typeface="Times New Roman" panose="02020603050405020304" charset="0"/>
+                        <a:cs typeface="Times New Roman" panose="02020603050405020304" charset="0"/>
+                      </a:endParaRPr>
+                    </a:p>
+                  </a:txBody>
+                  <a:tcPr/>
+                </a:tc>
+                <a:tc>
+                  <a:txBody>
+                    <a:bodyPr/>
+                    <a:p>
+                      <a:pPr algn="ctr">
+                        <a:buNone/>
+                      </a:pPr>
+                      <a:r>
+                        <a:rPr lang="en-US" altLang="zh-CN" sz="1400">
+                          <a:latin typeface="Times New Roman" panose="02020603050405020304" charset="0"/>
+                          <a:cs typeface="Times New Roman" panose="02020603050405020304" charset="0"/>
+                        </a:rPr>
+                        <a:t>0.31</a:t>
+                      </a:r>
+                      <a:endParaRPr lang="en-US" altLang="zh-CN" sz="1400">
+                        <a:latin typeface="Times New Roman" panose="02020603050405020304" charset="0"/>
+                        <a:cs typeface="Times New Roman" panose="02020603050405020304" charset="0"/>
+                      </a:endParaRPr>
+                    </a:p>
+                  </a:txBody>
+                  <a:tcPr/>
+                </a:tc>
+                <a:tc>
+                  <a:txBody>
+                    <a:bodyPr/>
+                    <a:p>
+                      <a:pPr algn="ctr">
+                        <a:buNone/>
+                      </a:pPr>
+                      <a:r>
+                        <a:rPr lang="en-US" altLang="zh-CN" sz="1400">
+                          <a:latin typeface="Times New Roman" panose="02020603050405020304" charset="0"/>
+                          <a:cs typeface="Times New Roman" panose="02020603050405020304" charset="0"/>
+                        </a:rPr>
+                        <a:t>-0.14</a:t>
+                      </a:r>
+                      <a:endParaRPr lang="en-US" altLang="zh-CN" sz="1400">
+                        <a:latin typeface="Times New Roman" panose="02020603050405020304" charset="0"/>
+                        <a:cs typeface="Times New Roman" panose="02020603050405020304" charset="0"/>
+                      </a:endParaRPr>
+                    </a:p>
+                  </a:txBody>
+                  <a:tcPr/>
+                </a:tc>
+              </a:tr>
+              <a:tr h="365760">
+                <a:tc>
+                  <a:txBody>
+                    <a:bodyPr/>
+                    <a:p>
+                      <a:pPr algn="ctr">
+                        <a:buNone/>
+                      </a:pPr>
+                      <a:r>
+                        <a:rPr lang="en-US" altLang="zh-CN" sz="1400">
+                          <a:latin typeface="Times New Roman" panose="02020603050405020304" charset="0"/>
+                          <a:cs typeface="Times New Roman" panose="02020603050405020304" charset="0"/>
+                        </a:rPr>
+                        <a:t>2</a:t>
+                      </a:r>
+                      <a:endParaRPr lang="en-US" altLang="zh-CN" sz="1400">
+                        <a:latin typeface="Times New Roman" panose="02020603050405020304" charset="0"/>
+                        <a:cs typeface="Times New Roman" panose="02020603050405020304" charset="0"/>
+                      </a:endParaRPr>
+                    </a:p>
+                  </a:txBody>
+                  <a:tcPr/>
+                </a:tc>
+                <a:tc>
+                  <a:txBody>
+                    <a:bodyPr/>
+                    <a:p>
+                      <a:pPr algn="ctr">
+                        <a:buNone/>
+                      </a:pPr>
+                      <a:r>
+                        <a:rPr lang="en-US" altLang="zh-CN" sz="1400">
+                          <a:latin typeface="Times New Roman" panose="02020603050405020304" charset="0"/>
+                          <a:cs typeface="Times New Roman" panose="02020603050405020304" charset="0"/>
+                        </a:rPr>
+                        <a:t>(1.90, -0.09)</a:t>
+                      </a:r>
+                      <a:endParaRPr lang="en-US" altLang="zh-CN" sz="1400">
+                        <a:latin typeface="Times New Roman" panose="02020603050405020304" charset="0"/>
+                        <a:cs typeface="Times New Roman" panose="02020603050405020304" charset="0"/>
+                      </a:endParaRPr>
+                    </a:p>
+                  </a:txBody>
+                  <a:tcPr/>
+                </a:tc>
+                <a:tc>
+                  <a:txBody>
+                    <a:bodyPr/>
+                    <a:p>
+                      <a:pPr algn="ctr">
+                        <a:buNone/>
+                      </a:pPr>
+                      <a:r>
+                        <a:rPr lang="en-US" altLang="zh-CN" sz="1400">
+                          <a:latin typeface="Times New Roman" panose="02020603050405020304" charset="0"/>
+                          <a:cs typeface="Times New Roman" panose="02020603050405020304" charset="0"/>
+                        </a:rPr>
+                        <a:t>(2.00, 0.00)</a:t>
+                      </a:r>
+                      <a:endParaRPr lang="en-US" altLang="zh-CN" sz="1400">
+                        <a:latin typeface="Times New Roman" panose="02020603050405020304" charset="0"/>
+                        <a:cs typeface="Times New Roman" panose="02020603050405020304" charset="0"/>
+                      </a:endParaRPr>
+                    </a:p>
+                  </a:txBody>
+                  <a:tcPr/>
+                </a:tc>
+                <a:tc>
+                  <a:txBody>
+                    <a:bodyPr/>
+                    <a:p>
+                      <a:pPr algn="ctr">
+                        <a:buNone/>
+                      </a:pPr>
+                      <a:r>
+                        <a:rPr lang="en-US" altLang="zh-CN" sz="1400">
+                          <a:latin typeface="Times New Roman" panose="02020603050405020304" charset="0"/>
+                          <a:cs typeface="Times New Roman" panose="02020603050405020304" charset="0"/>
+                        </a:rPr>
+                        <a:t>0.13</a:t>
+                      </a:r>
+                      <a:endParaRPr lang="en-US" altLang="zh-CN" sz="1400">
+                        <a:latin typeface="Times New Roman" panose="02020603050405020304" charset="0"/>
+                        <a:cs typeface="Times New Roman" panose="02020603050405020304" charset="0"/>
+                      </a:endParaRPr>
+                    </a:p>
+                  </a:txBody>
+                  <a:tcPr/>
+                </a:tc>
+                <a:tc>
+                  <a:txBody>
+                    <a:bodyPr/>
+                    <a:p>
+                      <a:pPr algn="ctr">
+                        <a:buNone/>
+                      </a:pPr>
+                      <a:r>
+                        <a:rPr lang="en-US" altLang="zh-CN" sz="1400">
+                          <a:latin typeface="Times New Roman" panose="02020603050405020304" charset="0"/>
+                          <a:cs typeface="Times New Roman" panose="02020603050405020304" charset="0"/>
+                        </a:rPr>
+                        <a:t>+0.16</a:t>
+                      </a:r>
+                      <a:endParaRPr lang="en-US" altLang="zh-CN" sz="1400">
+                        <a:latin typeface="Times New Roman" panose="02020603050405020304" charset="0"/>
+                        <a:cs typeface="Times New Roman" panose="02020603050405020304" charset="0"/>
+                      </a:endParaRPr>
+                    </a:p>
+                  </a:txBody>
+                  <a:tcPr/>
+                </a:tc>
+              </a:tr>
+              <a:tr h="365760">
+                <a:tc>
+                  <a:txBody>
+                    <a:bodyPr/>
+                    <a:p>
+                      <a:pPr algn="ctr">
+                        <a:buNone/>
+                      </a:pPr>
+                      <a:r>
+                        <a:rPr lang="en-US" altLang="zh-CN" sz="1400">
+                          <a:latin typeface="Times New Roman" panose="02020603050405020304" charset="0"/>
+                          <a:cs typeface="Times New Roman" panose="02020603050405020304" charset="0"/>
+                        </a:rPr>
+                        <a:t>3</a:t>
+                      </a:r>
+                      <a:endParaRPr lang="en-US" altLang="zh-CN" sz="1400">
+                        <a:latin typeface="Times New Roman" panose="02020603050405020304" charset="0"/>
+                        <a:cs typeface="Times New Roman" panose="02020603050405020304" charset="0"/>
+                      </a:endParaRPr>
+                    </a:p>
+                  </a:txBody>
+                  <a:tcPr/>
+                </a:tc>
+                <a:tc>
+                  <a:txBody>
+                    <a:bodyPr/>
+                    <a:p>
+                      <a:pPr algn="ctr">
+                        <a:buNone/>
+                      </a:pPr>
+                      <a:r>
+                        <a:rPr lang="en-US" altLang="zh-CN" sz="1400">
+                          <a:latin typeface="Times New Roman" panose="02020603050405020304" charset="0"/>
+                          <a:cs typeface="Times New Roman" panose="02020603050405020304" charset="0"/>
+                        </a:rPr>
+                        <a:t>(6.86, 3.76)</a:t>
+                      </a:r>
+                      <a:endParaRPr lang="en-US" altLang="zh-CN" sz="1400">
+                        <a:latin typeface="Times New Roman" panose="02020603050405020304" charset="0"/>
+                        <a:cs typeface="Times New Roman" panose="02020603050405020304" charset="0"/>
+                      </a:endParaRPr>
+                    </a:p>
+                  </a:txBody>
+                  <a:tcPr/>
+                </a:tc>
+                <a:tc>
+                  <a:txBody>
+                    <a:bodyPr/>
+                    <a:p>
+                      <a:pPr algn="ctr">
+                        <a:buNone/>
+                      </a:pPr>
+                      <a:r>
+                        <a:rPr lang="en-US" altLang="zh-CN" sz="1400">
+                          <a:latin typeface="Times New Roman" panose="02020603050405020304" charset="0"/>
+                          <a:cs typeface="Times New Roman" panose="02020603050405020304" charset="0"/>
+                        </a:rPr>
+                        <a:t>(7.00, 4.00)</a:t>
+                      </a:r>
+                      <a:endParaRPr lang="en-US" altLang="zh-CN" sz="1400">
+                        <a:latin typeface="Times New Roman" panose="02020603050405020304" charset="0"/>
+                        <a:cs typeface="Times New Roman" panose="02020603050405020304" charset="0"/>
+                      </a:endParaRPr>
+                    </a:p>
+                  </a:txBody>
+                  <a:tcPr/>
+                </a:tc>
+                <a:tc>
+                  <a:txBody>
+                    <a:bodyPr/>
+                    <a:p>
+                      <a:pPr algn="ctr">
+                        <a:buNone/>
+                      </a:pPr>
+                      <a:r>
+                        <a:rPr lang="en-US" altLang="zh-CN" sz="1400">
+                          <a:latin typeface="Times New Roman" panose="02020603050405020304" charset="0"/>
+                          <a:cs typeface="Times New Roman" panose="02020603050405020304" charset="0"/>
+                        </a:rPr>
+                        <a:t>0.28</a:t>
+                      </a:r>
+                      <a:endParaRPr lang="en-US" altLang="zh-CN" sz="1400">
+                        <a:latin typeface="Times New Roman" panose="02020603050405020304" charset="0"/>
+                        <a:cs typeface="Times New Roman" panose="02020603050405020304" charset="0"/>
+                      </a:endParaRPr>
+                    </a:p>
+                  </a:txBody>
+                  <a:tcPr/>
+                </a:tc>
+                <a:tc>
+                  <a:txBody>
+                    <a:bodyPr/>
+                    <a:p>
+                      <a:pPr algn="ctr">
+                        <a:buNone/>
+                      </a:pPr>
+                      <a:r>
+                        <a:rPr lang="en-US" altLang="zh-CN" sz="1400">
+                          <a:latin typeface="Times New Roman" panose="02020603050405020304" charset="0"/>
+                          <a:cs typeface="Times New Roman" panose="02020603050405020304" charset="0"/>
+                        </a:rPr>
+                        <a:t>+0.20</a:t>
+                      </a:r>
+                      <a:endParaRPr lang="en-US" altLang="zh-CN" sz="1400">
+                        <a:latin typeface="Times New Roman" panose="02020603050405020304" charset="0"/>
+                        <a:cs typeface="Times New Roman" panose="02020603050405020304" charset="0"/>
+                      </a:endParaRPr>
+                    </a:p>
+                  </a:txBody>
+                  <a:tcPr/>
+                </a:tc>
+              </a:tr>
+              <a:tr h="365760">
+                <a:tc>
+                  <a:txBody>
+                    <a:bodyPr/>
+                    <a:p>
+                      <a:pPr algn="ctr">
+                        <a:buNone/>
+                      </a:pPr>
+                      <a:r>
+                        <a:rPr lang="en-US" altLang="zh-CN" sz="1400">
+                          <a:latin typeface="Times New Roman" panose="02020603050405020304" charset="0"/>
+                          <a:cs typeface="Times New Roman" panose="02020603050405020304" charset="0"/>
+                        </a:rPr>
+                        <a:t>4</a:t>
+                      </a:r>
+                      <a:endParaRPr lang="en-US" altLang="zh-CN" sz="1400">
+                        <a:latin typeface="Times New Roman" panose="02020603050405020304" charset="0"/>
+                        <a:cs typeface="Times New Roman" panose="02020603050405020304" charset="0"/>
+                      </a:endParaRPr>
+                    </a:p>
+                  </a:txBody>
+                  <a:tcPr/>
+                </a:tc>
+                <a:tc>
+                  <a:txBody>
+                    <a:bodyPr/>
+                    <a:p>
+                      <a:pPr algn="ctr">
+                        <a:buNone/>
+                      </a:pPr>
+                      <a:r>
+                        <a:rPr lang="en-US" altLang="zh-CN" sz="1400">
+                          <a:latin typeface="Times New Roman" panose="02020603050405020304" charset="0"/>
+                          <a:cs typeface="Times New Roman" panose="02020603050405020304" charset="0"/>
+                        </a:rPr>
+                        <a:t>(2.28, 6.74)</a:t>
+                      </a:r>
+                      <a:endParaRPr lang="en-US" altLang="zh-CN" sz="1400">
+                        <a:latin typeface="Times New Roman" panose="02020603050405020304" charset="0"/>
+                        <a:cs typeface="Times New Roman" panose="02020603050405020304" charset="0"/>
+                      </a:endParaRPr>
+                    </a:p>
+                  </a:txBody>
+                  <a:tcPr/>
+                </a:tc>
+                <a:tc>
+                  <a:txBody>
+                    <a:bodyPr/>
+                    <a:p>
+                      <a:pPr algn="ctr">
+                        <a:buNone/>
+                      </a:pPr>
+                      <a:r>
+                        <a:rPr lang="en-US" altLang="zh-CN" sz="1400">
+                          <a:latin typeface="Times New Roman" panose="02020603050405020304" charset="0"/>
+                          <a:cs typeface="Times New Roman" panose="02020603050405020304" charset="0"/>
+                        </a:rPr>
+                        <a:t>(2.50, 7.00)</a:t>
+                      </a:r>
+                      <a:endParaRPr lang="en-US" altLang="zh-CN" sz="1400">
+                        <a:latin typeface="Times New Roman" panose="02020603050405020304" charset="0"/>
+                        <a:cs typeface="Times New Roman" panose="02020603050405020304" charset="0"/>
+                      </a:endParaRPr>
+                    </a:p>
+                  </a:txBody>
+                  <a:tcPr/>
+                </a:tc>
+                <a:tc>
+                  <a:txBody>
+                    <a:bodyPr/>
+                    <a:p>
+                      <a:pPr algn="ctr">
+                        <a:buNone/>
+                      </a:pPr>
+                      <a:r>
+                        <a:rPr lang="en-US" altLang="zh-CN" sz="1400">
+                          <a:latin typeface="Times New Roman" panose="02020603050405020304" charset="0"/>
+                          <a:cs typeface="Times New Roman" panose="02020603050405020304" charset="0"/>
+                        </a:rPr>
+                        <a:t>0.34</a:t>
+                      </a:r>
+                      <a:endParaRPr lang="en-US" altLang="zh-CN" sz="1400">
+                        <a:latin typeface="Times New Roman" panose="02020603050405020304" charset="0"/>
+                        <a:cs typeface="Times New Roman" panose="02020603050405020304" charset="0"/>
+                      </a:endParaRPr>
+                    </a:p>
+                  </a:txBody>
+                  <a:tcPr/>
+                </a:tc>
+                <a:tc>
+                  <a:txBody>
+                    <a:bodyPr/>
+                    <a:p>
+                      <a:pPr algn="ctr">
+                        <a:buNone/>
+                      </a:pPr>
+                      <a:r>
+                        <a:rPr lang="en-US" altLang="zh-CN" sz="1400">
+                          <a:solidFill>
+                            <a:srgbClr val="C00000"/>
+                          </a:solidFill>
+                          <a:latin typeface="Times New Roman" panose="02020603050405020304" charset="0"/>
+                          <a:cs typeface="Times New Roman" panose="02020603050405020304" charset="0"/>
+                        </a:rPr>
+                        <a:t>+0.16</a:t>
+                      </a:r>
+                      <a:endParaRPr lang="en-US" altLang="zh-CN" sz="1400">
+                        <a:solidFill>
+                          <a:srgbClr val="C00000"/>
+                        </a:solidFill>
+                        <a:latin typeface="Times New Roman" panose="02020603050405020304" charset="0"/>
+                        <a:cs typeface="Times New Roman" panose="02020603050405020304" charset="0"/>
+                      </a:endParaRPr>
+                    </a:p>
+                  </a:txBody>
+                  <a:tcPr/>
+                </a:tc>
+              </a:tr>
+              <a:tr h="365760">
+                <a:tc>
+                  <a:txBody>
+                    <a:bodyPr/>
+                    <a:p>
+                      <a:pPr algn="ctr">
+                        <a:buNone/>
+                      </a:pPr>
+                      <a:r>
+                        <a:rPr lang="en-US" altLang="zh-CN" sz="1400">
+                          <a:solidFill>
+                            <a:schemeClr val="tx1"/>
+                          </a:solidFill>
+                          <a:latin typeface="Times New Roman" panose="02020603050405020304" charset="0"/>
+                          <a:cs typeface="Times New Roman" panose="02020603050405020304" charset="0"/>
+                        </a:rPr>
+                        <a:t>5</a:t>
+                      </a:r>
+                      <a:endParaRPr lang="en-US" altLang="zh-CN" sz="1400">
+                        <a:solidFill>
+                          <a:schemeClr val="tx1"/>
+                        </a:solidFill>
+                        <a:latin typeface="Times New Roman" panose="02020603050405020304" charset="0"/>
+                        <a:cs typeface="Times New Roman" panose="02020603050405020304" charset="0"/>
+                      </a:endParaRPr>
+                    </a:p>
+                  </a:txBody>
+                  <a:tcPr/>
+                </a:tc>
+                <a:tc>
+                  <a:txBody>
+                    <a:bodyPr/>
+                    <a:p>
+                      <a:pPr algn="ctr">
+                        <a:buNone/>
+                      </a:pPr>
+                      <a:r>
+                        <a:rPr lang="en-US" altLang="zh-CN" sz="1400">
+                          <a:solidFill>
+                            <a:schemeClr val="tx1"/>
+                          </a:solidFill>
+                          <a:latin typeface="Times New Roman" panose="02020603050405020304" charset="0"/>
+                          <a:cs typeface="Times New Roman" panose="02020603050405020304" charset="0"/>
+                        </a:rPr>
+                        <a:t>(5.48, 7.68)</a:t>
+                      </a:r>
+                      <a:endParaRPr lang="en-US" altLang="zh-CN" sz="1400">
+                        <a:solidFill>
+                          <a:schemeClr val="tx1"/>
+                        </a:solidFill>
+                        <a:latin typeface="Times New Roman" panose="02020603050405020304" charset="0"/>
+                        <a:cs typeface="Times New Roman" panose="02020603050405020304" charset="0"/>
+                      </a:endParaRPr>
+                    </a:p>
+                  </a:txBody>
+                  <a:tcPr/>
+                </a:tc>
+                <a:tc>
+                  <a:txBody>
+                    <a:bodyPr/>
+                    <a:p>
+                      <a:pPr algn="ctr">
+                        <a:buNone/>
+                      </a:pPr>
+                      <a:r>
+                        <a:rPr lang="en-US" altLang="zh-CN" sz="1400">
+                          <a:solidFill>
+                            <a:schemeClr val="tx1"/>
+                          </a:solidFill>
+                          <a:latin typeface="Times New Roman" panose="02020603050405020304" charset="0"/>
+                          <a:cs typeface="Times New Roman" panose="02020603050405020304" charset="0"/>
+                        </a:rPr>
+                        <a:t>(6.00, 8.00)</a:t>
+                      </a:r>
+                      <a:endParaRPr lang="en-US" altLang="zh-CN" sz="1400">
+                        <a:solidFill>
+                          <a:schemeClr val="tx1"/>
+                        </a:solidFill>
+                        <a:latin typeface="Times New Roman" panose="02020603050405020304" charset="0"/>
+                        <a:cs typeface="Times New Roman" panose="02020603050405020304" charset="0"/>
+                      </a:endParaRPr>
+                    </a:p>
+                  </a:txBody>
+                  <a:tcPr/>
+                </a:tc>
+                <a:tc>
+                  <a:txBody>
+                    <a:bodyPr/>
+                    <a:p>
+                      <a:pPr algn="ctr">
+                        <a:buNone/>
+                      </a:pPr>
+                      <a:r>
+                        <a:rPr lang="en-US" altLang="zh-CN" sz="1400">
+                          <a:solidFill>
+                            <a:schemeClr val="tx1"/>
+                          </a:solidFill>
+                          <a:latin typeface="Times New Roman" panose="02020603050405020304" charset="0"/>
+                          <a:cs typeface="Times New Roman" panose="02020603050405020304" charset="0"/>
+                        </a:rPr>
+                        <a:t>0.61</a:t>
+                      </a:r>
+                      <a:endParaRPr lang="en-US" altLang="zh-CN" sz="1400">
+                        <a:solidFill>
+                          <a:schemeClr val="tx1"/>
+                        </a:solidFill>
+                        <a:latin typeface="Times New Roman" panose="02020603050405020304" charset="0"/>
+                        <a:cs typeface="Times New Roman" panose="02020603050405020304" charset="0"/>
+                      </a:endParaRPr>
+                    </a:p>
+                  </a:txBody>
+                  <a:tcPr/>
+                </a:tc>
+                <a:tc>
+                  <a:txBody>
+                    <a:bodyPr/>
+                    <a:p>
+                      <a:pPr algn="ctr">
+                        <a:buNone/>
+                      </a:pPr>
+                      <a:r>
+                        <a:rPr lang="en-US" altLang="zh-CN" sz="1400">
+                          <a:solidFill>
+                            <a:srgbClr val="C00000"/>
+                          </a:solidFill>
+                          <a:latin typeface="Times New Roman" panose="02020603050405020304" charset="0"/>
+                          <a:cs typeface="Times New Roman" panose="02020603050405020304" charset="0"/>
+                        </a:rPr>
+                        <a:t>+0.33</a:t>
+                      </a:r>
+                      <a:endParaRPr lang="en-US" altLang="zh-CN" sz="1400">
+                        <a:solidFill>
+                          <a:srgbClr val="C00000"/>
+                        </a:solidFill>
+                        <a:latin typeface="Times New Roman" panose="02020603050405020304" charset="0"/>
+                        <a:cs typeface="Times New Roman" panose="02020603050405020304" charset="0"/>
+                      </a:endParaRPr>
+                    </a:p>
+                  </a:txBody>
+                  <a:tcPr/>
+                </a:tc>
+              </a:tr>
+              <a:tr h="365760">
+                <a:tc>
+                  <a:txBody>
+                    <a:bodyPr/>
+                    <a:p>
+                      <a:pPr algn="ctr">
+                        <a:buNone/>
+                      </a:pPr>
+                      <a:r>
+                        <a:rPr lang="en-US" altLang="zh-CN" sz="1400">
+                          <a:latin typeface="Times New Roman" panose="02020603050405020304" charset="0"/>
+                          <a:cs typeface="Times New Roman" panose="02020603050405020304" charset="0"/>
+                        </a:rPr>
+                        <a:t>6</a:t>
+                      </a:r>
+                      <a:endParaRPr lang="en-US" altLang="zh-CN" sz="1400">
+                        <a:latin typeface="Times New Roman" panose="02020603050405020304" charset="0"/>
+                        <a:cs typeface="Times New Roman" panose="02020603050405020304" charset="0"/>
+                      </a:endParaRPr>
+                    </a:p>
+                  </a:txBody>
+                  <a:tcPr/>
+                </a:tc>
+                <a:tc>
+                  <a:txBody>
+                    <a:bodyPr/>
+                    <a:p>
+                      <a:pPr algn="ctr">
+                        <a:buNone/>
+                      </a:pPr>
+                      <a:r>
+                        <a:rPr lang="en-US" altLang="zh-CN" sz="1400">
+                          <a:latin typeface="Times New Roman" panose="02020603050405020304" charset="0"/>
+                          <a:cs typeface="Times New Roman" panose="02020603050405020304" charset="0"/>
+                        </a:rPr>
+                        <a:t>(7.21, 7.30)</a:t>
+                      </a:r>
+                      <a:endParaRPr lang="en-US" altLang="zh-CN" sz="1400">
+                        <a:latin typeface="Times New Roman" panose="02020603050405020304" charset="0"/>
+                        <a:cs typeface="Times New Roman" panose="02020603050405020304" charset="0"/>
+                      </a:endParaRPr>
+                    </a:p>
+                  </a:txBody>
+                  <a:tcPr/>
+                </a:tc>
+                <a:tc>
+                  <a:txBody>
+                    <a:bodyPr/>
+                    <a:p>
+                      <a:pPr algn="ctr">
+                        <a:buNone/>
+                      </a:pPr>
+                      <a:r>
+                        <a:rPr lang="en-US" altLang="zh-CN" sz="1400">
+                          <a:latin typeface="Times New Roman" panose="02020603050405020304" charset="0"/>
+                          <a:cs typeface="Times New Roman" panose="02020603050405020304" charset="0"/>
+                        </a:rPr>
+                        <a:t>(8.00, 7.50)</a:t>
+                      </a:r>
+                      <a:endParaRPr lang="en-US" altLang="zh-CN" sz="1400">
+                        <a:latin typeface="Times New Roman" panose="02020603050405020304" charset="0"/>
+                        <a:cs typeface="Times New Roman" panose="02020603050405020304" charset="0"/>
+                      </a:endParaRPr>
+                    </a:p>
+                  </a:txBody>
+                  <a:tcPr/>
+                </a:tc>
+                <a:tc>
+                  <a:txBody>
+                    <a:bodyPr/>
+                    <a:p>
+                      <a:pPr algn="ctr">
+                        <a:buNone/>
+                      </a:pPr>
+                      <a:r>
+                        <a:rPr lang="en-US" altLang="zh-CN" sz="1400">
+                          <a:latin typeface="Times New Roman" panose="02020603050405020304" charset="0"/>
+                          <a:cs typeface="Times New Roman" panose="02020603050405020304" charset="0"/>
+                        </a:rPr>
+                        <a:t>0.82</a:t>
+                      </a:r>
+                      <a:endParaRPr lang="en-US" altLang="zh-CN" sz="1400">
+                        <a:latin typeface="Times New Roman" panose="02020603050405020304" charset="0"/>
+                        <a:cs typeface="Times New Roman" panose="02020603050405020304" charset="0"/>
+                      </a:endParaRPr>
+                    </a:p>
+                  </a:txBody>
+                  <a:tcPr/>
+                </a:tc>
+                <a:tc>
+                  <a:txBody>
+                    <a:bodyPr/>
+                    <a:p>
+                      <a:pPr algn="ctr">
+                        <a:buNone/>
+                      </a:pPr>
+                      <a:r>
+                        <a:rPr lang="en-US" altLang="zh-CN" sz="1400">
+                          <a:solidFill>
+                            <a:srgbClr val="C00000"/>
+                          </a:solidFill>
+                          <a:latin typeface="Times New Roman" panose="02020603050405020304" charset="0"/>
+                          <a:cs typeface="Times New Roman" panose="02020603050405020304" charset="0"/>
+                        </a:rPr>
+                        <a:t>-0.35</a:t>
+                      </a:r>
+                      <a:endParaRPr lang="en-US" altLang="zh-CN" sz="1400">
+                        <a:solidFill>
+                          <a:srgbClr val="C00000"/>
+                        </a:solidFill>
+                        <a:latin typeface="Times New Roman" panose="02020603050405020304" charset="0"/>
+                        <a:cs typeface="Times New Roman" panose="02020603050405020304" charset="0"/>
+                      </a:endParaRPr>
+                    </a:p>
+                  </a:txBody>
+                  <a:tcPr/>
+                </a:tc>
+              </a:tr>
+            </a:tbl>
+          </a:graphicData>
+        </a:graphic>
+      </p:graphicFrame>
+      <p:graphicFrame>
+        <p:nvGraphicFramePr>
+          <p:cNvPr id="3" name="表格 2"/>
+          <p:cNvGraphicFramePr/>
+          <p:nvPr/>
+        </p:nvGraphicFramePr>
+        <p:xfrm>
+          <a:off x="4498340" y="827405"/>
+          <a:ext cx="4480560" cy="2517775"/>
+        </p:xfrm>
+        <a:graphic>
+          <a:graphicData uri="http://schemas.openxmlformats.org/drawingml/2006/table">
+            <a:tbl>
+              <a:tblPr firstRow="1" bandRow="1">
+                <a:tableStyleId>{5C22544A-7EE6-4342-B048-85BDC9FD1C3A}</a:tableStyleId>
+              </a:tblPr>
+              <a:tblGrid>
+                <a:gridCol w="954405"/>
+                <a:gridCol w="1128395"/>
+                <a:gridCol w="1226185"/>
+                <a:gridCol w="1171575"/>
+              </a:tblGrid>
+              <a:tr h="323215">
+                <a:tc>
+                  <a:txBody>
+                    <a:bodyPr/>
+                    <a:p>
+                      <a:pPr algn="ctr">
+                        <a:buNone/>
+                      </a:pPr>
+                      <a:r>
+                        <a:rPr lang="en-US" altLang="zh-CN" sz="1200">
+                          <a:latin typeface="Times New Roman" panose="02020603050405020304" charset="0"/>
+                          <a:cs typeface="Times New Roman" panose="02020603050405020304" charset="0"/>
+                        </a:rPr>
+                        <a:t> Node</a:t>
+                      </a:r>
+                      <a:endParaRPr lang="en-US" altLang="zh-CN" sz="1200">
+                        <a:latin typeface="Times New Roman" panose="02020603050405020304" charset="0"/>
+                        <a:cs typeface="Times New Roman" panose="02020603050405020304" charset="0"/>
+                      </a:endParaRPr>
+                    </a:p>
+                  </a:txBody>
+                  <a:tcPr/>
+                </a:tc>
+                <a:tc>
+                  <a:txBody>
+                    <a:bodyPr/>
+                    <a:p>
+                      <a:pPr algn="ctr">
+                        <a:buNone/>
+                      </a:pPr>
+                      <a:r>
+                        <a:rPr lang="en-US" altLang="zh-CN" sz="1400">
+                          <a:latin typeface="Times New Roman" panose="02020603050405020304" charset="0"/>
+                          <a:cs typeface="Times New Roman" panose="02020603050405020304" charset="0"/>
+                        </a:rPr>
+                        <a:t>est_location</a:t>
+                      </a:r>
+                      <a:endParaRPr lang="en-US" altLang="zh-CN" sz="1400">
+                        <a:latin typeface="Times New Roman" panose="02020603050405020304" charset="0"/>
+                        <a:cs typeface="Times New Roman" panose="02020603050405020304" charset="0"/>
+                      </a:endParaRPr>
+                    </a:p>
+                  </a:txBody>
+                  <a:tcPr/>
+                </a:tc>
+                <a:tc>
+                  <a:txBody>
+                    <a:bodyPr/>
+                    <a:p>
+                      <a:pPr algn="ctr">
+                        <a:buNone/>
+                      </a:pPr>
+                      <a:r>
+                        <a:rPr lang="en-US" altLang="zh-CN" sz="1400">
+                          <a:latin typeface="Times New Roman" panose="02020603050405020304" charset="0"/>
+                          <a:cs typeface="Times New Roman" panose="02020603050405020304" charset="0"/>
+                        </a:rPr>
+                        <a:t>true_location</a:t>
+                      </a:r>
+                      <a:endParaRPr lang="en-US" altLang="zh-CN" sz="1400">
+                        <a:latin typeface="Times New Roman" panose="02020603050405020304" charset="0"/>
+                        <a:cs typeface="Times New Roman" panose="02020603050405020304" charset="0"/>
+                      </a:endParaRPr>
+                    </a:p>
+                  </a:txBody>
+                  <a:tcPr/>
+                </a:tc>
+                <a:tc>
+                  <a:txBody>
+                    <a:bodyPr/>
+                    <a:p>
+                      <a:pPr algn="ctr">
+                        <a:buNone/>
+                      </a:pPr>
+                      <a:r>
+                        <a:rPr lang="en-US" altLang="zh-CN" sz="1400">
+                          <a:latin typeface="Times New Roman" panose="02020603050405020304" charset="0"/>
+                          <a:cs typeface="Times New Roman" panose="02020603050405020304" charset="0"/>
+                        </a:rPr>
+                        <a:t>error</a:t>
+                      </a:r>
+                      <a:endParaRPr lang="en-US" altLang="zh-CN" sz="1400">
+                        <a:latin typeface="Times New Roman" panose="02020603050405020304" charset="0"/>
+                        <a:cs typeface="Times New Roman" panose="02020603050405020304" charset="0"/>
+                      </a:endParaRPr>
+                    </a:p>
+                  </a:txBody>
+                  <a:tcPr/>
+                </a:tc>
+              </a:tr>
+              <a:tr h="365760">
+                <a:tc>
+                  <a:txBody>
+                    <a:bodyPr/>
+                    <a:p>
+                      <a:pPr algn="ctr">
+                        <a:buNone/>
+                      </a:pPr>
+                      <a:r>
+                        <a:rPr lang="en-US" altLang="zh-CN" sz="1400">
+                          <a:latin typeface="Times New Roman" panose="02020603050405020304" charset="0"/>
+                          <a:cs typeface="Times New Roman" panose="02020603050405020304" charset="0"/>
+                        </a:rPr>
+                        <a:t>1</a:t>
+                      </a:r>
+                      <a:endParaRPr lang="en-US" altLang="zh-CN" sz="1400">
+                        <a:latin typeface="Times New Roman" panose="02020603050405020304" charset="0"/>
+                        <a:cs typeface="Times New Roman" panose="02020603050405020304" charset="0"/>
+                      </a:endParaRPr>
+                    </a:p>
+                  </a:txBody>
+                  <a:tcPr/>
+                </a:tc>
+                <a:tc>
+                  <a:txBody>
+                    <a:bodyPr/>
+                    <a:p>
+                      <a:pPr algn="ctr">
+                        <a:buNone/>
+                      </a:pPr>
+                      <a:r>
+                        <a:rPr lang="en-US" altLang="zh-CN" sz="1400">
+                          <a:latin typeface="Times New Roman" panose="02020603050405020304" charset="0"/>
+                          <a:cs typeface="Times New Roman" panose="02020603050405020304" charset="0"/>
+                        </a:rPr>
+                        <a:t>(2.95, 2.95)</a:t>
+                      </a:r>
+                      <a:endParaRPr lang="en-US" altLang="zh-CN" sz="1400">
+                        <a:latin typeface="Times New Roman" panose="02020603050405020304" charset="0"/>
+                        <a:cs typeface="Times New Roman" panose="02020603050405020304" charset="0"/>
+                      </a:endParaRPr>
+                    </a:p>
+                  </a:txBody>
+                  <a:tcPr/>
+                </a:tc>
+                <a:tc>
+                  <a:txBody>
+                    <a:bodyPr/>
+                    <a:p>
+                      <a:pPr algn="ctr">
+                        <a:buNone/>
+                      </a:pPr>
+                      <a:r>
+                        <a:rPr lang="en-US" altLang="zh-CN" sz="1400">
+                          <a:latin typeface="Times New Roman" panose="02020603050405020304" charset="0"/>
+                          <a:cs typeface="Times New Roman" panose="02020603050405020304" charset="0"/>
+                        </a:rPr>
+                        <a:t>(3.00, 3.00)</a:t>
+                      </a:r>
+                      <a:endParaRPr lang="en-US" altLang="zh-CN" sz="1400">
+                        <a:latin typeface="Times New Roman" panose="02020603050405020304" charset="0"/>
+                        <a:cs typeface="Times New Roman" panose="02020603050405020304" charset="0"/>
+                      </a:endParaRPr>
+                    </a:p>
+                  </a:txBody>
+                  <a:tcPr/>
+                </a:tc>
+                <a:tc>
+                  <a:txBody>
+                    <a:bodyPr/>
+                    <a:p>
+                      <a:pPr algn="ctr">
+                        <a:buNone/>
+                      </a:pPr>
+                      <a:r>
+                        <a:rPr lang="en-US" altLang="zh-CN" sz="1400">
+                          <a:latin typeface="Times New Roman" panose="02020603050405020304" charset="0"/>
+                          <a:cs typeface="Times New Roman" panose="02020603050405020304" charset="0"/>
+                        </a:rPr>
+                        <a:t>0.07</a:t>
+                      </a:r>
+                      <a:endParaRPr lang="en-US" altLang="zh-CN" sz="1400">
+                        <a:latin typeface="Times New Roman" panose="02020603050405020304" charset="0"/>
+                        <a:cs typeface="Times New Roman" panose="02020603050405020304" charset="0"/>
+                      </a:endParaRPr>
+                    </a:p>
+                  </a:txBody>
+                  <a:tcPr/>
+                </a:tc>
+              </a:tr>
+              <a:tr h="365760">
+                <a:tc>
+                  <a:txBody>
+                    <a:bodyPr/>
+                    <a:p>
+                      <a:pPr algn="ctr">
+                        <a:buNone/>
+                      </a:pPr>
+                      <a:r>
+                        <a:rPr lang="en-US" altLang="zh-CN" sz="1400">
+                          <a:latin typeface="Times New Roman" panose="02020603050405020304" charset="0"/>
+                          <a:cs typeface="Times New Roman" panose="02020603050405020304" charset="0"/>
+                        </a:rPr>
+                        <a:t>2</a:t>
+                      </a:r>
+                      <a:endParaRPr lang="en-US" altLang="zh-CN" sz="1400">
+                        <a:latin typeface="Times New Roman" panose="02020603050405020304" charset="0"/>
+                        <a:cs typeface="Times New Roman" panose="02020603050405020304" charset="0"/>
+                      </a:endParaRPr>
+                    </a:p>
+                  </a:txBody>
+                  <a:tcPr/>
+                </a:tc>
+                <a:tc>
+                  <a:txBody>
+                    <a:bodyPr/>
+                    <a:p>
+                      <a:pPr algn="ctr">
+                        <a:buNone/>
+                      </a:pPr>
+                      <a:r>
+                        <a:rPr lang="en-US" altLang="zh-CN" sz="1400">
+                          <a:latin typeface="Times New Roman" panose="02020603050405020304" charset="0"/>
+                          <a:cs typeface="Times New Roman" panose="02020603050405020304" charset="0"/>
+                        </a:rPr>
+                        <a:t>(1.72, -0.08)</a:t>
+                      </a:r>
+                      <a:endParaRPr lang="en-US" altLang="zh-CN" sz="1400">
+                        <a:latin typeface="Times New Roman" panose="02020603050405020304" charset="0"/>
+                        <a:cs typeface="Times New Roman" panose="02020603050405020304" charset="0"/>
+                      </a:endParaRPr>
+                    </a:p>
+                  </a:txBody>
+                  <a:tcPr/>
+                </a:tc>
+                <a:tc>
+                  <a:txBody>
+                    <a:bodyPr/>
+                    <a:p>
+                      <a:pPr algn="ctr">
+                        <a:buNone/>
+                      </a:pPr>
+                      <a:r>
+                        <a:rPr lang="en-US" altLang="zh-CN" sz="1400">
+                          <a:latin typeface="Times New Roman" panose="02020603050405020304" charset="0"/>
+                          <a:cs typeface="Times New Roman" panose="02020603050405020304" charset="0"/>
+                        </a:rPr>
+                        <a:t>(2.00, 0.00)</a:t>
+                      </a:r>
+                      <a:endParaRPr lang="en-US" altLang="zh-CN" sz="1400">
+                        <a:latin typeface="Times New Roman" panose="02020603050405020304" charset="0"/>
+                        <a:cs typeface="Times New Roman" panose="02020603050405020304" charset="0"/>
+                      </a:endParaRPr>
+                    </a:p>
+                  </a:txBody>
+                  <a:tcPr/>
+                </a:tc>
+                <a:tc>
+                  <a:txBody>
+                    <a:bodyPr/>
+                    <a:p>
+                      <a:pPr algn="ctr">
+                        <a:buNone/>
+                      </a:pPr>
+                      <a:r>
+                        <a:rPr lang="en-US" altLang="zh-CN" sz="1400">
+                          <a:latin typeface="Times New Roman" panose="02020603050405020304" charset="0"/>
+                          <a:cs typeface="Times New Roman" panose="02020603050405020304" charset="0"/>
+                        </a:rPr>
+                        <a:t>0.29</a:t>
+                      </a:r>
+                      <a:endParaRPr lang="en-US" altLang="zh-CN" sz="1400">
+                        <a:latin typeface="Times New Roman" panose="02020603050405020304" charset="0"/>
+                        <a:cs typeface="Times New Roman" panose="02020603050405020304" charset="0"/>
+                      </a:endParaRPr>
+                    </a:p>
+                  </a:txBody>
+                  <a:tcPr/>
+                </a:tc>
+              </a:tr>
+              <a:tr h="365760">
+                <a:tc>
+                  <a:txBody>
+                    <a:bodyPr/>
+                    <a:p>
+                      <a:pPr algn="ctr">
+                        <a:buNone/>
+                      </a:pPr>
+                      <a:r>
+                        <a:rPr lang="en-US" altLang="zh-CN" sz="1400">
+                          <a:latin typeface="Times New Roman" panose="02020603050405020304" charset="0"/>
+                          <a:cs typeface="Times New Roman" panose="02020603050405020304" charset="0"/>
+                        </a:rPr>
+                        <a:t>3</a:t>
+                      </a:r>
+                      <a:endParaRPr lang="en-US" altLang="zh-CN" sz="1400">
+                        <a:latin typeface="Times New Roman" panose="02020603050405020304" charset="0"/>
+                        <a:cs typeface="Times New Roman" panose="02020603050405020304" charset="0"/>
+                      </a:endParaRPr>
+                    </a:p>
+                  </a:txBody>
+                  <a:tcPr/>
+                </a:tc>
+                <a:tc>
+                  <a:txBody>
+                    <a:bodyPr/>
+                    <a:p>
+                      <a:pPr algn="ctr">
+                        <a:buNone/>
+                      </a:pPr>
+                      <a:r>
+                        <a:rPr lang="en-US" altLang="zh-CN" sz="1400">
+                          <a:latin typeface="Times New Roman" panose="02020603050405020304" charset="0"/>
+                          <a:cs typeface="Times New Roman" panose="02020603050405020304" charset="0"/>
+                        </a:rPr>
+                        <a:t>(7.03, 3.53)</a:t>
+                      </a:r>
+                      <a:endParaRPr lang="en-US" altLang="zh-CN" sz="1400">
+                        <a:latin typeface="Times New Roman" panose="02020603050405020304" charset="0"/>
+                        <a:cs typeface="Times New Roman" panose="02020603050405020304" charset="0"/>
+                      </a:endParaRPr>
+                    </a:p>
+                  </a:txBody>
+                  <a:tcPr/>
+                </a:tc>
+                <a:tc>
+                  <a:txBody>
+                    <a:bodyPr/>
+                    <a:p>
+                      <a:pPr algn="ctr">
+                        <a:buNone/>
+                      </a:pPr>
+                      <a:r>
+                        <a:rPr lang="en-US" altLang="zh-CN" sz="1400">
+                          <a:latin typeface="Times New Roman" panose="02020603050405020304" charset="0"/>
+                          <a:cs typeface="Times New Roman" panose="02020603050405020304" charset="0"/>
+                        </a:rPr>
+                        <a:t>(7.00, 4.00)</a:t>
+                      </a:r>
+                      <a:endParaRPr lang="en-US" altLang="zh-CN" sz="1400">
+                        <a:latin typeface="Times New Roman" panose="02020603050405020304" charset="0"/>
+                        <a:cs typeface="Times New Roman" panose="02020603050405020304" charset="0"/>
+                      </a:endParaRPr>
+                    </a:p>
+                  </a:txBody>
+                  <a:tcPr/>
+                </a:tc>
+                <a:tc>
+                  <a:txBody>
+                    <a:bodyPr/>
+                    <a:p>
+                      <a:pPr algn="ctr">
+                        <a:buNone/>
+                      </a:pPr>
+                      <a:r>
+                        <a:rPr lang="en-US" altLang="zh-CN" sz="1400">
+                          <a:latin typeface="Times New Roman" panose="02020603050405020304" charset="0"/>
+                          <a:cs typeface="Times New Roman" panose="02020603050405020304" charset="0"/>
+                        </a:rPr>
+                        <a:t>0.48</a:t>
+                      </a:r>
+                      <a:endParaRPr lang="en-US" altLang="zh-CN" sz="1400">
+                        <a:latin typeface="Times New Roman" panose="02020603050405020304" charset="0"/>
+                        <a:cs typeface="Times New Roman" panose="02020603050405020304" charset="0"/>
+                      </a:endParaRPr>
+                    </a:p>
+                  </a:txBody>
+                  <a:tcPr/>
+                </a:tc>
+              </a:tr>
+              <a:tr h="365760">
+                <a:tc>
+                  <a:txBody>
+                    <a:bodyPr/>
+                    <a:p>
+                      <a:pPr algn="ctr">
+                        <a:buNone/>
+                      </a:pPr>
+                      <a:r>
+                        <a:rPr lang="en-US" altLang="zh-CN" sz="1400">
+                          <a:latin typeface="Times New Roman" panose="02020603050405020304" charset="0"/>
+                          <a:cs typeface="Times New Roman" panose="02020603050405020304" charset="0"/>
+                        </a:rPr>
+                        <a:t>4</a:t>
+                      </a:r>
+                      <a:endParaRPr lang="en-US" altLang="zh-CN" sz="1400">
+                        <a:latin typeface="Times New Roman" panose="02020603050405020304" charset="0"/>
+                        <a:cs typeface="Times New Roman" panose="02020603050405020304" charset="0"/>
+                      </a:endParaRPr>
+                    </a:p>
+                  </a:txBody>
+                  <a:tcPr/>
+                </a:tc>
+                <a:tc>
+                  <a:txBody>
+                    <a:bodyPr/>
+                    <a:p>
+                      <a:pPr algn="ctr">
+                        <a:buNone/>
+                      </a:pPr>
+                      <a:r>
+                        <a:rPr lang="en-US" altLang="zh-CN" sz="1400">
+                          <a:latin typeface="Times New Roman" panose="02020603050405020304" charset="0"/>
+                          <a:cs typeface="Times New Roman" panose="02020603050405020304" charset="0"/>
+                        </a:rPr>
+                        <a:t>(2.45, 6.51)</a:t>
+                      </a:r>
+                      <a:endParaRPr lang="en-US" altLang="zh-CN" sz="1400">
+                        <a:latin typeface="Times New Roman" panose="02020603050405020304" charset="0"/>
+                        <a:cs typeface="Times New Roman" panose="02020603050405020304" charset="0"/>
+                      </a:endParaRPr>
+                    </a:p>
+                  </a:txBody>
+                  <a:tcPr/>
+                </a:tc>
+                <a:tc>
+                  <a:txBody>
+                    <a:bodyPr/>
+                    <a:p>
+                      <a:pPr algn="ctr">
+                        <a:buNone/>
+                      </a:pPr>
+                      <a:r>
+                        <a:rPr lang="en-US" altLang="zh-CN" sz="1400">
+                          <a:latin typeface="Times New Roman" panose="02020603050405020304" charset="0"/>
+                          <a:cs typeface="Times New Roman" panose="02020603050405020304" charset="0"/>
+                        </a:rPr>
+                        <a:t>(2.50, 7.00)</a:t>
+                      </a:r>
+                      <a:endParaRPr lang="en-US" altLang="zh-CN" sz="1400">
+                        <a:latin typeface="Times New Roman" panose="02020603050405020304" charset="0"/>
+                        <a:cs typeface="Times New Roman" panose="02020603050405020304" charset="0"/>
+                      </a:endParaRPr>
+                    </a:p>
+                  </a:txBody>
+                  <a:tcPr/>
+                </a:tc>
+                <a:tc>
+                  <a:txBody>
+                    <a:bodyPr/>
+                    <a:p>
+                      <a:pPr algn="ctr">
+                        <a:buNone/>
+                      </a:pPr>
+                      <a:r>
+                        <a:rPr lang="en-US" altLang="zh-CN" sz="1400">
+                          <a:latin typeface="Times New Roman" panose="02020603050405020304" charset="0"/>
+                          <a:cs typeface="Times New Roman" panose="02020603050405020304" charset="0"/>
+                        </a:rPr>
+                        <a:t>0.49</a:t>
+                      </a:r>
+                      <a:endParaRPr lang="en-US" altLang="zh-CN" sz="1400">
+                        <a:latin typeface="Times New Roman" panose="02020603050405020304" charset="0"/>
+                        <a:cs typeface="Times New Roman" panose="02020603050405020304" charset="0"/>
+                      </a:endParaRPr>
+                    </a:p>
+                  </a:txBody>
+                  <a:tcPr/>
+                </a:tc>
+              </a:tr>
+              <a:tr h="365760">
+                <a:tc>
+                  <a:txBody>
+                    <a:bodyPr/>
+                    <a:p>
+                      <a:pPr algn="ctr">
+                        <a:buNone/>
+                      </a:pPr>
+                      <a:r>
+                        <a:rPr lang="en-US" altLang="zh-CN" sz="1400">
+                          <a:solidFill>
+                            <a:srgbClr val="C00000"/>
+                          </a:solidFill>
+                          <a:latin typeface="Times New Roman" panose="02020603050405020304" charset="0"/>
+                          <a:cs typeface="Times New Roman" panose="02020603050405020304" charset="0"/>
+                        </a:rPr>
+                        <a:t>5</a:t>
+                      </a:r>
+                      <a:endParaRPr lang="en-US" altLang="zh-CN" sz="1400">
+                        <a:solidFill>
+                          <a:srgbClr val="C00000"/>
+                        </a:solidFill>
+                        <a:latin typeface="Times New Roman" panose="02020603050405020304" charset="0"/>
+                        <a:cs typeface="Times New Roman" panose="02020603050405020304" charset="0"/>
+                      </a:endParaRPr>
+                    </a:p>
+                  </a:txBody>
+                  <a:tcPr/>
+                </a:tc>
+                <a:tc>
+                  <a:txBody>
+                    <a:bodyPr/>
+                    <a:p>
+                      <a:pPr algn="ctr">
+                        <a:buNone/>
+                      </a:pPr>
+                      <a:r>
+                        <a:rPr lang="en-US" altLang="zh-CN" sz="1400">
+                          <a:solidFill>
+                            <a:schemeClr val="tx1"/>
+                          </a:solidFill>
+                          <a:latin typeface="Times New Roman" panose="02020603050405020304" charset="0"/>
+                          <a:cs typeface="Times New Roman" panose="02020603050405020304" charset="0"/>
+                        </a:rPr>
+                        <a:t>(5.30, 7.37)</a:t>
+                      </a:r>
+                      <a:endParaRPr lang="en-US" altLang="zh-CN" sz="1400">
+                        <a:solidFill>
+                          <a:schemeClr val="tx1"/>
+                        </a:solidFill>
+                        <a:latin typeface="Times New Roman" panose="02020603050405020304" charset="0"/>
+                        <a:cs typeface="Times New Roman" panose="02020603050405020304" charset="0"/>
+                      </a:endParaRPr>
+                    </a:p>
+                  </a:txBody>
+                  <a:tcPr/>
+                </a:tc>
+                <a:tc>
+                  <a:txBody>
+                    <a:bodyPr/>
+                    <a:p>
+                      <a:pPr algn="ctr">
+                        <a:buNone/>
+                      </a:pPr>
+                      <a:r>
+                        <a:rPr lang="en-US" altLang="zh-CN" sz="1400">
+                          <a:solidFill>
+                            <a:schemeClr val="tx1"/>
+                          </a:solidFill>
+                          <a:latin typeface="Times New Roman" panose="02020603050405020304" charset="0"/>
+                          <a:cs typeface="Times New Roman" panose="02020603050405020304" charset="0"/>
+                        </a:rPr>
+                        <a:t>(6.00, 8.00)</a:t>
+                      </a:r>
+                      <a:endParaRPr lang="en-US" altLang="zh-CN" sz="1400">
+                        <a:solidFill>
+                          <a:schemeClr val="tx1"/>
+                        </a:solidFill>
+                        <a:latin typeface="Times New Roman" panose="02020603050405020304" charset="0"/>
+                        <a:cs typeface="Times New Roman" panose="02020603050405020304" charset="0"/>
+                      </a:endParaRPr>
+                    </a:p>
+                  </a:txBody>
+                  <a:tcPr/>
+                </a:tc>
+                <a:tc>
+                  <a:txBody>
+                    <a:bodyPr/>
+                    <a:p>
+                      <a:pPr algn="ctr">
+                        <a:buNone/>
+                      </a:pPr>
+                      <a:r>
+                        <a:rPr lang="en-US" altLang="zh-CN" sz="1400">
+                          <a:solidFill>
+                            <a:schemeClr val="tx1"/>
+                          </a:solidFill>
+                          <a:latin typeface="Times New Roman" panose="02020603050405020304" charset="0"/>
+                          <a:cs typeface="Times New Roman" panose="02020603050405020304" charset="0"/>
+                        </a:rPr>
+                        <a:t>0.94</a:t>
+                      </a:r>
+                      <a:endParaRPr lang="en-US" altLang="zh-CN" sz="1400">
+                        <a:solidFill>
+                          <a:schemeClr val="tx1"/>
+                        </a:solidFill>
+                        <a:latin typeface="Times New Roman" panose="02020603050405020304" charset="0"/>
+                        <a:cs typeface="Times New Roman" panose="02020603050405020304" charset="0"/>
+                      </a:endParaRPr>
+                    </a:p>
+                  </a:txBody>
+                  <a:tcPr/>
+                </a:tc>
+              </a:tr>
+              <a:tr h="365760">
+                <a:tc>
+                  <a:txBody>
+                    <a:bodyPr/>
+                    <a:p>
+                      <a:pPr algn="ctr">
+                        <a:buNone/>
+                      </a:pPr>
+                      <a:r>
+                        <a:rPr lang="en-US" altLang="zh-CN" sz="1400">
+                          <a:latin typeface="Times New Roman" panose="02020603050405020304" charset="0"/>
+                          <a:cs typeface="Times New Roman" panose="02020603050405020304" charset="0"/>
+                        </a:rPr>
+                        <a:t>6</a:t>
+                      </a:r>
+                      <a:endParaRPr lang="en-US" altLang="zh-CN" sz="1400">
+                        <a:latin typeface="Times New Roman" panose="02020603050405020304" charset="0"/>
+                        <a:cs typeface="Times New Roman" panose="02020603050405020304" charset="0"/>
+                      </a:endParaRPr>
+                    </a:p>
+                  </a:txBody>
+                  <a:tcPr/>
+                </a:tc>
+                <a:tc>
+                  <a:txBody>
+                    <a:bodyPr/>
+                    <a:p>
+                      <a:pPr algn="ctr">
+                        <a:buNone/>
+                      </a:pPr>
+                      <a:r>
+                        <a:rPr lang="en-US" altLang="zh-CN" sz="1400">
+                          <a:latin typeface="Times New Roman" panose="02020603050405020304" charset="0"/>
+                          <a:cs typeface="Times New Roman" panose="02020603050405020304" charset="0"/>
+                        </a:rPr>
+                        <a:t>(7.71, 7.14)</a:t>
+                      </a:r>
+                      <a:endParaRPr lang="en-US" altLang="zh-CN" sz="1400">
+                        <a:latin typeface="Times New Roman" panose="02020603050405020304" charset="0"/>
+                        <a:cs typeface="Times New Roman" panose="02020603050405020304" charset="0"/>
+                      </a:endParaRPr>
+                    </a:p>
+                  </a:txBody>
+                  <a:tcPr/>
+                </a:tc>
+                <a:tc>
+                  <a:txBody>
+                    <a:bodyPr/>
+                    <a:p>
+                      <a:pPr algn="ctr">
+                        <a:buNone/>
+                      </a:pPr>
+                      <a:r>
+                        <a:rPr lang="en-US" altLang="zh-CN" sz="1400">
+                          <a:latin typeface="Times New Roman" panose="02020603050405020304" charset="0"/>
+                          <a:cs typeface="Times New Roman" panose="02020603050405020304" charset="0"/>
+                        </a:rPr>
+                        <a:t>(8.00, 7.50)</a:t>
+                      </a:r>
+                      <a:endParaRPr lang="en-US" altLang="zh-CN" sz="1400">
+                        <a:latin typeface="Times New Roman" panose="02020603050405020304" charset="0"/>
+                        <a:cs typeface="Times New Roman" panose="02020603050405020304" charset="0"/>
+                      </a:endParaRPr>
+                    </a:p>
+                  </a:txBody>
+                  <a:tcPr/>
+                </a:tc>
+                <a:tc>
+                  <a:txBody>
+                    <a:bodyPr/>
+                    <a:p>
+                      <a:pPr algn="ctr">
+                        <a:buNone/>
+                      </a:pPr>
+                      <a:r>
+                        <a:rPr lang="en-US" altLang="zh-CN" sz="1400">
+                          <a:latin typeface="Times New Roman" panose="02020603050405020304" charset="0"/>
+                          <a:cs typeface="Times New Roman" panose="02020603050405020304" charset="0"/>
+                        </a:rPr>
+                        <a:t>0.46</a:t>
+                      </a:r>
+                      <a:endParaRPr lang="en-US" altLang="zh-CN" sz="1400">
+                        <a:latin typeface="Times New Roman" panose="02020603050405020304" charset="0"/>
+                        <a:cs typeface="Times New Roman" panose="02020603050405020304" charset="0"/>
+                      </a:endParaRPr>
+                    </a:p>
+                  </a:txBody>
+                  <a:tcPr/>
+                </a:tc>
+              </a:tr>
+            </a:tbl>
+          </a:graphicData>
+        </a:graphic>
+      </p:graphicFrame>
+    </p:spTree>
+  </p:cSld>
+  <p:clrMapOvr>
+    <a:masterClrMapping/>
+  </p:clrMapOvr>
+</p:sld>
+</file>
+
+<file path=ppt/slides/slide13.xml><?xml version="1.0" encoding="utf-8"?>
+<p:sld xmlns:a="http://schemas.openxmlformats.org/drawingml/2006/main" xmlns:r="http://schemas.openxmlformats.org/officeDocument/2006/relationships" xmlns:p="http://schemas.openxmlformats.org/presentationml/2006/main">
+  <p:cSld>
+    <p:spTree>
+      <p:nvGrpSpPr>
+        <p:cNvPr id="1" name=""/>
+        <p:cNvGrpSpPr/>
+        <p:nvPr/>
+      </p:nvGrpSpPr>
+      <p:grpSpPr>
+        <a:xfrm>
+          <a:off x="0" y="0"/>
+          <a:ext cx="0" cy="0"/>
+          <a:chOff x="0" y="0"/>
+          <a:chExt cx="0" cy="0"/>
+        </a:xfrm>
+      </p:grpSpPr>
+      <p:sp>
+        <p:nvSpPr>
           <p:cNvPr id="5" name="Title 1"/>
           <p:cNvSpPr txBox="1"/>
           <p:nvPr/>
@@ -12511,8 +18370,8 @@
         </p:blipFill>
         <p:spPr>
           <a:xfrm>
-            <a:off x="371475" y="1505585"/>
-            <a:ext cx="7435850" cy="2863215"/>
+            <a:off x="371475" y="1532890"/>
+            <a:ext cx="5516880" cy="2124710"/>
           </a:xfrm>
           <a:prstGeom prst="rect">
             <a:avLst/>
@@ -12527,7 +18386,7 @@
         </p:nvSpPr>
         <p:spPr>
           <a:xfrm>
-            <a:off x="678180" y="4431665"/>
+            <a:off x="678180" y="4592955"/>
             <a:ext cx="5777230" cy="1476375"/>
           </a:xfrm>
           <a:prstGeom prst="rect">
@@ -12602,7 +18461,7 @@
         </p:nvSpPr>
         <p:spPr>
           <a:xfrm>
-            <a:off x="426720" y="643255"/>
+            <a:off x="426720" y="0"/>
             <a:ext cx="10144760" cy="1082040"/>
           </a:xfrm>
           <a:prstGeom prst="rect">
@@ -12652,6 +18511,114 @@
             <a:endParaRPr lang="en-US" altLang="en-US" sz="4000" dirty="0">
               <a:latin typeface="Times New Roman" panose="02020603050405020304" charset="0"/>
               <a:ea typeface="Kaiti TC" panose="02010600040101010101" pitchFamily="2" charset="-120"/>
+              <a:cs typeface="Times New Roman" panose="02020603050405020304" charset="0"/>
+            </a:endParaRPr>
+          </a:p>
+        </p:txBody>
+      </p:sp>
+      <p:sp>
+        <p:nvSpPr>
+          <p:cNvPr id="2" name="文本框 1"/>
+          <p:cNvSpPr txBox="1"/>
+          <p:nvPr/>
+        </p:nvSpPr>
+        <p:spPr>
+          <a:xfrm>
+            <a:off x="2372360" y="3889375"/>
+            <a:ext cx="2019300" cy="368300"/>
+          </a:xfrm>
+          <a:prstGeom prst="rect">
+            <a:avLst/>
+          </a:prstGeom>
+        </p:spPr>
+        <p:txBody>
+          <a:bodyPr wrap="square">
+            <a:spAutoFit/>
+            <a:extLst>
+              <a:ext uri="{4A0BC546-FE56-4ADE-93B0-CB8AF2F6F144}">
+                <wpsdc:textFrameExt xmlns:wpsdc="http://www.wps.cn/officeDocument/2022/drawingmlCustomData" type="text"/>
+              </a:ext>
+            </a:extLst>
+          </a:bodyPr>
+          <a:p>
+            <a:pPr algn="l"/>
+            <a:r>
+              <a:rPr lang="en-US" altLang="zh-CN" sz="1800">
+                <a:latin typeface="Times New Roman" panose="02020603050405020304" charset="0"/>
+                <a:ea typeface="微软雅黑" panose="020B0503020204020204" charset="-122"/>
+                <a:cs typeface="Times New Roman" panose="02020603050405020304" charset="0"/>
+              </a:rPr>
+              <a:t>Test result of DNN</a:t>
+            </a:r>
+            <a:endParaRPr lang="en-US" altLang="zh-CN" sz="1800">
+              <a:latin typeface="Times New Roman" panose="02020603050405020304" charset="0"/>
+              <a:ea typeface="微软雅黑" panose="020B0503020204020204" charset="-122"/>
+              <a:cs typeface="Times New Roman" panose="02020603050405020304" charset="0"/>
+            </a:endParaRPr>
+          </a:p>
+        </p:txBody>
+      </p:sp>
+      <p:pic>
+        <p:nvPicPr>
+          <p:cNvPr id="3" name="图片 2" descr="csi_test_mae_vs_wall_loss_20MHz"/>
+          <p:cNvPicPr>
+            <a:picLocks noChangeAspect="1"/>
+          </p:cNvPicPr>
+          <p:nvPr/>
+        </p:nvPicPr>
+        <p:blipFill>
+          <a:blip r:embed="rId2"/>
+          <a:stretch>
+            <a:fillRect/>
+          </a:stretch>
+        </p:blipFill>
+        <p:spPr>
+          <a:xfrm>
+            <a:off x="6071235" y="1532890"/>
+            <a:ext cx="5517515" cy="2124710"/>
+          </a:xfrm>
+          <a:prstGeom prst="rect">
+            <a:avLst/>
+          </a:prstGeom>
+        </p:spPr>
+      </p:pic>
+      <p:sp>
+        <p:nvSpPr>
+          <p:cNvPr id="4" name="文本框 3"/>
+          <p:cNvSpPr txBox="1"/>
+          <p:nvPr/>
+        </p:nvSpPr>
+        <p:spPr>
+          <a:xfrm>
+            <a:off x="7422515" y="3889375"/>
+            <a:ext cx="2815590" cy="368300"/>
+          </a:xfrm>
+          <a:prstGeom prst="rect">
+            <a:avLst/>
+          </a:prstGeom>
+        </p:spPr>
+        <p:txBody>
+          <a:bodyPr wrap="square">
+            <a:spAutoFit/>
+            <a:extLst>
+              <a:ext uri="{4A0BC546-FE56-4ADE-93B0-CB8AF2F6F144}">
+                <wpsdc:textFrameExt xmlns:wpsdc="http://www.wps.cn/officeDocument/2022/drawingmlCustomData" type="text"/>
+              </a:ext>
+            </a:extLst>
+          </a:bodyPr>
+          <a:p>
+            <a:pPr algn="l"/>
+            <a:r>
+              <a:rPr lang="en-US" altLang="zh-CN" sz="1800">
+                <a:latin typeface="Times New Roman" panose="02020603050405020304" charset="0"/>
+                <a:ea typeface="微软雅黑" panose="020B0503020204020204" charset="-122"/>
+                <a:cs typeface="Times New Roman" panose="02020603050405020304" charset="0"/>
+              </a:rPr>
+              <a:t>Test result of Transformer</a:t>
+            </a:r>
+            <a:endParaRPr lang="en-US" altLang="zh-CN" sz="1800">
+              <a:latin typeface="Times New Roman" panose="02020603050405020304" charset="0"/>
+              <a:ea typeface="微软雅黑" panose="020B0503020204020204" charset="-122"/>
               <a:cs typeface="Times New Roman" panose="02020603050405020304" charset="0"/>
             </a:endParaRPr>
           </a:p>
@@ -14273,7 +20240,7 @@
           </p:nvPr>
         </p:nvPicPr>
         <p:blipFill>
-          <a:blip r:embed="rId16">
+          <a:blip r:embed="rId6">
             <a:extLst>
               <a:ext uri="{96DAC541-7B7A-43D3-8B79-37D633B846F1}">
                 <asvg:svgBlip xmlns:asvg="http://schemas.microsoft.com/office/drawing/2016/SVG/main" r:embed="rId7"/>
@@ -14345,12 +20312,12 @@
           <a:graphicData uri="http://schemas.openxmlformats.org/presentationml/2006/ole">
             <mc:AlternateContent xmlns:mc="http://schemas.openxmlformats.org/markup-compatibility/2006">
               <mc:Choice xmlns:v="urn:schemas-microsoft-com:vml" Requires="v">
-                <p:oleObj spid="_x0000_s1025" name="" r:id="rId17" imgW="152400" imgH="215900" progId="Equation.KSEE3">
+                <p:oleObj spid="_x0000_s1025" name="" r:id="rId16" imgW="152400" imgH="215900" progId="Equation.KSEE3">
                   <p:embed/>
                 </p:oleObj>
               </mc:Choice>
               <mc:Fallback>
-                <p:oleObj name="" r:id="rId17" imgW="152400" imgH="215900" progId="Equation.KSEE3">
+                <p:oleObj name="" r:id="rId16" imgW="152400" imgH="215900" progId="Equation.KSEE3">
                   <p:embed/>
                   <p:pic>
                     <p:nvPicPr>
@@ -14359,7 +20326,7 @@
                       <p:nvPr/>
                     </p:nvPicPr>
                     <p:blipFill>
-                      <a:blip r:embed="rId18"/>
+                      <a:blip r:embed="rId17"/>
                       <a:stretch>
                         <a:fillRect/>
                       </a:stretch>
@@ -14398,12 +20365,12 @@
           <a:graphicData uri="http://schemas.openxmlformats.org/presentationml/2006/ole">
             <mc:AlternateContent xmlns:mc="http://schemas.openxmlformats.org/markup-compatibility/2006">
               <mc:Choice xmlns:v="urn:schemas-microsoft-com:vml" Requires="v">
-                <p:oleObj spid="_x0000_s20" name="" r:id="rId19" imgW="165100" imgH="215900" progId="Equation.KSEE3">
+                <p:oleObj spid="_x0000_s20" name="" r:id="rId18" imgW="165100" imgH="215900" progId="Equation.KSEE3">
                   <p:embed/>
                 </p:oleObj>
               </mc:Choice>
               <mc:Fallback>
-                <p:oleObj name="" r:id="rId19" imgW="165100" imgH="215900" progId="Equation.KSEE3">
+                <p:oleObj name="" r:id="rId18" imgW="165100" imgH="215900" progId="Equation.KSEE3">
                   <p:embed/>
                   <p:pic>
                     <p:nvPicPr>
@@ -14412,7 +20379,7 @@
                       <p:nvPr/>
                     </p:nvPicPr>
                     <p:blipFill>
-                      <a:blip r:embed="rId20"/>
+                      <a:blip r:embed="rId19"/>
                       <a:stretch>
                         <a:fillRect/>
                       </a:stretch>
@@ -14481,12 +20448,12 @@
           <a:graphicData uri="http://schemas.openxmlformats.org/presentationml/2006/ole">
             <mc:AlternateContent xmlns:mc="http://schemas.openxmlformats.org/markup-compatibility/2006">
               <mc:Choice xmlns:v="urn:schemas-microsoft-com:vml" Requires="v">
-                <p:oleObj spid="_x0000_s49" name="" r:id="rId21" imgW="177165" imgH="215900" progId="Equation.KSEE3">
+                <p:oleObj spid="_x0000_s49" name="" r:id="rId20" imgW="177165" imgH="215900" progId="Equation.KSEE3">
                   <p:embed/>
                 </p:oleObj>
               </mc:Choice>
               <mc:Fallback>
-                <p:oleObj name="" r:id="rId21" imgW="177165" imgH="215900" progId="Equation.KSEE3">
+                <p:oleObj name="" r:id="rId20" imgW="177165" imgH="215900" progId="Equation.KSEE3">
                   <p:embed/>
                   <p:pic>
                     <p:nvPicPr>
@@ -14495,7 +20462,7 @@
                       <p:nvPr/>
                     </p:nvPicPr>
                     <p:blipFill>
-                      <a:blip r:embed="rId22"/>
+                      <a:blip r:embed="rId21"/>
                       <a:stretch>
                         <a:fillRect/>
                       </a:stretch>
@@ -14534,12 +20501,12 @@
           <a:graphicData uri="http://schemas.openxmlformats.org/presentationml/2006/ole">
             <mc:AlternateContent xmlns:mc="http://schemas.openxmlformats.org/markup-compatibility/2006">
               <mc:Choice xmlns:v="urn:schemas-microsoft-com:vml" Requires="v">
-                <p:oleObj spid="_x0000_s51" name="" r:id="rId23" imgW="165100" imgH="215900" progId="Equation.KSEE3">
+                <p:oleObj spid="_x0000_s51" name="" r:id="rId22" imgW="165100" imgH="215900" progId="Equation.KSEE3">
                   <p:embed/>
                 </p:oleObj>
               </mc:Choice>
               <mc:Fallback>
-                <p:oleObj name="" r:id="rId23" imgW="165100" imgH="215900" progId="Equation.KSEE3">
+                <p:oleObj name="" r:id="rId22" imgW="165100" imgH="215900" progId="Equation.KSEE3">
                   <p:embed/>
                   <p:pic>
                     <p:nvPicPr>
@@ -14548,7 +20515,7 @@
                       <p:nvPr/>
                     </p:nvPicPr>
                     <p:blipFill>
-                      <a:blip r:embed="rId24"/>
+                      <a:blip r:embed="rId23"/>
                       <a:stretch>
                         <a:fillRect/>
                       </a:stretch>
@@ -14587,12 +20554,12 @@
           <a:graphicData uri="http://schemas.openxmlformats.org/presentationml/2006/ole">
             <mc:AlternateContent xmlns:mc="http://schemas.openxmlformats.org/markup-compatibility/2006">
               <mc:Choice xmlns:v="urn:schemas-microsoft-com:vml" Requires="v">
-                <p:oleObj spid="_x0000_s1026" name="" r:id="rId25" imgW="342900" imgH="203200" progId="Equation.KSEE3">
+                <p:oleObj spid="_x0000_s1026" name="" r:id="rId24" imgW="342900" imgH="203200" progId="Equation.KSEE3">
                   <p:embed/>
                 </p:oleObj>
               </mc:Choice>
               <mc:Fallback>
-                <p:oleObj name="" r:id="rId25" imgW="342900" imgH="203200" progId="Equation.KSEE3">
+                <p:oleObj name="" r:id="rId24" imgW="342900" imgH="203200" progId="Equation.KSEE3">
                   <p:embed/>
                   <p:pic>
                     <p:nvPicPr>
@@ -14601,7 +20568,7 @@
                       <p:nvPr/>
                     </p:nvPicPr>
                     <p:blipFill>
-                      <a:blip r:embed="rId26"/>
+                      <a:blip r:embed="rId25"/>
                       <a:stretch>
                         <a:fillRect/>
                       </a:stretch>
@@ -14640,12 +20607,12 @@
           <a:graphicData uri="http://schemas.openxmlformats.org/presentationml/2006/ole">
             <mc:AlternateContent xmlns:mc="http://schemas.openxmlformats.org/markup-compatibility/2006">
               <mc:Choice xmlns:v="urn:schemas-microsoft-com:vml" Requires="v">
-                <p:oleObj spid="_x0000_s1027" name="" r:id="rId27" imgW="1028700" imgH="634365" progId="Equation.KSEE3">
+                <p:oleObj spid="_x0000_s1027" name="" r:id="rId26" imgW="1028700" imgH="634365" progId="Equation.KSEE3">
                   <p:embed/>
                 </p:oleObj>
               </mc:Choice>
               <mc:Fallback>
-                <p:oleObj name="" r:id="rId27" imgW="1028700" imgH="634365" progId="Equation.KSEE3">
+                <p:oleObj name="" r:id="rId26" imgW="1028700" imgH="634365" progId="Equation.KSEE3">
                   <p:embed/>
                   <p:pic>
                     <p:nvPicPr>
@@ -14654,7 +20621,7 @@
                       <p:nvPr/>
                     </p:nvPicPr>
                     <p:blipFill>
-                      <a:blip r:embed="rId28"/>
+                      <a:blip r:embed="rId27"/>
                       <a:stretch>
                         <a:fillRect/>
                       </a:stretch>
@@ -14693,12 +20660,12 @@
           <a:graphicData uri="http://schemas.openxmlformats.org/presentationml/2006/ole">
             <mc:AlternateContent xmlns:mc="http://schemas.openxmlformats.org/markup-compatibility/2006">
               <mc:Choice xmlns:v="urn:schemas-microsoft-com:vml" Requires="v">
-                <p:oleObj spid="_x0000_s1028" name="" r:id="rId29" imgW="1016000" imgH="482600" progId="Equation.KSEE3">
+                <p:oleObj spid="_x0000_s1028" name="" r:id="rId28" imgW="1016000" imgH="482600" progId="Equation.KSEE3">
                   <p:embed/>
                 </p:oleObj>
               </mc:Choice>
               <mc:Fallback>
-                <p:oleObj name="" r:id="rId29" imgW="1016000" imgH="482600" progId="Equation.KSEE3">
+                <p:oleObj name="" r:id="rId28" imgW="1016000" imgH="482600" progId="Equation.KSEE3">
                   <p:embed/>
                   <p:pic>
                     <p:nvPicPr>
@@ -14707,7 +20674,7 @@
                       <p:nvPr/>
                     </p:nvPicPr>
                     <p:blipFill>
-                      <a:blip r:embed="rId30"/>
+                      <a:blip r:embed="rId29"/>
                       <a:stretch>
                         <a:fillRect/>
                       </a:stretch>
@@ -14746,12 +20713,12 @@
           <a:graphicData uri="http://schemas.openxmlformats.org/presentationml/2006/ole">
             <mc:AlternateContent xmlns:mc="http://schemas.openxmlformats.org/markup-compatibility/2006">
               <mc:Choice xmlns:v="urn:schemas-microsoft-com:vml" Requires="v">
-                <p:oleObj spid="_x0000_s1029" name="" r:id="rId31" imgW="1447800" imgH="457200" progId="Equation.KSEE3">
+                <p:oleObj spid="_x0000_s1029" name="" r:id="rId30" imgW="1447800" imgH="457200" progId="Equation.KSEE3">
                   <p:embed/>
                 </p:oleObj>
               </mc:Choice>
               <mc:Fallback>
-                <p:oleObj name="" r:id="rId31" imgW="1447800" imgH="457200" progId="Equation.KSEE3">
+                <p:oleObj name="" r:id="rId30" imgW="1447800" imgH="457200" progId="Equation.KSEE3">
                   <p:embed/>
                   <p:pic>
                     <p:nvPicPr>
@@ -14760,7 +20727,7 @@
                       <p:nvPr/>
                     </p:nvPicPr>
                     <p:blipFill>
-                      <a:blip r:embed="rId32"/>
+                      <a:blip r:embed="rId31"/>
                       <a:stretch>
                         <a:fillRect/>
                       </a:stretch>
@@ -15772,7 +21739,7 @@
                 <a:cs typeface="Times New Roman" panose="02020603050405020304" charset="0"/>
                 <a:sym typeface="+mn-ea"/>
               </a:rPr>
-              <a:t>Simulation</a:t>
+              <a:t>Simulation(DNN)</a:t>
             </a:r>
             <a:endParaRPr lang="en-US" altLang="zh-CN" sz="4000" dirty="0" err="1">
               <a:latin typeface="Times New Roman" panose="02020603050405020304" charset="0"/>
@@ -16706,7 +22673,7 @@
       </p:sp>
       <p:pic>
         <p:nvPicPr>
-          <p:cNvPr id="14" name="图片 13" descr="CSI_Scene_20MHz_4Rx_layout"/>
+          <p:cNvPr id="29" name="图片 28" descr="CSI_Scene_20MHz_4Rx_layout"/>
           <p:cNvPicPr>
             <a:picLocks noChangeAspect="1"/>
           </p:cNvPicPr>
@@ -16720,8 +22687,8 @@
         </p:blipFill>
         <p:spPr>
           <a:xfrm>
-            <a:off x="5447665" y="1061085"/>
-            <a:ext cx="5918835" cy="4735195"/>
+            <a:off x="5748020" y="1087755"/>
+            <a:ext cx="5715635" cy="4572635"/>
           </a:xfrm>
           <a:prstGeom prst="rect">
             <a:avLst/>
@@ -16788,1546 +22755,220 @@
       </p:sp>
       <p:sp>
         <p:nvSpPr>
-          <p:cNvPr id="7" name="Title 2"/>
+          <p:cNvPr id="281" name="文本框 280"/>
           <p:cNvSpPr txBox="1"/>
           <p:nvPr/>
         </p:nvSpPr>
         <p:spPr>
           <a:xfrm>
-            <a:off x="265430" y="0"/>
-            <a:ext cx="10261600" cy="1082040"/>
+            <a:off x="402590" y="289560"/>
+            <a:ext cx="11386820" cy="5226685"/>
           </a:xfrm>
           <a:prstGeom prst="rect">
             <a:avLst/>
           </a:prstGeom>
+          <a:noFill/>
         </p:spPr>
         <p:txBody>
-          <a:bodyPr vert="horz" lIns="91440" tIns="45720" rIns="91440" bIns="45720" rtlCol="0" anchor="ctr">
-            <a:normAutofit/>
+          <a:bodyPr wrap="square" rtlCol="0" anchor="t">
+            <a:noAutofit/>
           </a:bodyPr>
-          <a:lstStyle>
-            <a:lvl1pPr algn="l" defTabSz="914400" rtl="0" eaLnBrk="1" latinLnBrk="0" hangingPunct="1">
-              <a:lnSpc>
-                <a:spcPct val="90000"/>
-              </a:lnSpc>
-              <a:spcBef>
-                <a:spcPct val="0"/>
-              </a:spcBef>
-              <a:buNone/>
-              <a:defRPr sz="6000" kern="1200">
+          <a:p>
+            <a:r>
+              <a:rPr lang="en-US" altLang="zh-CN"/>
+              <a:t>  ──────────────────────────────────────────────────────────────────────────────────────────</a:t>
+            </a:r>
+            <a:endParaRPr lang="en-US" altLang="zh-CN"/>
+          </a:p>
+          <a:p>
+            <a:r>
+              <a:rPr lang="en-US" altLang="zh-CN"/>
+              <a:t>  Node     True (x,y)       Sequential (x,y)        Err      Optimized (x,y)         Err          Δ       </a:t>
+            </a:r>
+            <a:endParaRPr lang="en-US" altLang="zh-CN"/>
+          </a:p>
+          <a:p>
+            <a:r>
+              <a:rPr lang="en-US" altLang="zh-CN"/>
+              <a:t>  ──────────────────────────────────────────────────────────────────────────────────────────</a:t>
+            </a:r>
+            <a:endParaRPr lang="en-US" altLang="zh-CN"/>
+          </a:p>
+          <a:p>
+            <a:r>
+              <a:rPr lang="en-US" altLang="zh-CN"/>
+              <a:t>  BS          (50.0, 10.0)     (50.00, 10.00)         0.00     (50.00, 10.00)         0.00     +0.00</a:t>
+            </a:r>
+            <a:endParaRPr lang="en-US" altLang="zh-CN"/>
+          </a:p>
+          <a:p>
+            <a:r>
+              <a:rPr lang="en-US" altLang="zh-CN"/>
+              <a:t>  UE1       (62.0, 28.0)     (60.91, 28.05)         1.09     (61.72, 28.24)         0.37     +0.72</a:t>
+            </a:r>
+            <a:endParaRPr lang="en-US" altLang="zh-CN"/>
+          </a:p>
+          <a:p>
+            <a:r>
+              <a:rPr lang="en-US" altLang="zh-CN"/>
+              <a:t>  UE10     (80.0, 90.0)     (79.83, 89.89)         0.20     (79.97, 90.85)         0.85     -0.64</a:t>
+            </a:r>
+            <a:endParaRPr lang="en-US" altLang="zh-CN"/>
+          </a:p>
+          <a:p>
+            <a:r>
+              <a:rPr lang="en-US" altLang="zh-CN"/>
+              <a:t>  UE11     (35.0, 70.0)     (31.96, 69.47)         </a:t>
+            </a:r>
+            <a:r>
+              <a:rPr lang="en-US" altLang="zh-CN" b="1">
                 <a:solidFill>
-                  <a:srgbClr val="DD613B"/>
+                  <a:srgbClr val="C00000"/>
                 </a:solidFill>
-                <a:latin typeface="+mj-lt"/>
-                <a:ea typeface="+mj-ea"/>
-                <a:cs typeface="+mj-cs"/>
-              </a:defRPr>
-            </a:lvl1pPr>
-          </a:lstStyle>
-          <a:p>
-            <a:r>
-              <a:rPr lang="en-US" altLang="zh-CN" sz="4000" dirty="0" err="1">
-                <a:latin typeface="Times New Roman" panose="02020603050405020304" charset="0"/>
-                <a:ea typeface="微软雅黑" panose="020B0503020204020204" charset="-122"/>
-                <a:cs typeface="Times New Roman" panose="02020603050405020304" charset="0"/>
-                <a:sym typeface="+mn-ea"/>
               </a:rPr>
-              <a:t>Simulation</a:t>
-            </a:r>
-            <a:endParaRPr lang="en-US" altLang="zh-CN" sz="4000" dirty="0" err="1">
-              <a:latin typeface="Times New Roman" panose="02020603050405020304" charset="0"/>
-              <a:ea typeface="微软雅黑" panose="020B0503020204020204" charset="-122"/>
-              <a:cs typeface="Times New Roman" panose="02020603050405020304" charset="0"/>
-              <a:sym typeface="+mn-ea"/>
-            </a:endParaRPr>
-          </a:p>
-        </p:txBody>
-      </p:sp>
-      <p:pic>
-        <p:nvPicPr>
-          <p:cNvPr id="30" name="图片 29" descr="localization_20MHz"/>
-          <p:cNvPicPr>
-            <a:picLocks noChangeAspect="1"/>
-          </p:cNvPicPr>
-          <p:nvPr/>
-        </p:nvPicPr>
-        <p:blipFill>
-          <a:blip r:embed="rId1"/>
-          <a:stretch>
-            <a:fillRect/>
-          </a:stretch>
-        </p:blipFill>
-        <p:spPr>
-          <a:xfrm>
-            <a:off x="412750" y="-3810"/>
-            <a:ext cx="4182745" cy="3348355"/>
-          </a:xfrm>
-          <a:prstGeom prst="rect">
-            <a:avLst/>
-          </a:prstGeom>
-        </p:spPr>
-      </p:pic>
-      <p:sp>
-        <p:nvSpPr>
-          <p:cNvPr id="31" name="文本框 30"/>
-          <p:cNvSpPr txBox="1"/>
-          <p:nvPr/>
-        </p:nvSpPr>
-        <p:spPr>
-          <a:xfrm>
-            <a:off x="9448800" y="2378075"/>
-            <a:ext cx="2622550" cy="521970"/>
-          </a:xfrm>
-          <a:prstGeom prst="rect">
-            <a:avLst/>
-          </a:prstGeom>
-        </p:spPr>
-        <p:txBody>
-          <a:bodyPr wrap="square">
-            <a:spAutoFit/>
-            <a:extLst>
-              <a:ext uri="{4A0BC546-FE56-4ADE-93B0-CB8AF2F6F144}">
-                <wpsdc:textFrameExt xmlns:wpsdc="http://www.wps.cn/officeDocument/2022/drawingmlCustomData" type="text"/>
-              </a:ext>
-            </a:extLst>
-          </a:bodyPr>
-          <a:p>
-            <a:pPr algn="l"/>
-            <a:r>
-              <a:rPr lang="en-US" altLang="zh-CN" sz="1400" b="1">
-                <a:latin typeface="Times New Roman" panose="02020603050405020304" charset="0"/>
-                <a:ea typeface="微软雅黑" panose="020B0503020204020204" charset="-122"/>
-                <a:cs typeface="Times New Roman" panose="02020603050405020304" charset="0"/>
+              <a:t>3.08</a:t>
+            </a:r>
+            <a:r>
+              <a:rPr lang="en-US" altLang="zh-CN">
+                <a:solidFill>
+                  <a:srgbClr val="C00000"/>
+                </a:solidFill>
               </a:rPr>
-              <a:t>With multi-hop mechnisim:</a:t>
-            </a:r>
-            <a:endParaRPr lang="en-US" altLang="zh-CN" sz="1400">
-              <a:latin typeface="Times New Roman" panose="02020603050405020304" charset="0"/>
-              <a:ea typeface="微软雅黑" panose="020B0503020204020204" charset="-122"/>
-              <a:cs typeface="Times New Roman" panose="02020603050405020304" charset="0"/>
-            </a:endParaRPr>
-          </a:p>
-          <a:p>
-            <a:pPr marL="285750" indent="-285750" algn="l">
-              <a:buFont typeface="Wingdings" panose="05000000000000000000" charset="0"/>
-              <a:buChar char="Ø"/>
-            </a:pPr>
-            <a:r>
-              <a:rPr lang="en-US" altLang="zh-CN" sz="1400">
-                <a:latin typeface="Times New Roman" panose="02020603050405020304" charset="0"/>
-                <a:ea typeface="微软雅黑" panose="020B0503020204020204" charset="-122"/>
-                <a:cs typeface="Times New Roman" panose="02020603050405020304" charset="0"/>
+              <a:t> </a:t>
+            </a:r>
+            <a:r>
+              <a:rPr lang="en-US" altLang="zh-CN"/>
+              <a:t>    (31.93, 69.43)         3.12     -0.04</a:t>
+            </a:r>
+            <a:endParaRPr lang="en-US" altLang="zh-CN"/>
+          </a:p>
+          <a:p>
+            <a:r>
+              <a:rPr lang="en-US" altLang="zh-CN"/>
+              <a:t>  UE12     (30.0, 80.0)     (26.86, 79.53)         </a:t>
+            </a:r>
+            <a:r>
+              <a:rPr lang="en-US" altLang="zh-CN" b="1">
+                <a:solidFill>
+                  <a:srgbClr val="C00000"/>
+                </a:solidFill>
               </a:rPr>
-              <a:t>Average error: 0.39</a:t>
-            </a:r>
-            <a:endParaRPr lang="en-US" altLang="zh-CN" sz="1400">
-              <a:latin typeface="Times New Roman" panose="02020603050405020304" charset="0"/>
-              <a:ea typeface="微软雅黑" panose="020B0503020204020204" charset="-122"/>
-              <a:cs typeface="Times New Roman" panose="02020603050405020304" charset="0"/>
-            </a:endParaRPr>
-          </a:p>
-        </p:txBody>
-      </p:sp>
-      <p:graphicFrame>
-        <p:nvGraphicFramePr>
-          <p:cNvPr id="32" name="表格 31"/>
-          <p:cNvGraphicFramePr/>
-          <p:nvPr/>
-        </p:nvGraphicFramePr>
-        <p:xfrm>
-          <a:off x="4728845" y="504825"/>
-          <a:ext cx="4480560" cy="2517775"/>
-        </p:xfrm>
-        <a:graphic>
-          <a:graphicData uri="http://schemas.openxmlformats.org/drawingml/2006/table">
-            <a:tbl>
-              <a:tblPr firstRow="1" bandRow="1">
-                <a:tableStyleId>{5C22544A-7EE6-4342-B048-85BDC9FD1C3A}</a:tableStyleId>
-              </a:tblPr>
-              <a:tblGrid>
-                <a:gridCol w="954405"/>
-                <a:gridCol w="1128395"/>
-                <a:gridCol w="1226185"/>
-                <a:gridCol w="1171575"/>
-              </a:tblGrid>
-              <a:tr h="323215">
-                <a:tc>
-                  <a:txBody>
-                    <a:bodyPr/>
-                    <a:p>
-                      <a:pPr algn="ctr">
-                        <a:buNone/>
-                      </a:pPr>
-                      <a:r>
-                        <a:rPr lang="en-US" altLang="zh-CN" sz="1200">
-                          <a:latin typeface="Times New Roman" panose="02020603050405020304" charset="0"/>
-                          <a:cs typeface="Times New Roman" panose="02020603050405020304" charset="0"/>
-                        </a:rPr>
-                        <a:t> Node</a:t>
-                      </a:r>
-                      <a:endParaRPr lang="en-US" altLang="zh-CN" sz="1200">
-                        <a:latin typeface="Times New Roman" panose="02020603050405020304" charset="0"/>
-                        <a:cs typeface="Times New Roman" panose="02020603050405020304" charset="0"/>
-                      </a:endParaRPr>
-                    </a:p>
-                  </a:txBody>
-                  <a:tcPr/>
-                </a:tc>
-                <a:tc>
-                  <a:txBody>
-                    <a:bodyPr/>
-                    <a:p>
-                      <a:pPr algn="ctr">
-                        <a:buNone/>
-                      </a:pPr>
-                      <a:r>
-                        <a:rPr lang="en-US" altLang="zh-CN" sz="1400">
-                          <a:latin typeface="Times New Roman" panose="02020603050405020304" charset="0"/>
-                          <a:cs typeface="Times New Roman" panose="02020603050405020304" charset="0"/>
-                        </a:rPr>
-                        <a:t>est_location</a:t>
-                      </a:r>
-                      <a:endParaRPr lang="en-US" altLang="zh-CN" sz="1400">
-                        <a:latin typeface="Times New Roman" panose="02020603050405020304" charset="0"/>
-                        <a:cs typeface="Times New Roman" panose="02020603050405020304" charset="0"/>
-                      </a:endParaRPr>
-                    </a:p>
-                  </a:txBody>
-                  <a:tcPr/>
-                </a:tc>
-                <a:tc>
-                  <a:txBody>
-                    <a:bodyPr/>
-                    <a:p>
-                      <a:pPr algn="ctr">
-                        <a:buNone/>
-                      </a:pPr>
-                      <a:r>
-                        <a:rPr lang="en-US" altLang="zh-CN" sz="1400">
-                          <a:latin typeface="Times New Roman" panose="02020603050405020304" charset="0"/>
-                          <a:cs typeface="Times New Roman" panose="02020603050405020304" charset="0"/>
-                        </a:rPr>
-                        <a:t>true_location</a:t>
-                      </a:r>
-                      <a:endParaRPr lang="en-US" altLang="zh-CN" sz="1400">
-                        <a:latin typeface="Times New Roman" panose="02020603050405020304" charset="0"/>
-                        <a:cs typeface="Times New Roman" panose="02020603050405020304" charset="0"/>
-                      </a:endParaRPr>
-                    </a:p>
-                  </a:txBody>
-                  <a:tcPr/>
-                </a:tc>
-                <a:tc>
-                  <a:txBody>
-                    <a:bodyPr/>
-                    <a:p>
-                      <a:pPr algn="ctr">
-                        <a:buNone/>
-                      </a:pPr>
-                      <a:r>
-                        <a:rPr lang="en-US" altLang="zh-CN" sz="1400">
-                          <a:latin typeface="Times New Roman" panose="02020603050405020304" charset="0"/>
-                          <a:cs typeface="Times New Roman" panose="02020603050405020304" charset="0"/>
-                        </a:rPr>
-                        <a:t>error</a:t>
-                      </a:r>
-                      <a:endParaRPr lang="en-US" altLang="zh-CN" sz="1400">
-                        <a:latin typeface="Times New Roman" panose="02020603050405020304" charset="0"/>
-                        <a:cs typeface="Times New Roman" panose="02020603050405020304" charset="0"/>
-                      </a:endParaRPr>
-                    </a:p>
-                  </a:txBody>
-                  <a:tcPr/>
-                </a:tc>
-              </a:tr>
-              <a:tr h="365760">
-                <a:tc>
-                  <a:txBody>
-                    <a:bodyPr/>
-                    <a:p>
-                      <a:pPr algn="ctr">
-                        <a:buNone/>
-                      </a:pPr>
-                      <a:r>
-                        <a:rPr lang="en-US" altLang="zh-CN" sz="1400">
-                          <a:latin typeface="Times New Roman" panose="02020603050405020304" charset="0"/>
-                          <a:cs typeface="Times New Roman" panose="02020603050405020304" charset="0"/>
-                        </a:rPr>
-                        <a:t>1</a:t>
-                      </a:r>
-                      <a:endParaRPr lang="en-US" altLang="zh-CN" sz="1400">
-                        <a:latin typeface="Times New Roman" panose="02020603050405020304" charset="0"/>
-                        <a:cs typeface="Times New Roman" panose="02020603050405020304" charset="0"/>
-                      </a:endParaRPr>
-                    </a:p>
-                  </a:txBody>
-                  <a:tcPr/>
-                </a:tc>
-                <a:tc>
-                  <a:txBody>
-                    <a:bodyPr/>
-                    <a:p>
-                      <a:pPr algn="ctr">
-                        <a:buNone/>
-                      </a:pPr>
-                      <a:r>
-                        <a:rPr lang="en-US" altLang="zh-CN" sz="1400">
-                          <a:latin typeface="Times New Roman" panose="02020603050405020304" charset="0"/>
-                          <a:cs typeface="Times New Roman" panose="02020603050405020304" charset="0"/>
-                        </a:rPr>
-                        <a:t>(2.75, 2.96)</a:t>
-                      </a:r>
-                      <a:endParaRPr lang="en-US" altLang="zh-CN" sz="1400">
-                        <a:latin typeface="Times New Roman" panose="02020603050405020304" charset="0"/>
-                        <a:cs typeface="Times New Roman" panose="02020603050405020304" charset="0"/>
-                      </a:endParaRPr>
-                    </a:p>
-                  </a:txBody>
-                  <a:tcPr/>
-                </a:tc>
-                <a:tc>
-                  <a:txBody>
-                    <a:bodyPr/>
-                    <a:p>
-                      <a:pPr algn="ctr">
-                        <a:buNone/>
-                      </a:pPr>
-                      <a:r>
-                        <a:rPr lang="en-US" altLang="zh-CN" sz="1400">
-                          <a:latin typeface="Times New Roman" panose="02020603050405020304" charset="0"/>
-                          <a:cs typeface="Times New Roman" panose="02020603050405020304" charset="0"/>
-                        </a:rPr>
-                        <a:t>(3.0, 3.0)</a:t>
-                      </a:r>
-                      <a:endParaRPr lang="en-US" altLang="zh-CN" sz="1400">
-                        <a:latin typeface="Times New Roman" panose="02020603050405020304" charset="0"/>
-                        <a:cs typeface="Times New Roman" panose="02020603050405020304" charset="0"/>
-                      </a:endParaRPr>
-                    </a:p>
-                  </a:txBody>
-                  <a:tcPr/>
-                </a:tc>
-                <a:tc>
-                  <a:txBody>
-                    <a:bodyPr/>
-                    <a:p>
-                      <a:pPr algn="ctr">
-                        <a:buNone/>
-                      </a:pPr>
-                      <a:r>
-                        <a:rPr lang="en-US" altLang="zh-CN" sz="1400">
-                          <a:latin typeface="Times New Roman" panose="02020603050405020304" charset="0"/>
-                          <a:cs typeface="Times New Roman" panose="02020603050405020304" charset="0"/>
-                        </a:rPr>
-                        <a:t>0.26</a:t>
-                      </a:r>
-                      <a:endParaRPr lang="en-US" altLang="zh-CN" sz="1400">
-                        <a:latin typeface="Times New Roman" panose="02020603050405020304" charset="0"/>
-                        <a:cs typeface="Times New Roman" panose="02020603050405020304" charset="0"/>
-                      </a:endParaRPr>
-                    </a:p>
-                  </a:txBody>
-                  <a:tcPr/>
-                </a:tc>
-              </a:tr>
-              <a:tr h="365760">
-                <a:tc>
-                  <a:txBody>
-                    <a:bodyPr/>
-                    <a:p>
-                      <a:pPr algn="ctr">
-                        <a:buNone/>
-                      </a:pPr>
-                      <a:r>
-                        <a:rPr lang="en-US" altLang="zh-CN" sz="1400">
-                          <a:latin typeface="Times New Roman" panose="02020603050405020304" charset="0"/>
-                          <a:cs typeface="Times New Roman" panose="02020603050405020304" charset="0"/>
-                        </a:rPr>
-                        <a:t>2</a:t>
-                      </a:r>
-                      <a:endParaRPr lang="en-US" altLang="zh-CN" sz="1400">
-                        <a:latin typeface="Times New Roman" panose="02020603050405020304" charset="0"/>
-                        <a:cs typeface="Times New Roman" panose="02020603050405020304" charset="0"/>
-                      </a:endParaRPr>
-                    </a:p>
-                  </a:txBody>
-                  <a:tcPr/>
-                </a:tc>
-                <a:tc>
-                  <a:txBody>
-                    <a:bodyPr/>
-                    <a:p>
-                      <a:pPr algn="ctr">
-                        <a:buNone/>
-                      </a:pPr>
-                      <a:r>
-                        <a:rPr lang="en-US" altLang="zh-CN" sz="1400">
-                          <a:latin typeface="Times New Roman" panose="02020603050405020304" charset="0"/>
-                          <a:cs typeface="Times New Roman" panose="02020603050405020304" charset="0"/>
-                        </a:rPr>
-                        <a:t>(1.91, 0.33)</a:t>
-                      </a:r>
-                      <a:endParaRPr lang="en-US" altLang="zh-CN" sz="1400">
-                        <a:latin typeface="Times New Roman" panose="02020603050405020304" charset="0"/>
-                        <a:cs typeface="Times New Roman" panose="02020603050405020304" charset="0"/>
-                      </a:endParaRPr>
-                    </a:p>
-                  </a:txBody>
-                  <a:tcPr/>
-                </a:tc>
-                <a:tc>
-                  <a:txBody>
-                    <a:bodyPr/>
-                    <a:p>
-                      <a:pPr algn="ctr">
-                        <a:buNone/>
-                      </a:pPr>
-                      <a:r>
-                        <a:rPr lang="en-US" altLang="zh-CN" sz="1400">
-                          <a:latin typeface="Times New Roman" panose="02020603050405020304" charset="0"/>
-                          <a:cs typeface="Times New Roman" panose="02020603050405020304" charset="0"/>
-                        </a:rPr>
-                        <a:t>(2.0, 0.0)</a:t>
-                      </a:r>
-                      <a:endParaRPr lang="en-US" altLang="zh-CN" sz="1400">
-                        <a:latin typeface="Times New Roman" panose="02020603050405020304" charset="0"/>
-                        <a:cs typeface="Times New Roman" panose="02020603050405020304" charset="0"/>
-                      </a:endParaRPr>
-                    </a:p>
-                  </a:txBody>
-                  <a:tcPr/>
-                </a:tc>
-                <a:tc>
-                  <a:txBody>
-                    <a:bodyPr/>
-                    <a:p>
-                      <a:pPr algn="ctr">
-                        <a:buNone/>
-                      </a:pPr>
-                      <a:r>
-                        <a:rPr lang="en-US" altLang="zh-CN" sz="1400">
-                          <a:latin typeface="Times New Roman" panose="02020603050405020304" charset="0"/>
-                          <a:cs typeface="Times New Roman" panose="02020603050405020304" charset="0"/>
-                        </a:rPr>
-                        <a:t>0.34</a:t>
-                      </a:r>
-                      <a:endParaRPr lang="en-US" altLang="zh-CN" sz="1400">
-                        <a:latin typeface="Times New Roman" panose="02020603050405020304" charset="0"/>
-                        <a:cs typeface="Times New Roman" panose="02020603050405020304" charset="0"/>
-                      </a:endParaRPr>
-                    </a:p>
-                  </a:txBody>
-                  <a:tcPr/>
-                </a:tc>
-              </a:tr>
-              <a:tr h="365760">
-                <a:tc>
-                  <a:txBody>
-                    <a:bodyPr/>
-                    <a:p>
-                      <a:pPr algn="ctr">
-                        <a:buNone/>
-                      </a:pPr>
-                      <a:r>
-                        <a:rPr lang="en-US" altLang="zh-CN" sz="1400">
-                          <a:latin typeface="Times New Roman" panose="02020603050405020304" charset="0"/>
-                          <a:cs typeface="Times New Roman" panose="02020603050405020304" charset="0"/>
-                        </a:rPr>
-                        <a:t>3</a:t>
-                      </a:r>
-                      <a:endParaRPr lang="en-US" altLang="zh-CN" sz="1400">
-                        <a:latin typeface="Times New Roman" panose="02020603050405020304" charset="0"/>
-                        <a:cs typeface="Times New Roman" panose="02020603050405020304" charset="0"/>
-                      </a:endParaRPr>
-                    </a:p>
-                  </a:txBody>
-                  <a:tcPr/>
-                </a:tc>
-                <a:tc>
-                  <a:txBody>
-                    <a:bodyPr/>
-                    <a:p>
-                      <a:pPr algn="ctr">
-                        <a:buNone/>
-                      </a:pPr>
-                      <a:r>
-                        <a:rPr lang="en-US" altLang="zh-CN" sz="1400">
-                          <a:latin typeface="Times New Roman" panose="02020603050405020304" charset="0"/>
-                          <a:cs typeface="Times New Roman" panose="02020603050405020304" charset="0"/>
-                        </a:rPr>
-                        <a:t>(7.30, 3.79)</a:t>
-                      </a:r>
-                      <a:endParaRPr lang="en-US" altLang="zh-CN" sz="1400">
-                        <a:latin typeface="Times New Roman" panose="02020603050405020304" charset="0"/>
-                        <a:cs typeface="Times New Roman" panose="02020603050405020304" charset="0"/>
-                      </a:endParaRPr>
-                    </a:p>
-                  </a:txBody>
-                  <a:tcPr/>
-                </a:tc>
-                <a:tc>
-                  <a:txBody>
-                    <a:bodyPr/>
-                    <a:p>
-                      <a:pPr algn="ctr">
-                        <a:buNone/>
-                      </a:pPr>
-                      <a:r>
-                        <a:rPr lang="en-US" altLang="zh-CN" sz="1400">
-                          <a:latin typeface="Times New Roman" panose="02020603050405020304" charset="0"/>
-                          <a:cs typeface="Times New Roman" panose="02020603050405020304" charset="0"/>
-                        </a:rPr>
-                        <a:t>(7.0, 4.0)</a:t>
-                      </a:r>
-                      <a:endParaRPr lang="en-US" altLang="zh-CN" sz="1400">
-                        <a:latin typeface="Times New Roman" panose="02020603050405020304" charset="0"/>
-                        <a:cs typeface="Times New Roman" panose="02020603050405020304" charset="0"/>
-                      </a:endParaRPr>
-                    </a:p>
-                  </a:txBody>
-                  <a:tcPr/>
-                </a:tc>
-                <a:tc>
-                  <a:txBody>
-                    <a:bodyPr/>
-                    <a:p>
-                      <a:pPr algn="ctr">
-                        <a:buNone/>
-                      </a:pPr>
-                      <a:r>
-                        <a:rPr lang="en-US" altLang="zh-CN" sz="1400">
-                          <a:latin typeface="Times New Roman" panose="02020603050405020304" charset="0"/>
-                          <a:cs typeface="Times New Roman" panose="02020603050405020304" charset="0"/>
-                        </a:rPr>
-                        <a:t>0.36</a:t>
-                      </a:r>
-                      <a:endParaRPr lang="en-US" altLang="zh-CN" sz="1400">
-                        <a:latin typeface="Times New Roman" panose="02020603050405020304" charset="0"/>
-                        <a:cs typeface="Times New Roman" panose="02020603050405020304" charset="0"/>
-                      </a:endParaRPr>
-                    </a:p>
-                  </a:txBody>
-                  <a:tcPr/>
-                </a:tc>
-              </a:tr>
-              <a:tr h="365760">
-                <a:tc>
-                  <a:txBody>
-                    <a:bodyPr/>
-                    <a:p>
-                      <a:pPr algn="ctr">
-                        <a:buNone/>
-                      </a:pPr>
-                      <a:r>
-                        <a:rPr lang="en-US" altLang="zh-CN" sz="1400">
-                          <a:latin typeface="Times New Roman" panose="02020603050405020304" charset="0"/>
-                          <a:cs typeface="Times New Roman" panose="02020603050405020304" charset="0"/>
-                        </a:rPr>
-                        <a:t>4</a:t>
-                      </a:r>
-                      <a:endParaRPr lang="en-US" altLang="zh-CN" sz="1400">
-                        <a:latin typeface="Times New Roman" panose="02020603050405020304" charset="0"/>
-                        <a:cs typeface="Times New Roman" panose="02020603050405020304" charset="0"/>
-                      </a:endParaRPr>
-                    </a:p>
-                  </a:txBody>
-                  <a:tcPr/>
-                </a:tc>
-                <a:tc>
-                  <a:txBody>
-                    <a:bodyPr/>
-                    <a:p>
-                      <a:pPr algn="ctr">
-                        <a:buNone/>
-                      </a:pPr>
-                      <a:r>
-                        <a:rPr lang="en-US" altLang="zh-CN" sz="1400">
-                          <a:latin typeface="Times New Roman" panose="02020603050405020304" charset="0"/>
-                          <a:cs typeface="Times New Roman" panose="02020603050405020304" charset="0"/>
-                        </a:rPr>
-                        <a:t>(2.54, 6.75)</a:t>
-                      </a:r>
-                      <a:endParaRPr lang="en-US" altLang="zh-CN" sz="1400">
-                        <a:latin typeface="Times New Roman" panose="02020603050405020304" charset="0"/>
-                        <a:cs typeface="Times New Roman" panose="02020603050405020304" charset="0"/>
-                      </a:endParaRPr>
-                    </a:p>
-                  </a:txBody>
-                  <a:tcPr/>
-                </a:tc>
-                <a:tc>
-                  <a:txBody>
-                    <a:bodyPr/>
-                    <a:p>
-                      <a:pPr algn="ctr">
-                        <a:buNone/>
-                      </a:pPr>
-                      <a:r>
-                        <a:rPr lang="en-US" altLang="zh-CN" sz="1400">
-                          <a:latin typeface="Times New Roman" panose="02020603050405020304" charset="0"/>
-                          <a:cs typeface="Times New Roman" panose="02020603050405020304" charset="0"/>
-                        </a:rPr>
-                        <a:t>(2.5, 7.0)</a:t>
-                      </a:r>
-                      <a:endParaRPr lang="en-US" altLang="zh-CN" sz="1400">
-                        <a:latin typeface="Times New Roman" panose="02020603050405020304" charset="0"/>
-                        <a:cs typeface="Times New Roman" panose="02020603050405020304" charset="0"/>
-                      </a:endParaRPr>
-                    </a:p>
-                  </a:txBody>
-                  <a:tcPr/>
-                </a:tc>
-                <a:tc>
-                  <a:txBody>
-                    <a:bodyPr/>
-                    <a:p>
-                      <a:pPr algn="ctr">
-                        <a:buNone/>
-                      </a:pPr>
-                      <a:r>
-                        <a:rPr lang="en-US" altLang="zh-CN" sz="1400">
-                          <a:latin typeface="Times New Roman" panose="02020603050405020304" charset="0"/>
-                          <a:cs typeface="Times New Roman" panose="02020603050405020304" charset="0"/>
-                        </a:rPr>
-                        <a:t>0.25</a:t>
-                      </a:r>
-                      <a:endParaRPr lang="en-US" altLang="zh-CN" sz="1400">
-                        <a:latin typeface="Times New Roman" panose="02020603050405020304" charset="0"/>
-                        <a:cs typeface="Times New Roman" panose="02020603050405020304" charset="0"/>
-                      </a:endParaRPr>
-                    </a:p>
-                  </a:txBody>
-                  <a:tcPr/>
-                </a:tc>
-              </a:tr>
-              <a:tr h="365760">
-                <a:tc>
-                  <a:txBody>
-                    <a:bodyPr/>
-                    <a:p>
-                      <a:pPr algn="ctr">
-                        <a:buNone/>
-                      </a:pPr>
-                      <a:r>
-                        <a:rPr lang="en-US" altLang="zh-CN" sz="1400">
-                          <a:latin typeface="Times New Roman" panose="02020603050405020304" charset="0"/>
-                          <a:cs typeface="Times New Roman" panose="02020603050405020304" charset="0"/>
-                        </a:rPr>
-                        <a:t>5</a:t>
-                      </a:r>
-                      <a:endParaRPr lang="en-US" altLang="zh-CN" sz="1400">
-                        <a:latin typeface="Times New Roman" panose="02020603050405020304" charset="0"/>
-                        <a:cs typeface="Times New Roman" panose="02020603050405020304" charset="0"/>
-                      </a:endParaRPr>
-                    </a:p>
-                  </a:txBody>
-                  <a:tcPr/>
-                </a:tc>
-                <a:tc>
-                  <a:txBody>
-                    <a:bodyPr/>
-                    <a:p>
-                      <a:pPr algn="ctr">
-                        <a:buNone/>
-                      </a:pPr>
-                      <a:r>
-                        <a:rPr lang="en-US" altLang="zh-CN" sz="1400">
-                          <a:solidFill>
-                            <a:schemeClr val="tx1"/>
-                          </a:solidFill>
-                          <a:latin typeface="Times New Roman" panose="02020603050405020304" charset="0"/>
-                          <a:cs typeface="Times New Roman" panose="02020603050405020304" charset="0"/>
-                        </a:rPr>
-                        <a:t>(5.33, 7.66)</a:t>
-                      </a:r>
-                      <a:endParaRPr lang="en-US" altLang="zh-CN" sz="1400">
-                        <a:solidFill>
-                          <a:schemeClr val="tx1"/>
-                        </a:solidFill>
-                        <a:latin typeface="Times New Roman" panose="02020603050405020304" charset="0"/>
-                        <a:cs typeface="Times New Roman" panose="02020603050405020304" charset="0"/>
-                      </a:endParaRPr>
-                    </a:p>
-                  </a:txBody>
-                  <a:tcPr/>
-                </a:tc>
-                <a:tc>
-                  <a:txBody>
-                    <a:bodyPr/>
-                    <a:p>
-                      <a:pPr algn="ctr">
-                        <a:buNone/>
-                      </a:pPr>
-                      <a:r>
-                        <a:rPr lang="en-US" altLang="zh-CN" sz="1400">
-                          <a:latin typeface="Times New Roman" panose="02020603050405020304" charset="0"/>
-                          <a:cs typeface="Times New Roman" panose="02020603050405020304" charset="0"/>
-                        </a:rPr>
-                        <a:t>(6.0, 8.0)</a:t>
-                      </a:r>
-                      <a:endParaRPr lang="en-US" altLang="zh-CN" sz="1400">
-                        <a:latin typeface="Times New Roman" panose="02020603050405020304" charset="0"/>
-                        <a:cs typeface="Times New Roman" panose="02020603050405020304" charset="0"/>
-                      </a:endParaRPr>
-                    </a:p>
-                  </a:txBody>
-                  <a:tcPr/>
-                </a:tc>
-                <a:tc>
-                  <a:txBody>
-                    <a:bodyPr/>
-                    <a:p>
-                      <a:pPr algn="ctr">
-                        <a:buNone/>
-                      </a:pPr>
-                      <a:r>
-                        <a:rPr lang="en-US" altLang="zh-CN" sz="1400">
-                          <a:latin typeface="Times New Roman" panose="02020603050405020304" charset="0"/>
-                          <a:cs typeface="Times New Roman" panose="02020603050405020304" charset="0"/>
-                        </a:rPr>
-                        <a:t>0.75</a:t>
-                      </a:r>
-                      <a:endParaRPr lang="en-US" altLang="zh-CN" sz="1400">
-                        <a:latin typeface="Times New Roman" panose="02020603050405020304" charset="0"/>
-                        <a:cs typeface="Times New Roman" panose="02020603050405020304" charset="0"/>
-                      </a:endParaRPr>
-                    </a:p>
-                  </a:txBody>
-                  <a:tcPr/>
-                </a:tc>
-              </a:tr>
-              <a:tr h="365760">
-                <a:tc>
-                  <a:txBody>
-                    <a:bodyPr/>
-                    <a:p>
-                      <a:pPr algn="ctr">
-                        <a:buNone/>
-                      </a:pPr>
-                      <a:r>
-                        <a:rPr lang="en-US" altLang="zh-CN" sz="1400">
-                          <a:latin typeface="Times New Roman" panose="02020603050405020304" charset="0"/>
-                          <a:cs typeface="Times New Roman" panose="02020603050405020304" charset="0"/>
-                        </a:rPr>
-                        <a:t>6</a:t>
-                      </a:r>
-                      <a:endParaRPr lang="en-US" altLang="zh-CN" sz="1400">
-                        <a:latin typeface="Times New Roman" panose="02020603050405020304" charset="0"/>
-                        <a:cs typeface="Times New Roman" panose="02020603050405020304" charset="0"/>
-                      </a:endParaRPr>
-                    </a:p>
-                  </a:txBody>
-                  <a:tcPr/>
-                </a:tc>
-                <a:tc>
-                  <a:txBody>
-                    <a:bodyPr/>
-                    <a:p>
-                      <a:pPr algn="ctr">
-                        <a:buNone/>
-                      </a:pPr>
-                      <a:r>
-                        <a:rPr lang="en-US" altLang="zh-CN" sz="1400">
-                          <a:latin typeface="Times New Roman" panose="02020603050405020304" charset="0"/>
-                          <a:cs typeface="Times New Roman" panose="02020603050405020304" charset="0"/>
-                        </a:rPr>
-                        <a:t>(8.28, 7.27)</a:t>
-                      </a:r>
-                      <a:endParaRPr lang="en-US" altLang="zh-CN" sz="1400">
-                        <a:latin typeface="Times New Roman" panose="02020603050405020304" charset="0"/>
-                        <a:cs typeface="Times New Roman" panose="02020603050405020304" charset="0"/>
-                      </a:endParaRPr>
-                    </a:p>
-                  </a:txBody>
-                  <a:tcPr/>
-                </a:tc>
-                <a:tc>
-                  <a:txBody>
-                    <a:bodyPr/>
-                    <a:p>
-                      <a:pPr algn="ctr">
-                        <a:buNone/>
-                      </a:pPr>
-                      <a:r>
-                        <a:rPr lang="en-US" altLang="zh-CN" sz="1400">
-                          <a:latin typeface="Times New Roman" panose="02020603050405020304" charset="0"/>
-                          <a:cs typeface="Times New Roman" panose="02020603050405020304" charset="0"/>
-                        </a:rPr>
-                        <a:t>(8.0, 7.5)</a:t>
-                      </a:r>
-                      <a:endParaRPr lang="en-US" altLang="zh-CN" sz="1400">
-                        <a:latin typeface="Times New Roman" panose="02020603050405020304" charset="0"/>
-                        <a:cs typeface="Times New Roman" panose="02020603050405020304" charset="0"/>
-                      </a:endParaRPr>
-                    </a:p>
-                  </a:txBody>
-                  <a:tcPr/>
-                </a:tc>
-                <a:tc>
-                  <a:txBody>
-                    <a:bodyPr/>
-                    <a:p>
-                      <a:pPr algn="ctr">
-                        <a:buNone/>
-                      </a:pPr>
-                      <a:r>
-                        <a:rPr lang="en-US" altLang="zh-CN" sz="1400">
-                          <a:latin typeface="Times New Roman" panose="02020603050405020304" charset="0"/>
-                          <a:cs typeface="Times New Roman" panose="02020603050405020304" charset="0"/>
-                        </a:rPr>
-                        <a:t>0.36</a:t>
-                      </a:r>
-                      <a:endParaRPr lang="en-US" altLang="zh-CN" sz="1400">
-                        <a:latin typeface="Times New Roman" panose="02020603050405020304" charset="0"/>
-                        <a:cs typeface="Times New Roman" panose="02020603050405020304" charset="0"/>
-                      </a:endParaRPr>
-                    </a:p>
-                  </a:txBody>
-                  <a:tcPr/>
-                </a:tc>
-              </a:tr>
-            </a:tbl>
-          </a:graphicData>
-        </a:graphic>
-      </p:graphicFrame>
-      <p:pic>
-        <p:nvPicPr>
-          <p:cNvPr id="34" name="图片 33" descr="localization_direct_20MHz"/>
-          <p:cNvPicPr>
-            <a:picLocks noChangeAspect="1"/>
-          </p:cNvPicPr>
-          <p:nvPr/>
-        </p:nvPicPr>
-        <p:blipFill>
-          <a:blip r:embed="rId2"/>
-          <a:stretch>
-            <a:fillRect/>
-          </a:stretch>
-        </p:blipFill>
-        <p:spPr>
-          <a:xfrm>
-            <a:off x="695960" y="3392170"/>
-            <a:ext cx="3471545" cy="3086100"/>
-          </a:xfrm>
-          <a:prstGeom prst="rect">
-            <a:avLst/>
-          </a:prstGeom>
-        </p:spPr>
-      </p:pic>
-      <p:graphicFrame>
-        <p:nvGraphicFramePr>
-          <p:cNvPr id="35" name="表格 34"/>
-          <p:cNvGraphicFramePr/>
-          <p:nvPr/>
-        </p:nvGraphicFramePr>
-        <p:xfrm>
-          <a:off x="4728845" y="3649980"/>
-          <a:ext cx="4480560" cy="2517775"/>
-        </p:xfrm>
-        <a:graphic>
-          <a:graphicData uri="http://schemas.openxmlformats.org/drawingml/2006/table">
-            <a:tbl>
-              <a:tblPr firstRow="1" bandRow="1">
-                <a:tableStyleId>{5C22544A-7EE6-4342-B048-85BDC9FD1C3A}</a:tableStyleId>
-              </a:tblPr>
-              <a:tblGrid>
-                <a:gridCol w="954405"/>
-                <a:gridCol w="1128395"/>
-                <a:gridCol w="1226185"/>
-                <a:gridCol w="1171575"/>
-              </a:tblGrid>
-              <a:tr h="323215">
-                <a:tc>
-                  <a:txBody>
-                    <a:bodyPr/>
-                    <a:p>
-                      <a:pPr algn="ctr">
-                        <a:buNone/>
-                      </a:pPr>
-                      <a:r>
-                        <a:rPr lang="en-US" altLang="zh-CN" sz="1200">
-                          <a:latin typeface="Times New Roman" panose="02020603050405020304" charset="0"/>
-                          <a:cs typeface="Times New Roman" panose="02020603050405020304" charset="0"/>
-                        </a:rPr>
-                        <a:t> Node</a:t>
-                      </a:r>
-                      <a:endParaRPr lang="en-US" altLang="zh-CN" sz="1200">
-                        <a:latin typeface="Times New Roman" panose="02020603050405020304" charset="0"/>
-                        <a:cs typeface="Times New Roman" panose="02020603050405020304" charset="0"/>
-                      </a:endParaRPr>
-                    </a:p>
-                  </a:txBody>
-                  <a:tcPr/>
-                </a:tc>
-                <a:tc>
-                  <a:txBody>
-                    <a:bodyPr/>
-                    <a:p>
-                      <a:pPr algn="ctr">
-                        <a:buNone/>
-                      </a:pPr>
-                      <a:r>
-                        <a:rPr lang="en-US" altLang="zh-CN" sz="1400">
-                          <a:latin typeface="Times New Roman" panose="02020603050405020304" charset="0"/>
-                          <a:cs typeface="Times New Roman" panose="02020603050405020304" charset="0"/>
-                        </a:rPr>
-                        <a:t>est_location</a:t>
-                      </a:r>
-                      <a:endParaRPr lang="en-US" altLang="zh-CN" sz="1400">
-                        <a:latin typeface="Times New Roman" panose="02020603050405020304" charset="0"/>
-                        <a:cs typeface="Times New Roman" panose="02020603050405020304" charset="0"/>
-                      </a:endParaRPr>
-                    </a:p>
-                  </a:txBody>
-                  <a:tcPr/>
-                </a:tc>
-                <a:tc>
-                  <a:txBody>
-                    <a:bodyPr/>
-                    <a:p>
-                      <a:pPr algn="ctr">
-                        <a:buNone/>
-                      </a:pPr>
-                      <a:r>
-                        <a:rPr lang="en-US" altLang="zh-CN" sz="1400">
-                          <a:latin typeface="Times New Roman" panose="02020603050405020304" charset="0"/>
-                          <a:cs typeface="Times New Roman" panose="02020603050405020304" charset="0"/>
-                        </a:rPr>
-                        <a:t>true_location</a:t>
-                      </a:r>
-                      <a:endParaRPr lang="en-US" altLang="zh-CN" sz="1400">
-                        <a:latin typeface="Times New Roman" panose="02020603050405020304" charset="0"/>
-                        <a:cs typeface="Times New Roman" panose="02020603050405020304" charset="0"/>
-                      </a:endParaRPr>
-                    </a:p>
-                  </a:txBody>
-                  <a:tcPr/>
-                </a:tc>
-                <a:tc>
-                  <a:txBody>
-                    <a:bodyPr/>
-                    <a:p>
-                      <a:pPr algn="ctr">
-                        <a:buNone/>
-                      </a:pPr>
-                      <a:r>
-                        <a:rPr lang="en-US" altLang="zh-CN" sz="1400">
-                          <a:latin typeface="Times New Roman" panose="02020603050405020304" charset="0"/>
-                          <a:cs typeface="Times New Roman" panose="02020603050405020304" charset="0"/>
-                        </a:rPr>
-                        <a:t>error</a:t>
-                      </a:r>
-                      <a:endParaRPr lang="en-US" altLang="zh-CN" sz="1400">
-                        <a:latin typeface="Times New Roman" panose="02020603050405020304" charset="0"/>
-                        <a:cs typeface="Times New Roman" panose="02020603050405020304" charset="0"/>
-                      </a:endParaRPr>
-                    </a:p>
-                  </a:txBody>
-                  <a:tcPr/>
-                </a:tc>
-              </a:tr>
-              <a:tr h="365760">
-                <a:tc>
-                  <a:txBody>
-                    <a:bodyPr/>
-                    <a:p>
-                      <a:pPr algn="ctr">
-                        <a:buNone/>
-                      </a:pPr>
-                      <a:r>
-                        <a:rPr lang="en-US" altLang="zh-CN" sz="1400">
-                          <a:latin typeface="Times New Roman" panose="02020603050405020304" charset="0"/>
-                          <a:cs typeface="Times New Roman" panose="02020603050405020304" charset="0"/>
-                        </a:rPr>
-                        <a:t>1</a:t>
-                      </a:r>
-                      <a:endParaRPr lang="en-US" altLang="zh-CN" sz="1400">
-                        <a:latin typeface="Times New Roman" panose="02020603050405020304" charset="0"/>
-                        <a:cs typeface="Times New Roman" panose="02020603050405020304" charset="0"/>
-                      </a:endParaRPr>
-                    </a:p>
-                  </a:txBody>
-                  <a:tcPr/>
-                </a:tc>
-                <a:tc>
-                  <a:txBody>
-                    <a:bodyPr/>
-                    <a:p>
-                      <a:pPr algn="ctr">
-                        <a:buNone/>
-                      </a:pPr>
-                      <a:r>
-                        <a:rPr lang="en-US" altLang="zh-CN" sz="1400">
-                          <a:latin typeface="Times New Roman" panose="02020603050405020304" charset="0"/>
-                          <a:cs typeface="Times New Roman" panose="02020603050405020304" charset="0"/>
-                        </a:rPr>
-                        <a:t>(2.75, 2.96)</a:t>
-                      </a:r>
-                      <a:endParaRPr lang="en-US" altLang="zh-CN" sz="1400">
-                        <a:latin typeface="Times New Roman" panose="02020603050405020304" charset="0"/>
-                        <a:cs typeface="Times New Roman" panose="02020603050405020304" charset="0"/>
-                      </a:endParaRPr>
-                    </a:p>
-                  </a:txBody>
-                  <a:tcPr/>
-                </a:tc>
-                <a:tc>
-                  <a:txBody>
-                    <a:bodyPr/>
-                    <a:p>
-                      <a:pPr algn="ctr">
-                        <a:buNone/>
-                      </a:pPr>
-                      <a:r>
-                        <a:rPr lang="en-US" altLang="zh-CN" sz="1400">
-                          <a:latin typeface="Times New Roman" panose="02020603050405020304" charset="0"/>
-                          <a:cs typeface="Times New Roman" panose="02020603050405020304" charset="0"/>
-                        </a:rPr>
-                        <a:t>(3.00, 3.00)</a:t>
-                      </a:r>
-                      <a:endParaRPr lang="en-US" altLang="zh-CN" sz="1400">
-                        <a:latin typeface="Times New Roman" panose="02020603050405020304" charset="0"/>
-                        <a:cs typeface="Times New Roman" panose="02020603050405020304" charset="0"/>
-                      </a:endParaRPr>
-                    </a:p>
-                  </a:txBody>
-                  <a:tcPr/>
-                </a:tc>
-                <a:tc>
-                  <a:txBody>
-                    <a:bodyPr/>
-                    <a:p>
-                      <a:pPr algn="ctr">
-                        <a:buNone/>
-                      </a:pPr>
-                      <a:r>
-                        <a:rPr lang="en-US" altLang="zh-CN" sz="1400">
-                          <a:latin typeface="Times New Roman" panose="02020603050405020304" charset="0"/>
-                          <a:cs typeface="Times New Roman" panose="02020603050405020304" charset="0"/>
-                        </a:rPr>
-                        <a:t>0.26</a:t>
-                      </a:r>
-                      <a:endParaRPr lang="en-US" altLang="zh-CN" sz="1400">
-                        <a:latin typeface="Times New Roman" panose="02020603050405020304" charset="0"/>
-                        <a:cs typeface="Times New Roman" panose="02020603050405020304" charset="0"/>
-                      </a:endParaRPr>
-                    </a:p>
-                  </a:txBody>
-                  <a:tcPr/>
-                </a:tc>
-              </a:tr>
-              <a:tr h="365760">
-                <a:tc>
-                  <a:txBody>
-                    <a:bodyPr/>
-                    <a:p>
-                      <a:pPr algn="ctr">
-                        <a:buNone/>
-                      </a:pPr>
-                      <a:r>
-                        <a:rPr lang="en-US" altLang="zh-CN" sz="1400">
-                          <a:latin typeface="Times New Roman" panose="02020603050405020304" charset="0"/>
-                          <a:cs typeface="Times New Roman" panose="02020603050405020304" charset="0"/>
-                        </a:rPr>
-                        <a:t>2</a:t>
-                      </a:r>
-                      <a:endParaRPr lang="en-US" altLang="zh-CN" sz="1400">
-                        <a:latin typeface="Times New Roman" panose="02020603050405020304" charset="0"/>
-                        <a:cs typeface="Times New Roman" panose="02020603050405020304" charset="0"/>
-                      </a:endParaRPr>
-                    </a:p>
-                  </a:txBody>
-                  <a:tcPr/>
-                </a:tc>
-                <a:tc>
-                  <a:txBody>
-                    <a:bodyPr/>
-                    <a:p>
-                      <a:pPr algn="ctr">
-                        <a:buNone/>
-                      </a:pPr>
-                      <a:r>
-                        <a:rPr lang="en-US" altLang="zh-CN" sz="1400">
-                          <a:latin typeface="Times New Roman" panose="02020603050405020304" charset="0"/>
-                          <a:cs typeface="Times New Roman" panose="02020603050405020304" charset="0"/>
-                        </a:rPr>
-                        <a:t>(1.91, 0.33)</a:t>
-                      </a:r>
-                      <a:endParaRPr lang="en-US" altLang="zh-CN" sz="1400">
-                        <a:latin typeface="Times New Roman" panose="02020603050405020304" charset="0"/>
-                        <a:cs typeface="Times New Roman" panose="02020603050405020304" charset="0"/>
-                      </a:endParaRPr>
-                    </a:p>
-                  </a:txBody>
-                  <a:tcPr/>
-                </a:tc>
-                <a:tc>
-                  <a:txBody>
-                    <a:bodyPr/>
-                    <a:p>
-                      <a:pPr algn="ctr">
-                        <a:buNone/>
-                      </a:pPr>
-                      <a:r>
-                        <a:rPr lang="en-US" altLang="zh-CN" sz="1400">
-                          <a:latin typeface="Times New Roman" panose="02020603050405020304" charset="0"/>
-                          <a:cs typeface="Times New Roman" panose="02020603050405020304" charset="0"/>
-                        </a:rPr>
-                        <a:t>(2.00, 0.00)</a:t>
-                      </a:r>
-                      <a:endParaRPr lang="en-US" altLang="zh-CN" sz="1400">
-                        <a:latin typeface="Times New Roman" panose="02020603050405020304" charset="0"/>
-                        <a:cs typeface="Times New Roman" panose="02020603050405020304" charset="0"/>
-                      </a:endParaRPr>
-                    </a:p>
-                  </a:txBody>
-                  <a:tcPr/>
-                </a:tc>
-                <a:tc>
-                  <a:txBody>
-                    <a:bodyPr/>
-                    <a:p>
-                      <a:pPr algn="ctr">
-                        <a:buNone/>
-                      </a:pPr>
-                      <a:r>
-                        <a:rPr lang="en-US" altLang="zh-CN" sz="1400">
-                          <a:latin typeface="Times New Roman" panose="02020603050405020304" charset="0"/>
-                          <a:cs typeface="Times New Roman" panose="02020603050405020304" charset="0"/>
-                        </a:rPr>
-                        <a:t>0.34</a:t>
-                      </a:r>
-                      <a:endParaRPr lang="en-US" altLang="zh-CN" sz="1400">
-                        <a:latin typeface="Times New Roman" panose="02020603050405020304" charset="0"/>
-                        <a:cs typeface="Times New Roman" panose="02020603050405020304" charset="0"/>
-                      </a:endParaRPr>
-                    </a:p>
-                  </a:txBody>
-                  <a:tcPr/>
-                </a:tc>
-              </a:tr>
-              <a:tr h="365760">
-                <a:tc>
-                  <a:txBody>
-                    <a:bodyPr/>
-                    <a:p>
-                      <a:pPr algn="ctr">
-                        <a:buNone/>
-                      </a:pPr>
-                      <a:r>
-                        <a:rPr lang="en-US" altLang="zh-CN" sz="1400">
-                          <a:latin typeface="Times New Roman" panose="02020603050405020304" charset="0"/>
-                          <a:cs typeface="Times New Roman" panose="02020603050405020304" charset="0"/>
-                        </a:rPr>
-                        <a:t>3</a:t>
-                      </a:r>
-                      <a:endParaRPr lang="en-US" altLang="zh-CN" sz="1400">
-                        <a:latin typeface="Times New Roman" panose="02020603050405020304" charset="0"/>
-                        <a:cs typeface="Times New Roman" panose="02020603050405020304" charset="0"/>
-                      </a:endParaRPr>
-                    </a:p>
-                  </a:txBody>
-                  <a:tcPr/>
-                </a:tc>
-                <a:tc>
-                  <a:txBody>
-                    <a:bodyPr/>
-                    <a:p>
-                      <a:pPr algn="ctr">
-                        <a:buNone/>
-                      </a:pPr>
-                      <a:r>
-                        <a:rPr lang="en-US" altLang="zh-CN" sz="1400">
-                          <a:latin typeface="Times New Roman" panose="02020603050405020304" charset="0"/>
-                          <a:cs typeface="Times New Roman" panose="02020603050405020304" charset="0"/>
-                        </a:rPr>
-                        <a:t>(7.30, 3.79)</a:t>
-                      </a:r>
-                      <a:endParaRPr lang="en-US" altLang="zh-CN" sz="1400">
-                        <a:latin typeface="Times New Roman" panose="02020603050405020304" charset="0"/>
-                        <a:cs typeface="Times New Roman" panose="02020603050405020304" charset="0"/>
-                      </a:endParaRPr>
-                    </a:p>
-                  </a:txBody>
-                  <a:tcPr/>
-                </a:tc>
-                <a:tc>
-                  <a:txBody>
-                    <a:bodyPr/>
-                    <a:p>
-                      <a:pPr algn="ctr">
-                        <a:buNone/>
-                      </a:pPr>
-                      <a:r>
-                        <a:rPr lang="en-US" altLang="zh-CN" sz="1400">
-                          <a:latin typeface="Times New Roman" panose="02020603050405020304" charset="0"/>
-                          <a:cs typeface="Times New Roman" panose="02020603050405020304" charset="0"/>
-                        </a:rPr>
-                        <a:t>(7.00, 4.00)</a:t>
-                      </a:r>
-                      <a:endParaRPr lang="en-US" altLang="zh-CN" sz="1400">
-                        <a:latin typeface="Times New Roman" panose="02020603050405020304" charset="0"/>
-                        <a:cs typeface="Times New Roman" panose="02020603050405020304" charset="0"/>
-                      </a:endParaRPr>
-                    </a:p>
-                  </a:txBody>
-                  <a:tcPr/>
-                </a:tc>
-                <a:tc>
-                  <a:txBody>
-                    <a:bodyPr/>
-                    <a:p>
-                      <a:pPr algn="ctr">
-                        <a:buNone/>
-                      </a:pPr>
-                      <a:r>
-                        <a:rPr lang="en-US" altLang="zh-CN" sz="1400">
-                          <a:latin typeface="Times New Roman" panose="02020603050405020304" charset="0"/>
-                          <a:cs typeface="Times New Roman" panose="02020603050405020304" charset="0"/>
-                        </a:rPr>
-                        <a:t>0.36</a:t>
-                      </a:r>
-                      <a:endParaRPr lang="en-US" altLang="zh-CN" sz="1400">
-                        <a:latin typeface="Times New Roman" panose="02020603050405020304" charset="0"/>
-                        <a:cs typeface="Times New Roman" panose="02020603050405020304" charset="0"/>
-                      </a:endParaRPr>
-                    </a:p>
-                  </a:txBody>
-                  <a:tcPr/>
-                </a:tc>
-              </a:tr>
-              <a:tr h="365760">
-                <a:tc>
-                  <a:txBody>
-                    <a:bodyPr/>
-                    <a:p>
-                      <a:pPr algn="ctr">
-                        <a:buNone/>
-                      </a:pPr>
-                      <a:r>
-                        <a:rPr lang="en-US" altLang="zh-CN" sz="1400">
-                          <a:latin typeface="Times New Roman" panose="02020603050405020304" charset="0"/>
-                          <a:cs typeface="Times New Roman" panose="02020603050405020304" charset="0"/>
-                        </a:rPr>
-                        <a:t>4</a:t>
-                      </a:r>
-                      <a:endParaRPr lang="en-US" altLang="zh-CN" sz="1400">
-                        <a:latin typeface="Times New Roman" panose="02020603050405020304" charset="0"/>
-                        <a:cs typeface="Times New Roman" panose="02020603050405020304" charset="0"/>
-                      </a:endParaRPr>
-                    </a:p>
-                  </a:txBody>
-                  <a:tcPr/>
-                </a:tc>
-                <a:tc>
-                  <a:txBody>
-                    <a:bodyPr/>
-                    <a:p>
-                      <a:pPr algn="ctr">
-                        <a:buNone/>
-                      </a:pPr>
-                      <a:r>
-                        <a:rPr lang="en-US" altLang="zh-CN" sz="1400">
-                          <a:latin typeface="Times New Roman" panose="02020603050405020304" charset="0"/>
-                          <a:cs typeface="Times New Roman" panose="02020603050405020304" charset="0"/>
-                        </a:rPr>
-                        <a:t>(-1.00, 0.85)</a:t>
-                      </a:r>
-                      <a:endParaRPr lang="en-US" altLang="zh-CN" sz="1400">
-                        <a:latin typeface="Times New Roman" panose="02020603050405020304" charset="0"/>
-                        <a:cs typeface="Times New Roman" panose="02020603050405020304" charset="0"/>
-                      </a:endParaRPr>
-                    </a:p>
-                  </a:txBody>
-                  <a:tcPr/>
-                </a:tc>
-                <a:tc>
-                  <a:txBody>
-                    <a:bodyPr/>
-                    <a:p>
-                      <a:pPr algn="ctr">
-                        <a:buNone/>
-                      </a:pPr>
-                      <a:r>
-                        <a:rPr lang="en-US" altLang="zh-CN" sz="1400">
-                          <a:latin typeface="Times New Roman" panose="02020603050405020304" charset="0"/>
-                          <a:cs typeface="Times New Roman" panose="02020603050405020304" charset="0"/>
-                        </a:rPr>
-                        <a:t>(2.50, 7.00)</a:t>
-                      </a:r>
-                      <a:endParaRPr lang="en-US" altLang="zh-CN" sz="1400">
-                        <a:latin typeface="Times New Roman" panose="02020603050405020304" charset="0"/>
-                        <a:cs typeface="Times New Roman" panose="02020603050405020304" charset="0"/>
-                      </a:endParaRPr>
-                    </a:p>
-                  </a:txBody>
-                  <a:tcPr/>
-                </a:tc>
-                <a:tc>
-                  <a:txBody>
-                    <a:bodyPr/>
-                    <a:p>
-                      <a:pPr algn="ctr">
-                        <a:buNone/>
-                      </a:pPr>
-                      <a:r>
-                        <a:rPr lang="en-US" altLang="zh-CN" sz="1400">
-                          <a:latin typeface="Times New Roman" panose="02020603050405020304" charset="0"/>
-                          <a:cs typeface="Times New Roman" panose="02020603050405020304" charset="0"/>
-                        </a:rPr>
-                        <a:t>0.71</a:t>
-                      </a:r>
-                      <a:endParaRPr lang="en-US" altLang="zh-CN" sz="1400">
-                        <a:latin typeface="Times New Roman" panose="02020603050405020304" charset="0"/>
-                        <a:cs typeface="Times New Roman" panose="02020603050405020304" charset="0"/>
-                      </a:endParaRPr>
-                    </a:p>
-                  </a:txBody>
-                  <a:tcPr/>
-                </a:tc>
-              </a:tr>
-              <a:tr h="365760">
-                <a:tc>
-                  <a:txBody>
-                    <a:bodyPr/>
-                    <a:p>
-                      <a:pPr algn="ctr">
-                        <a:buNone/>
-                      </a:pPr>
-                      <a:r>
-                        <a:rPr lang="en-US" altLang="zh-CN" sz="1400">
-                          <a:latin typeface="Times New Roman" panose="02020603050405020304" charset="0"/>
-                          <a:cs typeface="Times New Roman" panose="02020603050405020304" charset="0"/>
-                        </a:rPr>
-                        <a:t>5</a:t>
-                      </a:r>
-                      <a:endParaRPr lang="en-US" altLang="zh-CN" sz="1400">
-                        <a:latin typeface="Times New Roman" panose="02020603050405020304" charset="0"/>
-                        <a:cs typeface="Times New Roman" panose="02020603050405020304" charset="0"/>
-                      </a:endParaRPr>
-                    </a:p>
-                  </a:txBody>
-                  <a:tcPr/>
-                </a:tc>
-                <a:tc>
-                  <a:txBody>
-                    <a:bodyPr/>
-                    <a:p>
-                      <a:pPr algn="ctr">
-                        <a:buNone/>
-                      </a:pPr>
-                      <a:r>
-                        <a:rPr lang="en-US" altLang="zh-CN" sz="1400">
-                          <a:latin typeface="Times New Roman" panose="02020603050405020304" charset="0"/>
-                          <a:cs typeface="Times New Roman" panose="02020603050405020304" charset="0"/>
-                        </a:rPr>
-                        <a:t>(2.17, 6.02)</a:t>
-                      </a:r>
-                      <a:endParaRPr lang="en-US" altLang="zh-CN" sz="1400">
-                        <a:latin typeface="Times New Roman" panose="02020603050405020304" charset="0"/>
-                        <a:cs typeface="Times New Roman" panose="02020603050405020304" charset="0"/>
-                      </a:endParaRPr>
-                    </a:p>
-                  </a:txBody>
-                  <a:tcPr/>
-                </a:tc>
-                <a:tc>
-                  <a:txBody>
-                    <a:bodyPr/>
-                    <a:p>
-                      <a:pPr algn="ctr">
-                        <a:buNone/>
-                      </a:pPr>
-                      <a:r>
-                        <a:rPr lang="en-US" altLang="zh-CN" sz="1400">
-                          <a:latin typeface="Times New Roman" panose="02020603050405020304" charset="0"/>
-                          <a:cs typeface="Times New Roman" panose="02020603050405020304" charset="0"/>
-                        </a:rPr>
-                        <a:t>(6.00, 8.00)</a:t>
-                      </a:r>
-                      <a:endParaRPr lang="en-US" altLang="zh-CN" sz="1400">
-                        <a:latin typeface="Times New Roman" panose="02020603050405020304" charset="0"/>
-                        <a:cs typeface="Times New Roman" panose="02020603050405020304" charset="0"/>
-                      </a:endParaRPr>
-                    </a:p>
-                  </a:txBody>
-                  <a:tcPr/>
-                </a:tc>
-                <a:tc>
-                  <a:txBody>
-                    <a:bodyPr/>
-                    <a:p>
-                      <a:pPr algn="ctr">
-                        <a:buNone/>
-                      </a:pPr>
-                      <a:r>
-                        <a:rPr lang="en-US" altLang="zh-CN" sz="1400">
-                          <a:latin typeface="Times New Roman" panose="02020603050405020304" charset="0"/>
-                          <a:cs typeface="Times New Roman" panose="02020603050405020304" charset="0"/>
-                        </a:rPr>
-                        <a:t>4.3</a:t>
-                      </a:r>
-                      <a:endParaRPr lang="en-US" altLang="zh-CN" sz="1400">
-                        <a:latin typeface="Times New Roman" panose="02020603050405020304" charset="0"/>
-                        <a:cs typeface="Times New Roman" panose="02020603050405020304" charset="0"/>
-                      </a:endParaRPr>
-                    </a:p>
-                  </a:txBody>
-                  <a:tcPr/>
-                </a:tc>
-              </a:tr>
-              <a:tr h="365760">
-                <a:tc>
-                  <a:txBody>
-                    <a:bodyPr/>
-                    <a:p>
-                      <a:pPr algn="ctr">
-                        <a:buNone/>
-                      </a:pPr>
-                      <a:r>
-                        <a:rPr lang="en-US" altLang="zh-CN" sz="1400">
-                          <a:latin typeface="Times New Roman" panose="02020603050405020304" charset="0"/>
-                          <a:cs typeface="Times New Roman" panose="02020603050405020304" charset="0"/>
-                        </a:rPr>
-                        <a:t>6</a:t>
-                      </a:r>
-                      <a:endParaRPr lang="en-US" altLang="zh-CN" sz="1400">
-                        <a:latin typeface="Times New Roman" panose="02020603050405020304" charset="0"/>
-                        <a:cs typeface="Times New Roman" panose="02020603050405020304" charset="0"/>
-                      </a:endParaRPr>
-                    </a:p>
-                  </a:txBody>
-                  <a:tcPr/>
-                </a:tc>
-                <a:tc>
-                  <a:txBody>
-                    <a:bodyPr/>
-                    <a:p>
-                      <a:pPr algn="ctr">
-                        <a:buNone/>
-                      </a:pPr>
-                      <a:r>
-                        <a:rPr lang="en-US" altLang="zh-CN" sz="1400">
-                          <a:latin typeface="Times New Roman" panose="02020603050405020304" charset="0"/>
-                          <a:cs typeface="Times New Roman" panose="02020603050405020304" charset="0"/>
-                        </a:rPr>
-                        <a:t>(3.62, 6.35)</a:t>
-                      </a:r>
-                      <a:endParaRPr lang="en-US" altLang="zh-CN" sz="1400">
-                        <a:latin typeface="Times New Roman" panose="02020603050405020304" charset="0"/>
-                        <a:cs typeface="Times New Roman" panose="02020603050405020304" charset="0"/>
-                      </a:endParaRPr>
-                    </a:p>
-                  </a:txBody>
-                  <a:tcPr/>
-                </a:tc>
-                <a:tc>
-                  <a:txBody>
-                    <a:bodyPr/>
-                    <a:p>
-                      <a:pPr algn="ctr">
-                        <a:buNone/>
-                      </a:pPr>
-                      <a:r>
-                        <a:rPr lang="en-US" altLang="zh-CN" sz="1400">
-                          <a:latin typeface="Times New Roman" panose="02020603050405020304" charset="0"/>
-                          <a:cs typeface="Times New Roman" panose="02020603050405020304" charset="0"/>
-                        </a:rPr>
-                        <a:t>(8.00, 7.50)</a:t>
-                      </a:r>
-                      <a:endParaRPr lang="en-US" altLang="zh-CN" sz="1400">
-                        <a:latin typeface="Times New Roman" panose="02020603050405020304" charset="0"/>
-                        <a:cs typeface="Times New Roman" panose="02020603050405020304" charset="0"/>
-                      </a:endParaRPr>
-                    </a:p>
-                  </a:txBody>
-                  <a:tcPr/>
-                </a:tc>
-                <a:tc>
-                  <a:txBody>
-                    <a:bodyPr/>
-                    <a:p>
-                      <a:pPr algn="ctr">
-                        <a:buNone/>
-                      </a:pPr>
-                      <a:r>
-                        <a:rPr lang="en-US" altLang="zh-CN" sz="1400">
-                          <a:latin typeface="Times New Roman" panose="02020603050405020304" charset="0"/>
-                          <a:cs typeface="Times New Roman" panose="02020603050405020304" charset="0"/>
-                        </a:rPr>
-                        <a:t>4.5</a:t>
-                      </a:r>
-                      <a:endParaRPr lang="en-US" altLang="zh-CN" sz="1400">
-                        <a:latin typeface="Times New Roman" panose="02020603050405020304" charset="0"/>
-                        <a:cs typeface="Times New Roman" panose="02020603050405020304" charset="0"/>
-                      </a:endParaRPr>
-                    </a:p>
-                  </a:txBody>
-                  <a:tcPr/>
-                </a:tc>
-              </a:tr>
-            </a:tbl>
-          </a:graphicData>
-        </a:graphic>
-      </p:graphicFrame>
-      <p:sp>
-        <p:nvSpPr>
-          <p:cNvPr id="36" name="文本框 35"/>
-          <p:cNvSpPr txBox="1"/>
-          <p:nvPr/>
-        </p:nvSpPr>
-        <p:spPr>
-          <a:xfrm>
-            <a:off x="9359265" y="5645785"/>
-            <a:ext cx="2622550" cy="521970"/>
-          </a:xfrm>
-          <a:prstGeom prst="rect">
-            <a:avLst/>
-          </a:prstGeom>
-        </p:spPr>
-        <p:txBody>
-          <a:bodyPr wrap="square">
-            <a:spAutoFit/>
-            <a:extLst>
-              <a:ext uri="{4A0BC546-FE56-4ADE-93B0-CB8AF2F6F144}">
-                <wpsdc:textFrameExt xmlns:wpsdc="http://www.wps.cn/officeDocument/2022/drawingmlCustomData" type="text"/>
-              </a:ext>
-            </a:extLst>
-          </a:bodyPr>
-          <a:p>
-            <a:pPr algn="l"/>
-            <a:r>
-              <a:rPr lang="en-US" altLang="zh-CN" sz="1400" b="1">
-                <a:latin typeface="Times New Roman" panose="02020603050405020304" charset="0"/>
-                <a:ea typeface="微软雅黑" panose="020B0503020204020204" charset="-122"/>
-                <a:cs typeface="Times New Roman" panose="02020603050405020304" charset="0"/>
+              <a:t>3.17</a:t>
+            </a:r>
+            <a:r>
+              <a:rPr lang="en-US" altLang="zh-CN">
+                <a:solidFill>
+                  <a:schemeClr val="accent6">
+                    <a:lumMod val="60000"/>
+                    <a:lumOff val="40000"/>
+                  </a:schemeClr>
+                </a:solidFill>
               </a:rPr>
-              <a:t>Without multi-hop mechnisim:</a:t>
-            </a:r>
-            <a:endParaRPr lang="en-US" altLang="zh-CN" sz="1400">
-              <a:latin typeface="Times New Roman" panose="02020603050405020304" charset="0"/>
-              <a:ea typeface="微软雅黑" panose="020B0503020204020204" charset="-122"/>
-              <a:cs typeface="Times New Roman" panose="02020603050405020304" charset="0"/>
-            </a:endParaRPr>
-          </a:p>
-          <a:p>
-            <a:pPr marL="285750" indent="-285750" algn="l">
-              <a:buFont typeface="Wingdings" panose="05000000000000000000" charset="0"/>
-              <a:buChar char="Ø"/>
-            </a:pPr>
-            <a:r>
-              <a:rPr lang="en-US" altLang="zh-CN" sz="1400">
-                <a:latin typeface="Times New Roman" panose="02020603050405020304" charset="0"/>
-                <a:ea typeface="微软雅黑" panose="020B0503020204020204" charset="-122"/>
-                <a:cs typeface="Times New Roman" panose="02020603050405020304" charset="0"/>
-              </a:rPr>
-              <a:t>Average error: 2.81</a:t>
-            </a:r>
-            <a:endParaRPr lang="en-US" altLang="zh-CN" sz="1400">
-              <a:latin typeface="Times New Roman" panose="02020603050405020304" charset="0"/>
-              <a:ea typeface="微软雅黑" panose="020B0503020204020204" charset="-122"/>
-              <a:cs typeface="Times New Roman" panose="02020603050405020304" charset="0"/>
-            </a:endParaRPr>
+              <a:t>  </a:t>
+            </a:r>
+            <a:r>
+              <a:rPr lang="en-US" altLang="zh-CN"/>
+              <a:t>   (26.90, 79.57)         3.13     +0.04</a:t>
+            </a:r>
+            <a:endParaRPr lang="en-US" altLang="zh-CN"/>
+          </a:p>
+          <a:p>
+            <a:r>
+              <a:rPr lang="en-US" altLang="zh-CN"/>
+              <a:t>  UE13     (55.0, 30.0)     (55.28, 29.91)         0.29     (55.04, 30.00)         0.04     +0.25</a:t>
+            </a:r>
+            <a:endParaRPr lang="en-US" altLang="zh-CN"/>
+          </a:p>
+          <a:p>
+            <a:r>
+              <a:rPr lang="en-US" altLang="zh-CN"/>
+              <a:t>  UE14     (45.0, 40.0)     (45.18, 40.31)         0.36     (45.00, 40.38)         0.38     -0.01</a:t>
+            </a:r>
+            <a:endParaRPr lang="en-US" altLang="zh-CN"/>
+          </a:p>
+          <a:p>
+            <a:r>
+              <a:rPr lang="en-US" altLang="zh-CN"/>
+              <a:t>  UE15     (62.0, 62.0)     (61.51, 61.69)         0.59     (61.79, 62.49)         0.53     +0.06</a:t>
+            </a:r>
+            <a:endParaRPr lang="en-US" altLang="zh-CN"/>
+          </a:p>
+          <a:p>
+            <a:r>
+              <a:rPr lang="en-US" altLang="zh-CN"/>
+              <a:t>  UE2       (65.0, 50.0)     (63.54, 50.17)         1.47     (64.62, 50.22)         0.44     +1.02</a:t>
+            </a:r>
+            <a:endParaRPr lang="en-US" altLang="zh-CN"/>
+          </a:p>
+          <a:p>
+            <a:r>
+              <a:rPr lang="en-US" altLang="zh-CN"/>
+              <a:t>  UE3       (80.0, 55.0)     (79.55, 54.99)         0.45     (80.18, 55.50)         0.53     -0.08</a:t>
+            </a:r>
+            <a:endParaRPr lang="en-US" altLang="zh-CN"/>
+          </a:p>
+          <a:p>
+            <a:r>
+              <a:rPr lang="en-US" altLang="zh-CN"/>
+              <a:t>  UE4       (90.0, 40.0)     (89.86, 39.52)         0.50     (90.63, 39.94)         0.63     -0.13</a:t>
+            </a:r>
+            <a:endParaRPr lang="en-US" altLang="zh-CN"/>
+          </a:p>
+          <a:p>
+            <a:r>
+              <a:rPr lang="en-US" altLang="zh-CN"/>
+              <a:t>  UE5       (35.0, 50.0)     (35.24, 49.75)         0.35     (35.39, 50.14)         0.41     -0.07</a:t>
+            </a:r>
+            <a:endParaRPr lang="en-US" altLang="zh-CN"/>
+          </a:p>
+          <a:p>
+            <a:r>
+              <a:rPr lang="en-US" altLang="zh-CN"/>
+              <a:t>  UE6       (25.0, 48.0)     (25.18, 47.26)         0.76     (25.07, 47.69)         0.32     +0.44</a:t>
+            </a:r>
+            <a:endParaRPr lang="en-US" altLang="zh-CN"/>
+          </a:p>
+          <a:p>
+            <a:r>
+              <a:rPr lang="en-US" altLang="zh-CN"/>
+              <a:t>  UE7       (20.0, 30.0)     (19.88, 28.71)         1.30     (20.08, 29.30)         0.70     +0.59</a:t>
+            </a:r>
+            <a:endParaRPr lang="en-US" altLang="zh-CN"/>
+          </a:p>
+          <a:p>
+            <a:r>
+              <a:rPr lang="en-US" altLang="zh-CN"/>
+              <a:t>  UE8       (50.0, 60.0)     (50.47, 60.21)         0.52     (50.04, 60.37)         0.37     +0.15</a:t>
+            </a:r>
+            <a:endParaRPr lang="en-US" altLang="zh-CN"/>
+          </a:p>
+          <a:p>
+            <a:r>
+              <a:rPr lang="en-US" altLang="zh-CN"/>
+              <a:t>  UE9       (70.0, 80.0)     (69.75, 79.66)         0.42     (69.93, 80.57)         0.58     -0.16</a:t>
+            </a:r>
+            <a:endParaRPr lang="en-US" altLang="zh-CN"/>
+          </a:p>
+          <a:p>
+            <a:r>
+              <a:rPr lang="en-US" altLang="zh-CN"/>
+              <a:t>  ──────────────────────────────────────────────────────────────────────────────────────────</a:t>
+            </a:r>
+            <a:endParaRPr lang="en-US" altLang="zh-CN"/>
+          </a:p>
+          <a:p>
+            <a:r>
+              <a:rPr lang="en-US" altLang="zh-CN"/>
+              <a:t>  MEAN                                           0.97                          0.83     +0.14</a:t>
+            </a:r>
+            <a:endParaRPr lang="en-US" altLang="zh-CN"/>
+          </a:p>
+          <a:p>
+            <a:r>
+              <a:rPr lang="en-US" altLang="zh-CN"/>
+              <a:t>  ──────────────────────────────────────────────────────────────────────────────────────────</a:t>
+            </a:r>
+            <a:endParaRPr lang="zh-CN" altLang="en-US"/>
           </a:p>
         </p:txBody>
       </p:sp>
@@ -18397,7 +23038,7 @@
         </p:nvSpPr>
         <p:spPr>
           <a:xfrm>
-            <a:off x="265430" y="0"/>
+            <a:off x="265430" y="-254000"/>
             <a:ext cx="10261600" cy="1082040"/>
           </a:xfrm>
           <a:prstGeom prst="rect">
@@ -18435,7 +23076,7 @@
                 <a:cs typeface="Times New Roman" panose="02020603050405020304" charset="0"/>
                 <a:sym typeface="+mn-ea"/>
               </a:rPr>
-              <a:t>Simulation</a:t>
+              <a:t>Simulation(DNN)</a:t>
             </a:r>
             <a:endParaRPr lang="en-US" altLang="zh-CN" sz="4000" dirty="0" err="1">
               <a:latin typeface="Times New Roman" panose="02020603050405020304" charset="0"/>
@@ -18446,30 +23087,6 @@
           </a:p>
         </p:txBody>
       </p:sp>
-      <p:pic>
-        <p:nvPicPr>
-          <p:cNvPr id="30" name="图片 29" descr="localization_20MHz"/>
-          <p:cNvPicPr>
-            <a:picLocks noChangeAspect="1"/>
-          </p:cNvPicPr>
-          <p:nvPr/>
-        </p:nvPicPr>
-        <p:blipFill>
-          <a:blip r:embed="rId1"/>
-          <a:stretch>
-            <a:fillRect/>
-          </a:stretch>
-        </p:blipFill>
-        <p:spPr>
-          <a:xfrm>
-            <a:off x="412750" y="-3810"/>
-            <a:ext cx="4182745" cy="3348355"/>
-          </a:xfrm>
-          <a:prstGeom prst="rect">
-            <a:avLst/>
-          </a:prstGeom>
-        </p:spPr>
-      </p:pic>
       <p:sp>
         <p:nvSpPr>
           <p:cNvPr id="31" name="文本框 30"/>
@@ -18502,7 +23119,23 @@
                 <a:ea typeface="微软雅黑" panose="020B0503020204020204" charset="-122"/>
                 <a:cs typeface="Times New Roman" panose="02020603050405020304" charset="0"/>
               </a:rPr>
-              <a:t>With multi-hop mechnisim(before optimization):</a:t>
+              <a:t>With multi-hop mechnisim(</a:t>
+            </a:r>
+            <a:endParaRPr lang="en-US" altLang="zh-CN" sz="1400" b="1">
+              <a:latin typeface="Times New Roman" panose="02020603050405020304" charset="0"/>
+              <a:ea typeface="微软雅黑" panose="020B0503020204020204" charset="-122"/>
+              <a:cs typeface="Times New Roman" panose="02020603050405020304" charset="0"/>
+            </a:endParaRPr>
+          </a:p>
+          <a:p>
+            <a:pPr algn="l"/>
+            <a:r>
+              <a:rPr lang="en-US" altLang="zh-CN" sz="1400" b="1">
+                <a:latin typeface="Times New Roman" panose="02020603050405020304" charset="0"/>
+                <a:ea typeface="微软雅黑" panose="020B0503020204020204" charset="-122"/>
+                <a:cs typeface="Times New Roman" panose="02020603050405020304" charset="0"/>
+              </a:rPr>
+              <a:t>before optimization):</a:t>
             </a:r>
             <a:endParaRPr lang="en-US" altLang="zh-CN" sz="1400">
               <a:latin typeface="Times New Roman" panose="02020603050405020304" charset="0"/>
@@ -18521,7 +23154,7 @@
                 <a:ea typeface="微软雅黑" panose="020B0503020204020204" charset="-122"/>
                 <a:cs typeface="Times New Roman" panose="02020603050405020304" charset="0"/>
               </a:rPr>
-              <a:t>Average error: 0.39</a:t>
+              <a:t>Average error: 0.40</a:t>
             </a:r>
             <a:endParaRPr lang="en-US" altLang="zh-CN" sz="1400">
               <a:latin typeface="Times New Roman" panose="02020603050405020304" charset="0"/>
@@ -18538,7 +23171,7 @@
           <p:nvPr/>
         </p:nvGraphicFramePr>
         <p:xfrm>
-          <a:off x="4728845" y="504825"/>
+          <a:off x="4728845" y="718820"/>
           <a:ext cx="4480560" cy="2517775"/>
         </p:xfrm>
         <a:graphic>
@@ -18678,7 +23311,7 @@
                           <a:latin typeface="Times New Roman" panose="02020603050405020304" charset="0"/>
                           <a:cs typeface="Times New Roman" panose="02020603050405020304" charset="0"/>
                         </a:rPr>
-                        <a:t>(2.75, 2.96)</a:t>
+                        <a:t>(2.70, 2.91)</a:t>
                       </a:r>
                       <a:endParaRPr lang="en-US" altLang="zh-CN" sz="1400">
                         <a:latin typeface="Times New Roman" panose="02020603050405020304" charset="0"/>
@@ -18722,7 +23355,7 @@
                           <a:latin typeface="Times New Roman" panose="02020603050405020304" charset="0"/>
                           <a:cs typeface="Times New Roman" panose="02020603050405020304" charset="0"/>
                         </a:rPr>
-                        <a:t>0.26</a:t>
+                        <a:t>0.31</a:t>
                       </a:r>
                       <a:endParaRPr lang="en-US" altLang="zh-CN" sz="1400">
                         <a:latin typeface="Times New Roman" panose="02020603050405020304" charset="0"/>
@@ -18989,121 +23622,13 @@
                       </a:pPr>
                       <a:r>
                         <a:rPr lang="en-US" altLang="zh-CN" sz="1400">
-                          <a:latin typeface="Times New Roman" panose="02020603050405020304" charset="0"/>
-                          <a:cs typeface="Times New Roman" panose="02020603050405020304" charset="0"/>
-                        </a:rPr>
-                        <a:t>0.25</a:t>
-                      </a:r>
-                      <a:endParaRPr lang="en-US" altLang="zh-CN" sz="1400">
-                        <a:latin typeface="Times New Roman" panose="02020603050405020304" charset="0"/>
-                        <a:cs typeface="Times New Roman" panose="02020603050405020304" charset="0"/>
-                      </a:endParaRPr>
-                    </a:p>
-                  </a:txBody>
-                  <a:tcPr/>
-                </a:tc>
-              </a:tr>
-              <a:tr h="365760">
-                <a:tc>
-                  <a:txBody>
-                    <a:bodyPr/>
-                    <a:p>
-                      <a:pPr algn="ctr">
-                        <a:buNone/>
-                      </a:pPr>
-                      <a:r>
-                        <a:rPr lang="en-US" altLang="zh-CN" sz="1400">
                           <a:solidFill>
                             <a:srgbClr val="C00000"/>
                           </a:solidFill>
                           <a:latin typeface="Times New Roman" panose="02020603050405020304" charset="0"/>
                           <a:cs typeface="Times New Roman" panose="02020603050405020304" charset="0"/>
                         </a:rPr>
-                        <a:t>5</a:t>
-                      </a:r>
-                      <a:endParaRPr lang="en-US" altLang="zh-CN" sz="1400">
-                        <a:solidFill>
-                          <a:srgbClr val="C00000"/>
-                        </a:solidFill>
-                        <a:latin typeface="Times New Roman" panose="02020603050405020304" charset="0"/>
-                        <a:cs typeface="Times New Roman" panose="02020603050405020304" charset="0"/>
-                      </a:endParaRPr>
-                    </a:p>
-                  </a:txBody>
-                  <a:tcPr/>
-                </a:tc>
-                <a:tc>
-                  <a:txBody>
-                    <a:bodyPr/>
-                    <a:p>
-                      <a:pPr algn="ctr">
-                        <a:buNone/>
-                      </a:pPr>
-                      <a:r>
-                        <a:rPr lang="en-US" altLang="zh-CN" sz="1400">
-                          <a:solidFill>
-                            <a:srgbClr val="C00000"/>
-                          </a:solidFill>
-                          <a:latin typeface="Times New Roman" panose="02020603050405020304" charset="0"/>
-                          <a:cs typeface="Times New Roman" panose="02020603050405020304" charset="0"/>
-                        </a:rPr>
-                        <a:t>(5.33, 7.66)</a:t>
-                      </a:r>
-                      <a:endParaRPr lang="en-US" altLang="zh-CN" sz="1400">
-                        <a:solidFill>
-                          <a:srgbClr val="C00000"/>
-                        </a:solidFill>
-                        <a:latin typeface="Times New Roman" panose="02020603050405020304" charset="0"/>
-                        <a:cs typeface="Times New Roman" panose="02020603050405020304" charset="0"/>
-                      </a:endParaRPr>
-                    </a:p>
-                  </a:txBody>
-                  <a:tcPr/>
-                </a:tc>
-                <a:tc>
-                  <a:txBody>
-                    <a:bodyPr/>
-                    <a:p>
-                      <a:pPr algn="ctr">
-                        <a:buNone/>
-                      </a:pPr>
-                      <a:r>
-                        <a:rPr lang="en-US" altLang="zh-CN" sz="1400">
-                          <a:solidFill>
-                            <a:srgbClr val="C00000"/>
-                          </a:solidFill>
-                          <a:latin typeface="Times New Roman" panose="02020603050405020304" charset="0"/>
-                          <a:cs typeface="Times New Roman" panose="02020603050405020304" charset="0"/>
-                        </a:rPr>
-                        <a:t>(6.00, 8.00)</a:t>
-                      </a:r>
-                      <a:endParaRPr lang="en-US" altLang="zh-CN" sz="1400">
-                        <a:solidFill>
-                          <a:srgbClr val="C00000"/>
-                        </a:solidFill>
-                        <a:latin typeface="Times New Roman" panose="02020603050405020304" charset="0"/>
-                        <a:cs typeface="Times New Roman" panose="02020603050405020304" charset="0"/>
-                      </a:endParaRPr>
-                    </a:p>
-                  </a:txBody>
-                  <a:tcPr/>
-                </a:tc>
-                <a:tc>
-                  <a:txBody>
-                    <a:bodyPr/>
-                    <a:p>
-                      <a:pPr algn="ctr">
-                        <a:buNone/>
-                      </a:pPr>
-                      <a:r>
-                        <a:rPr lang="en-US" altLang="zh-CN" sz="1400">
-                          <a:solidFill>
-                            <a:srgbClr val="C00000"/>
-                          </a:solidFill>
-                          <a:latin typeface="Times New Roman" panose="02020603050405020304" charset="0"/>
-                          <a:cs typeface="Times New Roman" panose="02020603050405020304" charset="0"/>
-                        </a:rPr>
-                        <a:t>0.75</a:t>
+                        <a:t>0.25</a:t>
                       </a:r>
                       <a:endParaRPr lang="en-US" altLang="zh-CN" sz="1400">
                         <a:solidFill>
@@ -19127,6 +23652,120 @@
                       </a:pPr>
                       <a:r>
                         <a:rPr lang="en-US" altLang="zh-CN" sz="1400">
+                          <a:solidFill>
+                            <a:schemeClr val="tx1"/>
+                          </a:solidFill>
+                          <a:latin typeface="Times New Roman" panose="02020603050405020304" charset="0"/>
+                          <a:cs typeface="Times New Roman" panose="02020603050405020304" charset="0"/>
+                        </a:rPr>
+                        <a:t>5</a:t>
+                      </a:r>
+                      <a:endParaRPr lang="en-US" altLang="zh-CN" sz="1400">
+                        <a:solidFill>
+                          <a:schemeClr val="tx1"/>
+                        </a:solidFill>
+                        <a:latin typeface="Times New Roman" panose="02020603050405020304" charset="0"/>
+                        <a:cs typeface="Times New Roman" panose="02020603050405020304" charset="0"/>
+                      </a:endParaRPr>
+                    </a:p>
+                  </a:txBody>
+                  <a:tcPr/>
+                </a:tc>
+                <a:tc>
+                  <a:txBody>
+                    <a:bodyPr/>
+                    <a:p>
+                      <a:pPr algn="ctr">
+                        <a:buNone/>
+                      </a:pPr>
+                      <a:r>
+                        <a:rPr lang="en-US" altLang="zh-CN" sz="1400">
+                          <a:solidFill>
+                            <a:schemeClr val="tx1"/>
+                          </a:solidFill>
+                          <a:latin typeface="Times New Roman" panose="02020603050405020304" charset="0"/>
+                          <a:cs typeface="Times New Roman" panose="02020603050405020304" charset="0"/>
+                        </a:rPr>
+                        <a:t>(5.33, 7.66)</a:t>
+                      </a:r>
+                      <a:endParaRPr lang="en-US" altLang="zh-CN" sz="1400">
+                        <a:solidFill>
+                          <a:schemeClr val="tx1"/>
+                        </a:solidFill>
+                        <a:latin typeface="Times New Roman" panose="02020603050405020304" charset="0"/>
+                        <a:cs typeface="Times New Roman" panose="02020603050405020304" charset="0"/>
+                      </a:endParaRPr>
+                    </a:p>
+                  </a:txBody>
+                  <a:tcPr/>
+                </a:tc>
+                <a:tc>
+                  <a:txBody>
+                    <a:bodyPr/>
+                    <a:p>
+                      <a:pPr algn="ctr">
+                        <a:buNone/>
+                      </a:pPr>
+                      <a:r>
+                        <a:rPr lang="en-US" altLang="zh-CN" sz="1400">
+                          <a:solidFill>
+                            <a:schemeClr val="tx1"/>
+                          </a:solidFill>
+                          <a:latin typeface="Times New Roman" panose="02020603050405020304" charset="0"/>
+                          <a:cs typeface="Times New Roman" panose="02020603050405020304" charset="0"/>
+                        </a:rPr>
+                        <a:t>(6.00, 8.00)</a:t>
+                      </a:r>
+                      <a:endParaRPr lang="en-US" altLang="zh-CN" sz="1400">
+                        <a:solidFill>
+                          <a:schemeClr val="tx1"/>
+                        </a:solidFill>
+                        <a:latin typeface="Times New Roman" panose="02020603050405020304" charset="0"/>
+                        <a:cs typeface="Times New Roman" panose="02020603050405020304" charset="0"/>
+                      </a:endParaRPr>
+                    </a:p>
+                  </a:txBody>
+                  <a:tcPr/>
+                </a:tc>
+                <a:tc>
+                  <a:txBody>
+                    <a:bodyPr/>
+                    <a:p>
+                      <a:pPr algn="ctr">
+                        <a:buNone/>
+                      </a:pPr>
+                      <a:r>
+                        <a:rPr lang="en-US" altLang="zh-CN" sz="1400">
+                          <a:solidFill>
+                            <a:srgbClr val="C00000"/>
+                          </a:solidFill>
+                          <a:latin typeface="Times New Roman" panose="02020603050405020304" charset="0"/>
+                          <a:cs typeface="Times New Roman" panose="02020603050405020304" charset="0"/>
+                        </a:rPr>
+                        <a:t>0.75</a:t>
+                      </a:r>
+                      <a:endParaRPr lang="en-US" altLang="zh-CN" sz="1400">
+                        <a:solidFill>
+                          <a:srgbClr val="C00000"/>
+                        </a:solidFill>
+                        <a:latin typeface="Times New Roman" panose="02020603050405020304" charset="0"/>
+                        <a:cs typeface="Times New Roman" panose="02020603050405020304" charset="0"/>
+                      </a:endParaRPr>
+                    </a:p>
+                  </a:txBody>
+                  <a:tcPr/>
+                </a:tc>
+              </a:tr>
+              <a:tr h="365760">
+                <a:tc>
+                  <a:txBody>
+                    <a:bodyPr/>
+                    <a:p>
+                      <a:pPr algn="ctr">
+                        <a:buNone/>
+                      </a:pPr>
+                      <a:r>
+                        <a:rPr lang="en-US" altLang="zh-CN" sz="1400">
                           <a:latin typeface="Times New Roman" panose="02020603050405020304" charset="0"/>
                           <a:cs typeface="Times New Roman" panose="02020603050405020304" charset="0"/>
                         </a:rPr>
@@ -19193,12 +23832,18 @@
                       </a:pPr>
                       <a:r>
                         <a:rPr lang="en-US" altLang="zh-CN" sz="1400">
+                          <a:solidFill>
+                            <a:srgbClr val="C00000"/>
+                          </a:solidFill>
                           <a:latin typeface="Times New Roman" panose="02020603050405020304" charset="0"/>
                           <a:cs typeface="Times New Roman" panose="02020603050405020304" charset="0"/>
                         </a:rPr>
                         <a:t>0.36</a:t>
                       </a:r>
                       <a:endParaRPr lang="en-US" altLang="zh-CN" sz="1400">
+                        <a:solidFill>
+                          <a:srgbClr val="C00000"/>
+                        </a:solidFill>
                         <a:latin typeface="Times New Roman" panose="02020603050405020304" charset="0"/>
                         <a:cs typeface="Times New Roman" panose="02020603050405020304" charset="0"/>
                       </a:endParaRPr>
@@ -19211,99 +23856,14 @@
           </a:graphicData>
         </a:graphic>
       </p:graphicFrame>
-      <p:sp>
-        <p:nvSpPr>
-          <p:cNvPr id="36" name="文本框 35"/>
-          <p:cNvSpPr txBox="1"/>
-          <p:nvPr/>
-        </p:nvSpPr>
-        <p:spPr>
-          <a:xfrm>
-            <a:off x="9359265" y="5570855"/>
-            <a:ext cx="2622550" cy="737235"/>
-          </a:xfrm>
-          <a:prstGeom prst="rect">
-            <a:avLst/>
-          </a:prstGeom>
-        </p:spPr>
-        <p:txBody>
-          <a:bodyPr wrap="square">
-            <a:spAutoFit/>
-            <a:extLst>
-              <a:ext uri="{4A0BC546-FE56-4ADE-93B0-CB8AF2F6F144}">
-                <wpsdc:textFrameExt xmlns:wpsdc="http://www.wps.cn/officeDocument/2022/drawingmlCustomData" type="text"/>
-              </a:ext>
-            </a:extLst>
-          </a:bodyPr>
-          <a:p>
-            <a:pPr algn="l"/>
-            <a:r>
-              <a:rPr lang="en-US" altLang="zh-CN" sz="1400" b="1">
-                <a:latin typeface="Times New Roman" panose="02020603050405020304" charset="0"/>
-                <a:ea typeface="微软雅黑" panose="020B0503020204020204" charset="-122"/>
-                <a:cs typeface="Times New Roman" panose="02020603050405020304" charset="0"/>
-              </a:rPr>
-              <a:t>With multi-hop mechnisim(after optimization):</a:t>
-            </a:r>
-            <a:endParaRPr lang="en-US" altLang="zh-CN" sz="1400">
-              <a:latin typeface="Times New Roman" panose="02020603050405020304" charset="0"/>
-              <a:ea typeface="微软雅黑" panose="020B0503020204020204" charset="-122"/>
-              <a:cs typeface="Times New Roman" panose="02020603050405020304" charset="0"/>
-            </a:endParaRPr>
-          </a:p>
-          <a:p>
-            <a:pPr marL="285750" indent="-285750" algn="l">
-              <a:buFont typeface="Wingdings" panose="05000000000000000000" charset="0"/>
-              <a:buChar char="Ø"/>
-            </a:pPr>
-            <a:r>
-              <a:rPr lang="en-US" altLang="zh-CN" sz="1400">
-                <a:latin typeface="Times New Roman" panose="02020603050405020304" charset="0"/>
-                <a:ea typeface="微软雅黑" panose="020B0503020204020204" charset="-122"/>
-                <a:cs typeface="Times New Roman" panose="02020603050405020304" charset="0"/>
-              </a:rPr>
-              <a:t>Average error: 0.27</a:t>
-            </a:r>
-            <a:endParaRPr lang="en-US" altLang="zh-CN" sz="1400">
-              <a:latin typeface="Times New Roman" panose="02020603050405020304" charset="0"/>
-              <a:ea typeface="微软雅黑" panose="020B0503020204020204" charset="-122"/>
-              <a:cs typeface="Times New Roman" panose="02020603050405020304" charset="0"/>
-            </a:endParaRPr>
-          </a:p>
-        </p:txBody>
-      </p:sp>
-      <p:pic>
-        <p:nvPicPr>
-          <p:cNvPr id="3" name="图片 2" descr="localization_20MHz_optimized"/>
-          <p:cNvPicPr>
-            <a:picLocks noChangeAspect="1"/>
-          </p:cNvPicPr>
-          <p:nvPr/>
-        </p:nvPicPr>
-        <p:blipFill>
-          <a:blip r:embed="rId2"/>
-          <a:stretch>
-            <a:fillRect/>
-          </a:stretch>
-        </p:blipFill>
-        <p:spPr>
-          <a:xfrm>
-            <a:off x="365760" y="3344545"/>
-            <a:ext cx="4251960" cy="3402330"/>
-          </a:xfrm>
-          <a:prstGeom prst="rect">
-            <a:avLst/>
-          </a:prstGeom>
-        </p:spPr>
-      </p:pic>
       <p:graphicFrame>
         <p:nvGraphicFramePr>
-          <p:cNvPr id="4" name="表格 3"/>
+          <p:cNvPr id="35" name="表格 34"/>
           <p:cNvGraphicFramePr/>
           <p:nvPr/>
         </p:nvGraphicFramePr>
         <p:xfrm>
-          <a:off x="4728845" y="3735705"/>
+          <a:off x="4728845" y="3865245"/>
           <a:ext cx="4480560" cy="2517775"/>
         </p:xfrm>
         <a:graphic>
@@ -19443,7 +24003,7 @@
                           <a:latin typeface="Times New Roman" panose="02020603050405020304" charset="0"/>
                           <a:cs typeface="Times New Roman" panose="02020603050405020304" charset="0"/>
                         </a:rPr>
-                        <a:t>(2.87, 2.72)</a:t>
+                        <a:t>(2.86, 2.68)</a:t>
                       </a:r>
                       <a:endParaRPr lang="en-US" altLang="zh-CN" sz="1400">
                         <a:latin typeface="Times New Roman" panose="02020603050405020304" charset="0"/>
@@ -19465,7 +24025,7 @@
                           <a:latin typeface="Times New Roman" panose="02020603050405020304" charset="0"/>
                           <a:cs typeface="Times New Roman" panose="02020603050405020304" charset="0"/>
                         </a:rPr>
-                        <a:t>(3.0, 3.0)</a:t>
+                        <a:t>(3.00, 3.00)</a:t>
                       </a:r>
                       <a:endParaRPr lang="en-US" altLang="zh-CN" sz="1400">
                         <a:latin typeface="Times New Roman" panose="02020603050405020304" charset="0"/>
@@ -19533,7 +24093,7 @@
                           <a:latin typeface="Times New Roman" panose="02020603050405020304" charset="0"/>
                           <a:cs typeface="Times New Roman" panose="02020603050405020304" charset="0"/>
                         </a:rPr>
-                        <a:t>(1.96, 0.26)</a:t>
+                        <a:t>(1.91, 0.33)</a:t>
                       </a:r>
                       <a:endParaRPr lang="en-US" altLang="zh-CN" sz="1400">
                         <a:latin typeface="Times New Roman" panose="02020603050405020304" charset="0"/>
@@ -19555,7 +24115,7 @@
                           <a:latin typeface="Times New Roman" panose="02020603050405020304" charset="0"/>
                           <a:cs typeface="Times New Roman" panose="02020603050405020304" charset="0"/>
                         </a:rPr>
-                        <a:t>(2.0, 0.0)</a:t>
+                        <a:t>(2.00, 0.00)</a:t>
                       </a:r>
                       <a:endParaRPr lang="en-US" altLang="zh-CN" sz="1400">
                         <a:latin typeface="Times New Roman" panose="02020603050405020304" charset="0"/>
@@ -19577,7 +24137,7 @@
                           <a:latin typeface="Times New Roman" panose="02020603050405020304" charset="0"/>
                           <a:cs typeface="Times New Roman" panose="02020603050405020304" charset="0"/>
                         </a:rPr>
-                        <a:t>0.26</a:t>
+                        <a:t>0.34</a:t>
                       </a:r>
                       <a:endParaRPr lang="en-US" altLang="zh-CN" sz="1400">
                         <a:latin typeface="Times New Roman" panose="02020603050405020304" charset="0"/>
@@ -19623,7 +24183,7 @@
                           <a:latin typeface="Times New Roman" panose="02020603050405020304" charset="0"/>
                           <a:cs typeface="Times New Roman" panose="02020603050405020304" charset="0"/>
                         </a:rPr>
-                        <a:t>(7.14, 4.09)</a:t>
+                        <a:t>(7.30, 3.79)</a:t>
                       </a:r>
                       <a:endParaRPr lang="en-US" altLang="zh-CN" sz="1400">
                         <a:latin typeface="Times New Roman" panose="02020603050405020304" charset="0"/>
@@ -19645,7 +24205,7 @@
                           <a:latin typeface="Times New Roman" panose="02020603050405020304" charset="0"/>
                           <a:cs typeface="Times New Roman" panose="02020603050405020304" charset="0"/>
                         </a:rPr>
-                        <a:t>(7.0, 4.0)</a:t>
+                        <a:t>(7.00, 4.00)</a:t>
                       </a:r>
                       <a:endParaRPr lang="en-US" altLang="zh-CN" sz="1400">
                         <a:latin typeface="Times New Roman" panose="02020603050405020304" charset="0"/>
@@ -19667,7 +24227,7 @@
                           <a:latin typeface="Times New Roman" panose="02020603050405020304" charset="0"/>
                           <a:cs typeface="Times New Roman" panose="02020603050405020304" charset="0"/>
                         </a:rPr>
-                        <a:t>0.16</a:t>
+                        <a:t>0.36</a:t>
                       </a:r>
                       <a:endParaRPr lang="en-US" altLang="zh-CN" sz="1400">
                         <a:latin typeface="Times New Roman" panose="02020603050405020304" charset="0"/>
@@ -19713,7 +24273,7 @@
                           <a:latin typeface="Times New Roman" panose="02020603050405020304" charset="0"/>
                           <a:cs typeface="Times New Roman" panose="02020603050405020304" charset="0"/>
                         </a:rPr>
-                        <a:t>(2.37, 7.05)</a:t>
+                        <a:t>(-1.00, 0.85)</a:t>
                       </a:r>
                       <a:endParaRPr lang="en-US" altLang="zh-CN" sz="1400">
                         <a:latin typeface="Times New Roman" panose="02020603050405020304" charset="0"/>
@@ -19735,7 +24295,7 @@
                           <a:latin typeface="Times New Roman" panose="02020603050405020304" charset="0"/>
                           <a:cs typeface="Times New Roman" panose="02020603050405020304" charset="0"/>
                         </a:rPr>
-                        <a:t>(2.5, 7.0)</a:t>
+                        <a:t>(2.50, 7.00)</a:t>
                       </a:r>
                       <a:endParaRPr lang="en-US" altLang="zh-CN" sz="1400">
                         <a:latin typeface="Times New Roman" panose="02020603050405020304" charset="0"/>
@@ -19754,121 +24314,13 @@
                       </a:pPr>
                       <a:r>
                         <a:rPr lang="en-US" altLang="zh-CN" sz="1400">
-                          <a:latin typeface="Times New Roman" panose="02020603050405020304" charset="0"/>
-                          <a:cs typeface="Times New Roman" panose="02020603050405020304" charset="0"/>
-                        </a:rPr>
-                        <a:t>0.14</a:t>
-                      </a:r>
-                      <a:endParaRPr lang="en-US" altLang="zh-CN" sz="1400">
-                        <a:latin typeface="Times New Roman" panose="02020603050405020304" charset="0"/>
-                        <a:cs typeface="Times New Roman" panose="02020603050405020304" charset="0"/>
-                      </a:endParaRPr>
-                    </a:p>
-                  </a:txBody>
-                  <a:tcPr/>
-                </a:tc>
-              </a:tr>
-              <a:tr h="365760">
-                <a:tc>
-                  <a:txBody>
-                    <a:bodyPr/>
-                    <a:p>
-                      <a:pPr algn="ctr">
-                        <a:buNone/>
-                      </a:pPr>
-                      <a:r>
-                        <a:rPr lang="en-US" altLang="zh-CN" sz="1400">
                           <a:solidFill>
                             <a:srgbClr val="C00000"/>
                           </a:solidFill>
                           <a:latin typeface="Times New Roman" panose="02020603050405020304" charset="0"/>
                           <a:cs typeface="Times New Roman" panose="02020603050405020304" charset="0"/>
                         </a:rPr>
-                        <a:t>5</a:t>
-                      </a:r>
-                      <a:endParaRPr lang="en-US" altLang="zh-CN" sz="1400">
-                        <a:solidFill>
-                          <a:srgbClr val="C00000"/>
-                        </a:solidFill>
-                        <a:latin typeface="Times New Roman" panose="02020603050405020304" charset="0"/>
-                        <a:cs typeface="Times New Roman" panose="02020603050405020304" charset="0"/>
-                      </a:endParaRPr>
-                    </a:p>
-                  </a:txBody>
-                  <a:tcPr/>
-                </a:tc>
-                <a:tc>
-                  <a:txBody>
-                    <a:bodyPr/>
-                    <a:p>
-                      <a:pPr algn="ctr">
-                        <a:buNone/>
-                      </a:pPr>
-                      <a:r>
-                        <a:rPr lang="en-US" altLang="zh-CN" sz="1400">
-                          <a:solidFill>
-                            <a:srgbClr val="C00000"/>
-                          </a:solidFill>
-                          <a:latin typeface="Times New Roman" panose="02020603050405020304" charset="0"/>
-                          <a:cs typeface="Times New Roman" panose="02020603050405020304" charset="0"/>
-                        </a:rPr>
-                        <a:t>(5.50, 8.06)</a:t>
-                      </a:r>
-                      <a:endParaRPr lang="en-US" altLang="zh-CN" sz="1400">
-                        <a:solidFill>
-                          <a:srgbClr val="C00000"/>
-                        </a:solidFill>
-                        <a:latin typeface="Times New Roman" panose="02020603050405020304" charset="0"/>
-                        <a:cs typeface="Times New Roman" panose="02020603050405020304" charset="0"/>
-                      </a:endParaRPr>
-                    </a:p>
-                  </a:txBody>
-                  <a:tcPr/>
-                </a:tc>
-                <a:tc>
-                  <a:txBody>
-                    <a:bodyPr/>
-                    <a:p>
-                      <a:pPr algn="ctr">
-                        <a:buNone/>
-                      </a:pPr>
-                      <a:r>
-                        <a:rPr lang="en-US" altLang="zh-CN" sz="1400">
-                          <a:solidFill>
-                            <a:srgbClr val="C00000"/>
-                          </a:solidFill>
-                          <a:latin typeface="Times New Roman" panose="02020603050405020304" charset="0"/>
-                          <a:cs typeface="Times New Roman" panose="02020603050405020304" charset="0"/>
-                        </a:rPr>
-                        <a:t>(6.0, 8.0)</a:t>
-                      </a:r>
-                      <a:endParaRPr lang="en-US" altLang="zh-CN" sz="1400">
-                        <a:solidFill>
-                          <a:srgbClr val="C00000"/>
-                        </a:solidFill>
-                        <a:latin typeface="Times New Roman" panose="02020603050405020304" charset="0"/>
-                        <a:cs typeface="Times New Roman" panose="02020603050405020304" charset="0"/>
-                      </a:endParaRPr>
-                    </a:p>
-                  </a:txBody>
-                  <a:tcPr/>
-                </a:tc>
-                <a:tc>
-                  <a:txBody>
-                    <a:bodyPr/>
-                    <a:p>
-                      <a:pPr algn="ctr">
-                        <a:buNone/>
-                      </a:pPr>
-                      <a:r>
-                        <a:rPr lang="en-US" altLang="zh-CN" sz="1400">
-                          <a:solidFill>
-                            <a:srgbClr val="C00000"/>
-                          </a:solidFill>
-                          <a:latin typeface="Times New Roman" panose="02020603050405020304" charset="0"/>
-                          <a:cs typeface="Times New Roman" panose="02020603050405020304" charset="0"/>
-                        </a:rPr>
-                        <a:t>0.50</a:t>
+                        <a:t>7.08</a:t>
                       </a:r>
                       <a:endParaRPr lang="en-US" altLang="zh-CN" sz="1400">
                         <a:solidFill>
@@ -19895,7 +24347,7 @@
                           <a:latin typeface="Times New Roman" panose="02020603050405020304" charset="0"/>
                           <a:cs typeface="Times New Roman" panose="02020603050405020304" charset="0"/>
                         </a:rPr>
-                        <a:t>6</a:t>
+                        <a:t>5</a:t>
                       </a:r>
                       <a:endParaRPr lang="en-US" altLang="zh-CN" sz="1400">
                         <a:latin typeface="Times New Roman" panose="02020603050405020304" charset="0"/>
@@ -19917,7 +24369,7 @@
                           <a:latin typeface="Times New Roman" panose="02020603050405020304" charset="0"/>
                           <a:cs typeface="Times New Roman" panose="02020603050405020304" charset="0"/>
                         </a:rPr>
-                        <a:t>(7.78, 7.48)</a:t>
+                        <a:t>(2.17, 6.02)</a:t>
                       </a:r>
                       <a:endParaRPr lang="en-US" altLang="zh-CN" sz="1400">
                         <a:latin typeface="Times New Roman" panose="02020603050405020304" charset="0"/>
@@ -19939,7 +24391,7 @@
                           <a:latin typeface="Times New Roman" panose="02020603050405020304" charset="0"/>
                           <a:cs typeface="Times New Roman" panose="02020603050405020304" charset="0"/>
                         </a:rPr>
-                        <a:t>(8.0, 7.5)</a:t>
+                        <a:t>(6.00, 8.00)</a:t>
                       </a:r>
                       <a:endParaRPr lang="en-US" altLang="zh-CN" sz="1400">
                         <a:latin typeface="Times New Roman" panose="02020603050405020304" charset="0"/>
@@ -19958,12 +24410,114 @@
                       </a:pPr>
                       <a:r>
                         <a:rPr lang="en-US" altLang="zh-CN" sz="1400">
+                          <a:solidFill>
+                            <a:srgbClr val="C00000"/>
+                          </a:solidFill>
                           <a:latin typeface="Times New Roman" panose="02020603050405020304" charset="0"/>
                           <a:cs typeface="Times New Roman" panose="02020603050405020304" charset="0"/>
                         </a:rPr>
-                        <a:t>0.22</a:t>
+                        <a:t>4.31</a:t>
                       </a:r>
                       <a:endParaRPr lang="en-US" altLang="zh-CN" sz="1400">
+                        <a:solidFill>
+                          <a:srgbClr val="C00000"/>
+                        </a:solidFill>
+                        <a:latin typeface="Times New Roman" panose="02020603050405020304" charset="0"/>
+                        <a:cs typeface="Times New Roman" panose="02020603050405020304" charset="0"/>
+                      </a:endParaRPr>
+                    </a:p>
+                  </a:txBody>
+                  <a:tcPr/>
+                </a:tc>
+              </a:tr>
+              <a:tr h="365760">
+                <a:tc>
+                  <a:txBody>
+                    <a:bodyPr/>
+                    <a:p>
+                      <a:pPr algn="ctr">
+                        <a:buNone/>
+                      </a:pPr>
+                      <a:r>
+                        <a:rPr lang="en-US" altLang="zh-CN" sz="1400">
+                          <a:latin typeface="Times New Roman" panose="02020603050405020304" charset="0"/>
+                          <a:cs typeface="Times New Roman" panose="02020603050405020304" charset="0"/>
+                        </a:rPr>
+                        <a:t>6</a:t>
+                      </a:r>
+                      <a:endParaRPr lang="en-US" altLang="zh-CN" sz="1400">
+                        <a:latin typeface="Times New Roman" panose="02020603050405020304" charset="0"/>
+                        <a:cs typeface="Times New Roman" panose="02020603050405020304" charset="0"/>
+                      </a:endParaRPr>
+                    </a:p>
+                  </a:txBody>
+                  <a:tcPr/>
+                </a:tc>
+                <a:tc>
+                  <a:txBody>
+                    <a:bodyPr/>
+                    <a:p>
+                      <a:pPr algn="ctr">
+                        <a:buNone/>
+                      </a:pPr>
+                      <a:r>
+                        <a:rPr lang="en-US" altLang="zh-CN" sz="1400">
+                          <a:latin typeface="Times New Roman" panose="02020603050405020304" charset="0"/>
+                          <a:cs typeface="Times New Roman" panose="02020603050405020304" charset="0"/>
+                        </a:rPr>
+                        <a:t>(3.62, 6.35)</a:t>
+                      </a:r>
+                      <a:endParaRPr lang="en-US" altLang="zh-CN" sz="1400">
+                        <a:latin typeface="Times New Roman" panose="02020603050405020304" charset="0"/>
+                        <a:cs typeface="Times New Roman" panose="02020603050405020304" charset="0"/>
+                      </a:endParaRPr>
+                    </a:p>
+                  </a:txBody>
+                  <a:tcPr/>
+                </a:tc>
+                <a:tc>
+                  <a:txBody>
+                    <a:bodyPr/>
+                    <a:p>
+                      <a:pPr algn="ctr">
+                        <a:buNone/>
+                      </a:pPr>
+                      <a:r>
+                        <a:rPr lang="en-US" altLang="zh-CN" sz="1400">
+                          <a:latin typeface="Times New Roman" panose="02020603050405020304" charset="0"/>
+                          <a:cs typeface="Times New Roman" panose="02020603050405020304" charset="0"/>
+                        </a:rPr>
+                        <a:t>(8.00, 7.50)</a:t>
+                      </a:r>
+                      <a:endParaRPr lang="en-US" altLang="zh-CN" sz="1400">
+                        <a:latin typeface="Times New Roman" panose="02020603050405020304" charset="0"/>
+                        <a:cs typeface="Times New Roman" panose="02020603050405020304" charset="0"/>
+                      </a:endParaRPr>
+                    </a:p>
+                  </a:txBody>
+                  <a:tcPr/>
+                </a:tc>
+                <a:tc>
+                  <a:txBody>
+                    <a:bodyPr/>
+                    <a:p>
+                      <a:pPr algn="ctr">
+                        <a:buNone/>
+                      </a:pPr>
+                      <a:r>
+                        <a:rPr lang="en-US" altLang="zh-CN" sz="1400">
+                          <a:solidFill>
+                            <a:srgbClr val="C00000"/>
+                          </a:solidFill>
+                          <a:latin typeface="Times New Roman" panose="02020603050405020304" charset="0"/>
+                          <a:cs typeface="Times New Roman" panose="02020603050405020304" charset="0"/>
+                        </a:rPr>
+                        <a:t>4.53</a:t>
+                      </a:r>
+                      <a:endParaRPr lang="en-US" altLang="zh-CN" sz="1400">
+                        <a:solidFill>
+                          <a:srgbClr val="C00000"/>
+                        </a:solidFill>
                         <a:latin typeface="Times New Roman" panose="02020603050405020304" charset="0"/>
                         <a:cs typeface="Times New Roman" panose="02020603050405020304" charset="0"/>
                       </a:endParaRPr>
@@ -19976,6 +24530,115 @@
           </a:graphicData>
         </a:graphic>
       </p:graphicFrame>
+      <p:sp>
+        <p:nvSpPr>
+          <p:cNvPr id="36" name="文本框 35"/>
+          <p:cNvSpPr txBox="1"/>
+          <p:nvPr/>
+        </p:nvSpPr>
+        <p:spPr>
+          <a:xfrm>
+            <a:off x="9359265" y="5645785"/>
+            <a:ext cx="2622550" cy="521970"/>
+          </a:xfrm>
+          <a:prstGeom prst="rect">
+            <a:avLst/>
+          </a:prstGeom>
+        </p:spPr>
+        <p:txBody>
+          <a:bodyPr wrap="square">
+            <a:spAutoFit/>
+            <a:extLst>
+              <a:ext uri="{4A0BC546-FE56-4ADE-93B0-CB8AF2F6F144}">
+                <wpsdc:textFrameExt xmlns:wpsdc="http://www.wps.cn/officeDocument/2022/drawingmlCustomData" type="text"/>
+              </a:ext>
+            </a:extLst>
+          </a:bodyPr>
+          <a:p>
+            <a:pPr algn="l"/>
+            <a:r>
+              <a:rPr lang="en-US" altLang="zh-CN" sz="1400" b="1">
+                <a:latin typeface="Times New Roman" panose="02020603050405020304" charset="0"/>
+                <a:ea typeface="微软雅黑" panose="020B0503020204020204" charset="-122"/>
+                <a:cs typeface="Times New Roman" panose="02020603050405020304" charset="0"/>
+              </a:rPr>
+              <a:t>Without multi-hop mechnisim:</a:t>
+            </a:r>
+            <a:endParaRPr lang="en-US" altLang="zh-CN" sz="1400">
+              <a:latin typeface="Times New Roman" panose="02020603050405020304" charset="0"/>
+              <a:ea typeface="微软雅黑" panose="020B0503020204020204" charset="-122"/>
+              <a:cs typeface="Times New Roman" panose="02020603050405020304" charset="0"/>
+            </a:endParaRPr>
+          </a:p>
+          <a:p>
+            <a:pPr marL="285750" indent="-285750" algn="l">
+              <a:buFont typeface="Wingdings" panose="05000000000000000000" charset="0"/>
+              <a:buChar char="Ø"/>
+            </a:pPr>
+            <a:r>
+              <a:rPr lang="en-US" altLang="zh-CN" sz="1400">
+                <a:latin typeface="Times New Roman" panose="02020603050405020304" charset="0"/>
+                <a:ea typeface="微软雅黑" panose="020B0503020204020204" charset="-122"/>
+                <a:cs typeface="Times New Roman" panose="02020603050405020304" charset="0"/>
+              </a:rPr>
+              <a:t>Average error: 2.81</a:t>
+            </a:r>
+            <a:endParaRPr lang="en-US" altLang="zh-CN" sz="1400">
+              <a:latin typeface="Times New Roman" panose="02020603050405020304" charset="0"/>
+              <a:ea typeface="微软雅黑" panose="020B0503020204020204" charset="-122"/>
+              <a:cs typeface="Times New Roman" panose="02020603050405020304" charset="0"/>
+            </a:endParaRPr>
+          </a:p>
+        </p:txBody>
+      </p:sp>
+      <p:pic>
+        <p:nvPicPr>
+          <p:cNvPr id="3" name="图片 2" descr="localization_direct_20MHz"/>
+          <p:cNvPicPr>
+            <a:picLocks noChangeAspect="1"/>
+          </p:cNvPicPr>
+          <p:nvPr/>
+        </p:nvPicPr>
+        <p:blipFill>
+          <a:blip r:embed="rId1"/>
+          <a:stretch>
+            <a:fillRect/>
+          </a:stretch>
+        </p:blipFill>
+        <p:spPr>
+          <a:xfrm>
+            <a:off x="624205" y="3649980"/>
+            <a:ext cx="3543300" cy="3150870"/>
+          </a:xfrm>
+          <a:prstGeom prst="rect">
+            <a:avLst/>
+          </a:prstGeom>
+        </p:spPr>
+      </p:pic>
+      <p:pic>
+        <p:nvPicPr>
+          <p:cNvPr id="5" name="图片 4" descr="localization_dnn_20MHz_sequential"/>
+          <p:cNvPicPr>
+            <a:picLocks noChangeAspect="1"/>
+          </p:cNvPicPr>
+          <p:nvPr/>
+        </p:nvPicPr>
+        <p:blipFill>
+          <a:blip r:embed="rId2"/>
+          <a:stretch>
+            <a:fillRect/>
+          </a:stretch>
+        </p:blipFill>
+        <p:spPr>
+          <a:xfrm>
+            <a:off x="500380" y="490855"/>
+            <a:ext cx="3989070" cy="3191510"/>
+          </a:xfrm>
+          <a:prstGeom prst="rect">
+            <a:avLst/>
+          </a:prstGeom>
+        </p:spPr>
+      </p:pic>
     </p:spTree>
   </p:cSld>
   <p:clrMapOvr>
@@ -20137,7 +24800,21 @@
 </p:tagLst>
 </file>
 
-<file path=ppt/tags/tag35.xml><?xml version="1.0" encoding="utf-8"?>
+<file path=ppt/tags/tag32.xml><?xml version="1.0" encoding="utf-8"?>
+<p:tagLst xmlns:p="http://schemas.openxmlformats.org/presentationml/2006/main">
+  <p:tag name="TABLE_ENDDRAG_ORIGIN_RECT" val="385*198"/>
+  <p:tag name="TABLE_ENDDRAG_RECT" val="352*299*385*198"/>
+</p:tagLst>
+</file>
+
+<file path=ppt/tags/tag33.xml><?xml version="1.0" encoding="utf-8"?>
+<p:tagLst xmlns:p="http://schemas.openxmlformats.org/presentationml/2006/main">
+  <p:tag name="TABLE_ENDDRAG_ORIGIN_RECT" val="438*234"/>
+  <p:tag name="TABLE_ENDDRAG_RECT" val="354*284*438*234"/>
+</p:tagLst>
+</file>
+
+<file path=ppt/tags/tag37.xml><?xml version="1.0" encoding="utf-8"?>
 <p:tagLst xmlns:p="http://schemas.openxmlformats.org/presentationml/2006/main">
   <p:tag name="resource_record_key" val="{&quot;10&quot;:[50039990,21557347,50013684,3643177]}"/>
 </p:tagLst>
@@ -21472,19 +26149,19 @@
 </FormTemplates>
 </file>
 
-<file path=customXml/itemProps32.xml><?xml version="1.0" encoding="utf-8"?>
+<file path=customXml/itemProps34.xml><?xml version="1.0" encoding="utf-8"?>
 <ds:datastoreItem xmlns:ds="http://schemas.openxmlformats.org/officeDocument/2006/customXml" ds:itemID="{FAF196E8-F5B0-48C6-818B-9DED3B3F4B9F}">
   <ds:schemaRefs/>
 </ds:datastoreItem>
 </file>
 
-<file path=customXml/itemProps33.xml><?xml version="1.0" encoding="utf-8"?>
+<file path=customXml/itemProps35.xml><?xml version="1.0" encoding="utf-8"?>
 <ds:datastoreItem xmlns:ds="http://schemas.openxmlformats.org/officeDocument/2006/customXml" ds:itemID="{5A95CB02-FDAC-45C3-9CB4-7E4403C86BD8}">
   <ds:schemaRefs/>
 </ds:datastoreItem>
 </file>
 
-<file path=customXml/itemProps34.xml><?xml version="1.0" encoding="utf-8"?>
+<file path=customXml/itemProps36.xml><?xml version="1.0" encoding="utf-8"?>
 <ds:datastoreItem xmlns:ds="http://schemas.openxmlformats.org/officeDocument/2006/customXml" ds:itemID="{8B561345-5481-4888-8BC1-875739BC27F9}">
   <ds:schemaRefs/>
 </ds:datastoreItem>
